--- a/docs/local-eum/mentoring/LOCAL_EUM_MENTORING.pptx
+++ b/docs/local-eum/mentoring/LOCAL_EUM_MENTORING.pptx
@@ -2,24 +2,24 @@
 <file path=ppt/presentation.xml><?xml version="1.0" encoding="utf-8"?>
 <p:presentation xmlns:p="http://schemas.openxmlformats.org/presentationml/2006/main">
   <p:sldMasterIdLst>
-    <p:sldMasterId xmlns:r="http://schemas.openxmlformats.org/officeDocument/2006/relationships" id="2147483648" r:id="Rbe3b5ee4f8c44ddf"/>
+    <p:sldMasterId xmlns:r="http://schemas.openxmlformats.org/officeDocument/2006/relationships" id="2147483648" r:id="Rfd41d27402bc4d15"/>
   </p:sldMasterIdLst>
   <p:notesMasterIdLst>
-    <p:notesMasterId xmlns:r="http://schemas.openxmlformats.org/officeDocument/2006/relationships" r:id="R17c0af1338294029"/>
+    <p:notesMasterId xmlns:r="http://schemas.openxmlformats.org/officeDocument/2006/relationships" r:id="R7d30581f7ef543a6"/>
   </p:notesMasterIdLst>
   <p:sldIdLst>
-    <p:sldId xmlns:r="http://schemas.openxmlformats.org/officeDocument/2006/relationships" id="256" r:id="R7236373d2f0e4f39"/>
-    <p:sldId xmlns:r="http://schemas.openxmlformats.org/officeDocument/2006/relationships" id="257" r:id="Rd082c6134ca948bc"/>
-    <p:sldId xmlns:r="http://schemas.openxmlformats.org/officeDocument/2006/relationships" id="258" r:id="R8a5c4c420efa468f"/>
-    <p:sldId xmlns:r="http://schemas.openxmlformats.org/officeDocument/2006/relationships" id="259" r:id="Ra5fa49e5161c4479"/>
-    <p:sldId xmlns:r="http://schemas.openxmlformats.org/officeDocument/2006/relationships" id="260" r:id="R8db1f3950f7a450c"/>
-    <p:sldId xmlns:r="http://schemas.openxmlformats.org/officeDocument/2006/relationships" id="261" r:id="Rb5618fdcee8a43b8"/>
-    <p:sldId xmlns:r="http://schemas.openxmlformats.org/officeDocument/2006/relationships" id="262" r:id="R19fae8860481456d"/>
-    <p:sldId xmlns:r="http://schemas.openxmlformats.org/officeDocument/2006/relationships" id="263" r:id="R85253cd98b0c4d73"/>
-    <p:sldId xmlns:r="http://schemas.openxmlformats.org/officeDocument/2006/relationships" id="264" r:id="R3e85cac281c64aed"/>
-    <p:sldId xmlns:r="http://schemas.openxmlformats.org/officeDocument/2006/relationships" id="265" r:id="R47bc417363524d5d"/>
-    <p:sldId xmlns:r="http://schemas.openxmlformats.org/officeDocument/2006/relationships" id="266" r:id="R42d0acb259504b5d"/>
-    <p:sldId xmlns:r="http://schemas.openxmlformats.org/officeDocument/2006/relationships" id="267" r:id="R06ca769e902f4174"/>
+    <p:sldId xmlns:r="http://schemas.openxmlformats.org/officeDocument/2006/relationships" id="256" r:id="R63b0b455b3394cfc"/>
+    <p:sldId xmlns:r="http://schemas.openxmlformats.org/officeDocument/2006/relationships" id="257" r:id="Rd2171aa5a21e48b2"/>
+    <p:sldId xmlns:r="http://schemas.openxmlformats.org/officeDocument/2006/relationships" id="258" r:id="R79e6aa4f16434761"/>
+    <p:sldId xmlns:r="http://schemas.openxmlformats.org/officeDocument/2006/relationships" id="259" r:id="R305df44012924383"/>
+    <p:sldId xmlns:r="http://schemas.openxmlformats.org/officeDocument/2006/relationships" id="260" r:id="R5062ae71af7b4f58"/>
+    <p:sldId xmlns:r="http://schemas.openxmlformats.org/officeDocument/2006/relationships" id="261" r:id="R17c5eb4e76c54fd4"/>
+    <p:sldId xmlns:r="http://schemas.openxmlformats.org/officeDocument/2006/relationships" id="262" r:id="Rc3f703a8d3ff47a8"/>
+    <p:sldId xmlns:r="http://schemas.openxmlformats.org/officeDocument/2006/relationships" id="263" r:id="Rd705ee75130f48c9"/>
+    <p:sldId xmlns:r="http://schemas.openxmlformats.org/officeDocument/2006/relationships" id="264" r:id="R334d122b481a402e"/>
+    <p:sldId xmlns:r="http://schemas.openxmlformats.org/officeDocument/2006/relationships" id="265" r:id="R80264429490048fe"/>
+    <p:sldId xmlns:r="http://schemas.openxmlformats.org/officeDocument/2006/relationships" id="266" r:id="R1f4041ae3be545d6"/>
+    <p:sldId xmlns:r="http://schemas.openxmlformats.org/officeDocument/2006/relationships" id="267" r:id="Rf28ab61c56404cfc"/>
   </p:sldIdLst>
   <p:sldSz cx="12192000" cy="6858000"/>
   <p:notesSz cx="6858000" cy="9144000"/>
@@ -453,7 +453,7 @@
           <a:lstStyle xmlns:a="http://schemas.openxmlformats.org/drawingml/2006/main"/>
           <a:p xmlns:a="http://schemas.openxmlformats.org/drawingml/2006/main">
             <a:r>
-              <a:t>발표 목표는 완성 홍보가 아니라 현재 구현의 경계와 검증이 필요한 선택을 멘토와 함께 정하는 것입니다. 화면 캡처는 2026-10-20 로컬 개발 앱에서 직접 취득했습니다. 주요 근거: docs/local-eum/README.md, src/App.jsx.</a:t>
+              <a:t>로컬이음은 지역 주민과 여행자가 함께하는 경험을 연결하기 위해 기획했습니다. 화면 캡처는 2026-10-20 로컬 개발 앱에서 직접 취득했습니다. 주요 근거: docs/local-eum/README.md, src/App.jsx.</a:t>
             </a:r>
           </a:p>
         </p:txBody>
@@ -593,7 +593,7 @@
           <a:lstStyle xmlns:a="http://schemas.openxmlformats.org/drawingml/2006/main"/>
           <a:p xmlns:a="http://schemas.openxmlformats.org/drawingml/2006/main">
             <a:r>
-              <a:t>질문은 현재 근거의 빈칸과 결정 대안을 연결하도록 구성했습니다. 특히 AI 기술 진화보다 먼저 고객이 실제로 지불할 경험인지 검증하는 것이 사업·개발 우선순위의 핵심 판단입니다.</a:t>
+              <a:t>기획 의도는 장소 정보를 나열하는 여행에서 지역 주민과 함께 일상을 경험하는 여행으로 확장하는 것입니다. 호스트는 자신의 이야기와 관심사를 체험으로 구성하는 주체입니다.</a:t>
             </a:r>
           </a:p>
         </p:txBody>
@@ -663,7 +663,7 @@
           <a:lstStyle xmlns:a="http://schemas.openxmlformats.org/drawingml/2006/main"/>
           <a:p xmlns:a="http://schemas.openxmlformats.org/drawingml/2006/main">
             <a:r>
-              <a:t>4단계는 제안이지 현재 완료된 계획 승인 사항이 아닙니다. 멘토링에서 한정된 캡스톤 기간에 필요한 목표·측정치·제외 범위를 정합니다.</a:t>
+              <a:t>다음 개발 단계는 호스트 운영 조건, 여행자 이용 경험, Agent 제안 품질을 순서대로 확인하는 것입니다. 각 항목은 실제 운영과 사용자 테스트를 통해 개선합니다.</a:t>
             </a:r>
           </a:p>
         </p:txBody>
@@ -733,7 +733,7 @@
           <a:lstStyle xmlns:a="http://schemas.openxmlformats.org/drawingml/2006/main"/>
           <a:p xmlns:a="http://schemas.openxmlformats.org/drawingml/2006/main">
             <a:r>
-              <a:t>문제 정의는 현재 서비스 가설입니다. 지불 의사나 시장 규모를 조사로 입증한 사실처럼 말하지 않습니다. 검증 질문은 외부 여행자·호스트의 인터뷰와 유료 전환 테스트가 필요합니다.</a:t>
+              <a:t>서비스 기획은 관광 정보 탐색에서 지역 주민과 함께하는 경험으로 초점을 넓히는 데서 출발했습니다. 시장 규모와 지불 의사는 향후 사용자 조사로 확인할 영역입니다.</a:t>
             </a:r>
           </a:p>
         </p:txBody>
@@ -1013,7 +1013,7 @@
           <a:lstStyle xmlns:a="http://schemas.openxmlformats.org/drawingml/2006/main"/>
           <a:p xmlns:a="http://schemas.openxmlformats.org/drawingml/2006/main">
             <a:r>
-              <a:t>실제 연결: src/App.jsx, src/components/header.jsx; Supabase client src/pages/local-eum/... 및 supabase/functions/local-eum-agent/index.ts. DB는 Supabase 프로젝트 local-eum-dev입니다. Codyssey API 비밀키는 Edge Function secret로만 관리됩니다. 팀 Oracle은 다른 영역이며 로컬이음이 대체하지 않습니다.</a:t>
+              <a:t>로컬이음의 프런트엔드와 데이터 계층은 React/Vite와 Supabase로 구성했습니다. DB는 Supabase PostgreSQL이며 Auth, RLS, Storage, Edge Function을 사용합니다. Codyssey API 비밀키는 Edge Function secret로만 관리됩니다.</a:t>
             </a:r>
           </a:p>
         </p:txBody>
@@ -1270,7 +1270,7 @@
           <p:cNvPr id="3" name="Title">
             <a:extLst xmlns:a="http://schemas.openxmlformats.org/drawingml/2006/main">
               <a:ext uri="{FF2B5EF4-FFF2-40B4-BE49-F238E27FC236}">
-                <a16:creationId xmlns:a16="http://schemas.microsoft.com/office/drawing/2014/main" id="{24618DEF-C3FC-42D4-B63A-788DBDA60171}"/>
+                <a16:creationId xmlns:a16="http://schemas.microsoft.com/office/drawing/2014/main" id="{3DF1C4B1-B869-43EB-85D2-90DD9C4D2357}"/>
               </a:ext>
             </a:extLst>
           </p:cNvPr>
@@ -1499,7 +1499,7 @@
           <p:cNvPr id="2" name="Subtitle">
             <a:extLst xmlns:a="http://schemas.openxmlformats.org/drawingml/2006/main">
               <a:ext uri="{FF2B5EF4-FFF2-40B4-BE49-F238E27FC236}">
-                <a16:creationId xmlns:a16="http://schemas.microsoft.com/office/drawing/2014/main" id="{AC9F1333-A31E-4EDA-931D-48484C1DFDB2}"/>
+                <a16:creationId xmlns:a16="http://schemas.microsoft.com/office/drawing/2014/main" id="{D75EB0FB-0449-4C11-A330-89C787FA6281}"/>
               </a:ext>
             </a:extLst>
           </p:cNvPr>
@@ -1745,7 +1745,7 @@
           <p:cNvPr id="2" name="Section title">
             <a:extLst xmlns:a="http://schemas.openxmlformats.org/drawingml/2006/main">
               <a:ext uri="{FF2B5EF4-FFF2-40B4-BE49-F238E27FC236}">
-                <a16:creationId xmlns:a16="http://schemas.microsoft.com/office/drawing/2014/main" id="{86E6927F-7AA8-4746-A93C-5E16615BBAD5}"/>
+                <a16:creationId xmlns:a16="http://schemas.microsoft.com/office/drawing/2014/main" id="{F9BC14C2-AE10-43B1-BCA3-A013AD1162F6}"/>
               </a:ext>
             </a:extLst>
           </p:cNvPr>
@@ -1991,7 +1991,7 @@
           <p:cNvPr id="3" name="Title">
             <a:extLst xmlns:a="http://schemas.openxmlformats.org/drawingml/2006/main">
               <a:ext uri="{FF2B5EF4-FFF2-40B4-BE49-F238E27FC236}">
-                <a16:creationId xmlns:a16="http://schemas.microsoft.com/office/drawing/2014/main" id="{FA757256-BC37-4ED8-8D4C-447A244CB43D}"/>
+                <a16:creationId xmlns:a16="http://schemas.microsoft.com/office/drawing/2014/main" id="{158D2695-1745-44E0-9470-E433ABDAB926}"/>
               </a:ext>
             </a:extLst>
           </p:cNvPr>
@@ -2220,7 +2220,7 @@
           <p:cNvPr id="2" name="Body">
             <a:extLst xmlns:a="http://schemas.openxmlformats.org/drawingml/2006/main">
               <a:ext uri="{FF2B5EF4-FFF2-40B4-BE49-F238E27FC236}">
-                <a16:creationId xmlns:a16="http://schemas.microsoft.com/office/drawing/2014/main" id="{3D06BCFD-0366-44C2-9E27-B2D0ABC5E6E2}"/>
+                <a16:creationId xmlns:a16="http://schemas.microsoft.com/office/drawing/2014/main" id="{E88C39FB-193F-4054-A6C2-797A680A4468}"/>
               </a:ext>
             </a:extLst>
           </p:cNvPr>
@@ -2466,7 +2466,7 @@
           <p:cNvPr id="4" name="Title">
             <a:extLst xmlns:a="http://schemas.openxmlformats.org/drawingml/2006/main">
               <a:ext uri="{FF2B5EF4-FFF2-40B4-BE49-F238E27FC236}">
-                <a16:creationId xmlns:a16="http://schemas.microsoft.com/office/drawing/2014/main" id="{FC0CE1CF-F8D6-4672-B998-A5523B506DDF}"/>
+                <a16:creationId xmlns:a16="http://schemas.microsoft.com/office/drawing/2014/main" id="{ED587308-4631-4988-B823-FCE753935291}"/>
               </a:ext>
             </a:extLst>
           </p:cNvPr>
@@ -2695,7 +2695,7 @@
           <p:cNvPr id="2" name="Left column">
             <a:extLst xmlns:a="http://schemas.openxmlformats.org/drawingml/2006/main">
               <a:ext uri="{FF2B5EF4-FFF2-40B4-BE49-F238E27FC236}">
-                <a16:creationId xmlns:a16="http://schemas.microsoft.com/office/drawing/2014/main" id="{8E9A0118-F0DD-48BE-82F0-55C29F61E542}"/>
+                <a16:creationId xmlns:a16="http://schemas.microsoft.com/office/drawing/2014/main" id="{E3F706CA-AD67-4EAE-9B6A-7A0DBD2AF602}"/>
               </a:ext>
             </a:extLst>
           </p:cNvPr>
@@ -2924,7 +2924,7 @@
           <p:cNvPr id="3" name="Right column">
             <a:extLst xmlns:a="http://schemas.openxmlformats.org/drawingml/2006/main">
               <a:ext uri="{FF2B5EF4-FFF2-40B4-BE49-F238E27FC236}">
-                <a16:creationId xmlns:a16="http://schemas.microsoft.com/office/drawing/2014/main" id="{A08A5369-89BF-4A46-8DF8-E3FBC67953F7}"/>
+                <a16:creationId xmlns:a16="http://schemas.microsoft.com/office/drawing/2014/main" id="{DE2330F4-BA4D-4C9A-867E-45F364822AF4}"/>
               </a:ext>
             </a:extLst>
           </p:cNvPr>
@@ -3170,7 +3170,7 @@
           <p:cNvPr id="3" name="Title">
             <a:extLst xmlns:a="http://schemas.openxmlformats.org/drawingml/2006/main">
               <a:ext uri="{FF2B5EF4-FFF2-40B4-BE49-F238E27FC236}">
-                <a16:creationId xmlns:a16="http://schemas.microsoft.com/office/drawing/2014/main" id="{7D23ED32-4B32-4442-88B0-E36BCD4C6AE3}"/>
+                <a16:creationId xmlns:a16="http://schemas.microsoft.com/office/drawing/2014/main" id="{ED3A6F88-943D-49F9-959D-8F64284997A4}"/>
               </a:ext>
             </a:extLst>
           </p:cNvPr>
@@ -3399,7 +3399,7 @@
           <p:cNvPr id="2" name="Left column">
             <a:extLst xmlns:a="http://schemas.openxmlformats.org/drawingml/2006/main">
               <a:ext uri="{FF2B5EF4-FFF2-40B4-BE49-F238E27FC236}">
-                <a16:creationId xmlns:a16="http://schemas.microsoft.com/office/drawing/2014/main" id="{4759E29B-3E0E-43FD-A255-F2A529665E06}"/>
+                <a16:creationId xmlns:a16="http://schemas.microsoft.com/office/drawing/2014/main" id="{44009995-8371-4554-AC5B-5699B4991AFF}"/>
               </a:ext>
             </a:extLst>
           </p:cNvPr>
@@ -3666,12 +3666,12 @@
   </p:cSld>
   <p:clrMap bg1="lt1" tx1="dk1" bg2="lt2" tx2="dk2" accent1="accent1" accent2="accent2" accent3="accent3" accent4="accent4" accent5="accent5" accent6="accent6" hlink="hlink" folHlink="folHlink"/>
   <p:sldLayoutIdLst>
-    <p:sldLayoutId xmlns:r="http://schemas.openxmlformats.org/officeDocument/2006/relationships" id="2147483649" r:id="Rc418e91ee4524098"/>
-    <p:sldLayoutId xmlns:r="http://schemas.openxmlformats.org/officeDocument/2006/relationships" id="2147483650" r:id="R985eede2efb4431c"/>
-    <p:sldLayoutId xmlns:r="http://schemas.openxmlformats.org/officeDocument/2006/relationships" id="2147483651" r:id="R791e982974184627"/>
-    <p:sldLayoutId xmlns:r="http://schemas.openxmlformats.org/officeDocument/2006/relationships" id="2147483652" r:id="R26aae561e6c24318"/>
-    <p:sldLayoutId xmlns:r="http://schemas.openxmlformats.org/officeDocument/2006/relationships" id="2147483653" r:id="R5dd32b65817b4368"/>
-    <p:sldLayoutId xmlns:r="http://schemas.openxmlformats.org/officeDocument/2006/relationships" id="2147483654" r:id="R758cf8185a6247c8"/>
+    <p:sldLayoutId xmlns:r="http://schemas.openxmlformats.org/officeDocument/2006/relationships" id="2147483649" r:id="Rd81ab12cdbd849aa"/>
+    <p:sldLayoutId xmlns:r="http://schemas.openxmlformats.org/officeDocument/2006/relationships" id="2147483650" r:id="Rb2064ff442204ef7"/>
+    <p:sldLayoutId xmlns:r="http://schemas.openxmlformats.org/officeDocument/2006/relationships" id="2147483651" r:id="R5253c10b862b48f6"/>
+    <p:sldLayoutId xmlns:r="http://schemas.openxmlformats.org/officeDocument/2006/relationships" id="2147483652" r:id="Re50ff29b5e07406d"/>
+    <p:sldLayoutId xmlns:r="http://schemas.openxmlformats.org/officeDocument/2006/relationships" id="2147483653" r:id="R0f520b42ee864d4a"/>
+    <p:sldLayoutId xmlns:r="http://schemas.openxmlformats.org/officeDocument/2006/relationships" id="2147483654" r:id="R19c953c39be741b4"/>
   </p:sldLayoutIdLst>
   <p:txStyles>
     <p:titleStyle>
@@ -4222,7 +4222,7 @@
           <p:cNvPr id="14" name="">
             <a:extLst xmlns:a="http://schemas.openxmlformats.org/drawingml/2006/main">
               <a:ext uri="{FF2B5EF4-FFF2-40B4-BE49-F238E27FC236}">
-                <a16:creationId xmlns:a16="http://schemas.microsoft.com/office/drawing/2014/main" id="{87F6D178-6A6E-46A2-9AE7-76512AB23F5D}"/>
+                <a16:creationId xmlns:a16="http://schemas.microsoft.com/office/drawing/2014/main" id="{7E6FC0E7-2D8E-4911-BC8F-0C3DE8996AED}"/>
               </a:ext>
             </a:extLst>
           </p:cNvPr>
@@ -4371,7 +4371,7 @@
                 <a:ea typeface="Malgun Gothic"/>
                 <a:cs typeface="Malgun Gothic"/>
               </a:rPr>
-              <a:t>MENTORING SESSION  ·  15 MIN</a:t>
+              <a:t>LOCAL EXPERIENCE PROJECT</a:t>
             </a:r>
           </a:p>
         </p:txBody>
@@ -4381,7 +4381,7 @@
           <p:cNvPr id="2" name="">
             <a:extLst xmlns:a="http://schemas.openxmlformats.org/drawingml/2006/main">
               <a:ext uri="{FF2B5EF4-FFF2-40B4-BE49-F238E27FC236}">
-                <a16:creationId xmlns:a16="http://schemas.microsoft.com/office/drawing/2014/main" id="{15E36CF0-34DC-42F6-9EC3-DB4C39930369}"/>
+                <a16:creationId xmlns:a16="http://schemas.microsoft.com/office/drawing/2014/main" id="{4F98C052-6C70-4DB5-9D4D-6F82E437ADC1}"/>
               </a:ext>
             </a:extLst>
           </p:cNvPr>
@@ -4530,7 +4530,7 @@
                 <a:ea typeface="Malgun Gothic"/>
                 <a:cs typeface="Malgun Gothic"/>
               </a:rPr>
-              <a:t>로컬이음, 지역의 만남을 체험으로</a:t>
+              <a:t>관광지에서 사람으로, 정보에서 경험으로</a:t>
             </a:r>
           </a:p>
         </p:txBody>
@@ -4540,7 +4540,7 @@
           <p:cNvPr id="3" name="">
             <a:extLst xmlns:a="http://schemas.openxmlformats.org/drawingml/2006/main">
               <a:ext uri="{FF2B5EF4-FFF2-40B4-BE49-F238E27FC236}">
-                <a16:creationId xmlns:a16="http://schemas.microsoft.com/office/drawing/2014/main" id="{72E56091-D9C1-4E65-A5C9-625490C47A98}"/>
+                <a16:creationId xmlns:a16="http://schemas.microsoft.com/office/drawing/2014/main" id="{7F12A141-3492-4743-BA60-938D414F8D84}"/>
               </a:ext>
             </a:extLst>
           </p:cNvPr>
@@ -4573,7 +4573,7 @@
           <p:cNvPr id="4" name="">
             <a:extLst xmlns:a="http://schemas.openxmlformats.org/drawingml/2006/main">
               <a:ext uri="{FF2B5EF4-FFF2-40B4-BE49-F238E27FC236}">
-                <a16:creationId xmlns:a16="http://schemas.microsoft.com/office/drawing/2014/main" id="{3B4B28AA-26A8-4EEA-9E9D-538E5FEACFB6}"/>
+                <a16:creationId xmlns:a16="http://schemas.microsoft.com/office/drawing/2014/main" id="{8854695A-7650-479C-902B-DB0741F6B869}"/>
               </a:ext>
             </a:extLst>
           </p:cNvPr>
@@ -4722,7 +4722,7 @@
                 <a:ea typeface="Malgun Gothic"/>
                 <a:cs typeface="Malgun Gothic"/>
               </a:rPr>
-              <a:t>LOCAL EUM  ·  멘토링 브리프  ·  2026.10</a:t>
+              <a:t>LOCAL EUM  ·  기획과 구현  ·  2026.10</a:t>
             </a:r>
           </a:p>
         </p:txBody>
@@ -4732,7 +4732,7 @@
           <p:cNvPr id="5" name="">
             <a:extLst xmlns:a="http://schemas.openxmlformats.org/drawingml/2006/main">
               <a:ext uri="{FF2B5EF4-FFF2-40B4-BE49-F238E27FC236}">
-                <a16:creationId xmlns:a16="http://schemas.microsoft.com/office/drawing/2014/main" id="{39EE8E6F-04A6-4416-8C89-36C248CDA45B}"/>
+                <a16:creationId xmlns:a16="http://schemas.microsoft.com/office/drawing/2014/main" id="{7E876D6E-60A4-43D8-A4B9-1A295BCFEA82}"/>
               </a:ext>
             </a:extLst>
           </p:cNvPr>
@@ -4891,7 +4891,7 @@
           <p:cNvPr id="6" name="">
             <a:extLst xmlns:a="http://schemas.openxmlformats.org/drawingml/2006/main">
               <a:ext uri="{FF2B5EF4-FFF2-40B4-BE49-F238E27FC236}">
-                <a16:creationId xmlns:a16="http://schemas.microsoft.com/office/drawing/2014/main" id="{60890BB6-A269-4DF4-A943-42B9436F3F87}"/>
+                <a16:creationId xmlns:a16="http://schemas.microsoft.com/office/drawing/2014/main" id="{B7E91E9E-63B5-45F9-9D81-BF4297B913AA}"/>
               </a:ext>
             </a:extLst>
           </p:cNvPr>
@@ -5050,7 +5050,7 @@
           <p:cNvPr id="7" name="">
             <a:extLst xmlns:a="http://schemas.openxmlformats.org/drawingml/2006/main">
               <a:ext uri="{FF2B5EF4-FFF2-40B4-BE49-F238E27FC236}">
-                <a16:creationId xmlns:a16="http://schemas.microsoft.com/office/drawing/2014/main" id="{12AEBC9A-C4AD-456A-A355-24C8EB7F1DB1}"/>
+                <a16:creationId xmlns:a16="http://schemas.microsoft.com/office/drawing/2014/main" id="{5F5C8DB0-8116-4DA4-B094-C1EAC694A337}"/>
               </a:ext>
             </a:extLst>
           </p:cNvPr>
@@ -5209,7 +5209,7 @@
           <p:cNvPr id="8" name="">
             <a:extLst xmlns:a="http://schemas.openxmlformats.org/drawingml/2006/main">
               <a:ext uri="{FF2B5EF4-FFF2-40B4-BE49-F238E27FC236}">
-                <a16:creationId xmlns:a16="http://schemas.microsoft.com/office/drawing/2014/main" id="{68162814-3990-4E20-B1A6-634FF8F79F0F}"/>
+                <a16:creationId xmlns:a16="http://schemas.microsoft.com/office/drawing/2014/main" id="{CE7341D6-09C9-4C15-95AE-672AF0EDDA09}"/>
               </a:ext>
             </a:extLst>
           </p:cNvPr>
@@ -5220,7 +5220,189 @@
         </p:nvSpPr>
         <p:spPr>
           <a:xfrm xmlns:a="http://schemas.openxmlformats.org/drawingml/2006/main">
-            <a:off x="609600" y="3429000"/>
+            <a:off x="609600" y="3333750"/>
+            <a:ext cx="5095875" cy="838200"/>
+          </a:xfrm>
+          <a:prstGeom xmlns:a="http://schemas.openxmlformats.org/drawingml/2006/main" prst="rect">
+            <a:avLst/>
+          </a:prstGeom>
+          <a:noFill xmlns:a="http://schemas.openxmlformats.org/drawingml/2006/main"/>
+          <a:ln xmlns:a="http://schemas.openxmlformats.org/drawingml/2006/main" w="0">
+            <a:noFill/>
+            <a:prstDash val="solid"/>
+          </a:ln>
+        </p:spPr>
+        <p:txBody>
+          <a:bodyPr xmlns:a="http://schemas.openxmlformats.org/drawingml/2006/main" wrap="square" lIns="0" tIns="0" rIns="0" bIns="0" anchor="t">
+            <a:normAutofit fontScale="100000"/>
+          </a:bodyPr>
+          <a:lstStyle xmlns:a="http://schemas.openxmlformats.org/drawingml/2006/main">
+            <a:defPPr algn="l">
+              <a:defRPr sz="2100" b="1">
+                <a:solidFill>
+                  <a:srgbClr val="FFFFFF"/>
+                </a:solidFill>
+                <a:latin typeface="Malgun Gothic"/>
+                <a:ea typeface="Malgun Gothic"/>
+                <a:cs typeface="Malgun Gothic"/>
+              </a:defRPr>
+            </a:defPPr>
+            <a:lvl1pPr algn="l">
+              <a:defRPr sz="2100" b="1">
+                <a:solidFill>
+                  <a:srgbClr val="FFFFFF"/>
+                </a:solidFill>
+                <a:latin typeface="Malgun Gothic"/>
+                <a:ea typeface="Malgun Gothic"/>
+                <a:cs typeface="Malgun Gothic"/>
+              </a:defRPr>
+            </a:lvl1pPr>
+            <a:lvl2pPr algn="l">
+              <a:defRPr sz="2100" b="1">
+                <a:solidFill>
+                  <a:srgbClr val="FFFFFF"/>
+                </a:solidFill>
+                <a:latin typeface="Malgun Gothic"/>
+                <a:ea typeface="Malgun Gothic"/>
+                <a:cs typeface="Malgun Gothic"/>
+              </a:defRPr>
+            </a:lvl2pPr>
+            <a:lvl3pPr algn="l">
+              <a:defRPr sz="2100" b="1">
+                <a:solidFill>
+                  <a:srgbClr val="FFFFFF"/>
+                </a:solidFill>
+                <a:latin typeface="Malgun Gothic"/>
+                <a:ea typeface="Malgun Gothic"/>
+                <a:cs typeface="Malgun Gothic"/>
+              </a:defRPr>
+            </a:lvl3pPr>
+            <a:lvl4pPr algn="l">
+              <a:defRPr sz="2100" b="1">
+                <a:solidFill>
+                  <a:srgbClr val="FFFFFF"/>
+                </a:solidFill>
+                <a:latin typeface="Malgun Gothic"/>
+                <a:ea typeface="Malgun Gothic"/>
+                <a:cs typeface="Malgun Gothic"/>
+              </a:defRPr>
+            </a:lvl4pPr>
+            <a:lvl5pPr algn="l">
+              <a:defRPr sz="2100" b="1">
+                <a:solidFill>
+                  <a:srgbClr val="FFFFFF"/>
+                </a:solidFill>
+                <a:latin typeface="Malgun Gothic"/>
+                <a:ea typeface="Malgun Gothic"/>
+                <a:cs typeface="Malgun Gothic"/>
+              </a:defRPr>
+            </a:lvl5pPr>
+            <a:lvl6pPr algn="l">
+              <a:defRPr sz="2100" b="1">
+                <a:solidFill>
+                  <a:srgbClr val="FFFFFF"/>
+                </a:solidFill>
+                <a:latin typeface="Malgun Gothic"/>
+                <a:ea typeface="Malgun Gothic"/>
+                <a:cs typeface="Malgun Gothic"/>
+              </a:defRPr>
+            </a:lvl6pPr>
+            <a:lvl7pPr algn="l">
+              <a:defRPr sz="2100" b="1">
+                <a:solidFill>
+                  <a:srgbClr val="FFFFFF"/>
+                </a:solidFill>
+                <a:latin typeface="Malgun Gothic"/>
+                <a:ea typeface="Malgun Gothic"/>
+                <a:cs typeface="Malgun Gothic"/>
+              </a:defRPr>
+            </a:lvl7pPr>
+            <a:lvl8pPr algn="l">
+              <a:defRPr sz="2100" b="1">
+                <a:solidFill>
+                  <a:srgbClr val="FFFFFF"/>
+                </a:solidFill>
+                <a:latin typeface="Malgun Gothic"/>
+                <a:ea typeface="Malgun Gothic"/>
+                <a:cs typeface="Malgun Gothic"/>
+              </a:defRPr>
+            </a:lvl8pPr>
+            <a:lvl9pPr algn="l">
+              <a:defRPr sz="2100" b="1">
+                <a:solidFill>
+                  <a:srgbClr val="FFFFFF"/>
+                </a:solidFill>
+                <a:latin typeface="Malgun Gothic"/>
+                <a:ea typeface="Malgun Gothic"/>
+                <a:cs typeface="Malgun Gothic"/>
+              </a:defRPr>
+            </a:lvl9pPr>
+          </a:lstStyle>
+          <a:p xmlns:a="http://schemas.openxmlformats.org/drawingml/2006/main">
+            <a:pPr algn="l">
+              <a:defRPr sz="2100" b="1">
+                <a:solidFill>
+                  <a:srgbClr val="FFFFFF"/>
+                </a:solidFill>
+                <a:latin typeface="Malgun Gothic"/>
+                <a:ea typeface="Malgun Gothic"/>
+                <a:cs typeface="Malgun Gothic"/>
+              </a:defRPr>
+            </a:pPr>
+            <a:r>
+              <a:rPr sz="2100" b="1">
+                <a:solidFill>
+                  <a:srgbClr val="FFFFFF"/>
+                </a:solidFill>
+                <a:latin typeface="Malgun Gothic"/>
+                <a:ea typeface="Malgun Gothic"/>
+                <a:cs typeface="Malgun Gothic"/>
+              </a:rPr>
+              <a:t>여행에서 만남으로,</a:t>
+            </a:r>
+          </a:p>
+          <a:p xmlns:a="http://schemas.openxmlformats.org/drawingml/2006/main">
+            <a:pPr algn="l">
+              <a:defRPr sz="2100" b="1">
+                <a:solidFill>
+                  <a:srgbClr val="FFFFFF"/>
+                </a:solidFill>
+                <a:latin typeface="Malgun Gothic"/>
+                <a:ea typeface="Malgun Gothic"/>
+                <a:cs typeface="Malgun Gothic"/>
+              </a:defRPr>
+            </a:pPr>
+            <a:r>
+              <a:rPr sz="2100" b="1">
+                <a:solidFill>
+                  <a:srgbClr val="FFFFFF"/>
+                </a:solidFill>
+                <a:latin typeface="Malgun Gothic"/>
+                <a:ea typeface="Malgun Gothic"/>
+                <a:cs typeface="Malgun Gothic"/>
+              </a:rPr>
+              <a:t>만남에서 새로운 경험으로</a:t>
+            </a:r>
+          </a:p>
+        </p:txBody>
+      </p:sp>
+      <p:sp>
+        <p:nvSpPr>
+          <p:cNvPr id="9" name="">
+            <a:extLst xmlns:a="http://schemas.openxmlformats.org/drawingml/2006/main">
+              <a:ext uri="{FF2B5EF4-FFF2-40B4-BE49-F238E27FC236}">
+                <a16:creationId xmlns:a16="http://schemas.microsoft.com/office/drawing/2014/main" id="{BAC8C5F0-FBB1-4133-B7C8-ADD12B012F28}"/>
+              </a:ext>
+            </a:extLst>
+          </p:cNvPr>
+          <p:cNvSpPr>
+            <a:spLocks xmlns:a="http://schemas.openxmlformats.org/drawingml/2006/main" noGrp="1"/>
+          </p:cNvSpPr>
+          <p:nvPr/>
+        </p:nvSpPr>
+        <p:spPr>
+          <a:xfrm xmlns:a="http://schemas.openxmlformats.org/drawingml/2006/main">
+            <a:off x="609600" y="4410075"/>
             <a:ext cx="5095875" cy="857250"/>
           </a:xfrm>
           <a:prstGeom xmlns:a="http://schemas.openxmlformats.org/drawingml/2006/main" prst="rect">
@@ -5238,9 +5420,9 @@
           </a:bodyPr>
           <a:lstStyle xmlns:a="http://schemas.openxmlformats.org/drawingml/2006/main">
             <a:defPPr algn="l">
-              <a:defRPr sz="2100" b="1">
-                <a:solidFill>
-                  <a:srgbClr val="FFFFFF"/>
+              <a:defRPr sz="1425" b="0">
+                <a:solidFill>
+                  <a:srgbClr val="C7D6E2"/>
                 </a:solidFill>
                 <a:latin typeface="Malgun Gothic"/>
                 <a:ea typeface="Malgun Gothic"/>
@@ -5248,9 +5430,9 @@
               </a:defRPr>
             </a:defPPr>
             <a:lvl1pPr algn="l">
-              <a:defRPr sz="2100" b="1">
-                <a:solidFill>
-                  <a:srgbClr val="FFFFFF"/>
+              <a:defRPr sz="1425" b="0">
+                <a:solidFill>
+                  <a:srgbClr val="C7D6E2"/>
                 </a:solidFill>
                 <a:latin typeface="Malgun Gothic"/>
                 <a:ea typeface="Malgun Gothic"/>
@@ -5258,9 +5440,9 @@
               </a:defRPr>
             </a:lvl1pPr>
             <a:lvl2pPr algn="l">
-              <a:defRPr sz="2100" b="1">
-                <a:solidFill>
-                  <a:srgbClr val="FFFFFF"/>
+              <a:defRPr sz="1425" b="0">
+                <a:solidFill>
+                  <a:srgbClr val="C7D6E2"/>
                 </a:solidFill>
                 <a:latin typeface="Malgun Gothic"/>
                 <a:ea typeface="Malgun Gothic"/>
@@ -5268,9 +5450,9 @@
               </a:defRPr>
             </a:lvl2pPr>
             <a:lvl3pPr algn="l">
-              <a:defRPr sz="2100" b="1">
-                <a:solidFill>
-                  <a:srgbClr val="FFFFFF"/>
+              <a:defRPr sz="1425" b="0">
+                <a:solidFill>
+                  <a:srgbClr val="C7D6E2"/>
                 </a:solidFill>
                 <a:latin typeface="Malgun Gothic"/>
                 <a:ea typeface="Malgun Gothic"/>
@@ -5278,9 +5460,9 @@
               </a:defRPr>
             </a:lvl3pPr>
             <a:lvl4pPr algn="l">
-              <a:defRPr sz="2100" b="1">
-                <a:solidFill>
-                  <a:srgbClr val="FFFFFF"/>
+              <a:defRPr sz="1425" b="0">
+                <a:solidFill>
+                  <a:srgbClr val="C7D6E2"/>
                 </a:solidFill>
                 <a:latin typeface="Malgun Gothic"/>
                 <a:ea typeface="Malgun Gothic"/>
@@ -5288,9 +5470,9 @@
               </a:defRPr>
             </a:lvl4pPr>
             <a:lvl5pPr algn="l">
-              <a:defRPr sz="2100" b="1">
-                <a:solidFill>
-                  <a:srgbClr val="FFFFFF"/>
+              <a:defRPr sz="1425" b="0">
+                <a:solidFill>
+                  <a:srgbClr val="C7D6E2"/>
                 </a:solidFill>
                 <a:latin typeface="Malgun Gothic"/>
                 <a:ea typeface="Malgun Gothic"/>
@@ -5298,9 +5480,9 @@
               </a:defRPr>
             </a:lvl5pPr>
             <a:lvl6pPr algn="l">
-              <a:defRPr sz="2100" b="1">
-                <a:solidFill>
-                  <a:srgbClr val="FFFFFF"/>
+              <a:defRPr sz="1425" b="0">
+                <a:solidFill>
+                  <a:srgbClr val="C7D6E2"/>
                 </a:solidFill>
                 <a:latin typeface="Malgun Gothic"/>
                 <a:ea typeface="Malgun Gothic"/>
@@ -5308,9 +5490,9 @@
               </a:defRPr>
             </a:lvl6pPr>
             <a:lvl7pPr algn="l">
-              <a:defRPr sz="2100" b="1">
-                <a:solidFill>
-                  <a:srgbClr val="FFFFFF"/>
+              <a:defRPr sz="1425" b="0">
+                <a:solidFill>
+                  <a:srgbClr val="C7D6E2"/>
                 </a:solidFill>
                 <a:latin typeface="Malgun Gothic"/>
                 <a:ea typeface="Malgun Gothic"/>
@@ -5318,9 +5500,9 @@
               </a:defRPr>
             </a:lvl7pPr>
             <a:lvl8pPr algn="l">
-              <a:defRPr sz="2100" b="1">
-                <a:solidFill>
-                  <a:srgbClr val="FFFFFF"/>
+              <a:defRPr sz="1425" b="0">
+                <a:solidFill>
+                  <a:srgbClr val="C7D6E2"/>
                 </a:solidFill>
                 <a:latin typeface="Malgun Gothic"/>
                 <a:ea typeface="Malgun Gothic"/>
@@ -5328,9 +5510,9 @@
               </a:defRPr>
             </a:lvl8pPr>
             <a:lvl9pPr algn="l">
-              <a:defRPr sz="2100" b="1">
-                <a:solidFill>
-                  <a:srgbClr val="FFFFFF"/>
+              <a:defRPr sz="1425" b="0">
+                <a:solidFill>
+                  <a:srgbClr val="C7D6E2"/>
                 </a:solidFill>
                 <a:latin typeface="Malgun Gothic"/>
                 <a:ea typeface="Malgun Gothic"/>
@@ -5340,9 +5522,9 @@
           </a:lstStyle>
           <a:p xmlns:a="http://schemas.openxmlformats.org/drawingml/2006/main">
             <a:pPr algn="l">
-              <a:defRPr sz="2100" b="1">
-                <a:solidFill>
-                  <a:srgbClr val="FFFFFF"/>
+              <a:defRPr sz="1425" b="0">
+                <a:solidFill>
+                  <a:srgbClr val="C7D6E2"/>
                 </a:solidFill>
                 <a:latin typeface="Malgun Gothic"/>
                 <a:ea typeface="Malgun Gothic"/>
@@ -5350,22 +5532,22 @@
               </a:defRPr>
             </a:pPr>
             <a:r>
-              <a:rPr sz="2100" b="1">
-                <a:solidFill>
-                  <a:srgbClr val="FFFFFF"/>
+              <a:rPr sz="1425" b="0">
+                <a:solidFill>
+                  <a:srgbClr val="C7D6E2"/>
                 </a:solidFill>
                 <a:latin typeface="Malgun Gothic"/>
                 <a:ea typeface="Malgun Gothic"/>
                 <a:cs typeface="Malgun Gothic"/>
               </a:rPr>
-              <a:t>여행에서 만남으로,</a:t>
+              <a:t>지역 주민의 이야기와 관심사를 여행자와 연결해,</a:t>
             </a:r>
           </a:p>
           <a:p xmlns:a="http://schemas.openxmlformats.org/drawingml/2006/main">
             <a:pPr algn="l">
-              <a:defRPr sz="2100" b="1">
-                <a:solidFill>
-                  <a:srgbClr val="FFFFFF"/>
+              <a:defRPr sz="1425" b="0">
+                <a:solidFill>
+                  <a:srgbClr val="C7D6E2"/>
                 </a:solidFill>
                 <a:latin typeface="Malgun Gothic"/>
                 <a:ea typeface="Malgun Gothic"/>
@@ -5373,197 +5555,15 @@
               </a:defRPr>
             </a:pPr>
             <a:r>
-              <a:rPr sz="2100" b="1">
-                <a:solidFill>
-                  <a:srgbClr val="FFFFFF"/>
+              <a:rPr sz="1425" b="0">
+                <a:solidFill>
+                  <a:srgbClr val="C7D6E2"/>
                 </a:solidFill>
                 <a:latin typeface="Malgun Gothic"/>
                 <a:ea typeface="Malgun Gothic"/>
                 <a:cs typeface="Malgun Gothic"/>
               </a:rPr>
-              <a:t>만남에서 새로운 경험으로</a:t>
-            </a:r>
-          </a:p>
-        </p:txBody>
-      </p:sp>
-      <p:sp>
-        <p:nvSpPr>
-          <p:cNvPr id="9" name="">
-            <a:extLst xmlns:a="http://schemas.openxmlformats.org/drawingml/2006/main">
-              <a:ext uri="{FF2B5EF4-FFF2-40B4-BE49-F238E27FC236}">
-                <a16:creationId xmlns:a16="http://schemas.microsoft.com/office/drawing/2014/main" id="{F2899C52-174A-472F-B1FC-8D2F16B37BBD}"/>
-              </a:ext>
-            </a:extLst>
-          </p:cNvPr>
-          <p:cNvSpPr>
-            <a:spLocks xmlns:a="http://schemas.openxmlformats.org/drawingml/2006/main" noGrp="1"/>
-          </p:cNvSpPr>
-          <p:nvPr/>
-        </p:nvSpPr>
-        <p:spPr>
-          <a:xfrm xmlns:a="http://schemas.openxmlformats.org/drawingml/2006/main">
-            <a:off x="609600" y="4524375"/>
-            <a:ext cx="4857750" cy="723900"/>
-          </a:xfrm>
-          <a:prstGeom xmlns:a="http://schemas.openxmlformats.org/drawingml/2006/main" prst="rect">
-            <a:avLst/>
-          </a:prstGeom>
-          <a:noFill xmlns:a="http://schemas.openxmlformats.org/drawingml/2006/main"/>
-          <a:ln xmlns:a="http://schemas.openxmlformats.org/drawingml/2006/main" w="0">
-            <a:noFill/>
-            <a:prstDash val="solid"/>
-          </a:ln>
-        </p:spPr>
-        <p:txBody>
-          <a:bodyPr xmlns:a="http://schemas.openxmlformats.org/drawingml/2006/main" wrap="square" lIns="0" tIns="0" rIns="0" bIns="0" anchor="t">
-            <a:normAutofit fontScale="100000"/>
-          </a:bodyPr>
-          <a:lstStyle xmlns:a="http://schemas.openxmlformats.org/drawingml/2006/main">
-            <a:defPPr algn="l">
-              <a:defRPr sz="1500" b="0">
-                <a:solidFill>
-                  <a:srgbClr val="C7D6E2"/>
-                </a:solidFill>
-                <a:latin typeface="Malgun Gothic"/>
-                <a:ea typeface="Malgun Gothic"/>
-                <a:cs typeface="Malgun Gothic"/>
-              </a:defRPr>
-            </a:defPPr>
-            <a:lvl1pPr algn="l">
-              <a:defRPr sz="1500" b="0">
-                <a:solidFill>
-                  <a:srgbClr val="C7D6E2"/>
-                </a:solidFill>
-                <a:latin typeface="Malgun Gothic"/>
-                <a:ea typeface="Malgun Gothic"/>
-                <a:cs typeface="Malgun Gothic"/>
-              </a:defRPr>
-            </a:lvl1pPr>
-            <a:lvl2pPr algn="l">
-              <a:defRPr sz="1500" b="0">
-                <a:solidFill>
-                  <a:srgbClr val="C7D6E2"/>
-                </a:solidFill>
-                <a:latin typeface="Malgun Gothic"/>
-                <a:ea typeface="Malgun Gothic"/>
-                <a:cs typeface="Malgun Gothic"/>
-              </a:defRPr>
-            </a:lvl2pPr>
-            <a:lvl3pPr algn="l">
-              <a:defRPr sz="1500" b="0">
-                <a:solidFill>
-                  <a:srgbClr val="C7D6E2"/>
-                </a:solidFill>
-                <a:latin typeface="Malgun Gothic"/>
-                <a:ea typeface="Malgun Gothic"/>
-                <a:cs typeface="Malgun Gothic"/>
-              </a:defRPr>
-            </a:lvl3pPr>
-            <a:lvl4pPr algn="l">
-              <a:defRPr sz="1500" b="0">
-                <a:solidFill>
-                  <a:srgbClr val="C7D6E2"/>
-                </a:solidFill>
-                <a:latin typeface="Malgun Gothic"/>
-                <a:ea typeface="Malgun Gothic"/>
-                <a:cs typeface="Malgun Gothic"/>
-              </a:defRPr>
-            </a:lvl4pPr>
-            <a:lvl5pPr algn="l">
-              <a:defRPr sz="1500" b="0">
-                <a:solidFill>
-                  <a:srgbClr val="C7D6E2"/>
-                </a:solidFill>
-                <a:latin typeface="Malgun Gothic"/>
-                <a:ea typeface="Malgun Gothic"/>
-                <a:cs typeface="Malgun Gothic"/>
-              </a:defRPr>
-            </a:lvl5pPr>
-            <a:lvl6pPr algn="l">
-              <a:defRPr sz="1500" b="0">
-                <a:solidFill>
-                  <a:srgbClr val="C7D6E2"/>
-                </a:solidFill>
-                <a:latin typeface="Malgun Gothic"/>
-                <a:ea typeface="Malgun Gothic"/>
-                <a:cs typeface="Malgun Gothic"/>
-              </a:defRPr>
-            </a:lvl6pPr>
-            <a:lvl7pPr algn="l">
-              <a:defRPr sz="1500" b="0">
-                <a:solidFill>
-                  <a:srgbClr val="C7D6E2"/>
-                </a:solidFill>
-                <a:latin typeface="Malgun Gothic"/>
-                <a:ea typeface="Malgun Gothic"/>
-                <a:cs typeface="Malgun Gothic"/>
-              </a:defRPr>
-            </a:lvl7pPr>
-            <a:lvl8pPr algn="l">
-              <a:defRPr sz="1500" b="0">
-                <a:solidFill>
-                  <a:srgbClr val="C7D6E2"/>
-                </a:solidFill>
-                <a:latin typeface="Malgun Gothic"/>
-                <a:ea typeface="Malgun Gothic"/>
-                <a:cs typeface="Malgun Gothic"/>
-              </a:defRPr>
-            </a:lvl8pPr>
-            <a:lvl9pPr algn="l">
-              <a:defRPr sz="1500" b="0">
-                <a:solidFill>
-                  <a:srgbClr val="C7D6E2"/>
-                </a:solidFill>
-                <a:latin typeface="Malgun Gothic"/>
-                <a:ea typeface="Malgun Gothic"/>
-                <a:cs typeface="Malgun Gothic"/>
-              </a:defRPr>
-            </a:lvl9pPr>
-          </a:lstStyle>
-          <a:p xmlns:a="http://schemas.openxmlformats.org/drawingml/2006/main">
-            <a:pPr algn="l">
-              <a:defRPr sz="1500" b="0">
-                <a:solidFill>
-                  <a:srgbClr val="C7D6E2"/>
-                </a:solidFill>
-                <a:latin typeface="Malgun Gothic"/>
-                <a:ea typeface="Malgun Gothic"/>
-                <a:cs typeface="Malgun Gothic"/>
-              </a:defRPr>
-            </a:pPr>
-            <a:r>
-              <a:rPr sz="1500" b="0">
-                <a:solidFill>
-                  <a:srgbClr val="C7D6E2"/>
-                </a:solidFill>
-                <a:latin typeface="Malgun Gothic"/>
-                <a:ea typeface="Malgun Gothic"/>
-                <a:cs typeface="Malgun Gothic"/>
-              </a:rPr>
-              <a:t>지역 호스트의 체험을 찾고 신청하는 흐름과</a:t>
-            </a:r>
-          </a:p>
-          <a:p xmlns:a="http://schemas.openxmlformats.org/drawingml/2006/main">
-            <a:pPr algn="l">
-              <a:defRPr sz="1500" b="0">
-                <a:solidFill>
-                  <a:srgbClr val="C7D6E2"/>
-                </a:solidFill>
-                <a:latin typeface="Malgun Gothic"/>
-                <a:ea typeface="Malgun Gothic"/>
-                <a:cs typeface="Malgun Gothic"/>
-              </a:defRPr>
-            </a:pPr>
-            <a:r>
-              <a:rPr sz="1500" b="0">
-                <a:solidFill>
-                  <a:srgbClr val="C7D6E2"/>
-                </a:solidFill>
-                <a:latin typeface="Malgun Gothic"/>
-                <a:ea typeface="Malgun Gothic"/>
-                <a:cs typeface="Malgun Gothic"/>
-              </a:rPr>
-              <a:t>호스트 운영·AI 기획 지원을 연결합니다.</a:t>
+              <a:t>평범한 일상을 함께하는 체험으로 만듭니다.</a:t>
             </a:r>
           </a:p>
         </p:txBody>
@@ -5573,7 +5573,7 @@
           <p:cNvPr id="10" name="">
             <a:extLst xmlns:a="http://schemas.openxmlformats.org/drawingml/2006/main">
               <a:ext uri="{FF2B5EF4-FFF2-40B4-BE49-F238E27FC236}">
-                <a16:creationId xmlns:a16="http://schemas.microsoft.com/office/drawing/2014/main" id="{A0C40ED3-A63E-4F25-981C-1D2FB15AB512}"/>
+                <a16:creationId xmlns:a16="http://schemas.microsoft.com/office/drawing/2014/main" id="{0929ABB0-F7EF-42C2-88A1-4C833D4391B7}"/>
               </a:ext>
             </a:extLst>
           </p:cNvPr>
@@ -5583,7 +5583,7 @@
           <p:nvPr/>
         </p:nvPicPr>
         <p:blipFill>
-          <a:blip xmlns:r="http://schemas.openxmlformats.org/officeDocument/2006/relationships" xmlns:a="http://schemas.openxmlformats.org/drawingml/2006/main" r:embed="R1f49c44353d643dc"/>
+          <a:blip xmlns:r="http://schemas.openxmlformats.org/officeDocument/2006/relationships" xmlns:a="http://schemas.openxmlformats.org/drawingml/2006/main" r:embed="Ra5784f12036c46a1"/>
           <a:srcRect xmlns:a="http://schemas.openxmlformats.org/drawingml/2006/main" l="189" t="0" r="189" b="0"/>
           <a:stretch xmlns:a="http://schemas.openxmlformats.org/drawingml/2006/main">
             <a:fillRect l="0" t="0" r="0" b="0"/>
@@ -5606,7 +5606,7 @@
           <p:cNvPr id="11" name="">
             <a:extLst xmlns:a="http://schemas.openxmlformats.org/drawingml/2006/main">
               <a:ext uri="{FF2B5EF4-FFF2-40B4-BE49-F238E27FC236}">
-                <a16:creationId xmlns:a16="http://schemas.microsoft.com/office/drawing/2014/main" id="{58DB9F44-D465-4DB3-AA98-44EC750E0CF1}"/>
+                <a16:creationId xmlns:a16="http://schemas.microsoft.com/office/drawing/2014/main" id="{4351638E-A6FE-416F-98C9-74C04F536588}"/>
               </a:ext>
             </a:extLst>
           </p:cNvPr>
@@ -5639,7 +5639,7 @@
           <p:cNvPr id="12" name="">
             <a:extLst xmlns:a="http://schemas.openxmlformats.org/drawingml/2006/main">
               <a:ext uri="{FF2B5EF4-FFF2-40B4-BE49-F238E27FC236}">
-                <a16:creationId xmlns:a16="http://schemas.microsoft.com/office/drawing/2014/main" id="{4CDBA588-C9E3-4682-BCF9-C852586A08BA}"/>
+                <a16:creationId xmlns:a16="http://schemas.microsoft.com/office/drawing/2014/main" id="{ED602072-64B3-467D-8CBE-F9CEB2264D92}"/>
               </a:ext>
             </a:extLst>
           </p:cNvPr>
@@ -5798,7 +5798,7 @@
           <p:cNvPr id="13" name="">
             <a:extLst xmlns:a="http://schemas.openxmlformats.org/drawingml/2006/main">
               <a:ext uri="{FF2B5EF4-FFF2-40B4-BE49-F238E27FC236}">
-                <a16:creationId xmlns:a16="http://schemas.microsoft.com/office/drawing/2014/main" id="{4E63E3B4-0793-4F4E-8304-199AC92CDDEF}"/>
+                <a16:creationId xmlns:a16="http://schemas.microsoft.com/office/drawing/2014/main" id="{F566B2A5-4EAA-4418-9674-8482F6E55631}"/>
               </a:ext>
             </a:extLst>
           </p:cNvPr>
@@ -5947,7 +5947,7 @@
                 <a:ea typeface="Malgun Gothic"/>
                 <a:cs typeface="Malgun Gothic"/>
               </a:rPr>
-              <a:t>멘토링 목표  ·  무엇을 검증하고, 다음에 무엇을 만들지 결정하기</a:t>
+              <a:t>지역의 일상이 여행자의 기억이 되는 경험을 만듭니다.</a:t>
             </a:r>
           </a:p>
         </p:txBody>
@@ -5955,7 +5955,7 @@
     </p:spTree>
     <p:extLst>
       <p:ext uri="{BB962C8B-B14F-4D97-AF65-F5344CB8AC3E}">
-        <p14:creationId xmlns:p14="http://schemas.microsoft.com/office/powerpoint/2010/main" val="2126114875"/>
+        <p14:creationId xmlns:p14="http://schemas.microsoft.com/office/powerpoint/2010/main" val="1795140751"/>
       </p:ext>
     </p:extLst>
   </p:cSld>
@@ -5986,7 +5986,7 @@
           <p:cNvPr id="31" name="">
             <a:extLst xmlns:a="http://schemas.openxmlformats.org/drawingml/2006/main">
               <a:ext uri="{FF2B5EF4-FFF2-40B4-BE49-F238E27FC236}">
-                <a16:creationId xmlns:a16="http://schemas.microsoft.com/office/drawing/2014/main" id="{F7C9E7E8-AC91-421B-9DF8-623AB556491E}"/>
+                <a16:creationId xmlns:a16="http://schemas.microsoft.com/office/drawing/2014/main" id="{2603310B-F7DC-4226-BF31-3E3538C88766}"/>
               </a:ext>
             </a:extLst>
           </p:cNvPr>
@@ -6145,7 +6145,7 @@
           <p:cNvPr id="2" name="">
             <a:extLst xmlns:a="http://schemas.openxmlformats.org/drawingml/2006/main">
               <a:ext uri="{FF2B5EF4-FFF2-40B4-BE49-F238E27FC236}">
-                <a16:creationId xmlns:a16="http://schemas.microsoft.com/office/drawing/2014/main" id="{473AF893-91AF-484F-857D-757E9AF8960A}"/>
+                <a16:creationId xmlns:a16="http://schemas.microsoft.com/office/drawing/2014/main" id="{CD3049A4-1E3B-434B-8941-59247CBC1F7A}"/>
               </a:ext>
             </a:extLst>
           </p:cNvPr>
@@ -6304,7 +6304,7 @@
           <p:cNvPr id="3" name="">
             <a:extLst xmlns:a="http://schemas.openxmlformats.org/drawingml/2006/main">
               <a:ext uri="{FF2B5EF4-FFF2-40B4-BE49-F238E27FC236}">
-                <a16:creationId xmlns:a16="http://schemas.microsoft.com/office/drawing/2014/main" id="{EF501636-0F23-4414-8B7D-FDBAE49B70F4}"/>
+                <a16:creationId xmlns:a16="http://schemas.microsoft.com/office/drawing/2014/main" id="{721AA3BD-3974-424A-A51F-D3BDCC4219F2}"/>
               </a:ext>
             </a:extLst>
           </p:cNvPr>
@@ -6337,7 +6337,7 @@
           <p:cNvPr id="4" name="">
             <a:extLst xmlns:a="http://schemas.openxmlformats.org/drawingml/2006/main">
               <a:ext uri="{FF2B5EF4-FFF2-40B4-BE49-F238E27FC236}">
-                <a16:creationId xmlns:a16="http://schemas.microsoft.com/office/drawing/2014/main" id="{BF7465BB-BA38-4F89-8325-691ED62ACB2B}"/>
+                <a16:creationId xmlns:a16="http://schemas.microsoft.com/office/drawing/2014/main" id="{5912505D-42A8-4218-9B4A-5EF9AECF7F56}"/>
               </a:ext>
             </a:extLst>
           </p:cNvPr>
@@ -6486,7 +6486,7 @@
                 <a:ea typeface="Malgun Gothic"/>
                 <a:cs typeface="Malgun Gothic"/>
               </a:rPr>
-              <a:t>LOCAL EUM  ·  멘토링 브리프  ·  2026.10</a:t>
+              <a:t>LOCAL EUM  ·  기획과 구현  ·  2026.10</a:t>
             </a:r>
           </a:p>
         </p:txBody>
@@ -6496,7 +6496,7 @@
           <p:cNvPr id="5" name="">
             <a:extLst xmlns:a="http://schemas.openxmlformats.org/drawingml/2006/main">
               <a:ext uri="{FF2B5EF4-FFF2-40B4-BE49-F238E27FC236}">
-                <a16:creationId xmlns:a16="http://schemas.microsoft.com/office/drawing/2014/main" id="{69A2B245-77D0-47AE-8589-75297752DF1F}"/>
+                <a16:creationId xmlns:a16="http://schemas.microsoft.com/office/drawing/2014/main" id="{DA2B07B6-476A-45A8-BFF4-DCDA05225114}"/>
               </a:ext>
             </a:extLst>
           </p:cNvPr>
@@ -6655,7 +6655,7 @@
           <p:cNvPr id="6" name="">
             <a:extLst xmlns:a="http://schemas.openxmlformats.org/drawingml/2006/main">
               <a:ext uri="{FF2B5EF4-FFF2-40B4-BE49-F238E27FC236}">
-                <a16:creationId xmlns:a16="http://schemas.microsoft.com/office/drawing/2014/main" id="{5E7C4251-85FA-4BB7-A1AA-23914E4F66E2}"/>
+                <a16:creationId xmlns:a16="http://schemas.microsoft.com/office/drawing/2014/main" id="{F8DBF0B9-CABE-4453-BA64-9FB235DC8AA6}"/>
               </a:ext>
             </a:extLst>
           </p:cNvPr>
@@ -6690,7 +6690,7 @@
           <p:cNvPr id="7" name="">
             <a:extLst xmlns:a="http://schemas.openxmlformats.org/drawingml/2006/main">
               <a:ext uri="{FF2B5EF4-FFF2-40B4-BE49-F238E27FC236}">
-                <a16:creationId xmlns:a16="http://schemas.microsoft.com/office/drawing/2014/main" id="{7F693BFD-D92D-43EF-8A0B-EF7DDF9A4AB5}"/>
+                <a16:creationId xmlns:a16="http://schemas.microsoft.com/office/drawing/2014/main" id="{CCF216AB-CF8E-4DF7-B7E0-5D6E8A82D340}"/>
               </a:ext>
             </a:extLst>
           </p:cNvPr>
@@ -6723,7 +6723,7 @@
           <p:cNvPr id="8" name="">
             <a:extLst xmlns:a="http://schemas.openxmlformats.org/drawingml/2006/main">
               <a:ext uri="{FF2B5EF4-FFF2-40B4-BE49-F238E27FC236}">
-                <a16:creationId xmlns:a16="http://schemas.microsoft.com/office/drawing/2014/main" id="{A623AD81-9D14-4FC9-9553-C7E6052D13B4}"/>
+                <a16:creationId xmlns:a16="http://schemas.microsoft.com/office/drawing/2014/main" id="{4C1FF3AD-08BB-4AB5-A0E6-2D329B6DD740}"/>
               </a:ext>
             </a:extLst>
           </p:cNvPr>
@@ -6882,7 +6882,7 @@
           <p:cNvPr id="9" name="">
             <a:extLst xmlns:a="http://schemas.openxmlformats.org/drawingml/2006/main">
               <a:ext uri="{FF2B5EF4-FFF2-40B4-BE49-F238E27FC236}">
-                <a16:creationId xmlns:a16="http://schemas.microsoft.com/office/drawing/2014/main" id="{DB27F561-8892-41F7-8EFC-2C82A1A178C5}"/>
+                <a16:creationId xmlns:a16="http://schemas.microsoft.com/office/drawing/2014/main" id="{8D4702B2-321B-469C-99B4-09957A56D694}"/>
               </a:ext>
             </a:extLst>
           </p:cNvPr>
@@ -7045,7 +7045,7 @@
           <p:cNvPr id="10" name="">
             <a:extLst xmlns:a="http://schemas.openxmlformats.org/drawingml/2006/main">
               <a:ext uri="{FF2B5EF4-FFF2-40B4-BE49-F238E27FC236}">
-                <a16:creationId xmlns:a16="http://schemas.microsoft.com/office/drawing/2014/main" id="{2CA5DF73-46B8-4E8A-974B-640023E70A18}"/>
+                <a16:creationId xmlns:a16="http://schemas.microsoft.com/office/drawing/2014/main" id="{124EC968-8908-4796-A56E-311A78D5B4EE}"/>
               </a:ext>
             </a:extLst>
           </p:cNvPr>
@@ -7080,7 +7080,7 @@
           <p:cNvPr id="11" name="">
             <a:extLst xmlns:a="http://schemas.openxmlformats.org/drawingml/2006/main">
               <a:ext uri="{FF2B5EF4-FFF2-40B4-BE49-F238E27FC236}">
-                <a16:creationId xmlns:a16="http://schemas.microsoft.com/office/drawing/2014/main" id="{3FBF4A8C-63AE-461A-B475-E7D752231D12}"/>
+                <a16:creationId xmlns:a16="http://schemas.microsoft.com/office/drawing/2014/main" id="{B2B1C0A2-B79F-4918-A9CE-7716271F147F}"/>
               </a:ext>
             </a:extLst>
           </p:cNvPr>
@@ -7113,7 +7113,7 @@
           <p:cNvPr id="12" name="">
             <a:extLst xmlns:a="http://schemas.openxmlformats.org/drawingml/2006/main">
               <a:ext uri="{FF2B5EF4-FFF2-40B4-BE49-F238E27FC236}">
-                <a16:creationId xmlns:a16="http://schemas.microsoft.com/office/drawing/2014/main" id="{A46F54FF-F43E-4360-AB1D-6E74C2D1174E}"/>
+                <a16:creationId xmlns:a16="http://schemas.microsoft.com/office/drawing/2014/main" id="{EB4DFEB0-1205-41B9-9330-8AF686527373}"/>
               </a:ext>
             </a:extLst>
           </p:cNvPr>
@@ -7272,7 +7272,7 @@
           <p:cNvPr id="13" name="">
             <a:extLst xmlns:a="http://schemas.openxmlformats.org/drawingml/2006/main">
               <a:ext uri="{FF2B5EF4-FFF2-40B4-BE49-F238E27FC236}">
-                <a16:creationId xmlns:a16="http://schemas.microsoft.com/office/drawing/2014/main" id="{EF50DD42-BF33-4B18-A27E-B1588CB50577}"/>
+                <a16:creationId xmlns:a16="http://schemas.microsoft.com/office/drawing/2014/main" id="{2A974072-744A-4161-92E8-EE2795002514}"/>
               </a:ext>
             </a:extLst>
           </p:cNvPr>
@@ -7435,7 +7435,7 @@
           <p:cNvPr id="14" name="">
             <a:extLst xmlns:a="http://schemas.openxmlformats.org/drawingml/2006/main">
               <a:ext uri="{FF2B5EF4-FFF2-40B4-BE49-F238E27FC236}">
-                <a16:creationId xmlns:a16="http://schemas.microsoft.com/office/drawing/2014/main" id="{E1BBB9F8-8F6E-4E58-91EE-BDE6B32AA50B}"/>
+                <a16:creationId xmlns:a16="http://schemas.microsoft.com/office/drawing/2014/main" id="{00D16908-4977-4A28-BEB9-0D9A1E5E155B}"/>
               </a:ext>
             </a:extLst>
           </p:cNvPr>
@@ -7470,7 +7470,7 @@
           <p:cNvPr id="15" name="">
             <a:extLst xmlns:a="http://schemas.openxmlformats.org/drawingml/2006/main">
               <a:ext uri="{FF2B5EF4-FFF2-40B4-BE49-F238E27FC236}">
-                <a16:creationId xmlns:a16="http://schemas.microsoft.com/office/drawing/2014/main" id="{000B222A-6783-4520-B1BD-FCB38A284F13}"/>
+                <a16:creationId xmlns:a16="http://schemas.microsoft.com/office/drawing/2014/main" id="{0FFE255E-3C4C-48FA-B51A-62E30D23155D}"/>
               </a:ext>
             </a:extLst>
           </p:cNvPr>
@@ -7503,7 +7503,7 @@
           <p:cNvPr id="16" name="">
             <a:extLst xmlns:a="http://schemas.openxmlformats.org/drawingml/2006/main">
               <a:ext uri="{FF2B5EF4-FFF2-40B4-BE49-F238E27FC236}">
-                <a16:creationId xmlns:a16="http://schemas.microsoft.com/office/drawing/2014/main" id="{2ACC15EE-130F-499C-B7C2-95535A3924D1}"/>
+                <a16:creationId xmlns:a16="http://schemas.microsoft.com/office/drawing/2014/main" id="{C32A27B8-538C-423F-87F7-2447BA78032E}"/>
               </a:ext>
             </a:extLst>
           </p:cNvPr>
@@ -7662,7 +7662,7 @@
           <p:cNvPr id="17" name="">
             <a:extLst xmlns:a="http://schemas.openxmlformats.org/drawingml/2006/main">
               <a:ext uri="{FF2B5EF4-FFF2-40B4-BE49-F238E27FC236}">
-                <a16:creationId xmlns:a16="http://schemas.microsoft.com/office/drawing/2014/main" id="{D8CE3C79-5D69-421C-ADF8-565471063D56}"/>
+                <a16:creationId xmlns:a16="http://schemas.microsoft.com/office/drawing/2014/main" id="{BEF964F7-5CF9-4F30-AC1F-838A9FC5A97C}"/>
               </a:ext>
             </a:extLst>
           </p:cNvPr>
@@ -7825,7 +7825,7 @@
           <p:cNvPr id="18" name="">
             <a:extLst xmlns:a="http://schemas.openxmlformats.org/drawingml/2006/main">
               <a:ext uri="{FF2B5EF4-FFF2-40B4-BE49-F238E27FC236}">
-                <a16:creationId xmlns:a16="http://schemas.microsoft.com/office/drawing/2014/main" id="{66EB72DE-84A3-4FA4-B89C-8265BC6BB0DF}"/>
+                <a16:creationId xmlns:a16="http://schemas.microsoft.com/office/drawing/2014/main" id="{9D43C997-E40E-404F-AB49-A29C5E4E4F4B}"/>
               </a:ext>
             </a:extLst>
           </p:cNvPr>
@@ -7860,7 +7860,7 @@
           <p:cNvPr id="19" name="">
             <a:extLst xmlns:a="http://schemas.openxmlformats.org/drawingml/2006/main">
               <a:ext uri="{FF2B5EF4-FFF2-40B4-BE49-F238E27FC236}">
-                <a16:creationId xmlns:a16="http://schemas.microsoft.com/office/drawing/2014/main" id="{C1E24B93-CF41-463B-AE9E-D417A3CAF99C}"/>
+                <a16:creationId xmlns:a16="http://schemas.microsoft.com/office/drawing/2014/main" id="{6B266A55-5756-4C7A-8939-8BE6EC0F75E7}"/>
               </a:ext>
             </a:extLst>
           </p:cNvPr>
@@ -7893,7 +7893,7 @@
           <p:cNvPr id="20" name="">
             <a:extLst xmlns:a="http://schemas.openxmlformats.org/drawingml/2006/main">
               <a:ext uri="{FF2B5EF4-FFF2-40B4-BE49-F238E27FC236}">
-                <a16:creationId xmlns:a16="http://schemas.microsoft.com/office/drawing/2014/main" id="{36E018C6-AB1D-470F-8FE1-6A3B8ECECD48}"/>
+                <a16:creationId xmlns:a16="http://schemas.microsoft.com/office/drawing/2014/main" id="{F020378E-C9AE-465C-922E-BA9EC65C4F1B}"/>
               </a:ext>
             </a:extLst>
           </p:cNvPr>
@@ -8052,7 +8052,7 @@
           <p:cNvPr id="21" name="">
             <a:extLst xmlns:a="http://schemas.openxmlformats.org/drawingml/2006/main">
               <a:ext uri="{FF2B5EF4-FFF2-40B4-BE49-F238E27FC236}">
-                <a16:creationId xmlns:a16="http://schemas.microsoft.com/office/drawing/2014/main" id="{D7C6804E-CFA6-4E4D-83FE-99E71B5B740D}"/>
+                <a16:creationId xmlns:a16="http://schemas.microsoft.com/office/drawing/2014/main" id="{E287C3EF-D8B0-4C36-8EF4-009396A1E6C8}"/>
               </a:ext>
             </a:extLst>
           </p:cNvPr>
@@ -8215,7 +8215,7 @@
           <p:cNvPr id="22" name="">
             <a:extLst xmlns:a="http://schemas.openxmlformats.org/drawingml/2006/main">
               <a:ext uri="{FF2B5EF4-FFF2-40B4-BE49-F238E27FC236}">
-                <a16:creationId xmlns:a16="http://schemas.microsoft.com/office/drawing/2014/main" id="{04D14750-5248-4FF0-A6E5-A87B2E7E58BB}"/>
+                <a16:creationId xmlns:a16="http://schemas.microsoft.com/office/drawing/2014/main" id="{9530335F-A649-4A0E-9038-8964B0E3254D}"/>
               </a:ext>
             </a:extLst>
           </p:cNvPr>
@@ -8250,7 +8250,7 @@
           <p:cNvPr id="23" name="">
             <a:extLst xmlns:a="http://schemas.openxmlformats.org/drawingml/2006/main">
               <a:ext uri="{FF2B5EF4-FFF2-40B4-BE49-F238E27FC236}">
-                <a16:creationId xmlns:a16="http://schemas.microsoft.com/office/drawing/2014/main" id="{1BBB1A41-503E-48F5-A1D5-3BE836FEC3F7}"/>
+                <a16:creationId xmlns:a16="http://schemas.microsoft.com/office/drawing/2014/main" id="{D9A13687-3A9A-474A-81DC-51FFC7CF7BA0}"/>
               </a:ext>
             </a:extLst>
           </p:cNvPr>
@@ -8283,7 +8283,7 @@
           <p:cNvPr id="24" name="">
             <a:extLst xmlns:a="http://schemas.openxmlformats.org/drawingml/2006/main">
               <a:ext uri="{FF2B5EF4-FFF2-40B4-BE49-F238E27FC236}">
-                <a16:creationId xmlns:a16="http://schemas.microsoft.com/office/drawing/2014/main" id="{AC8E6F94-A219-47AD-ADB8-C5E3A17B0277}"/>
+                <a16:creationId xmlns:a16="http://schemas.microsoft.com/office/drawing/2014/main" id="{18138D4B-9EA1-46E0-BBFB-5AC46FB0F1F7}"/>
               </a:ext>
             </a:extLst>
           </p:cNvPr>
@@ -8442,7 +8442,7 @@
           <p:cNvPr id="25" name="">
             <a:extLst xmlns:a="http://schemas.openxmlformats.org/drawingml/2006/main">
               <a:ext uri="{FF2B5EF4-FFF2-40B4-BE49-F238E27FC236}">
-                <a16:creationId xmlns:a16="http://schemas.microsoft.com/office/drawing/2014/main" id="{EB42CA74-7073-4A9E-8CEB-FFE0E8108A83}"/>
+                <a16:creationId xmlns:a16="http://schemas.microsoft.com/office/drawing/2014/main" id="{020B9664-E637-426B-83BF-20A94CF68D4D}"/>
               </a:ext>
             </a:extLst>
           </p:cNvPr>
@@ -8605,7 +8605,7 @@
           <p:cNvPr id="26" name="">
             <a:extLst xmlns:a="http://schemas.openxmlformats.org/drawingml/2006/main">
               <a:ext uri="{FF2B5EF4-FFF2-40B4-BE49-F238E27FC236}">
-                <a16:creationId xmlns:a16="http://schemas.microsoft.com/office/drawing/2014/main" id="{2BD12B35-1D8F-476D-A2F7-E8443B3EB6A9}"/>
+                <a16:creationId xmlns:a16="http://schemas.microsoft.com/office/drawing/2014/main" id="{13C5BEC2-350F-417F-B998-EB08DCB4463B}"/>
               </a:ext>
             </a:extLst>
           </p:cNvPr>
@@ -8640,7 +8640,7 @@
           <p:cNvPr id="27" name="">
             <a:extLst xmlns:a="http://schemas.openxmlformats.org/drawingml/2006/main">
               <a:ext uri="{FF2B5EF4-FFF2-40B4-BE49-F238E27FC236}">
-                <a16:creationId xmlns:a16="http://schemas.microsoft.com/office/drawing/2014/main" id="{5BD9B1F6-8754-430C-9774-61675091EDCD}"/>
+                <a16:creationId xmlns:a16="http://schemas.microsoft.com/office/drawing/2014/main" id="{B746CCD4-412D-4B2B-8EFD-C494ADA9004C}"/>
               </a:ext>
             </a:extLst>
           </p:cNvPr>
@@ -8673,7 +8673,7 @@
           <p:cNvPr id="28" name="">
             <a:extLst xmlns:a="http://schemas.openxmlformats.org/drawingml/2006/main">
               <a:ext uri="{FF2B5EF4-FFF2-40B4-BE49-F238E27FC236}">
-                <a16:creationId xmlns:a16="http://schemas.microsoft.com/office/drawing/2014/main" id="{388E5ECE-2E6B-4F30-AD6E-BE7DB027B5DE}"/>
+                <a16:creationId xmlns:a16="http://schemas.microsoft.com/office/drawing/2014/main" id="{F3F3EE2E-AA0E-4FE8-A485-B7A4E3F66840}"/>
               </a:ext>
             </a:extLst>
           </p:cNvPr>
@@ -8832,7 +8832,7 @@
           <p:cNvPr id="29" name="">
             <a:extLst xmlns:a="http://schemas.openxmlformats.org/drawingml/2006/main">
               <a:ext uri="{FF2B5EF4-FFF2-40B4-BE49-F238E27FC236}">
-                <a16:creationId xmlns:a16="http://schemas.microsoft.com/office/drawing/2014/main" id="{776AD692-C550-41E1-9124-0225F91E022E}"/>
+                <a16:creationId xmlns:a16="http://schemas.microsoft.com/office/drawing/2014/main" id="{858173DA-8C0C-4C40-A98C-BB8CA885AACF}"/>
               </a:ext>
             </a:extLst>
           </p:cNvPr>
@@ -8995,7 +8995,7 @@
           <p:cNvPr id="30" name="">
             <a:extLst xmlns:a="http://schemas.openxmlformats.org/drawingml/2006/main">
               <a:ext uri="{FF2B5EF4-FFF2-40B4-BE49-F238E27FC236}">
-                <a16:creationId xmlns:a16="http://schemas.microsoft.com/office/drawing/2014/main" id="{DD6E5D3D-B776-43F9-8F0A-26C9961A085B}"/>
+                <a16:creationId xmlns:a16="http://schemas.microsoft.com/office/drawing/2014/main" id="{EC359AED-3DF2-4B0A-BCFB-8725A7E02EE6}"/>
               </a:ext>
             </a:extLst>
           </p:cNvPr>
@@ -9144,7 +9144,7 @@
                 <a:ea typeface="Malgun Gothic"/>
                 <a:cs typeface="Malgun Gothic"/>
               </a:rPr>
-              <a:t>우선순위 제안  ·  체험 가치·가격·호스트 운영 조건을 작은 사용자 테스트로 먼저 확인</a:t>
+              <a:t>개발 방향  ·  체험 가치와 호스트 운영 조건을 작은 사용자 테스트로 확인</a:t>
             </a:r>
           </a:p>
         </p:txBody>
@@ -9152,7 +9152,7 @@
     </p:spTree>
     <p:extLst>
       <p:ext uri="{BB962C8B-B14F-4D97-AF65-F5344CB8AC3E}">
-        <p14:creationId xmlns:p14="http://schemas.microsoft.com/office/powerpoint/2010/main" val="1171091573"/>
+        <p14:creationId xmlns:p14="http://schemas.microsoft.com/office/powerpoint/2010/main" val="370635421"/>
       </p:ext>
     </p:extLst>
   </p:cSld>
@@ -9180,10 +9180,10 @@
       </p:grpSpPr>
       <p:sp>
         <p:nvSpPr>
-          <p:cNvPr id="27" name="">
+          <p:cNvPr id="11" name="">
             <a:extLst xmlns:a="http://schemas.openxmlformats.org/drawingml/2006/main">
               <a:ext uri="{FF2B5EF4-FFF2-40B4-BE49-F238E27FC236}">
-                <a16:creationId xmlns:a16="http://schemas.microsoft.com/office/drawing/2014/main" id="{A3251A3B-F094-4DED-9023-9C96AC80BDED}"/>
+                <a16:creationId xmlns:a16="http://schemas.microsoft.com/office/drawing/2014/main" id="{A0CD3B22-A2E9-475B-9CC9-09FC4363E874}"/>
               </a:ext>
             </a:extLst>
           </p:cNvPr>
@@ -9332,7 +9332,7 @@
                 <a:ea typeface="Malgun Gothic"/>
                 <a:cs typeface="Malgun Gothic"/>
               </a:rPr>
-              <a:t>MENTOR QUESTIONS</a:t>
+              <a:t>LOCAL EUM’S INTENTION</a:t>
             </a:r>
           </a:p>
         </p:txBody>
@@ -9342,7 +9342,7 @@
           <p:cNvPr id="2" name="">
             <a:extLst xmlns:a="http://schemas.openxmlformats.org/drawingml/2006/main">
               <a:ext uri="{FF2B5EF4-FFF2-40B4-BE49-F238E27FC236}">
-                <a16:creationId xmlns:a16="http://schemas.microsoft.com/office/drawing/2014/main" id="{63B40268-4A7A-4210-8370-16E70C7CD46E}"/>
+                <a16:creationId xmlns:a16="http://schemas.microsoft.com/office/drawing/2014/main" id="{4EE2E74C-B3B0-4225-9061-7D7E401FAE07}"/>
               </a:ext>
             </a:extLst>
           </p:cNvPr>
@@ -9491,7 +9491,7 @@
                 <a:ea typeface="Malgun Gothic"/>
                 <a:cs typeface="Malgun Gothic"/>
               </a:rPr>
-              <a:t>멘토에게 받고 싶은 판단: 지금 무엇부터 증명할까?</a:t>
+              <a:t>관광지에서 사람으로, 정보에서 경험으로</a:t>
             </a:r>
           </a:p>
         </p:txBody>
@@ -9501,7 +9501,7 @@
           <p:cNvPr id="3" name="">
             <a:extLst xmlns:a="http://schemas.openxmlformats.org/drawingml/2006/main">
               <a:ext uri="{FF2B5EF4-FFF2-40B4-BE49-F238E27FC236}">
-                <a16:creationId xmlns:a16="http://schemas.microsoft.com/office/drawing/2014/main" id="{4139A11C-D10B-4BC0-A27C-CC57E0727134}"/>
+                <a16:creationId xmlns:a16="http://schemas.microsoft.com/office/drawing/2014/main" id="{A514E8B6-456B-48E4-A5E7-29BD34DA6FBB}"/>
               </a:ext>
             </a:extLst>
           </p:cNvPr>
@@ -9534,7 +9534,7 @@
           <p:cNvPr id="4" name="">
             <a:extLst xmlns:a="http://schemas.openxmlformats.org/drawingml/2006/main">
               <a:ext uri="{FF2B5EF4-FFF2-40B4-BE49-F238E27FC236}">
-                <a16:creationId xmlns:a16="http://schemas.microsoft.com/office/drawing/2014/main" id="{1F7C443D-AADA-4497-A225-5E3683721489}"/>
+                <a16:creationId xmlns:a16="http://schemas.microsoft.com/office/drawing/2014/main" id="{FD2F6F77-DE5B-4762-8404-26582156B33F}"/>
               </a:ext>
             </a:extLst>
           </p:cNvPr>
@@ -9683,7 +9683,7 @@
                 <a:ea typeface="Malgun Gothic"/>
                 <a:cs typeface="Malgun Gothic"/>
               </a:rPr>
-              <a:t>LOCAL EUM  ·  멘토링 브리프  ·  2026.10</a:t>
+              <a:t>LOCAL EUM  ·  기획과 구현  ·  2026.10</a:t>
             </a:r>
           </a:p>
         </p:txBody>
@@ -9693,7 +9693,7 @@
           <p:cNvPr id="5" name="">
             <a:extLst xmlns:a="http://schemas.openxmlformats.org/drawingml/2006/main">
               <a:ext uri="{FF2B5EF4-FFF2-40B4-BE49-F238E27FC236}">
-                <a16:creationId xmlns:a16="http://schemas.microsoft.com/office/drawing/2014/main" id="{E5BEC537-82CB-4022-880A-3F48348FAEA2}"/>
+                <a16:creationId xmlns:a16="http://schemas.microsoft.com/office/drawing/2014/main" id="{9119E2DB-DAD2-498F-BF17-FD8D14D5D1D6}"/>
               </a:ext>
             </a:extLst>
           </p:cNvPr>
@@ -9852,7 +9852,7 @@
           <p:cNvPr id="6" name="">
             <a:extLst xmlns:a="http://schemas.openxmlformats.org/drawingml/2006/main">
               <a:ext uri="{FF2B5EF4-FFF2-40B4-BE49-F238E27FC236}">
-                <a16:creationId xmlns:a16="http://schemas.microsoft.com/office/drawing/2014/main" id="{A98EC6AD-C726-47B9-BA71-8BA486DD9AD6}"/>
+                <a16:creationId xmlns:a16="http://schemas.microsoft.com/office/drawing/2014/main" id="{0E06FA7C-6D59-4F5F-928B-FDDC6B0DB3D0}"/>
               </a:ext>
             </a:extLst>
           </p:cNvPr>
@@ -9863,200 +9863,8 @@
         </p:nvSpPr>
         <p:spPr>
           <a:xfrm xmlns:a="http://schemas.openxmlformats.org/drawingml/2006/main">
-            <a:off x="609600" y="1647825"/>
-            <a:ext cx="495300" cy="304800"/>
-          </a:xfrm>
-          <a:prstGeom xmlns:a="http://schemas.openxmlformats.org/drawingml/2006/main" prst="roundRect">
-            <a:avLst>
-              <a:gd name="adj" fmla="val 50000"/>
-            </a:avLst>
-          </a:prstGeom>
-          <a:solidFill xmlns:a="http://schemas.openxmlformats.org/drawingml/2006/main">
-            <a:srgbClr val="F06D5D"/>
-          </a:solidFill>
-          <a:ln xmlns:a="http://schemas.openxmlformats.org/drawingml/2006/main" w="0">
-            <a:noFill/>
-            <a:prstDash val="solid"/>
-          </a:ln>
-        </p:spPr>
-      </p:sp>
-      <p:sp>
-        <p:nvSpPr>
-          <p:cNvPr id="7" name="">
-            <a:extLst xmlns:a="http://schemas.openxmlformats.org/drawingml/2006/main">
-              <a:ext uri="{FF2B5EF4-FFF2-40B4-BE49-F238E27FC236}">
-                <a16:creationId xmlns:a16="http://schemas.microsoft.com/office/drawing/2014/main" id="{C0E7D511-4F20-47E7-9CB6-A2097C226348}"/>
-              </a:ext>
-            </a:extLst>
-          </p:cNvPr>
-          <p:cNvSpPr>
-            <a:spLocks xmlns:a="http://schemas.openxmlformats.org/drawingml/2006/main" noGrp="1"/>
-          </p:cNvSpPr>
-          <p:nvPr/>
-        </p:nvSpPr>
-        <p:spPr>
-          <a:xfrm xmlns:a="http://schemas.openxmlformats.org/drawingml/2006/main">
-            <a:off x="685800" y="1695450"/>
-            <a:ext cx="342900" cy="209550"/>
-          </a:xfrm>
-          <a:prstGeom xmlns:a="http://schemas.openxmlformats.org/drawingml/2006/main" prst="rect">
-            <a:avLst/>
-          </a:prstGeom>
-          <a:noFill xmlns:a="http://schemas.openxmlformats.org/drawingml/2006/main"/>
-          <a:ln xmlns:a="http://schemas.openxmlformats.org/drawingml/2006/main" w="0">
-            <a:noFill/>
-            <a:prstDash val="solid"/>
-          </a:ln>
-        </p:spPr>
-        <p:txBody>
-          <a:bodyPr xmlns:a="http://schemas.openxmlformats.org/drawingml/2006/main" wrap="square" lIns="0" tIns="0" rIns="0" bIns="0" anchor="ctr">
-            <a:normAutofit fontScale="100000"/>
-          </a:bodyPr>
-          <a:lstStyle xmlns:a="http://schemas.openxmlformats.org/drawingml/2006/main">
-            <a:defPPr algn="ctr">
-              <a:defRPr sz="1050" b="1">
-                <a:solidFill>
-                  <a:srgbClr val="FFFFFF"/>
-                </a:solidFill>
-                <a:latin typeface="Malgun Gothic"/>
-                <a:ea typeface="Malgun Gothic"/>
-                <a:cs typeface="Malgun Gothic"/>
-              </a:defRPr>
-            </a:defPPr>
-            <a:lvl1pPr algn="ctr">
-              <a:defRPr sz="1050" b="1">
-                <a:solidFill>
-                  <a:srgbClr val="FFFFFF"/>
-                </a:solidFill>
-                <a:latin typeface="Malgun Gothic"/>
-                <a:ea typeface="Malgun Gothic"/>
-                <a:cs typeface="Malgun Gothic"/>
-              </a:defRPr>
-            </a:lvl1pPr>
-            <a:lvl2pPr algn="ctr">
-              <a:defRPr sz="1050" b="1">
-                <a:solidFill>
-                  <a:srgbClr val="FFFFFF"/>
-                </a:solidFill>
-                <a:latin typeface="Malgun Gothic"/>
-                <a:ea typeface="Malgun Gothic"/>
-                <a:cs typeface="Malgun Gothic"/>
-              </a:defRPr>
-            </a:lvl2pPr>
-            <a:lvl3pPr algn="ctr">
-              <a:defRPr sz="1050" b="1">
-                <a:solidFill>
-                  <a:srgbClr val="FFFFFF"/>
-                </a:solidFill>
-                <a:latin typeface="Malgun Gothic"/>
-                <a:ea typeface="Malgun Gothic"/>
-                <a:cs typeface="Malgun Gothic"/>
-              </a:defRPr>
-            </a:lvl3pPr>
-            <a:lvl4pPr algn="ctr">
-              <a:defRPr sz="1050" b="1">
-                <a:solidFill>
-                  <a:srgbClr val="FFFFFF"/>
-                </a:solidFill>
-                <a:latin typeface="Malgun Gothic"/>
-                <a:ea typeface="Malgun Gothic"/>
-                <a:cs typeface="Malgun Gothic"/>
-              </a:defRPr>
-            </a:lvl4pPr>
-            <a:lvl5pPr algn="ctr">
-              <a:defRPr sz="1050" b="1">
-                <a:solidFill>
-                  <a:srgbClr val="FFFFFF"/>
-                </a:solidFill>
-                <a:latin typeface="Malgun Gothic"/>
-                <a:ea typeface="Malgun Gothic"/>
-                <a:cs typeface="Malgun Gothic"/>
-              </a:defRPr>
-            </a:lvl5pPr>
-            <a:lvl6pPr algn="ctr">
-              <a:defRPr sz="1050" b="1">
-                <a:solidFill>
-                  <a:srgbClr val="FFFFFF"/>
-                </a:solidFill>
-                <a:latin typeface="Malgun Gothic"/>
-                <a:ea typeface="Malgun Gothic"/>
-                <a:cs typeface="Malgun Gothic"/>
-              </a:defRPr>
-            </a:lvl6pPr>
-            <a:lvl7pPr algn="ctr">
-              <a:defRPr sz="1050" b="1">
-                <a:solidFill>
-                  <a:srgbClr val="FFFFFF"/>
-                </a:solidFill>
-                <a:latin typeface="Malgun Gothic"/>
-                <a:ea typeface="Malgun Gothic"/>
-                <a:cs typeface="Malgun Gothic"/>
-              </a:defRPr>
-            </a:lvl7pPr>
-            <a:lvl8pPr algn="ctr">
-              <a:defRPr sz="1050" b="1">
-                <a:solidFill>
-                  <a:srgbClr val="FFFFFF"/>
-                </a:solidFill>
-                <a:latin typeface="Malgun Gothic"/>
-                <a:ea typeface="Malgun Gothic"/>
-                <a:cs typeface="Malgun Gothic"/>
-              </a:defRPr>
-            </a:lvl8pPr>
-            <a:lvl9pPr algn="ctr">
-              <a:defRPr sz="1050" b="1">
-                <a:solidFill>
-                  <a:srgbClr val="FFFFFF"/>
-                </a:solidFill>
-                <a:latin typeface="Malgun Gothic"/>
-                <a:ea typeface="Malgun Gothic"/>
-                <a:cs typeface="Malgun Gothic"/>
-              </a:defRPr>
-            </a:lvl9pPr>
-          </a:lstStyle>
-          <a:p xmlns:a="http://schemas.openxmlformats.org/drawingml/2006/main">
-            <a:pPr algn="ctr">
-              <a:defRPr sz="1050" b="1">
-                <a:solidFill>
-                  <a:srgbClr val="FFFFFF"/>
-                </a:solidFill>
-                <a:latin typeface="Malgun Gothic"/>
-                <a:ea typeface="Malgun Gothic"/>
-                <a:cs typeface="Malgun Gothic"/>
-              </a:defRPr>
-            </a:pPr>
-            <a:r>
-              <a:rPr sz="1050" b="1">
-                <a:solidFill>
-                  <a:srgbClr val="FFFFFF"/>
-                </a:solidFill>
-                <a:latin typeface="Malgun Gothic"/>
-                <a:ea typeface="Malgun Gothic"/>
-                <a:cs typeface="Malgun Gothic"/>
-              </a:rPr>
-              <a:t>01</a:t>
-            </a:r>
-          </a:p>
-        </p:txBody>
-      </p:sp>
-      <p:sp>
-        <p:nvSpPr>
-          <p:cNvPr id="8" name="">
-            <a:extLst xmlns:a="http://schemas.openxmlformats.org/drawingml/2006/main">
-              <a:ext uri="{FF2B5EF4-FFF2-40B4-BE49-F238E27FC236}">
-                <a16:creationId xmlns:a16="http://schemas.microsoft.com/office/drawing/2014/main" id="{0094AD93-BD84-422E-9AB1-011118D1820A}"/>
-              </a:ext>
-            </a:extLst>
-          </p:cNvPr>
-          <p:cNvSpPr>
-            <a:spLocks xmlns:a="http://schemas.openxmlformats.org/drawingml/2006/main" noGrp="1"/>
-          </p:cNvSpPr>
-          <p:nvPr/>
-        </p:nvSpPr>
-        <p:spPr>
-          <a:xfrm xmlns:a="http://schemas.openxmlformats.org/drawingml/2006/main">
-            <a:off x="1352550" y="1619250"/>
-            <a:ext cx="2190750" cy="285750"/>
+            <a:off x="609600" y="1657350"/>
+            <a:ext cx="10972800" cy="1181100"/>
           </a:xfrm>
           <a:prstGeom xmlns:a="http://schemas.openxmlformats.org/drawingml/2006/main" prst="rect">
             <a:avLst/>
@@ -10073,9 +9881,9 @@
           </a:bodyPr>
           <a:lstStyle xmlns:a="http://schemas.openxmlformats.org/drawingml/2006/main">
             <a:defPPr algn="l">
-              <a:defRPr sz="1425" b="1">
-                <a:solidFill>
-                  <a:srgbClr val="73D1CC"/>
+              <a:defRPr sz="1650" b="0">
+                <a:solidFill>
+                  <a:srgbClr val="FFFFFF"/>
                 </a:solidFill>
                 <a:latin typeface="Malgun Gothic"/>
                 <a:ea typeface="Malgun Gothic"/>
@@ -10083,9 +9891,9 @@
               </a:defRPr>
             </a:defPPr>
             <a:lvl1pPr algn="l">
-              <a:defRPr sz="1425" b="1">
-                <a:solidFill>
-                  <a:srgbClr val="73D1CC"/>
+              <a:defRPr sz="1650" b="0">
+                <a:solidFill>
+                  <a:srgbClr val="FFFFFF"/>
                 </a:solidFill>
                 <a:latin typeface="Malgun Gothic"/>
                 <a:ea typeface="Malgun Gothic"/>
@@ -10093,9 +9901,9 @@
               </a:defRPr>
             </a:lvl1pPr>
             <a:lvl2pPr algn="l">
-              <a:defRPr sz="1425" b="1">
-                <a:solidFill>
-                  <a:srgbClr val="73D1CC"/>
+              <a:defRPr sz="1650" b="0">
+                <a:solidFill>
+                  <a:srgbClr val="FFFFFF"/>
                 </a:solidFill>
                 <a:latin typeface="Malgun Gothic"/>
                 <a:ea typeface="Malgun Gothic"/>
@@ -10103,9 +9911,9 @@
               </a:defRPr>
             </a:lvl2pPr>
             <a:lvl3pPr algn="l">
-              <a:defRPr sz="1425" b="1">
-                <a:solidFill>
-                  <a:srgbClr val="73D1CC"/>
+              <a:defRPr sz="1650" b="0">
+                <a:solidFill>
+                  <a:srgbClr val="FFFFFF"/>
                 </a:solidFill>
                 <a:latin typeface="Malgun Gothic"/>
                 <a:ea typeface="Malgun Gothic"/>
@@ -10113,9 +9921,9 @@
               </a:defRPr>
             </a:lvl3pPr>
             <a:lvl4pPr algn="l">
-              <a:defRPr sz="1425" b="1">
-                <a:solidFill>
-                  <a:srgbClr val="73D1CC"/>
+              <a:defRPr sz="1650" b="0">
+                <a:solidFill>
+                  <a:srgbClr val="FFFFFF"/>
                 </a:solidFill>
                 <a:latin typeface="Malgun Gothic"/>
                 <a:ea typeface="Malgun Gothic"/>
@@ -10123,9 +9931,9 @@
               </a:defRPr>
             </a:lvl4pPr>
             <a:lvl5pPr algn="l">
-              <a:defRPr sz="1425" b="1">
-                <a:solidFill>
-                  <a:srgbClr val="73D1CC"/>
+              <a:defRPr sz="1650" b="0">
+                <a:solidFill>
+                  <a:srgbClr val="FFFFFF"/>
                 </a:solidFill>
                 <a:latin typeface="Malgun Gothic"/>
                 <a:ea typeface="Malgun Gothic"/>
@@ -10133,9 +9941,9 @@
               </a:defRPr>
             </a:lvl5pPr>
             <a:lvl6pPr algn="l">
-              <a:defRPr sz="1425" b="1">
-                <a:solidFill>
-                  <a:srgbClr val="73D1CC"/>
+              <a:defRPr sz="1650" b="0">
+                <a:solidFill>
+                  <a:srgbClr val="FFFFFF"/>
                 </a:solidFill>
                 <a:latin typeface="Malgun Gothic"/>
                 <a:ea typeface="Malgun Gothic"/>
@@ -10143,9 +9951,9 @@
               </a:defRPr>
             </a:lvl6pPr>
             <a:lvl7pPr algn="l">
-              <a:defRPr sz="1425" b="1">
-                <a:solidFill>
-                  <a:srgbClr val="73D1CC"/>
+              <a:defRPr sz="1650" b="0">
+                <a:solidFill>
+                  <a:srgbClr val="FFFFFF"/>
                 </a:solidFill>
                 <a:latin typeface="Malgun Gothic"/>
                 <a:ea typeface="Malgun Gothic"/>
@@ -10153,9 +9961,9 @@
               </a:defRPr>
             </a:lvl7pPr>
             <a:lvl8pPr algn="l">
-              <a:defRPr sz="1425" b="1">
-                <a:solidFill>
-                  <a:srgbClr val="73D1CC"/>
+              <a:defRPr sz="1650" b="0">
+                <a:solidFill>
+                  <a:srgbClr val="FFFFFF"/>
                 </a:solidFill>
                 <a:latin typeface="Malgun Gothic"/>
                 <a:ea typeface="Malgun Gothic"/>
@@ -10163,9 +9971,9 @@
               </a:defRPr>
             </a:lvl8pPr>
             <a:lvl9pPr algn="l">
-              <a:defRPr sz="1425" b="1">
-                <a:solidFill>
-                  <a:srgbClr val="73D1CC"/>
+              <a:defRPr sz="1650" b="0">
+                <a:solidFill>
+                  <a:srgbClr val="FFFFFF"/>
                 </a:solidFill>
                 <a:latin typeface="Malgun Gothic"/>
                 <a:ea typeface="Malgun Gothic"/>
@@ -10175,9 +9983,13 @@
           </a:lstStyle>
           <a:p xmlns:a="http://schemas.openxmlformats.org/drawingml/2006/main">
             <a:pPr algn="l">
-              <a:defRPr sz="1425" b="1">
-                <a:solidFill>
-                  <a:srgbClr val="73D1CC"/>
+              <a:lnSpc>
+                <a:spcPct val="118000"/>
+              </a:lnSpc>
+              <a:buNone/>
+              <a:defRPr sz="1650" b="0">
+                <a:solidFill>
+                  <a:srgbClr val="FFFFFF"/>
                 </a:solidFill>
                 <a:latin typeface="Malgun Gothic"/>
                 <a:ea typeface="Malgun Gothic"/>
@@ -10185,25 +9997,25 @@
               </a:defRPr>
             </a:pPr>
             <a:r>
-              <a:rPr sz="1425" b="1">
-                <a:solidFill>
-                  <a:srgbClr val="73D1CC"/>
+              <a:rPr sz="1650" b="0">
+                <a:solidFill>
+                  <a:srgbClr val="FFFFFF"/>
                 </a:solidFill>
                 <a:latin typeface="Malgun Gothic"/>
                 <a:ea typeface="Malgun Gothic"/>
                 <a:cs typeface="Malgun Gothic"/>
               </a:rPr>
-              <a:t>고객 가치·가격</a:t>
+              <a:t>기존 여행 서비스가 주로 어디를 방문하고 무엇을 볼 것인지에 집중한다면, 로컬이음은 그곳에서 누구를 만나고 무엇을 함께 경험할 수 있는가라는 질문에서 출발했습니다.</a:t>
             </a:r>
           </a:p>
         </p:txBody>
       </p:sp>
       <p:sp>
         <p:nvSpPr>
-          <p:cNvPr id="9" name="">
+          <p:cNvPr id="7" name="">
             <a:extLst xmlns:a="http://schemas.openxmlformats.org/drawingml/2006/main">
               <a:ext uri="{FF2B5EF4-FFF2-40B4-BE49-F238E27FC236}">
-                <a16:creationId xmlns:a16="http://schemas.microsoft.com/office/drawing/2014/main" id="{E4030F73-0299-4C1C-94C8-EA11B6FB29A0}"/>
+                <a16:creationId xmlns:a16="http://schemas.microsoft.com/office/drawing/2014/main" id="{7F2D6981-5CFD-41E0-9845-E0715EBD9DF9}"/>
               </a:ext>
             </a:extLst>
           </p:cNvPr>
@@ -10214,8 +10026,41 @@
         </p:nvSpPr>
         <p:spPr>
           <a:xfrm xmlns:a="http://schemas.openxmlformats.org/drawingml/2006/main">
-            <a:off x="3562350" y="1619250"/>
-            <a:ext cx="7810500" cy="514350"/>
+            <a:off x="609600" y="3028950"/>
+            <a:ext cx="533400" cy="38100"/>
+          </a:xfrm>
+          <a:prstGeom xmlns:a="http://schemas.openxmlformats.org/drawingml/2006/main" prst="roundRect">
+            <a:avLst>
+              <a:gd name="adj" fmla="val 50000"/>
+            </a:avLst>
+          </a:prstGeom>
+          <a:solidFill xmlns:a="http://schemas.openxmlformats.org/drawingml/2006/main">
+            <a:srgbClr val="73D1CC"/>
+          </a:solidFill>
+          <a:ln xmlns:a="http://schemas.openxmlformats.org/drawingml/2006/main" w="0">
+            <a:noFill/>
+            <a:prstDash val="solid"/>
+          </a:ln>
+        </p:spPr>
+      </p:sp>
+      <p:sp>
+        <p:nvSpPr>
+          <p:cNvPr id="8" name="">
+            <a:extLst xmlns:a="http://schemas.openxmlformats.org/drawingml/2006/main">
+              <a:ext uri="{FF2B5EF4-FFF2-40B4-BE49-F238E27FC236}">
+                <a16:creationId xmlns:a16="http://schemas.microsoft.com/office/drawing/2014/main" id="{D3C69F6E-1E62-42B4-B146-013EDCF76FC5}"/>
+              </a:ext>
+            </a:extLst>
+          </p:cNvPr>
+          <p:cNvSpPr>
+            <a:spLocks xmlns:a="http://schemas.openxmlformats.org/drawingml/2006/main" noGrp="1"/>
+          </p:cNvSpPr>
+          <p:nvPr/>
+        </p:nvSpPr>
+        <p:spPr>
+          <a:xfrm xmlns:a="http://schemas.openxmlformats.org/drawingml/2006/main">
+            <a:off x="609600" y="3314700"/>
+            <a:ext cx="10972800" cy="1181100"/>
           </a:xfrm>
           <a:prstGeom xmlns:a="http://schemas.openxmlformats.org/drawingml/2006/main" prst="rect">
             <a:avLst/>
@@ -10232,7 +10077,7 @@
           </a:bodyPr>
           <a:lstStyle xmlns:a="http://schemas.openxmlformats.org/drawingml/2006/main">
             <a:defPPr algn="l">
-              <a:defRPr sz="1350" b="0">
+              <a:defRPr sz="1650" b="0">
                 <a:solidFill>
                   <a:srgbClr val="FFFFFF"/>
                 </a:solidFill>
@@ -10242,7 +10087,7 @@
               </a:defRPr>
             </a:defPPr>
             <a:lvl1pPr algn="l">
-              <a:defRPr sz="1350" b="0">
+              <a:defRPr sz="1650" b="0">
                 <a:solidFill>
                   <a:srgbClr val="FFFFFF"/>
                 </a:solidFill>
@@ -10252,7 +10097,7 @@
               </a:defRPr>
             </a:lvl1pPr>
             <a:lvl2pPr algn="l">
-              <a:defRPr sz="1350" b="0">
+              <a:defRPr sz="1650" b="0">
                 <a:solidFill>
                   <a:srgbClr val="FFFFFF"/>
                 </a:solidFill>
@@ -10262,7 +10107,7 @@
               </a:defRPr>
             </a:lvl2pPr>
             <a:lvl3pPr algn="l">
-              <a:defRPr sz="1350" b="0">
+              <a:defRPr sz="1650" b="0">
                 <a:solidFill>
                   <a:srgbClr val="FFFFFF"/>
                 </a:solidFill>
@@ -10272,7 +10117,7 @@
               </a:defRPr>
             </a:lvl3pPr>
             <a:lvl4pPr algn="l">
-              <a:defRPr sz="1350" b="0">
+              <a:defRPr sz="1650" b="0">
                 <a:solidFill>
                   <a:srgbClr val="FFFFFF"/>
                 </a:solidFill>
@@ -10282,7 +10127,7 @@
               </a:defRPr>
             </a:lvl4pPr>
             <a:lvl5pPr algn="l">
-              <a:defRPr sz="1350" b="0">
+              <a:defRPr sz="1650" b="0">
                 <a:solidFill>
                   <a:srgbClr val="FFFFFF"/>
                 </a:solidFill>
@@ -10292,7 +10137,7 @@
               </a:defRPr>
             </a:lvl5pPr>
             <a:lvl6pPr algn="l">
-              <a:defRPr sz="1350" b="0">
+              <a:defRPr sz="1650" b="0">
                 <a:solidFill>
                   <a:srgbClr val="FFFFFF"/>
                 </a:solidFill>
@@ -10302,7 +10147,7 @@
               </a:defRPr>
             </a:lvl6pPr>
             <a:lvl7pPr algn="l">
-              <a:defRPr sz="1350" b="0">
+              <a:defRPr sz="1650" b="0">
                 <a:solidFill>
                   <a:srgbClr val="FFFFFF"/>
                 </a:solidFill>
@@ -10312,7 +10157,7 @@
               </a:defRPr>
             </a:lvl7pPr>
             <a:lvl8pPr algn="l">
-              <a:defRPr sz="1350" b="0">
+              <a:defRPr sz="1650" b="0">
                 <a:solidFill>
                   <a:srgbClr val="FFFFFF"/>
                 </a:solidFill>
@@ -10322,7 +10167,7 @@
               </a:defRPr>
             </a:lvl8pPr>
             <a:lvl9pPr algn="l">
-              <a:defRPr sz="1350" b="0">
+              <a:defRPr sz="1650" b="0">
                 <a:solidFill>
                   <a:srgbClr val="FFFFFF"/>
                 </a:solidFill>
@@ -10334,7 +10179,11 @@
           </a:lstStyle>
           <a:p xmlns:a="http://schemas.openxmlformats.org/drawingml/2006/main">
             <a:pPr algn="l">
-              <a:defRPr sz="1350" b="0">
+              <a:lnSpc>
+                <a:spcPct val="118000"/>
+              </a:lnSpc>
+              <a:buNone/>
+              <a:defRPr sz="1650" b="0">
                 <a:solidFill>
                   <a:srgbClr val="FFFFFF"/>
                 </a:solidFill>
@@ -10344,7 +10193,7 @@
               </a:defRPr>
             </a:pPr>
             <a:r>
-              <a:rPr sz="1350" b="0">
+              <a:rPr sz="1650" b="0">
                 <a:solidFill>
                   <a:srgbClr val="FFFFFF"/>
                 </a:solidFill>
@@ -10352,17 +10201,17 @@
                 <a:ea typeface="Malgun Gothic"/>
                 <a:cs typeface="Malgun Gothic"/>
               </a:rPr>
-              <a:t>장소 방문을 넘어 돈을 지불할 이유를 어떤 테스트로 검증할까요?</a:t>
+              <a:t>국내외 여행자가 지역 주민과 시장을 걷고, 음식을 나누고, 언어와 문화를 교류하며 평범한 일상 속에서 특별한 경험을 발견하도록 연결하는 서비스입니다.</a:t>
             </a:r>
           </a:p>
         </p:txBody>
       </p:sp>
       <p:sp>
         <p:nvSpPr>
-          <p:cNvPr id="10" name="">
+          <p:cNvPr id="9" name="">
             <a:extLst xmlns:a="http://schemas.openxmlformats.org/drawingml/2006/main">
               <a:ext uri="{FF2B5EF4-FFF2-40B4-BE49-F238E27FC236}">
-                <a16:creationId xmlns:a16="http://schemas.microsoft.com/office/drawing/2014/main" id="{C84A260A-E2DC-4496-9FD2-B2FA7815781A}"/>
+                <a16:creationId xmlns:a16="http://schemas.microsoft.com/office/drawing/2014/main" id="{077AA44A-4600-4E95-9D51-BA37C756D399}"/>
               </a:ext>
             </a:extLst>
           </p:cNvPr>
@@ -10373,200 +10222,8 @@
         </p:nvSpPr>
         <p:spPr>
           <a:xfrm xmlns:a="http://schemas.openxmlformats.org/drawingml/2006/main">
-            <a:off x="609600" y="2486025"/>
-            <a:ext cx="495300" cy="304800"/>
-          </a:xfrm>
-          <a:prstGeom xmlns:a="http://schemas.openxmlformats.org/drawingml/2006/main" prst="roundRect">
-            <a:avLst>
-              <a:gd name="adj" fmla="val 50000"/>
-            </a:avLst>
-          </a:prstGeom>
-          <a:solidFill xmlns:a="http://schemas.openxmlformats.org/drawingml/2006/main">
-            <a:srgbClr val="29425A"/>
-          </a:solidFill>
-          <a:ln xmlns:a="http://schemas.openxmlformats.org/drawingml/2006/main" w="0">
-            <a:noFill/>
-            <a:prstDash val="solid"/>
-          </a:ln>
-        </p:spPr>
-      </p:sp>
-      <p:sp>
-        <p:nvSpPr>
-          <p:cNvPr id="11" name="">
-            <a:extLst xmlns:a="http://schemas.openxmlformats.org/drawingml/2006/main">
-              <a:ext uri="{FF2B5EF4-FFF2-40B4-BE49-F238E27FC236}">
-                <a16:creationId xmlns:a16="http://schemas.microsoft.com/office/drawing/2014/main" id="{141432C3-36E2-4334-B377-C1AFDDE8B7DB}"/>
-              </a:ext>
-            </a:extLst>
-          </p:cNvPr>
-          <p:cNvSpPr>
-            <a:spLocks xmlns:a="http://schemas.openxmlformats.org/drawingml/2006/main" noGrp="1"/>
-          </p:cNvSpPr>
-          <p:nvPr/>
-        </p:nvSpPr>
-        <p:spPr>
-          <a:xfrm xmlns:a="http://schemas.openxmlformats.org/drawingml/2006/main">
-            <a:off x="685800" y="2533650"/>
-            <a:ext cx="342900" cy="209550"/>
-          </a:xfrm>
-          <a:prstGeom xmlns:a="http://schemas.openxmlformats.org/drawingml/2006/main" prst="rect">
-            <a:avLst/>
-          </a:prstGeom>
-          <a:noFill xmlns:a="http://schemas.openxmlformats.org/drawingml/2006/main"/>
-          <a:ln xmlns:a="http://schemas.openxmlformats.org/drawingml/2006/main" w="0">
-            <a:noFill/>
-            <a:prstDash val="solid"/>
-          </a:ln>
-        </p:spPr>
-        <p:txBody>
-          <a:bodyPr xmlns:a="http://schemas.openxmlformats.org/drawingml/2006/main" wrap="square" lIns="0" tIns="0" rIns="0" bIns="0" anchor="ctr">
-            <a:normAutofit fontScale="100000"/>
-          </a:bodyPr>
-          <a:lstStyle xmlns:a="http://schemas.openxmlformats.org/drawingml/2006/main">
-            <a:defPPr algn="ctr">
-              <a:defRPr sz="1050" b="1">
-                <a:solidFill>
-                  <a:srgbClr val="FFFFFF"/>
-                </a:solidFill>
-                <a:latin typeface="Malgun Gothic"/>
-                <a:ea typeface="Malgun Gothic"/>
-                <a:cs typeface="Malgun Gothic"/>
-              </a:defRPr>
-            </a:defPPr>
-            <a:lvl1pPr algn="ctr">
-              <a:defRPr sz="1050" b="1">
-                <a:solidFill>
-                  <a:srgbClr val="FFFFFF"/>
-                </a:solidFill>
-                <a:latin typeface="Malgun Gothic"/>
-                <a:ea typeface="Malgun Gothic"/>
-                <a:cs typeface="Malgun Gothic"/>
-              </a:defRPr>
-            </a:lvl1pPr>
-            <a:lvl2pPr algn="ctr">
-              <a:defRPr sz="1050" b="1">
-                <a:solidFill>
-                  <a:srgbClr val="FFFFFF"/>
-                </a:solidFill>
-                <a:latin typeface="Malgun Gothic"/>
-                <a:ea typeface="Malgun Gothic"/>
-                <a:cs typeface="Malgun Gothic"/>
-              </a:defRPr>
-            </a:lvl2pPr>
-            <a:lvl3pPr algn="ctr">
-              <a:defRPr sz="1050" b="1">
-                <a:solidFill>
-                  <a:srgbClr val="FFFFFF"/>
-                </a:solidFill>
-                <a:latin typeface="Malgun Gothic"/>
-                <a:ea typeface="Malgun Gothic"/>
-                <a:cs typeface="Malgun Gothic"/>
-              </a:defRPr>
-            </a:lvl3pPr>
-            <a:lvl4pPr algn="ctr">
-              <a:defRPr sz="1050" b="1">
-                <a:solidFill>
-                  <a:srgbClr val="FFFFFF"/>
-                </a:solidFill>
-                <a:latin typeface="Malgun Gothic"/>
-                <a:ea typeface="Malgun Gothic"/>
-                <a:cs typeface="Malgun Gothic"/>
-              </a:defRPr>
-            </a:lvl4pPr>
-            <a:lvl5pPr algn="ctr">
-              <a:defRPr sz="1050" b="1">
-                <a:solidFill>
-                  <a:srgbClr val="FFFFFF"/>
-                </a:solidFill>
-                <a:latin typeface="Malgun Gothic"/>
-                <a:ea typeface="Malgun Gothic"/>
-                <a:cs typeface="Malgun Gothic"/>
-              </a:defRPr>
-            </a:lvl5pPr>
-            <a:lvl6pPr algn="ctr">
-              <a:defRPr sz="1050" b="1">
-                <a:solidFill>
-                  <a:srgbClr val="FFFFFF"/>
-                </a:solidFill>
-                <a:latin typeface="Malgun Gothic"/>
-                <a:ea typeface="Malgun Gothic"/>
-                <a:cs typeface="Malgun Gothic"/>
-              </a:defRPr>
-            </a:lvl6pPr>
-            <a:lvl7pPr algn="ctr">
-              <a:defRPr sz="1050" b="1">
-                <a:solidFill>
-                  <a:srgbClr val="FFFFFF"/>
-                </a:solidFill>
-                <a:latin typeface="Malgun Gothic"/>
-                <a:ea typeface="Malgun Gothic"/>
-                <a:cs typeface="Malgun Gothic"/>
-              </a:defRPr>
-            </a:lvl7pPr>
-            <a:lvl8pPr algn="ctr">
-              <a:defRPr sz="1050" b="1">
-                <a:solidFill>
-                  <a:srgbClr val="FFFFFF"/>
-                </a:solidFill>
-                <a:latin typeface="Malgun Gothic"/>
-                <a:ea typeface="Malgun Gothic"/>
-                <a:cs typeface="Malgun Gothic"/>
-              </a:defRPr>
-            </a:lvl8pPr>
-            <a:lvl9pPr algn="ctr">
-              <a:defRPr sz="1050" b="1">
-                <a:solidFill>
-                  <a:srgbClr val="FFFFFF"/>
-                </a:solidFill>
-                <a:latin typeface="Malgun Gothic"/>
-                <a:ea typeface="Malgun Gothic"/>
-                <a:cs typeface="Malgun Gothic"/>
-              </a:defRPr>
-            </a:lvl9pPr>
-          </a:lstStyle>
-          <a:p xmlns:a="http://schemas.openxmlformats.org/drawingml/2006/main">
-            <a:pPr algn="ctr">
-              <a:defRPr sz="1050" b="1">
-                <a:solidFill>
-                  <a:srgbClr val="FFFFFF"/>
-                </a:solidFill>
-                <a:latin typeface="Malgun Gothic"/>
-                <a:ea typeface="Malgun Gothic"/>
-                <a:cs typeface="Malgun Gothic"/>
-              </a:defRPr>
-            </a:pPr>
-            <a:r>
-              <a:rPr sz="1050" b="1">
-                <a:solidFill>
-                  <a:srgbClr val="FFFFFF"/>
-                </a:solidFill>
-                <a:latin typeface="Malgun Gothic"/>
-                <a:ea typeface="Malgun Gothic"/>
-                <a:cs typeface="Malgun Gothic"/>
-              </a:rPr>
-              <a:t>02</a:t>
-            </a:r>
-          </a:p>
-        </p:txBody>
-      </p:sp>
-      <p:sp>
-        <p:nvSpPr>
-          <p:cNvPr id="12" name="">
-            <a:extLst xmlns:a="http://schemas.openxmlformats.org/drawingml/2006/main">
-              <a:ext uri="{FF2B5EF4-FFF2-40B4-BE49-F238E27FC236}">
-                <a16:creationId xmlns:a16="http://schemas.microsoft.com/office/drawing/2014/main" id="{08511F6E-878F-4973-A4D4-DA68EA3A07EE}"/>
-              </a:ext>
-            </a:extLst>
-          </p:cNvPr>
-          <p:cNvSpPr>
-            <a:spLocks xmlns:a="http://schemas.openxmlformats.org/drawingml/2006/main" noGrp="1"/>
-          </p:cNvSpPr>
-          <p:nvPr/>
-        </p:nvSpPr>
-        <p:spPr>
-          <a:xfrm xmlns:a="http://schemas.openxmlformats.org/drawingml/2006/main">
-            <a:off x="1352550" y="2457450"/>
-            <a:ext cx="2190750" cy="285750"/>
+            <a:off x="609600" y="4667250"/>
+            <a:ext cx="10972800" cy="781050"/>
           </a:xfrm>
           <a:prstGeom xmlns:a="http://schemas.openxmlformats.org/drawingml/2006/main" prst="rect">
             <a:avLst/>
@@ -10583,9 +10240,9 @@
           </a:bodyPr>
           <a:lstStyle xmlns:a="http://schemas.openxmlformats.org/drawingml/2006/main">
             <a:defPPr algn="l">
-              <a:defRPr sz="1425" b="1">
-                <a:solidFill>
-                  <a:srgbClr val="73D1CC"/>
+              <a:defRPr sz="1650" b="0">
+                <a:solidFill>
+                  <a:srgbClr val="C7D6E2"/>
                 </a:solidFill>
                 <a:latin typeface="Malgun Gothic"/>
                 <a:ea typeface="Malgun Gothic"/>
@@ -10593,9 +10250,9 @@
               </a:defRPr>
             </a:defPPr>
             <a:lvl1pPr algn="l">
-              <a:defRPr sz="1425" b="1">
-                <a:solidFill>
-                  <a:srgbClr val="73D1CC"/>
+              <a:defRPr sz="1650" b="0">
+                <a:solidFill>
+                  <a:srgbClr val="C7D6E2"/>
                 </a:solidFill>
                 <a:latin typeface="Malgun Gothic"/>
                 <a:ea typeface="Malgun Gothic"/>
@@ -10603,9 +10260,9 @@
               </a:defRPr>
             </a:lvl1pPr>
             <a:lvl2pPr algn="l">
-              <a:defRPr sz="1425" b="1">
-                <a:solidFill>
-                  <a:srgbClr val="73D1CC"/>
+              <a:defRPr sz="1650" b="0">
+                <a:solidFill>
+                  <a:srgbClr val="C7D6E2"/>
                 </a:solidFill>
                 <a:latin typeface="Malgun Gothic"/>
                 <a:ea typeface="Malgun Gothic"/>
@@ -10613,9 +10270,9 @@
               </a:defRPr>
             </a:lvl2pPr>
             <a:lvl3pPr algn="l">
-              <a:defRPr sz="1425" b="1">
-                <a:solidFill>
-                  <a:srgbClr val="73D1CC"/>
+              <a:defRPr sz="1650" b="0">
+                <a:solidFill>
+                  <a:srgbClr val="C7D6E2"/>
                 </a:solidFill>
                 <a:latin typeface="Malgun Gothic"/>
                 <a:ea typeface="Malgun Gothic"/>
@@ -10623,9 +10280,9 @@
               </a:defRPr>
             </a:lvl3pPr>
             <a:lvl4pPr algn="l">
-              <a:defRPr sz="1425" b="1">
-                <a:solidFill>
-                  <a:srgbClr val="73D1CC"/>
+              <a:defRPr sz="1650" b="0">
+                <a:solidFill>
+                  <a:srgbClr val="C7D6E2"/>
                 </a:solidFill>
                 <a:latin typeface="Malgun Gothic"/>
                 <a:ea typeface="Malgun Gothic"/>
@@ -10633,9 +10290,9 @@
               </a:defRPr>
             </a:lvl4pPr>
             <a:lvl5pPr algn="l">
-              <a:defRPr sz="1425" b="1">
-                <a:solidFill>
-                  <a:srgbClr val="73D1CC"/>
+              <a:defRPr sz="1650" b="0">
+                <a:solidFill>
+                  <a:srgbClr val="C7D6E2"/>
                 </a:solidFill>
                 <a:latin typeface="Malgun Gothic"/>
                 <a:ea typeface="Malgun Gothic"/>
@@ -10643,9 +10300,9 @@
               </a:defRPr>
             </a:lvl5pPr>
             <a:lvl6pPr algn="l">
-              <a:defRPr sz="1425" b="1">
-                <a:solidFill>
-                  <a:srgbClr val="73D1CC"/>
+              <a:defRPr sz="1650" b="0">
+                <a:solidFill>
+                  <a:srgbClr val="C7D6E2"/>
                 </a:solidFill>
                 <a:latin typeface="Malgun Gothic"/>
                 <a:ea typeface="Malgun Gothic"/>
@@ -10653,9 +10310,9 @@
               </a:defRPr>
             </a:lvl6pPr>
             <a:lvl7pPr algn="l">
-              <a:defRPr sz="1425" b="1">
-                <a:solidFill>
-                  <a:srgbClr val="73D1CC"/>
+              <a:defRPr sz="1650" b="0">
+                <a:solidFill>
+                  <a:srgbClr val="C7D6E2"/>
                 </a:solidFill>
                 <a:latin typeface="Malgun Gothic"/>
                 <a:ea typeface="Malgun Gothic"/>
@@ -10663,9 +10320,9 @@
               </a:defRPr>
             </a:lvl7pPr>
             <a:lvl8pPr algn="l">
-              <a:defRPr sz="1425" b="1">
-                <a:solidFill>
-                  <a:srgbClr val="73D1CC"/>
+              <a:defRPr sz="1650" b="0">
+                <a:solidFill>
+                  <a:srgbClr val="C7D6E2"/>
                 </a:solidFill>
                 <a:latin typeface="Malgun Gothic"/>
                 <a:ea typeface="Malgun Gothic"/>
@@ -10673,9 +10330,9 @@
               </a:defRPr>
             </a:lvl8pPr>
             <a:lvl9pPr algn="l">
-              <a:defRPr sz="1425" b="1">
-                <a:solidFill>
-                  <a:srgbClr val="73D1CC"/>
+              <a:defRPr sz="1650" b="0">
+                <a:solidFill>
+                  <a:srgbClr val="C7D6E2"/>
                 </a:solidFill>
                 <a:latin typeface="Malgun Gothic"/>
                 <a:ea typeface="Malgun Gothic"/>
@@ -10685,9 +10342,13 @@
           </a:lstStyle>
           <a:p xmlns:a="http://schemas.openxmlformats.org/drawingml/2006/main">
             <a:pPr algn="l">
-              <a:defRPr sz="1425" b="1">
-                <a:solidFill>
-                  <a:srgbClr val="73D1CC"/>
+              <a:lnSpc>
+                <a:spcPct val="118000"/>
+              </a:lnSpc>
+              <a:buNone/>
+              <a:defRPr sz="1650" b="0">
+                <a:solidFill>
+                  <a:srgbClr val="C7D6E2"/>
                 </a:solidFill>
                 <a:latin typeface="Malgun Gothic"/>
                 <a:ea typeface="Malgun Gothic"/>
@@ -10695,25 +10356,25 @@
               </a:defRPr>
             </a:pPr>
             <a:r>
-              <a:rPr sz="1425" b="1">
-                <a:solidFill>
-                  <a:srgbClr val="73D1CC"/>
+              <a:rPr sz="1650" b="0">
+                <a:solidFill>
+                  <a:srgbClr val="C7D6E2"/>
                 </a:solidFill>
                 <a:latin typeface="Malgun Gothic"/>
                 <a:ea typeface="Malgun Gothic"/>
                 <a:cs typeface="Malgun Gothic"/>
               </a:rPr>
-              <a:t>운영의 최소 조건</a:t>
+              <a:t>지역 주민은 단순한 관광 안내자가 아니라 자신이 가진 이야기와 관심사로 여행 경험을 만드는 호스트가 됩니다.</a:t>
             </a:r>
           </a:p>
         </p:txBody>
       </p:sp>
       <p:sp>
         <p:nvSpPr>
-          <p:cNvPr id="13" name="">
+          <p:cNvPr id="10" name="">
             <a:extLst xmlns:a="http://schemas.openxmlformats.org/drawingml/2006/main">
               <a:ext uri="{FF2B5EF4-FFF2-40B4-BE49-F238E27FC236}">
-                <a16:creationId xmlns:a16="http://schemas.microsoft.com/office/drawing/2014/main" id="{1F6CE5BA-E242-48AA-BB66-E93FD40DAAEE}"/>
+                <a16:creationId xmlns:a16="http://schemas.microsoft.com/office/drawing/2014/main" id="{C0E65C05-7B7C-4198-B826-6B85A1FADB96}"/>
               </a:ext>
             </a:extLst>
           </p:cNvPr>
@@ -10724,1697 +10385,8 @@
         </p:nvSpPr>
         <p:spPr>
           <a:xfrm xmlns:a="http://schemas.openxmlformats.org/drawingml/2006/main">
-            <a:off x="3562350" y="2457450"/>
-            <a:ext cx="7810500" cy="514350"/>
-          </a:xfrm>
-          <a:prstGeom xmlns:a="http://schemas.openxmlformats.org/drawingml/2006/main" prst="rect">
-            <a:avLst/>
-          </a:prstGeom>
-          <a:noFill xmlns:a="http://schemas.openxmlformats.org/drawingml/2006/main"/>
-          <a:ln xmlns:a="http://schemas.openxmlformats.org/drawingml/2006/main" w="0">
-            <a:noFill/>
-            <a:prstDash val="solid"/>
-          </a:ln>
-        </p:spPr>
-        <p:txBody>
-          <a:bodyPr xmlns:a="http://schemas.openxmlformats.org/drawingml/2006/main" wrap="square" lIns="0" tIns="0" rIns="0" bIns="0" anchor="t">
-            <a:normAutofit fontScale="100000"/>
-          </a:bodyPr>
-          <a:lstStyle xmlns:a="http://schemas.openxmlformats.org/drawingml/2006/main">
-            <a:defPPr algn="l">
-              <a:defRPr sz="1350" b="0">
-                <a:solidFill>
-                  <a:srgbClr val="FFFFFF"/>
-                </a:solidFill>
-                <a:latin typeface="Malgun Gothic"/>
-                <a:ea typeface="Malgun Gothic"/>
-                <a:cs typeface="Malgun Gothic"/>
-              </a:defRPr>
-            </a:defPPr>
-            <a:lvl1pPr algn="l">
-              <a:defRPr sz="1350" b="0">
-                <a:solidFill>
-                  <a:srgbClr val="FFFFFF"/>
-                </a:solidFill>
-                <a:latin typeface="Malgun Gothic"/>
-                <a:ea typeface="Malgun Gothic"/>
-                <a:cs typeface="Malgun Gothic"/>
-              </a:defRPr>
-            </a:lvl1pPr>
-            <a:lvl2pPr algn="l">
-              <a:defRPr sz="1350" b="0">
-                <a:solidFill>
-                  <a:srgbClr val="FFFFFF"/>
-                </a:solidFill>
-                <a:latin typeface="Malgun Gothic"/>
-                <a:ea typeface="Malgun Gothic"/>
-                <a:cs typeface="Malgun Gothic"/>
-              </a:defRPr>
-            </a:lvl2pPr>
-            <a:lvl3pPr algn="l">
-              <a:defRPr sz="1350" b="0">
-                <a:solidFill>
-                  <a:srgbClr val="FFFFFF"/>
-                </a:solidFill>
-                <a:latin typeface="Malgun Gothic"/>
-                <a:ea typeface="Malgun Gothic"/>
-                <a:cs typeface="Malgun Gothic"/>
-              </a:defRPr>
-            </a:lvl3pPr>
-            <a:lvl4pPr algn="l">
-              <a:defRPr sz="1350" b="0">
-                <a:solidFill>
-                  <a:srgbClr val="FFFFFF"/>
-                </a:solidFill>
-                <a:latin typeface="Malgun Gothic"/>
-                <a:ea typeface="Malgun Gothic"/>
-                <a:cs typeface="Malgun Gothic"/>
-              </a:defRPr>
-            </a:lvl4pPr>
-            <a:lvl5pPr algn="l">
-              <a:defRPr sz="1350" b="0">
-                <a:solidFill>
-                  <a:srgbClr val="FFFFFF"/>
-                </a:solidFill>
-                <a:latin typeface="Malgun Gothic"/>
-                <a:ea typeface="Malgun Gothic"/>
-                <a:cs typeface="Malgun Gothic"/>
-              </a:defRPr>
-            </a:lvl5pPr>
-            <a:lvl6pPr algn="l">
-              <a:defRPr sz="1350" b="0">
-                <a:solidFill>
-                  <a:srgbClr val="FFFFFF"/>
-                </a:solidFill>
-                <a:latin typeface="Malgun Gothic"/>
-                <a:ea typeface="Malgun Gothic"/>
-                <a:cs typeface="Malgun Gothic"/>
-              </a:defRPr>
-            </a:lvl6pPr>
-            <a:lvl7pPr algn="l">
-              <a:defRPr sz="1350" b="0">
-                <a:solidFill>
-                  <a:srgbClr val="FFFFFF"/>
-                </a:solidFill>
-                <a:latin typeface="Malgun Gothic"/>
-                <a:ea typeface="Malgun Gothic"/>
-                <a:cs typeface="Malgun Gothic"/>
-              </a:defRPr>
-            </a:lvl7pPr>
-            <a:lvl8pPr algn="l">
-              <a:defRPr sz="1350" b="0">
-                <a:solidFill>
-                  <a:srgbClr val="FFFFFF"/>
-                </a:solidFill>
-                <a:latin typeface="Malgun Gothic"/>
-                <a:ea typeface="Malgun Gothic"/>
-                <a:cs typeface="Malgun Gothic"/>
-              </a:defRPr>
-            </a:lvl8pPr>
-            <a:lvl9pPr algn="l">
-              <a:defRPr sz="1350" b="0">
-                <a:solidFill>
-                  <a:srgbClr val="FFFFFF"/>
-                </a:solidFill>
-                <a:latin typeface="Malgun Gothic"/>
-                <a:ea typeface="Malgun Gothic"/>
-                <a:cs typeface="Malgun Gothic"/>
-              </a:defRPr>
-            </a:lvl9pPr>
-          </a:lstStyle>
-          <a:p xmlns:a="http://schemas.openxmlformats.org/drawingml/2006/main">
-            <a:pPr algn="l">
-              <a:defRPr sz="1350" b="0">
-                <a:solidFill>
-                  <a:srgbClr val="FFFFFF"/>
-                </a:solidFill>
-                <a:latin typeface="Malgun Gothic"/>
-                <a:ea typeface="Malgun Gothic"/>
-                <a:cs typeface="Malgun Gothic"/>
-              </a:defRPr>
-            </a:pPr>
-            <a:r>
-              <a:rPr sz="1350" b="0">
-                <a:solidFill>
-                  <a:srgbClr val="FFFFFF"/>
-                </a:solidFill>
-                <a:latin typeface="Malgun Gothic"/>
-                <a:ea typeface="Malgun Gothic"/>
-                <a:cs typeface="Malgun Gothic"/>
-              </a:rPr>
-              <a:t>HOST 2명·시범 3개 중 어떤 운영조건을 먼저 실제로 확인할까요?</a:t>
-            </a:r>
-          </a:p>
-        </p:txBody>
-      </p:sp>
-      <p:sp>
-        <p:nvSpPr>
-          <p:cNvPr id="14" name="">
-            <a:extLst xmlns:a="http://schemas.openxmlformats.org/drawingml/2006/main">
-              <a:ext uri="{FF2B5EF4-FFF2-40B4-BE49-F238E27FC236}">
-                <a16:creationId xmlns:a16="http://schemas.microsoft.com/office/drawing/2014/main" id="{C494833B-F940-4F69-9E51-52EA9EB6DBA0}"/>
-              </a:ext>
-            </a:extLst>
-          </p:cNvPr>
-          <p:cNvSpPr>
-            <a:spLocks xmlns:a="http://schemas.openxmlformats.org/drawingml/2006/main" noGrp="1"/>
-          </p:cNvSpPr>
-          <p:nvPr/>
-        </p:nvSpPr>
-        <p:spPr>
-          <a:xfrm xmlns:a="http://schemas.openxmlformats.org/drawingml/2006/main">
-            <a:off x="609600" y="3324225"/>
-            <a:ext cx="495300" cy="304800"/>
-          </a:xfrm>
-          <a:prstGeom xmlns:a="http://schemas.openxmlformats.org/drawingml/2006/main" prst="roundRect">
-            <a:avLst>
-              <a:gd name="adj" fmla="val 50000"/>
-            </a:avLst>
-          </a:prstGeom>
-          <a:solidFill xmlns:a="http://schemas.openxmlformats.org/drawingml/2006/main">
-            <a:srgbClr val="29425A"/>
-          </a:solidFill>
-          <a:ln xmlns:a="http://schemas.openxmlformats.org/drawingml/2006/main" w="0">
-            <a:noFill/>
-            <a:prstDash val="solid"/>
-          </a:ln>
-        </p:spPr>
-      </p:sp>
-      <p:sp>
-        <p:nvSpPr>
-          <p:cNvPr id="15" name="">
-            <a:extLst xmlns:a="http://schemas.openxmlformats.org/drawingml/2006/main">
-              <a:ext uri="{FF2B5EF4-FFF2-40B4-BE49-F238E27FC236}">
-                <a16:creationId xmlns:a16="http://schemas.microsoft.com/office/drawing/2014/main" id="{6B6BD75E-2E06-49D4-888E-F0A7FE140CB1}"/>
-              </a:ext>
-            </a:extLst>
-          </p:cNvPr>
-          <p:cNvSpPr>
-            <a:spLocks xmlns:a="http://schemas.openxmlformats.org/drawingml/2006/main" noGrp="1"/>
-          </p:cNvSpPr>
-          <p:nvPr/>
-        </p:nvSpPr>
-        <p:spPr>
-          <a:xfrm xmlns:a="http://schemas.openxmlformats.org/drawingml/2006/main">
-            <a:off x="685800" y="3371850"/>
-            <a:ext cx="342900" cy="209550"/>
-          </a:xfrm>
-          <a:prstGeom xmlns:a="http://schemas.openxmlformats.org/drawingml/2006/main" prst="rect">
-            <a:avLst/>
-          </a:prstGeom>
-          <a:noFill xmlns:a="http://schemas.openxmlformats.org/drawingml/2006/main"/>
-          <a:ln xmlns:a="http://schemas.openxmlformats.org/drawingml/2006/main" w="0">
-            <a:noFill/>
-            <a:prstDash val="solid"/>
-          </a:ln>
-        </p:spPr>
-        <p:txBody>
-          <a:bodyPr xmlns:a="http://schemas.openxmlformats.org/drawingml/2006/main" wrap="square" lIns="0" tIns="0" rIns="0" bIns="0" anchor="ctr">
-            <a:normAutofit fontScale="100000"/>
-          </a:bodyPr>
-          <a:lstStyle xmlns:a="http://schemas.openxmlformats.org/drawingml/2006/main">
-            <a:defPPr algn="ctr">
-              <a:defRPr sz="1050" b="1">
-                <a:solidFill>
-                  <a:srgbClr val="FFFFFF"/>
-                </a:solidFill>
-                <a:latin typeface="Malgun Gothic"/>
-                <a:ea typeface="Malgun Gothic"/>
-                <a:cs typeface="Malgun Gothic"/>
-              </a:defRPr>
-            </a:defPPr>
-            <a:lvl1pPr algn="ctr">
-              <a:defRPr sz="1050" b="1">
-                <a:solidFill>
-                  <a:srgbClr val="FFFFFF"/>
-                </a:solidFill>
-                <a:latin typeface="Malgun Gothic"/>
-                <a:ea typeface="Malgun Gothic"/>
-                <a:cs typeface="Malgun Gothic"/>
-              </a:defRPr>
-            </a:lvl1pPr>
-            <a:lvl2pPr algn="ctr">
-              <a:defRPr sz="1050" b="1">
-                <a:solidFill>
-                  <a:srgbClr val="FFFFFF"/>
-                </a:solidFill>
-                <a:latin typeface="Malgun Gothic"/>
-                <a:ea typeface="Malgun Gothic"/>
-                <a:cs typeface="Malgun Gothic"/>
-              </a:defRPr>
-            </a:lvl2pPr>
-            <a:lvl3pPr algn="ctr">
-              <a:defRPr sz="1050" b="1">
-                <a:solidFill>
-                  <a:srgbClr val="FFFFFF"/>
-                </a:solidFill>
-                <a:latin typeface="Malgun Gothic"/>
-                <a:ea typeface="Malgun Gothic"/>
-                <a:cs typeface="Malgun Gothic"/>
-              </a:defRPr>
-            </a:lvl3pPr>
-            <a:lvl4pPr algn="ctr">
-              <a:defRPr sz="1050" b="1">
-                <a:solidFill>
-                  <a:srgbClr val="FFFFFF"/>
-                </a:solidFill>
-                <a:latin typeface="Malgun Gothic"/>
-                <a:ea typeface="Malgun Gothic"/>
-                <a:cs typeface="Malgun Gothic"/>
-              </a:defRPr>
-            </a:lvl4pPr>
-            <a:lvl5pPr algn="ctr">
-              <a:defRPr sz="1050" b="1">
-                <a:solidFill>
-                  <a:srgbClr val="FFFFFF"/>
-                </a:solidFill>
-                <a:latin typeface="Malgun Gothic"/>
-                <a:ea typeface="Malgun Gothic"/>
-                <a:cs typeface="Malgun Gothic"/>
-              </a:defRPr>
-            </a:lvl5pPr>
-            <a:lvl6pPr algn="ctr">
-              <a:defRPr sz="1050" b="1">
-                <a:solidFill>
-                  <a:srgbClr val="FFFFFF"/>
-                </a:solidFill>
-                <a:latin typeface="Malgun Gothic"/>
-                <a:ea typeface="Malgun Gothic"/>
-                <a:cs typeface="Malgun Gothic"/>
-              </a:defRPr>
-            </a:lvl6pPr>
-            <a:lvl7pPr algn="ctr">
-              <a:defRPr sz="1050" b="1">
-                <a:solidFill>
-                  <a:srgbClr val="FFFFFF"/>
-                </a:solidFill>
-                <a:latin typeface="Malgun Gothic"/>
-                <a:ea typeface="Malgun Gothic"/>
-                <a:cs typeface="Malgun Gothic"/>
-              </a:defRPr>
-            </a:lvl7pPr>
-            <a:lvl8pPr algn="ctr">
-              <a:defRPr sz="1050" b="1">
-                <a:solidFill>
-                  <a:srgbClr val="FFFFFF"/>
-                </a:solidFill>
-                <a:latin typeface="Malgun Gothic"/>
-                <a:ea typeface="Malgun Gothic"/>
-                <a:cs typeface="Malgun Gothic"/>
-              </a:defRPr>
-            </a:lvl8pPr>
-            <a:lvl9pPr algn="ctr">
-              <a:defRPr sz="1050" b="1">
-                <a:solidFill>
-                  <a:srgbClr val="FFFFFF"/>
-                </a:solidFill>
-                <a:latin typeface="Malgun Gothic"/>
-                <a:ea typeface="Malgun Gothic"/>
-                <a:cs typeface="Malgun Gothic"/>
-              </a:defRPr>
-            </a:lvl9pPr>
-          </a:lstStyle>
-          <a:p xmlns:a="http://schemas.openxmlformats.org/drawingml/2006/main">
-            <a:pPr algn="ctr">
-              <a:defRPr sz="1050" b="1">
-                <a:solidFill>
-                  <a:srgbClr val="FFFFFF"/>
-                </a:solidFill>
-                <a:latin typeface="Malgun Gothic"/>
-                <a:ea typeface="Malgun Gothic"/>
-                <a:cs typeface="Malgun Gothic"/>
-              </a:defRPr>
-            </a:pPr>
-            <a:r>
-              <a:rPr sz="1050" b="1">
-                <a:solidFill>
-                  <a:srgbClr val="FFFFFF"/>
-                </a:solidFill>
-                <a:latin typeface="Malgun Gothic"/>
-                <a:ea typeface="Malgun Gothic"/>
-                <a:cs typeface="Malgun Gothic"/>
-              </a:rPr>
-              <a:t>03</a:t>
-            </a:r>
-          </a:p>
-        </p:txBody>
-      </p:sp>
-      <p:sp>
-        <p:nvSpPr>
-          <p:cNvPr id="16" name="">
-            <a:extLst xmlns:a="http://schemas.openxmlformats.org/drawingml/2006/main">
-              <a:ext uri="{FF2B5EF4-FFF2-40B4-BE49-F238E27FC236}">
-                <a16:creationId xmlns:a16="http://schemas.microsoft.com/office/drawing/2014/main" id="{5ADA206F-60FD-40B5-8006-C3C8B2392EEE}"/>
-              </a:ext>
-            </a:extLst>
-          </p:cNvPr>
-          <p:cNvSpPr>
-            <a:spLocks xmlns:a="http://schemas.openxmlformats.org/drawingml/2006/main" noGrp="1"/>
-          </p:cNvSpPr>
-          <p:nvPr/>
-        </p:nvSpPr>
-        <p:spPr>
-          <a:xfrm xmlns:a="http://schemas.openxmlformats.org/drawingml/2006/main">
-            <a:off x="1352550" y="3295650"/>
-            <a:ext cx="2190750" cy="285750"/>
-          </a:xfrm>
-          <a:prstGeom xmlns:a="http://schemas.openxmlformats.org/drawingml/2006/main" prst="rect">
-            <a:avLst/>
-          </a:prstGeom>
-          <a:noFill xmlns:a="http://schemas.openxmlformats.org/drawingml/2006/main"/>
-          <a:ln xmlns:a="http://schemas.openxmlformats.org/drawingml/2006/main" w="0">
-            <a:noFill/>
-            <a:prstDash val="solid"/>
-          </a:ln>
-        </p:spPr>
-        <p:txBody>
-          <a:bodyPr xmlns:a="http://schemas.openxmlformats.org/drawingml/2006/main" wrap="square" lIns="0" tIns="0" rIns="0" bIns="0" anchor="t">
-            <a:normAutofit fontScale="100000"/>
-          </a:bodyPr>
-          <a:lstStyle xmlns:a="http://schemas.openxmlformats.org/drawingml/2006/main">
-            <a:defPPr algn="l">
-              <a:defRPr sz="1425" b="1">
-                <a:solidFill>
-                  <a:srgbClr val="73D1CC"/>
-                </a:solidFill>
-                <a:latin typeface="Malgun Gothic"/>
-                <a:ea typeface="Malgun Gothic"/>
-                <a:cs typeface="Malgun Gothic"/>
-              </a:defRPr>
-            </a:defPPr>
-            <a:lvl1pPr algn="l">
-              <a:defRPr sz="1425" b="1">
-                <a:solidFill>
-                  <a:srgbClr val="73D1CC"/>
-                </a:solidFill>
-                <a:latin typeface="Malgun Gothic"/>
-                <a:ea typeface="Malgun Gothic"/>
-                <a:cs typeface="Malgun Gothic"/>
-              </a:defRPr>
-            </a:lvl1pPr>
-            <a:lvl2pPr algn="l">
-              <a:defRPr sz="1425" b="1">
-                <a:solidFill>
-                  <a:srgbClr val="73D1CC"/>
-                </a:solidFill>
-                <a:latin typeface="Malgun Gothic"/>
-                <a:ea typeface="Malgun Gothic"/>
-                <a:cs typeface="Malgun Gothic"/>
-              </a:defRPr>
-            </a:lvl2pPr>
-            <a:lvl3pPr algn="l">
-              <a:defRPr sz="1425" b="1">
-                <a:solidFill>
-                  <a:srgbClr val="73D1CC"/>
-                </a:solidFill>
-                <a:latin typeface="Malgun Gothic"/>
-                <a:ea typeface="Malgun Gothic"/>
-                <a:cs typeface="Malgun Gothic"/>
-              </a:defRPr>
-            </a:lvl3pPr>
-            <a:lvl4pPr algn="l">
-              <a:defRPr sz="1425" b="1">
-                <a:solidFill>
-                  <a:srgbClr val="73D1CC"/>
-                </a:solidFill>
-                <a:latin typeface="Malgun Gothic"/>
-                <a:ea typeface="Malgun Gothic"/>
-                <a:cs typeface="Malgun Gothic"/>
-              </a:defRPr>
-            </a:lvl4pPr>
-            <a:lvl5pPr algn="l">
-              <a:defRPr sz="1425" b="1">
-                <a:solidFill>
-                  <a:srgbClr val="73D1CC"/>
-                </a:solidFill>
-                <a:latin typeface="Malgun Gothic"/>
-                <a:ea typeface="Malgun Gothic"/>
-                <a:cs typeface="Malgun Gothic"/>
-              </a:defRPr>
-            </a:lvl5pPr>
-            <a:lvl6pPr algn="l">
-              <a:defRPr sz="1425" b="1">
-                <a:solidFill>
-                  <a:srgbClr val="73D1CC"/>
-                </a:solidFill>
-                <a:latin typeface="Malgun Gothic"/>
-                <a:ea typeface="Malgun Gothic"/>
-                <a:cs typeface="Malgun Gothic"/>
-              </a:defRPr>
-            </a:lvl6pPr>
-            <a:lvl7pPr algn="l">
-              <a:defRPr sz="1425" b="1">
-                <a:solidFill>
-                  <a:srgbClr val="73D1CC"/>
-                </a:solidFill>
-                <a:latin typeface="Malgun Gothic"/>
-                <a:ea typeface="Malgun Gothic"/>
-                <a:cs typeface="Malgun Gothic"/>
-              </a:defRPr>
-            </a:lvl7pPr>
-            <a:lvl8pPr algn="l">
-              <a:defRPr sz="1425" b="1">
-                <a:solidFill>
-                  <a:srgbClr val="73D1CC"/>
-                </a:solidFill>
-                <a:latin typeface="Malgun Gothic"/>
-                <a:ea typeface="Malgun Gothic"/>
-                <a:cs typeface="Malgun Gothic"/>
-              </a:defRPr>
-            </a:lvl8pPr>
-            <a:lvl9pPr algn="l">
-              <a:defRPr sz="1425" b="1">
-                <a:solidFill>
-                  <a:srgbClr val="73D1CC"/>
-                </a:solidFill>
-                <a:latin typeface="Malgun Gothic"/>
-                <a:ea typeface="Malgun Gothic"/>
-                <a:cs typeface="Malgun Gothic"/>
-              </a:defRPr>
-            </a:lvl9pPr>
-          </a:lstStyle>
-          <a:p xmlns:a="http://schemas.openxmlformats.org/drawingml/2006/main">
-            <a:pPr algn="l">
-              <a:defRPr sz="1425" b="1">
-                <a:solidFill>
-                  <a:srgbClr val="73D1CC"/>
-                </a:solidFill>
-                <a:latin typeface="Malgun Gothic"/>
-                <a:ea typeface="Malgun Gothic"/>
-                <a:cs typeface="Malgun Gothic"/>
-              </a:defRPr>
-            </a:pPr>
-            <a:r>
-              <a:rPr sz="1425" b="1">
-                <a:solidFill>
-                  <a:srgbClr val="73D1CC"/>
-                </a:solidFill>
-                <a:latin typeface="Malgun Gothic"/>
-                <a:ea typeface="Malgun Gothic"/>
-                <a:cs typeface="Malgun Gothic"/>
-              </a:rPr>
-              <a:t>Agent 구조</a:t>
-            </a:r>
-          </a:p>
-        </p:txBody>
-      </p:sp>
-      <p:sp>
-        <p:nvSpPr>
-          <p:cNvPr id="17" name="">
-            <a:extLst xmlns:a="http://schemas.openxmlformats.org/drawingml/2006/main">
-              <a:ext uri="{FF2B5EF4-FFF2-40B4-BE49-F238E27FC236}">
-                <a16:creationId xmlns:a16="http://schemas.microsoft.com/office/drawing/2014/main" id="{115A9064-1C1F-4FFF-B83F-1193C3FE9774}"/>
-              </a:ext>
-            </a:extLst>
-          </p:cNvPr>
-          <p:cNvSpPr>
-            <a:spLocks xmlns:a="http://schemas.openxmlformats.org/drawingml/2006/main" noGrp="1"/>
-          </p:cNvSpPr>
-          <p:nvPr/>
-        </p:nvSpPr>
-        <p:spPr>
-          <a:xfrm xmlns:a="http://schemas.openxmlformats.org/drawingml/2006/main">
-            <a:off x="3562350" y="3295650"/>
-            <a:ext cx="7810500" cy="514350"/>
-          </a:xfrm>
-          <a:prstGeom xmlns:a="http://schemas.openxmlformats.org/drawingml/2006/main" prst="rect">
-            <a:avLst/>
-          </a:prstGeom>
-          <a:noFill xmlns:a="http://schemas.openxmlformats.org/drawingml/2006/main"/>
-          <a:ln xmlns:a="http://schemas.openxmlformats.org/drawingml/2006/main" w="0">
-            <a:noFill/>
-            <a:prstDash val="solid"/>
-          </a:ln>
-        </p:spPr>
-        <p:txBody>
-          <a:bodyPr xmlns:a="http://schemas.openxmlformats.org/drawingml/2006/main" wrap="square" lIns="0" tIns="0" rIns="0" bIns="0" anchor="t">
-            <a:normAutofit fontScale="100000"/>
-          </a:bodyPr>
-          <a:lstStyle xmlns:a="http://schemas.openxmlformats.org/drawingml/2006/main">
-            <a:defPPr algn="l">
-              <a:defRPr sz="1350" b="0">
-                <a:solidFill>
-                  <a:srgbClr val="FFFFFF"/>
-                </a:solidFill>
-                <a:latin typeface="Malgun Gothic"/>
-                <a:ea typeface="Malgun Gothic"/>
-                <a:cs typeface="Malgun Gothic"/>
-              </a:defRPr>
-            </a:defPPr>
-            <a:lvl1pPr algn="l">
-              <a:defRPr sz="1350" b="0">
-                <a:solidFill>
-                  <a:srgbClr val="FFFFFF"/>
-                </a:solidFill>
-                <a:latin typeface="Malgun Gothic"/>
-                <a:ea typeface="Malgun Gothic"/>
-                <a:cs typeface="Malgun Gothic"/>
-              </a:defRPr>
-            </a:lvl1pPr>
-            <a:lvl2pPr algn="l">
-              <a:defRPr sz="1350" b="0">
-                <a:solidFill>
-                  <a:srgbClr val="FFFFFF"/>
-                </a:solidFill>
-                <a:latin typeface="Malgun Gothic"/>
-                <a:ea typeface="Malgun Gothic"/>
-                <a:cs typeface="Malgun Gothic"/>
-              </a:defRPr>
-            </a:lvl2pPr>
-            <a:lvl3pPr algn="l">
-              <a:defRPr sz="1350" b="0">
-                <a:solidFill>
-                  <a:srgbClr val="FFFFFF"/>
-                </a:solidFill>
-                <a:latin typeface="Malgun Gothic"/>
-                <a:ea typeface="Malgun Gothic"/>
-                <a:cs typeface="Malgun Gothic"/>
-              </a:defRPr>
-            </a:lvl3pPr>
-            <a:lvl4pPr algn="l">
-              <a:defRPr sz="1350" b="0">
-                <a:solidFill>
-                  <a:srgbClr val="FFFFFF"/>
-                </a:solidFill>
-                <a:latin typeface="Malgun Gothic"/>
-                <a:ea typeface="Malgun Gothic"/>
-                <a:cs typeface="Malgun Gothic"/>
-              </a:defRPr>
-            </a:lvl4pPr>
-            <a:lvl5pPr algn="l">
-              <a:defRPr sz="1350" b="0">
-                <a:solidFill>
-                  <a:srgbClr val="FFFFFF"/>
-                </a:solidFill>
-                <a:latin typeface="Malgun Gothic"/>
-                <a:ea typeface="Malgun Gothic"/>
-                <a:cs typeface="Malgun Gothic"/>
-              </a:defRPr>
-            </a:lvl5pPr>
-            <a:lvl6pPr algn="l">
-              <a:defRPr sz="1350" b="0">
-                <a:solidFill>
-                  <a:srgbClr val="FFFFFF"/>
-                </a:solidFill>
-                <a:latin typeface="Malgun Gothic"/>
-                <a:ea typeface="Malgun Gothic"/>
-                <a:cs typeface="Malgun Gothic"/>
-              </a:defRPr>
-            </a:lvl6pPr>
-            <a:lvl7pPr algn="l">
-              <a:defRPr sz="1350" b="0">
-                <a:solidFill>
-                  <a:srgbClr val="FFFFFF"/>
-                </a:solidFill>
-                <a:latin typeface="Malgun Gothic"/>
-                <a:ea typeface="Malgun Gothic"/>
-                <a:cs typeface="Malgun Gothic"/>
-              </a:defRPr>
-            </a:lvl7pPr>
-            <a:lvl8pPr algn="l">
-              <a:defRPr sz="1350" b="0">
-                <a:solidFill>
-                  <a:srgbClr val="FFFFFF"/>
-                </a:solidFill>
-                <a:latin typeface="Malgun Gothic"/>
-                <a:ea typeface="Malgun Gothic"/>
-                <a:cs typeface="Malgun Gothic"/>
-              </a:defRPr>
-            </a:lvl8pPr>
-            <a:lvl9pPr algn="l">
-              <a:defRPr sz="1350" b="0">
-                <a:solidFill>
-                  <a:srgbClr val="FFFFFF"/>
-                </a:solidFill>
-                <a:latin typeface="Malgun Gothic"/>
-                <a:ea typeface="Malgun Gothic"/>
-                <a:cs typeface="Malgun Gothic"/>
-              </a:defRPr>
-            </a:lvl9pPr>
-          </a:lstStyle>
-          <a:p xmlns:a="http://schemas.openxmlformats.org/drawingml/2006/main">
-            <a:pPr algn="l">
-              <a:defRPr sz="1350" b="0">
-                <a:solidFill>
-                  <a:srgbClr val="FFFFFF"/>
-                </a:solidFill>
-                <a:latin typeface="Malgun Gothic"/>
-                <a:ea typeface="Malgun Gothic"/>
-                <a:cs typeface="Malgun Gothic"/>
-              </a:defRPr>
-            </a:pPr>
-            <a:r>
-              <a:rPr sz="1350" b="0">
-                <a:solidFill>
-                  <a:srgbClr val="FFFFFF"/>
-                </a:solidFill>
-                <a:latin typeface="Malgun Gothic"/>
-                <a:ea typeface="Malgun Gothic"/>
-                <a:cs typeface="Malgun Gothic"/>
-              </a:rPr>
-              <a:t>현재 JSON 도구 어댑터를 유지할까요, 실험 기준을 정해 다른 구조와 비교할까요?</a:t>
-            </a:r>
-          </a:p>
-        </p:txBody>
-      </p:sp>
-      <p:sp>
-        <p:nvSpPr>
-          <p:cNvPr id="18" name="">
-            <a:extLst xmlns:a="http://schemas.openxmlformats.org/drawingml/2006/main">
-              <a:ext uri="{FF2B5EF4-FFF2-40B4-BE49-F238E27FC236}">
-                <a16:creationId xmlns:a16="http://schemas.microsoft.com/office/drawing/2014/main" id="{83BD734F-4B86-48E4-A159-C18B93DE7BCD}"/>
-              </a:ext>
-            </a:extLst>
-          </p:cNvPr>
-          <p:cNvSpPr>
-            <a:spLocks xmlns:a="http://schemas.openxmlformats.org/drawingml/2006/main" noGrp="1"/>
-          </p:cNvSpPr>
-          <p:nvPr/>
-        </p:nvSpPr>
-        <p:spPr>
-          <a:xfrm xmlns:a="http://schemas.openxmlformats.org/drawingml/2006/main">
-            <a:off x="609600" y="4162425"/>
-            <a:ext cx="495300" cy="304800"/>
-          </a:xfrm>
-          <a:prstGeom xmlns:a="http://schemas.openxmlformats.org/drawingml/2006/main" prst="roundRect">
-            <a:avLst>
-              <a:gd name="adj" fmla="val 50000"/>
-            </a:avLst>
-          </a:prstGeom>
-          <a:solidFill xmlns:a="http://schemas.openxmlformats.org/drawingml/2006/main">
-            <a:srgbClr val="29425A"/>
-          </a:solidFill>
-          <a:ln xmlns:a="http://schemas.openxmlformats.org/drawingml/2006/main" w="0">
-            <a:noFill/>
-            <a:prstDash val="solid"/>
-          </a:ln>
-        </p:spPr>
-      </p:sp>
-      <p:sp>
-        <p:nvSpPr>
-          <p:cNvPr id="19" name="">
-            <a:extLst xmlns:a="http://schemas.openxmlformats.org/drawingml/2006/main">
-              <a:ext uri="{FF2B5EF4-FFF2-40B4-BE49-F238E27FC236}">
-                <a16:creationId xmlns:a16="http://schemas.microsoft.com/office/drawing/2014/main" id="{59476E61-D860-41F5-8892-DFCEEC5A78E6}"/>
-              </a:ext>
-            </a:extLst>
-          </p:cNvPr>
-          <p:cNvSpPr>
-            <a:spLocks xmlns:a="http://schemas.openxmlformats.org/drawingml/2006/main" noGrp="1"/>
-          </p:cNvSpPr>
-          <p:nvPr/>
-        </p:nvSpPr>
-        <p:spPr>
-          <a:xfrm xmlns:a="http://schemas.openxmlformats.org/drawingml/2006/main">
-            <a:off x="685800" y="4210050"/>
-            <a:ext cx="342900" cy="209550"/>
-          </a:xfrm>
-          <a:prstGeom xmlns:a="http://schemas.openxmlformats.org/drawingml/2006/main" prst="rect">
-            <a:avLst/>
-          </a:prstGeom>
-          <a:noFill xmlns:a="http://schemas.openxmlformats.org/drawingml/2006/main"/>
-          <a:ln xmlns:a="http://schemas.openxmlformats.org/drawingml/2006/main" w="0">
-            <a:noFill/>
-            <a:prstDash val="solid"/>
-          </a:ln>
-        </p:spPr>
-        <p:txBody>
-          <a:bodyPr xmlns:a="http://schemas.openxmlformats.org/drawingml/2006/main" wrap="square" lIns="0" tIns="0" rIns="0" bIns="0" anchor="ctr">
-            <a:normAutofit fontScale="100000"/>
-          </a:bodyPr>
-          <a:lstStyle xmlns:a="http://schemas.openxmlformats.org/drawingml/2006/main">
-            <a:defPPr algn="ctr">
-              <a:defRPr sz="1050" b="1">
-                <a:solidFill>
-                  <a:srgbClr val="FFFFFF"/>
-                </a:solidFill>
-                <a:latin typeface="Malgun Gothic"/>
-                <a:ea typeface="Malgun Gothic"/>
-                <a:cs typeface="Malgun Gothic"/>
-              </a:defRPr>
-            </a:defPPr>
-            <a:lvl1pPr algn="ctr">
-              <a:defRPr sz="1050" b="1">
-                <a:solidFill>
-                  <a:srgbClr val="FFFFFF"/>
-                </a:solidFill>
-                <a:latin typeface="Malgun Gothic"/>
-                <a:ea typeface="Malgun Gothic"/>
-                <a:cs typeface="Malgun Gothic"/>
-              </a:defRPr>
-            </a:lvl1pPr>
-            <a:lvl2pPr algn="ctr">
-              <a:defRPr sz="1050" b="1">
-                <a:solidFill>
-                  <a:srgbClr val="FFFFFF"/>
-                </a:solidFill>
-                <a:latin typeface="Malgun Gothic"/>
-                <a:ea typeface="Malgun Gothic"/>
-                <a:cs typeface="Malgun Gothic"/>
-              </a:defRPr>
-            </a:lvl2pPr>
-            <a:lvl3pPr algn="ctr">
-              <a:defRPr sz="1050" b="1">
-                <a:solidFill>
-                  <a:srgbClr val="FFFFFF"/>
-                </a:solidFill>
-                <a:latin typeface="Malgun Gothic"/>
-                <a:ea typeface="Malgun Gothic"/>
-                <a:cs typeface="Malgun Gothic"/>
-              </a:defRPr>
-            </a:lvl3pPr>
-            <a:lvl4pPr algn="ctr">
-              <a:defRPr sz="1050" b="1">
-                <a:solidFill>
-                  <a:srgbClr val="FFFFFF"/>
-                </a:solidFill>
-                <a:latin typeface="Malgun Gothic"/>
-                <a:ea typeface="Malgun Gothic"/>
-                <a:cs typeface="Malgun Gothic"/>
-              </a:defRPr>
-            </a:lvl4pPr>
-            <a:lvl5pPr algn="ctr">
-              <a:defRPr sz="1050" b="1">
-                <a:solidFill>
-                  <a:srgbClr val="FFFFFF"/>
-                </a:solidFill>
-                <a:latin typeface="Malgun Gothic"/>
-                <a:ea typeface="Malgun Gothic"/>
-                <a:cs typeface="Malgun Gothic"/>
-              </a:defRPr>
-            </a:lvl5pPr>
-            <a:lvl6pPr algn="ctr">
-              <a:defRPr sz="1050" b="1">
-                <a:solidFill>
-                  <a:srgbClr val="FFFFFF"/>
-                </a:solidFill>
-                <a:latin typeface="Malgun Gothic"/>
-                <a:ea typeface="Malgun Gothic"/>
-                <a:cs typeface="Malgun Gothic"/>
-              </a:defRPr>
-            </a:lvl6pPr>
-            <a:lvl7pPr algn="ctr">
-              <a:defRPr sz="1050" b="1">
-                <a:solidFill>
-                  <a:srgbClr val="FFFFFF"/>
-                </a:solidFill>
-                <a:latin typeface="Malgun Gothic"/>
-                <a:ea typeface="Malgun Gothic"/>
-                <a:cs typeface="Malgun Gothic"/>
-              </a:defRPr>
-            </a:lvl7pPr>
-            <a:lvl8pPr algn="ctr">
-              <a:defRPr sz="1050" b="1">
-                <a:solidFill>
-                  <a:srgbClr val="FFFFFF"/>
-                </a:solidFill>
-                <a:latin typeface="Malgun Gothic"/>
-                <a:ea typeface="Malgun Gothic"/>
-                <a:cs typeface="Malgun Gothic"/>
-              </a:defRPr>
-            </a:lvl8pPr>
-            <a:lvl9pPr algn="ctr">
-              <a:defRPr sz="1050" b="1">
-                <a:solidFill>
-                  <a:srgbClr val="FFFFFF"/>
-                </a:solidFill>
-                <a:latin typeface="Malgun Gothic"/>
-                <a:ea typeface="Malgun Gothic"/>
-                <a:cs typeface="Malgun Gothic"/>
-              </a:defRPr>
-            </a:lvl9pPr>
-          </a:lstStyle>
-          <a:p xmlns:a="http://schemas.openxmlformats.org/drawingml/2006/main">
-            <a:pPr algn="ctr">
-              <a:defRPr sz="1050" b="1">
-                <a:solidFill>
-                  <a:srgbClr val="FFFFFF"/>
-                </a:solidFill>
-                <a:latin typeface="Malgun Gothic"/>
-                <a:ea typeface="Malgun Gothic"/>
-                <a:cs typeface="Malgun Gothic"/>
-              </a:defRPr>
-            </a:pPr>
-            <a:r>
-              <a:rPr sz="1050" b="1">
-                <a:solidFill>
-                  <a:srgbClr val="FFFFFF"/>
-                </a:solidFill>
-                <a:latin typeface="Malgun Gothic"/>
-                <a:ea typeface="Malgun Gothic"/>
-                <a:cs typeface="Malgun Gothic"/>
-              </a:rPr>
-              <a:t>04</a:t>
-            </a:r>
-          </a:p>
-        </p:txBody>
-      </p:sp>
-      <p:sp>
-        <p:nvSpPr>
-          <p:cNvPr id="20" name="">
-            <a:extLst xmlns:a="http://schemas.openxmlformats.org/drawingml/2006/main">
-              <a:ext uri="{FF2B5EF4-FFF2-40B4-BE49-F238E27FC236}">
-                <a16:creationId xmlns:a16="http://schemas.microsoft.com/office/drawing/2014/main" id="{823A06C7-DCBD-4F3C-B167-70DEA7DB67B1}"/>
-              </a:ext>
-            </a:extLst>
-          </p:cNvPr>
-          <p:cNvSpPr>
-            <a:spLocks xmlns:a="http://schemas.openxmlformats.org/drawingml/2006/main" noGrp="1"/>
-          </p:cNvSpPr>
-          <p:nvPr/>
-        </p:nvSpPr>
-        <p:spPr>
-          <a:xfrm xmlns:a="http://schemas.openxmlformats.org/drawingml/2006/main">
-            <a:off x="1352550" y="4133850"/>
-            <a:ext cx="2190750" cy="285750"/>
-          </a:xfrm>
-          <a:prstGeom xmlns:a="http://schemas.openxmlformats.org/drawingml/2006/main" prst="rect">
-            <a:avLst/>
-          </a:prstGeom>
-          <a:noFill xmlns:a="http://schemas.openxmlformats.org/drawingml/2006/main"/>
-          <a:ln xmlns:a="http://schemas.openxmlformats.org/drawingml/2006/main" w="0">
-            <a:noFill/>
-            <a:prstDash val="solid"/>
-          </a:ln>
-        </p:spPr>
-        <p:txBody>
-          <a:bodyPr xmlns:a="http://schemas.openxmlformats.org/drawingml/2006/main" wrap="square" lIns="0" tIns="0" rIns="0" bIns="0" anchor="t">
-            <a:normAutofit fontScale="100000"/>
-          </a:bodyPr>
-          <a:lstStyle xmlns:a="http://schemas.openxmlformats.org/drawingml/2006/main">
-            <a:defPPr algn="l">
-              <a:defRPr sz="1425" b="1">
-                <a:solidFill>
-                  <a:srgbClr val="73D1CC"/>
-                </a:solidFill>
-                <a:latin typeface="Malgun Gothic"/>
-                <a:ea typeface="Malgun Gothic"/>
-                <a:cs typeface="Malgun Gothic"/>
-              </a:defRPr>
-            </a:defPPr>
-            <a:lvl1pPr algn="l">
-              <a:defRPr sz="1425" b="1">
-                <a:solidFill>
-                  <a:srgbClr val="73D1CC"/>
-                </a:solidFill>
-                <a:latin typeface="Malgun Gothic"/>
-                <a:ea typeface="Malgun Gothic"/>
-                <a:cs typeface="Malgun Gothic"/>
-              </a:defRPr>
-            </a:lvl1pPr>
-            <a:lvl2pPr algn="l">
-              <a:defRPr sz="1425" b="1">
-                <a:solidFill>
-                  <a:srgbClr val="73D1CC"/>
-                </a:solidFill>
-                <a:latin typeface="Malgun Gothic"/>
-                <a:ea typeface="Malgun Gothic"/>
-                <a:cs typeface="Malgun Gothic"/>
-              </a:defRPr>
-            </a:lvl2pPr>
-            <a:lvl3pPr algn="l">
-              <a:defRPr sz="1425" b="1">
-                <a:solidFill>
-                  <a:srgbClr val="73D1CC"/>
-                </a:solidFill>
-                <a:latin typeface="Malgun Gothic"/>
-                <a:ea typeface="Malgun Gothic"/>
-                <a:cs typeface="Malgun Gothic"/>
-              </a:defRPr>
-            </a:lvl3pPr>
-            <a:lvl4pPr algn="l">
-              <a:defRPr sz="1425" b="1">
-                <a:solidFill>
-                  <a:srgbClr val="73D1CC"/>
-                </a:solidFill>
-                <a:latin typeface="Malgun Gothic"/>
-                <a:ea typeface="Malgun Gothic"/>
-                <a:cs typeface="Malgun Gothic"/>
-              </a:defRPr>
-            </a:lvl4pPr>
-            <a:lvl5pPr algn="l">
-              <a:defRPr sz="1425" b="1">
-                <a:solidFill>
-                  <a:srgbClr val="73D1CC"/>
-                </a:solidFill>
-                <a:latin typeface="Malgun Gothic"/>
-                <a:ea typeface="Malgun Gothic"/>
-                <a:cs typeface="Malgun Gothic"/>
-              </a:defRPr>
-            </a:lvl5pPr>
-            <a:lvl6pPr algn="l">
-              <a:defRPr sz="1425" b="1">
-                <a:solidFill>
-                  <a:srgbClr val="73D1CC"/>
-                </a:solidFill>
-                <a:latin typeface="Malgun Gothic"/>
-                <a:ea typeface="Malgun Gothic"/>
-                <a:cs typeface="Malgun Gothic"/>
-              </a:defRPr>
-            </a:lvl6pPr>
-            <a:lvl7pPr algn="l">
-              <a:defRPr sz="1425" b="1">
-                <a:solidFill>
-                  <a:srgbClr val="73D1CC"/>
-                </a:solidFill>
-                <a:latin typeface="Malgun Gothic"/>
-                <a:ea typeface="Malgun Gothic"/>
-                <a:cs typeface="Malgun Gothic"/>
-              </a:defRPr>
-            </a:lvl7pPr>
-            <a:lvl8pPr algn="l">
-              <a:defRPr sz="1425" b="1">
-                <a:solidFill>
-                  <a:srgbClr val="73D1CC"/>
-                </a:solidFill>
-                <a:latin typeface="Malgun Gothic"/>
-                <a:ea typeface="Malgun Gothic"/>
-                <a:cs typeface="Malgun Gothic"/>
-              </a:defRPr>
-            </a:lvl8pPr>
-            <a:lvl9pPr algn="l">
-              <a:defRPr sz="1425" b="1">
-                <a:solidFill>
-                  <a:srgbClr val="73D1CC"/>
-                </a:solidFill>
-                <a:latin typeface="Malgun Gothic"/>
-                <a:ea typeface="Malgun Gothic"/>
-                <a:cs typeface="Malgun Gothic"/>
-              </a:defRPr>
-            </a:lvl9pPr>
-          </a:lstStyle>
-          <a:p xmlns:a="http://schemas.openxmlformats.org/drawingml/2006/main">
-            <a:pPr algn="l">
-              <a:defRPr sz="1425" b="1">
-                <a:solidFill>
-                  <a:srgbClr val="73D1CC"/>
-                </a:solidFill>
-                <a:latin typeface="Malgun Gothic"/>
-                <a:ea typeface="Malgun Gothic"/>
-                <a:cs typeface="Malgun Gothic"/>
-              </a:defRPr>
-            </a:pPr>
-            <a:r>
-              <a:rPr sz="1425" b="1">
-                <a:solidFill>
-                  <a:srgbClr val="73D1CC"/>
-                </a:solidFill>
-                <a:latin typeface="Malgun Gothic"/>
-                <a:ea typeface="Malgun Gothic"/>
-                <a:cs typeface="Malgun Gothic"/>
-              </a:rPr>
-              <a:t>RAG 범위</a:t>
-            </a:r>
-          </a:p>
-        </p:txBody>
-      </p:sp>
-      <p:sp>
-        <p:nvSpPr>
-          <p:cNvPr id="21" name="">
-            <a:extLst xmlns:a="http://schemas.openxmlformats.org/drawingml/2006/main">
-              <a:ext uri="{FF2B5EF4-FFF2-40B4-BE49-F238E27FC236}">
-                <a16:creationId xmlns:a16="http://schemas.microsoft.com/office/drawing/2014/main" id="{27CE5D39-0502-41BF-9A41-0BF473F24629}"/>
-              </a:ext>
-            </a:extLst>
-          </p:cNvPr>
-          <p:cNvSpPr>
-            <a:spLocks xmlns:a="http://schemas.openxmlformats.org/drawingml/2006/main" noGrp="1"/>
-          </p:cNvSpPr>
-          <p:nvPr/>
-        </p:nvSpPr>
-        <p:spPr>
-          <a:xfrm xmlns:a="http://schemas.openxmlformats.org/drawingml/2006/main">
-            <a:off x="3562350" y="4133850"/>
-            <a:ext cx="7810500" cy="514350"/>
-          </a:xfrm>
-          <a:prstGeom xmlns:a="http://schemas.openxmlformats.org/drawingml/2006/main" prst="rect">
-            <a:avLst/>
-          </a:prstGeom>
-          <a:noFill xmlns:a="http://schemas.openxmlformats.org/drawingml/2006/main"/>
-          <a:ln xmlns:a="http://schemas.openxmlformats.org/drawingml/2006/main" w="0">
-            <a:noFill/>
-            <a:prstDash val="solid"/>
-          </a:ln>
-        </p:spPr>
-        <p:txBody>
-          <a:bodyPr xmlns:a="http://schemas.openxmlformats.org/drawingml/2006/main" wrap="square" lIns="0" tIns="0" rIns="0" bIns="0" anchor="t">
-            <a:normAutofit fontScale="100000"/>
-          </a:bodyPr>
-          <a:lstStyle xmlns:a="http://schemas.openxmlformats.org/drawingml/2006/main">
-            <a:defPPr algn="l">
-              <a:defRPr sz="1350" b="0">
-                <a:solidFill>
-                  <a:srgbClr val="FFFFFF"/>
-                </a:solidFill>
-                <a:latin typeface="Malgun Gothic"/>
-                <a:ea typeface="Malgun Gothic"/>
-                <a:cs typeface="Malgun Gothic"/>
-              </a:defRPr>
-            </a:defPPr>
-            <a:lvl1pPr algn="l">
-              <a:defRPr sz="1350" b="0">
-                <a:solidFill>
-                  <a:srgbClr val="FFFFFF"/>
-                </a:solidFill>
-                <a:latin typeface="Malgun Gothic"/>
-                <a:ea typeface="Malgun Gothic"/>
-                <a:cs typeface="Malgun Gothic"/>
-              </a:defRPr>
-            </a:lvl1pPr>
-            <a:lvl2pPr algn="l">
-              <a:defRPr sz="1350" b="0">
-                <a:solidFill>
-                  <a:srgbClr val="FFFFFF"/>
-                </a:solidFill>
-                <a:latin typeface="Malgun Gothic"/>
-                <a:ea typeface="Malgun Gothic"/>
-                <a:cs typeface="Malgun Gothic"/>
-              </a:defRPr>
-            </a:lvl2pPr>
-            <a:lvl3pPr algn="l">
-              <a:defRPr sz="1350" b="0">
-                <a:solidFill>
-                  <a:srgbClr val="FFFFFF"/>
-                </a:solidFill>
-                <a:latin typeface="Malgun Gothic"/>
-                <a:ea typeface="Malgun Gothic"/>
-                <a:cs typeface="Malgun Gothic"/>
-              </a:defRPr>
-            </a:lvl3pPr>
-            <a:lvl4pPr algn="l">
-              <a:defRPr sz="1350" b="0">
-                <a:solidFill>
-                  <a:srgbClr val="FFFFFF"/>
-                </a:solidFill>
-                <a:latin typeface="Malgun Gothic"/>
-                <a:ea typeface="Malgun Gothic"/>
-                <a:cs typeface="Malgun Gothic"/>
-              </a:defRPr>
-            </a:lvl4pPr>
-            <a:lvl5pPr algn="l">
-              <a:defRPr sz="1350" b="0">
-                <a:solidFill>
-                  <a:srgbClr val="FFFFFF"/>
-                </a:solidFill>
-                <a:latin typeface="Malgun Gothic"/>
-                <a:ea typeface="Malgun Gothic"/>
-                <a:cs typeface="Malgun Gothic"/>
-              </a:defRPr>
-            </a:lvl5pPr>
-            <a:lvl6pPr algn="l">
-              <a:defRPr sz="1350" b="0">
-                <a:solidFill>
-                  <a:srgbClr val="FFFFFF"/>
-                </a:solidFill>
-                <a:latin typeface="Malgun Gothic"/>
-                <a:ea typeface="Malgun Gothic"/>
-                <a:cs typeface="Malgun Gothic"/>
-              </a:defRPr>
-            </a:lvl6pPr>
-            <a:lvl7pPr algn="l">
-              <a:defRPr sz="1350" b="0">
-                <a:solidFill>
-                  <a:srgbClr val="FFFFFF"/>
-                </a:solidFill>
-                <a:latin typeface="Malgun Gothic"/>
-                <a:ea typeface="Malgun Gothic"/>
-                <a:cs typeface="Malgun Gothic"/>
-              </a:defRPr>
-            </a:lvl7pPr>
-            <a:lvl8pPr algn="l">
-              <a:defRPr sz="1350" b="0">
-                <a:solidFill>
-                  <a:srgbClr val="FFFFFF"/>
-                </a:solidFill>
-                <a:latin typeface="Malgun Gothic"/>
-                <a:ea typeface="Malgun Gothic"/>
-                <a:cs typeface="Malgun Gothic"/>
-              </a:defRPr>
-            </a:lvl8pPr>
-            <a:lvl9pPr algn="l">
-              <a:defRPr sz="1350" b="0">
-                <a:solidFill>
-                  <a:srgbClr val="FFFFFF"/>
-                </a:solidFill>
-                <a:latin typeface="Malgun Gothic"/>
-                <a:ea typeface="Malgun Gothic"/>
-                <a:cs typeface="Malgun Gothic"/>
-              </a:defRPr>
-            </a:lvl9pPr>
-          </a:lstStyle>
-          <a:p xmlns:a="http://schemas.openxmlformats.org/drawingml/2006/main">
-            <a:pPr algn="l">
-              <a:defRPr sz="1350" b="0">
-                <a:solidFill>
-                  <a:srgbClr val="FFFFFF"/>
-                </a:solidFill>
-                <a:latin typeface="Malgun Gothic"/>
-                <a:ea typeface="Malgun Gothic"/>
-                <a:cs typeface="Malgun Gothic"/>
-              </a:defRPr>
-            </a:pPr>
-            <a:r>
-              <a:rPr sz="1350" b="0">
-                <a:solidFill>
-                  <a:srgbClr val="FFFFFF"/>
-                </a:solidFill>
-                <a:latin typeface="Malgun Gothic"/>
-                <a:ea typeface="Malgun Gothic"/>
-                <a:cs typeface="Malgun Gothic"/>
-              </a:rPr>
-              <a:t>출처·확인일·지역 커버리지를 어떤 기준으로 늘리고 품질을 평가할까요?</a:t>
-            </a:r>
-          </a:p>
-        </p:txBody>
-      </p:sp>
-      <p:sp>
-        <p:nvSpPr>
-          <p:cNvPr id="22" name="">
-            <a:extLst xmlns:a="http://schemas.openxmlformats.org/drawingml/2006/main">
-              <a:ext uri="{FF2B5EF4-FFF2-40B4-BE49-F238E27FC236}">
-                <a16:creationId xmlns:a16="http://schemas.microsoft.com/office/drawing/2014/main" id="{A330E02A-5056-4019-AFAA-F38B2AEA5BA8}"/>
-              </a:ext>
-            </a:extLst>
-          </p:cNvPr>
-          <p:cNvSpPr>
-            <a:spLocks xmlns:a="http://schemas.openxmlformats.org/drawingml/2006/main" noGrp="1"/>
-          </p:cNvSpPr>
-          <p:nvPr/>
-        </p:nvSpPr>
-        <p:spPr>
-          <a:xfrm xmlns:a="http://schemas.openxmlformats.org/drawingml/2006/main">
-            <a:off x="609600" y="5000625"/>
-            <a:ext cx="495300" cy="304800"/>
-          </a:xfrm>
-          <a:prstGeom xmlns:a="http://schemas.openxmlformats.org/drawingml/2006/main" prst="roundRect">
-            <a:avLst>
-              <a:gd name="adj" fmla="val 50000"/>
-            </a:avLst>
-          </a:prstGeom>
-          <a:solidFill xmlns:a="http://schemas.openxmlformats.org/drawingml/2006/main">
-            <a:srgbClr val="29425A"/>
-          </a:solidFill>
-          <a:ln xmlns:a="http://schemas.openxmlformats.org/drawingml/2006/main" w="0">
-            <a:noFill/>
-            <a:prstDash val="solid"/>
-          </a:ln>
-        </p:spPr>
-      </p:sp>
-      <p:sp>
-        <p:nvSpPr>
-          <p:cNvPr id="23" name="">
-            <a:extLst xmlns:a="http://schemas.openxmlformats.org/drawingml/2006/main">
-              <a:ext uri="{FF2B5EF4-FFF2-40B4-BE49-F238E27FC236}">
-                <a16:creationId xmlns:a16="http://schemas.microsoft.com/office/drawing/2014/main" id="{B44B07BC-DB1A-4AC0-B94F-F56C4E784BCC}"/>
-              </a:ext>
-            </a:extLst>
-          </p:cNvPr>
-          <p:cNvSpPr>
-            <a:spLocks xmlns:a="http://schemas.openxmlformats.org/drawingml/2006/main" noGrp="1"/>
-          </p:cNvSpPr>
-          <p:nvPr/>
-        </p:nvSpPr>
-        <p:spPr>
-          <a:xfrm xmlns:a="http://schemas.openxmlformats.org/drawingml/2006/main">
-            <a:off x="685800" y="5048250"/>
-            <a:ext cx="342900" cy="209550"/>
-          </a:xfrm>
-          <a:prstGeom xmlns:a="http://schemas.openxmlformats.org/drawingml/2006/main" prst="rect">
-            <a:avLst/>
-          </a:prstGeom>
-          <a:noFill xmlns:a="http://schemas.openxmlformats.org/drawingml/2006/main"/>
-          <a:ln xmlns:a="http://schemas.openxmlformats.org/drawingml/2006/main" w="0">
-            <a:noFill/>
-            <a:prstDash val="solid"/>
-          </a:ln>
-        </p:spPr>
-        <p:txBody>
-          <a:bodyPr xmlns:a="http://schemas.openxmlformats.org/drawingml/2006/main" wrap="square" lIns="0" tIns="0" rIns="0" bIns="0" anchor="ctr">
-            <a:normAutofit fontScale="100000"/>
-          </a:bodyPr>
-          <a:lstStyle xmlns:a="http://schemas.openxmlformats.org/drawingml/2006/main">
-            <a:defPPr algn="ctr">
-              <a:defRPr sz="1050" b="1">
-                <a:solidFill>
-                  <a:srgbClr val="FFFFFF"/>
-                </a:solidFill>
-                <a:latin typeface="Malgun Gothic"/>
-                <a:ea typeface="Malgun Gothic"/>
-                <a:cs typeface="Malgun Gothic"/>
-              </a:defRPr>
-            </a:defPPr>
-            <a:lvl1pPr algn="ctr">
-              <a:defRPr sz="1050" b="1">
-                <a:solidFill>
-                  <a:srgbClr val="FFFFFF"/>
-                </a:solidFill>
-                <a:latin typeface="Malgun Gothic"/>
-                <a:ea typeface="Malgun Gothic"/>
-                <a:cs typeface="Malgun Gothic"/>
-              </a:defRPr>
-            </a:lvl1pPr>
-            <a:lvl2pPr algn="ctr">
-              <a:defRPr sz="1050" b="1">
-                <a:solidFill>
-                  <a:srgbClr val="FFFFFF"/>
-                </a:solidFill>
-                <a:latin typeface="Malgun Gothic"/>
-                <a:ea typeface="Malgun Gothic"/>
-                <a:cs typeface="Malgun Gothic"/>
-              </a:defRPr>
-            </a:lvl2pPr>
-            <a:lvl3pPr algn="ctr">
-              <a:defRPr sz="1050" b="1">
-                <a:solidFill>
-                  <a:srgbClr val="FFFFFF"/>
-                </a:solidFill>
-                <a:latin typeface="Malgun Gothic"/>
-                <a:ea typeface="Malgun Gothic"/>
-                <a:cs typeface="Malgun Gothic"/>
-              </a:defRPr>
-            </a:lvl3pPr>
-            <a:lvl4pPr algn="ctr">
-              <a:defRPr sz="1050" b="1">
-                <a:solidFill>
-                  <a:srgbClr val="FFFFFF"/>
-                </a:solidFill>
-                <a:latin typeface="Malgun Gothic"/>
-                <a:ea typeface="Malgun Gothic"/>
-                <a:cs typeface="Malgun Gothic"/>
-              </a:defRPr>
-            </a:lvl4pPr>
-            <a:lvl5pPr algn="ctr">
-              <a:defRPr sz="1050" b="1">
-                <a:solidFill>
-                  <a:srgbClr val="FFFFFF"/>
-                </a:solidFill>
-                <a:latin typeface="Malgun Gothic"/>
-                <a:ea typeface="Malgun Gothic"/>
-                <a:cs typeface="Malgun Gothic"/>
-              </a:defRPr>
-            </a:lvl5pPr>
-            <a:lvl6pPr algn="ctr">
-              <a:defRPr sz="1050" b="1">
-                <a:solidFill>
-                  <a:srgbClr val="FFFFFF"/>
-                </a:solidFill>
-                <a:latin typeface="Malgun Gothic"/>
-                <a:ea typeface="Malgun Gothic"/>
-                <a:cs typeface="Malgun Gothic"/>
-              </a:defRPr>
-            </a:lvl6pPr>
-            <a:lvl7pPr algn="ctr">
-              <a:defRPr sz="1050" b="1">
-                <a:solidFill>
-                  <a:srgbClr val="FFFFFF"/>
-                </a:solidFill>
-                <a:latin typeface="Malgun Gothic"/>
-                <a:ea typeface="Malgun Gothic"/>
-                <a:cs typeface="Malgun Gothic"/>
-              </a:defRPr>
-            </a:lvl7pPr>
-            <a:lvl8pPr algn="ctr">
-              <a:defRPr sz="1050" b="1">
-                <a:solidFill>
-                  <a:srgbClr val="FFFFFF"/>
-                </a:solidFill>
-                <a:latin typeface="Malgun Gothic"/>
-                <a:ea typeface="Malgun Gothic"/>
-                <a:cs typeface="Malgun Gothic"/>
-              </a:defRPr>
-            </a:lvl8pPr>
-            <a:lvl9pPr algn="ctr">
-              <a:defRPr sz="1050" b="1">
-                <a:solidFill>
-                  <a:srgbClr val="FFFFFF"/>
-                </a:solidFill>
-                <a:latin typeface="Malgun Gothic"/>
-                <a:ea typeface="Malgun Gothic"/>
-                <a:cs typeface="Malgun Gothic"/>
-              </a:defRPr>
-            </a:lvl9pPr>
-          </a:lstStyle>
-          <a:p xmlns:a="http://schemas.openxmlformats.org/drawingml/2006/main">
-            <a:pPr algn="ctr">
-              <a:defRPr sz="1050" b="1">
-                <a:solidFill>
-                  <a:srgbClr val="FFFFFF"/>
-                </a:solidFill>
-                <a:latin typeface="Malgun Gothic"/>
-                <a:ea typeface="Malgun Gothic"/>
-                <a:cs typeface="Malgun Gothic"/>
-              </a:defRPr>
-            </a:pPr>
-            <a:r>
-              <a:rPr sz="1050" b="1">
-                <a:solidFill>
-                  <a:srgbClr val="FFFFFF"/>
-                </a:solidFill>
-                <a:latin typeface="Malgun Gothic"/>
-                <a:ea typeface="Malgun Gothic"/>
-                <a:cs typeface="Malgun Gothic"/>
-              </a:rPr>
-              <a:t>05</a:t>
-            </a:r>
-          </a:p>
-        </p:txBody>
-      </p:sp>
-      <p:sp>
-        <p:nvSpPr>
-          <p:cNvPr id="24" name="">
-            <a:extLst xmlns:a="http://schemas.openxmlformats.org/drawingml/2006/main">
-              <a:ext uri="{FF2B5EF4-FFF2-40B4-BE49-F238E27FC236}">
-                <a16:creationId xmlns:a16="http://schemas.microsoft.com/office/drawing/2014/main" id="{F40DA23D-CF45-477D-9D54-3CBE8D587604}"/>
-              </a:ext>
-            </a:extLst>
-          </p:cNvPr>
-          <p:cNvSpPr>
-            <a:spLocks xmlns:a="http://schemas.openxmlformats.org/drawingml/2006/main" noGrp="1"/>
-          </p:cNvSpPr>
-          <p:nvPr/>
-        </p:nvSpPr>
-        <p:spPr>
-          <a:xfrm xmlns:a="http://schemas.openxmlformats.org/drawingml/2006/main">
-            <a:off x="1352550" y="4972050"/>
-            <a:ext cx="2190750" cy="285750"/>
-          </a:xfrm>
-          <a:prstGeom xmlns:a="http://schemas.openxmlformats.org/drawingml/2006/main" prst="rect">
-            <a:avLst/>
-          </a:prstGeom>
-          <a:noFill xmlns:a="http://schemas.openxmlformats.org/drawingml/2006/main"/>
-          <a:ln xmlns:a="http://schemas.openxmlformats.org/drawingml/2006/main" w="0">
-            <a:noFill/>
-            <a:prstDash val="solid"/>
-          </a:ln>
-        </p:spPr>
-        <p:txBody>
-          <a:bodyPr xmlns:a="http://schemas.openxmlformats.org/drawingml/2006/main" wrap="square" lIns="0" tIns="0" rIns="0" bIns="0" anchor="t">
-            <a:normAutofit fontScale="100000"/>
-          </a:bodyPr>
-          <a:lstStyle xmlns:a="http://schemas.openxmlformats.org/drawingml/2006/main">
-            <a:defPPr algn="l">
-              <a:defRPr sz="1425" b="1">
-                <a:solidFill>
-                  <a:srgbClr val="73D1CC"/>
-                </a:solidFill>
-                <a:latin typeface="Malgun Gothic"/>
-                <a:ea typeface="Malgun Gothic"/>
-                <a:cs typeface="Malgun Gothic"/>
-              </a:defRPr>
-            </a:defPPr>
-            <a:lvl1pPr algn="l">
-              <a:defRPr sz="1425" b="1">
-                <a:solidFill>
-                  <a:srgbClr val="73D1CC"/>
-                </a:solidFill>
-                <a:latin typeface="Malgun Gothic"/>
-                <a:ea typeface="Malgun Gothic"/>
-                <a:cs typeface="Malgun Gothic"/>
-              </a:defRPr>
-            </a:lvl1pPr>
-            <a:lvl2pPr algn="l">
-              <a:defRPr sz="1425" b="1">
-                <a:solidFill>
-                  <a:srgbClr val="73D1CC"/>
-                </a:solidFill>
-                <a:latin typeface="Malgun Gothic"/>
-                <a:ea typeface="Malgun Gothic"/>
-                <a:cs typeface="Malgun Gothic"/>
-              </a:defRPr>
-            </a:lvl2pPr>
-            <a:lvl3pPr algn="l">
-              <a:defRPr sz="1425" b="1">
-                <a:solidFill>
-                  <a:srgbClr val="73D1CC"/>
-                </a:solidFill>
-                <a:latin typeface="Malgun Gothic"/>
-                <a:ea typeface="Malgun Gothic"/>
-                <a:cs typeface="Malgun Gothic"/>
-              </a:defRPr>
-            </a:lvl3pPr>
-            <a:lvl4pPr algn="l">
-              <a:defRPr sz="1425" b="1">
-                <a:solidFill>
-                  <a:srgbClr val="73D1CC"/>
-                </a:solidFill>
-                <a:latin typeface="Malgun Gothic"/>
-                <a:ea typeface="Malgun Gothic"/>
-                <a:cs typeface="Malgun Gothic"/>
-              </a:defRPr>
-            </a:lvl4pPr>
-            <a:lvl5pPr algn="l">
-              <a:defRPr sz="1425" b="1">
-                <a:solidFill>
-                  <a:srgbClr val="73D1CC"/>
-                </a:solidFill>
-                <a:latin typeface="Malgun Gothic"/>
-                <a:ea typeface="Malgun Gothic"/>
-                <a:cs typeface="Malgun Gothic"/>
-              </a:defRPr>
-            </a:lvl5pPr>
-            <a:lvl6pPr algn="l">
-              <a:defRPr sz="1425" b="1">
-                <a:solidFill>
-                  <a:srgbClr val="73D1CC"/>
-                </a:solidFill>
-                <a:latin typeface="Malgun Gothic"/>
-                <a:ea typeface="Malgun Gothic"/>
-                <a:cs typeface="Malgun Gothic"/>
-              </a:defRPr>
-            </a:lvl6pPr>
-            <a:lvl7pPr algn="l">
-              <a:defRPr sz="1425" b="1">
-                <a:solidFill>
-                  <a:srgbClr val="73D1CC"/>
-                </a:solidFill>
-                <a:latin typeface="Malgun Gothic"/>
-                <a:ea typeface="Malgun Gothic"/>
-                <a:cs typeface="Malgun Gothic"/>
-              </a:defRPr>
-            </a:lvl7pPr>
-            <a:lvl8pPr algn="l">
-              <a:defRPr sz="1425" b="1">
-                <a:solidFill>
-                  <a:srgbClr val="73D1CC"/>
-                </a:solidFill>
-                <a:latin typeface="Malgun Gothic"/>
-                <a:ea typeface="Malgun Gothic"/>
-                <a:cs typeface="Malgun Gothic"/>
-              </a:defRPr>
-            </a:lvl8pPr>
-            <a:lvl9pPr algn="l">
-              <a:defRPr sz="1425" b="1">
-                <a:solidFill>
-                  <a:srgbClr val="73D1CC"/>
-                </a:solidFill>
-                <a:latin typeface="Malgun Gothic"/>
-                <a:ea typeface="Malgun Gothic"/>
-                <a:cs typeface="Malgun Gothic"/>
-              </a:defRPr>
-            </a:lvl9pPr>
-          </a:lstStyle>
-          <a:p xmlns:a="http://schemas.openxmlformats.org/drawingml/2006/main">
-            <a:pPr algn="l">
-              <a:defRPr sz="1425" b="1">
-                <a:solidFill>
-                  <a:srgbClr val="73D1CC"/>
-                </a:solidFill>
-                <a:latin typeface="Malgun Gothic"/>
-                <a:ea typeface="Malgun Gothic"/>
-                <a:cs typeface="Malgun Gothic"/>
-              </a:defRPr>
-            </a:pPr>
-            <a:r>
-              <a:rPr sz="1425" b="1">
-                <a:solidFill>
-                  <a:srgbClr val="73D1CC"/>
-                </a:solidFill>
-                <a:latin typeface="Malgun Gothic"/>
-                <a:ea typeface="Malgun Gothic"/>
-                <a:cs typeface="Malgun Gothic"/>
-              </a:rPr>
-              <a:t>팀 통합</a:t>
-            </a:r>
-          </a:p>
-        </p:txBody>
-      </p:sp>
-      <p:sp>
-        <p:nvSpPr>
-          <p:cNvPr id="25" name="">
-            <a:extLst xmlns:a="http://schemas.openxmlformats.org/drawingml/2006/main">
-              <a:ext uri="{FF2B5EF4-FFF2-40B4-BE49-F238E27FC236}">
-                <a16:creationId xmlns:a16="http://schemas.microsoft.com/office/drawing/2014/main" id="{731A2717-DB3F-4194-8B69-D6AB999B1728}"/>
-              </a:ext>
-            </a:extLst>
-          </p:cNvPr>
-          <p:cNvSpPr>
-            <a:spLocks xmlns:a="http://schemas.openxmlformats.org/drawingml/2006/main" noGrp="1"/>
-          </p:cNvSpPr>
-          <p:nvPr/>
-        </p:nvSpPr>
-        <p:spPr>
-          <a:xfrm xmlns:a="http://schemas.openxmlformats.org/drawingml/2006/main">
-            <a:off x="3562350" y="4972050"/>
-            <a:ext cx="7810500" cy="514350"/>
-          </a:xfrm>
-          <a:prstGeom xmlns:a="http://schemas.openxmlformats.org/drawingml/2006/main" prst="rect">
-            <a:avLst/>
-          </a:prstGeom>
-          <a:noFill xmlns:a="http://schemas.openxmlformats.org/drawingml/2006/main"/>
-          <a:ln xmlns:a="http://schemas.openxmlformats.org/drawingml/2006/main" w="0">
-            <a:noFill/>
-            <a:prstDash val="solid"/>
-          </a:ln>
-        </p:spPr>
-        <p:txBody>
-          <a:bodyPr xmlns:a="http://schemas.openxmlformats.org/drawingml/2006/main" wrap="square" lIns="0" tIns="0" rIns="0" bIns="0" anchor="t">
-            <a:normAutofit fontScale="100000"/>
-          </a:bodyPr>
-          <a:lstStyle xmlns:a="http://schemas.openxmlformats.org/drawingml/2006/main">
-            <a:defPPr algn="l">
-              <a:defRPr sz="1350" b="0">
-                <a:solidFill>
-                  <a:srgbClr val="FFFFFF"/>
-                </a:solidFill>
-                <a:latin typeface="Malgun Gothic"/>
-                <a:ea typeface="Malgun Gothic"/>
-                <a:cs typeface="Malgun Gothic"/>
-              </a:defRPr>
-            </a:defPPr>
-            <a:lvl1pPr algn="l">
-              <a:defRPr sz="1350" b="0">
-                <a:solidFill>
-                  <a:srgbClr val="FFFFFF"/>
-                </a:solidFill>
-                <a:latin typeface="Malgun Gothic"/>
-                <a:ea typeface="Malgun Gothic"/>
-                <a:cs typeface="Malgun Gothic"/>
-              </a:defRPr>
-            </a:lvl1pPr>
-            <a:lvl2pPr algn="l">
-              <a:defRPr sz="1350" b="0">
-                <a:solidFill>
-                  <a:srgbClr val="FFFFFF"/>
-                </a:solidFill>
-                <a:latin typeface="Malgun Gothic"/>
-                <a:ea typeface="Malgun Gothic"/>
-                <a:cs typeface="Malgun Gothic"/>
-              </a:defRPr>
-            </a:lvl2pPr>
-            <a:lvl3pPr algn="l">
-              <a:defRPr sz="1350" b="0">
-                <a:solidFill>
-                  <a:srgbClr val="FFFFFF"/>
-                </a:solidFill>
-                <a:latin typeface="Malgun Gothic"/>
-                <a:ea typeface="Malgun Gothic"/>
-                <a:cs typeface="Malgun Gothic"/>
-              </a:defRPr>
-            </a:lvl3pPr>
-            <a:lvl4pPr algn="l">
-              <a:defRPr sz="1350" b="0">
-                <a:solidFill>
-                  <a:srgbClr val="FFFFFF"/>
-                </a:solidFill>
-                <a:latin typeface="Malgun Gothic"/>
-                <a:ea typeface="Malgun Gothic"/>
-                <a:cs typeface="Malgun Gothic"/>
-              </a:defRPr>
-            </a:lvl4pPr>
-            <a:lvl5pPr algn="l">
-              <a:defRPr sz="1350" b="0">
-                <a:solidFill>
-                  <a:srgbClr val="FFFFFF"/>
-                </a:solidFill>
-                <a:latin typeface="Malgun Gothic"/>
-                <a:ea typeface="Malgun Gothic"/>
-                <a:cs typeface="Malgun Gothic"/>
-              </a:defRPr>
-            </a:lvl5pPr>
-            <a:lvl6pPr algn="l">
-              <a:defRPr sz="1350" b="0">
-                <a:solidFill>
-                  <a:srgbClr val="FFFFFF"/>
-                </a:solidFill>
-                <a:latin typeface="Malgun Gothic"/>
-                <a:ea typeface="Malgun Gothic"/>
-                <a:cs typeface="Malgun Gothic"/>
-              </a:defRPr>
-            </a:lvl6pPr>
-            <a:lvl7pPr algn="l">
-              <a:defRPr sz="1350" b="0">
-                <a:solidFill>
-                  <a:srgbClr val="FFFFFF"/>
-                </a:solidFill>
-                <a:latin typeface="Malgun Gothic"/>
-                <a:ea typeface="Malgun Gothic"/>
-                <a:cs typeface="Malgun Gothic"/>
-              </a:defRPr>
-            </a:lvl7pPr>
-            <a:lvl8pPr algn="l">
-              <a:defRPr sz="1350" b="0">
-                <a:solidFill>
-                  <a:srgbClr val="FFFFFF"/>
-                </a:solidFill>
-                <a:latin typeface="Malgun Gothic"/>
-                <a:ea typeface="Malgun Gothic"/>
-                <a:cs typeface="Malgun Gothic"/>
-              </a:defRPr>
-            </a:lvl8pPr>
-            <a:lvl9pPr algn="l">
-              <a:defRPr sz="1350" b="0">
-                <a:solidFill>
-                  <a:srgbClr val="FFFFFF"/>
-                </a:solidFill>
-                <a:latin typeface="Malgun Gothic"/>
-                <a:ea typeface="Malgun Gothic"/>
-                <a:cs typeface="Malgun Gothic"/>
-              </a:defRPr>
-            </a:lvl9pPr>
-          </a:lstStyle>
-          <a:p xmlns:a="http://schemas.openxmlformats.org/drawingml/2006/main">
-            <a:pPr algn="l">
-              <a:defRPr sz="1350" b="0">
-                <a:solidFill>
-                  <a:srgbClr val="FFFFFF"/>
-                </a:solidFill>
-                <a:latin typeface="Malgun Gothic"/>
-                <a:ea typeface="Malgun Gothic"/>
-                <a:cs typeface="Malgun Gothic"/>
-              </a:defRPr>
-            </a:pPr>
-            <a:r>
-              <a:rPr sz="1350" b="0">
-                <a:solidFill>
-                  <a:srgbClr val="FFFFFF"/>
-                </a:solidFill>
-                <a:latin typeface="Malgun Gothic"/>
-                <a:ea typeface="Malgun Gothic"/>
-                <a:cs typeface="Malgun Gothic"/>
-              </a:rPr>
-              <a:t>HOST 로그인·라우팅·공통 배포에서 팀 인증과 Supabase 역할을 어떻게 연결할까요?</a:t>
-            </a:r>
-          </a:p>
-        </p:txBody>
-      </p:sp>
-      <p:sp>
-        <p:nvSpPr>
-          <p:cNvPr id="26" name="">
-            <a:extLst xmlns:a="http://schemas.openxmlformats.org/drawingml/2006/main">
-              <a:ext uri="{FF2B5EF4-FFF2-40B4-BE49-F238E27FC236}">
-                <a16:creationId xmlns:a16="http://schemas.microsoft.com/office/drawing/2014/main" id="{85DDAE13-FCBF-4F27-B712-5881DBEEC183}"/>
-              </a:ext>
-            </a:extLst>
-          </p:cNvPr>
-          <p:cNvSpPr>
-            <a:spLocks xmlns:a="http://schemas.openxmlformats.org/drawingml/2006/main" noGrp="1"/>
-          </p:cNvSpPr>
-          <p:nvPr/>
-        </p:nvSpPr>
-        <p:spPr>
-          <a:xfrm xmlns:a="http://schemas.openxmlformats.org/drawingml/2006/main">
-            <a:off x="609600" y="5953125"/>
-            <a:ext cx="10972800" cy="266700"/>
+            <a:off x="609600" y="5791200"/>
+            <a:ext cx="10972800" cy="361950"/>
           </a:xfrm>
           <a:prstGeom xmlns:a="http://schemas.openxmlformats.org/drawingml/2006/main" prst="rect">
             <a:avLst/>
@@ -12431,9 +10403,9 @@
           </a:bodyPr>
           <a:lstStyle xmlns:a="http://schemas.openxmlformats.org/drawingml/2006/main">
             <a:defPPr algn="ctr">
-              <a:defRPr sz="1500" b="1">
-                <a:solidFill>
-                  <a:srgbClr val="FFFFFF"/>
+              <a:defRPr sz="1875" b="1">
+                <a:solidFill>
+                  <a:srgbClr val="73D1CC"/>
                 </a:solidFill>
                 <a:latin typeface="Malgun Gothic"/>
                 <a:ea typeface="Malgun Gothic"/>
@@ -12441,9 +10413,9 @@
               </a:defRPr>
             </a:defPPr>
             <a:lvl1pPr algn="ctr">
-              <a:defRPr sz="1500" b="1">
-                <a:solidFill>
-                  <a:srgbClr val="FFFFFF"/>
+              <a:defRPr sz="1875" b="1">
+                <a:solidFill>
+                  <a:srgbClr val="73D1CC"/>
                 </a:solidFill>
                 <a:latin typeface="Malgun Gothic"/>
                 <a:ea typeface="Malgun Gothic"/>
@@ -12451,9 +10423,9 @@
               </a:defRPr>
             </a:lvl1pPr>
             <a:lvl2pPr algn="ctr">
-              <a:defRPr sz="1500" b="1">
-                <a:solidFill>
-                  <a:srgbClr val="FFFFFF"/>
+              <a:defRPr sz="1875" b="1">
+                <a:solidFill>
+                  <a:srgbClr val="73D1CC"/>
                 </a:solidFill>
                 <a:latin typeface="Malgun Gothic"/>
                 <a:ea typeface="Malgun Gothic"/>
@@ -12461,9 +10433,9 @@
               </a:defRPr>
             </a:lvl2pPr>
             <a:lvl3pPr algn="ctr">
-              <a:defRPr sz="1500" b="1">
-                <a:solidFill>
-                  <a:srgbClr val="FFFFFF"/>
+              <a:defRPr sz="1875" b="1">
+                <a:solidFill>
+                  <a:srgbClr val="73D1CC"/>
                 </a:solidFill>
                 <a:latin typeface="Malgun Gothic"/>
                 <a:ea typeface="Malgun Gothic"/>
@@ -12471,9 +10443,9 @@
               </a:defRPr>
             </a:lvl3pPr>
             <a:lvl4pPr algn="ctr">
-              <a:defRPr sz="1500" b="1">
-                <a:solidFill>
-                  <a:srgbClr val="FFFFFF"/>
+              <a:defRPr sz="1875" b="1">
+                <a:solidFill>
+                  <a:srgbClr val="73D1CC"/>
                 </a:solidFill>
                 <a:latin typeface="Malgun Gothic"/>
                 <a:ea typeface="Malgun Gothic"/>
@@ -12481,9 +10453,9 @@
               </a:defRPr>
             </a:lvl4pPr>
             <a:lvl5pPr algn="ctr">
-              <a:defRPr sz="1500" b="1">
-                <a:solidFill>
-                  <a:srgbClr val="FFFFFF"/>
+              <a:defRPr sz="1875" b="1">
+                <a:solidFill>
+                  <a:srgbClr val="73D1CC"/>
                 </a:solidFill>
                 <a:latin typeface="Malgun Gothic"/>
                 <a:ea typeface="Malgun Gothic"/>
@@ -12491,9 +10463,9 @@
               </a:defRPr>
             </a:lvl5pPr>
             <a:lvl6pPr algn="ctr">
-              <a:defRPr sz="1500" b="1">
-                <a:solidFill>
-                  <a:srgbClr val="FFFFFF"/>
+              <a:defRPr sz="1875" b="1">
+                <a:solidFill>
+                  <a:srgbClr val="73D1CC"/>
                 </a:solidFill>
                 <a:latin typeface="Malgun Gothic"/>
                 <a:ea typeface="Malgun Gothic"/>
@@ -12501,9 +10473,9 @@
               </a:defRPr>
             </a:lvl6pPr>
             <a:lvl7pPr algn="ctr">
-              <a:defRPr sz="1500" b="1">
-                <a:solidFill>
-                  <a:srgbClr val="FFFFFF"/>
+              <a:defRPr sz="1875" b="1">
+                <a:solidFill>
+                  <a:srgbClr val="73D1CC"/>
                 </a:solidFill>
                 <a:latin typeface="Malgun Gothic"/>
                 <a:ea typeface="Malgun Gothic"/>
@@ -12511,9 +10483,9 @@
               </a:defRPr>
             </a:lvl7pPr>
             <a:lvl8pPr algn="ctr">
-              <a:defRPr sz="1500" b="1">
-                <a:solidFill>
-                  <a:srgbClr val="FFFFFF"/>
+              <a:defRPr sz="1875" b="1">
+                <a:solidFill>
+                  <a:srgbClr val="73D1CC"/>
                 </a:solidFill>
                 <a:latin typeface="Malgun Gothic"/>
                 <a:ea typeface="Malgun Gothic"/>
@@ -12521,9 +10493,9 @@
               </a:defRPr>
             </a:lvl8pPr>
             <a:lvl9pPr algn="ctr">
-              <a:defRPr sz="1500" b="1">
-                <a:solidFill>
-                  <a:srgbClr val="FFFFFF"/>
+              <a:defRPr sz="1875" b="1">
+                <a:solidFill>
+                  <a:srgbClr val="73D1CC"/>
                 </a:solidFill>
                 <a:latin typeface="Malgun Gothic"/>
                 <a:ea typeface="Malgun Gothic"/>
@@ -12533,9 +10505,9 @@
           </a:lstStyle>
           <a:p xmlns:a="http://schemas.openxmlformats.org/drawingml/2006/main">
             <a:pPr algn="ctr">
-              <a:defRPr sz="1500" b="1">
-                <a:solidFill>
-                  <a:srgbClr val="FFFFFF"/>
+              <a:defRPr sz="1875" b="1">
+                <a:solidFill>
+                  <a:srgbClr val="73D1CC"/>
                 </a:solidFill>
                 <a:latin typeface="Malgun Gothic"/>
                 <a:ea typeface="Malgun Gothic"/>
@@ -12543,15 +10515,15 @@
               </a:defRPr>
             </a:pPr>
             <a:r>
-              <a:rPr sz="1500" b="1">
-                <a:solidFill>
-                  <a:srgbClr val="FFFFFF"/>
+              <a:rPr sz="1875" b="1">
+                <a:solidFill>
+                  <a:srgbClr val="73D1CC"/>
                 </a:solidFill>
                 <a:latin typeface="Malgun Gothic"/>
                 <a:ea typeface="Malgun Gothic"/>
                 <a:cs typeface="Malgun Gothic"/>
               </a:rPr>
-              <a:t>오늘 결정할 것  ·  다음 2주 MVP의 검증 대상 하나와 측정 기준 하나</a:t>
+              <a:t>“여행에서 만남으로, 만남에서 새로운 경험으로.”</a:t>
             </a:r>
           </a:p>
         </p:txBody>
@@ -12559,7 +10531,7 @@
     </p:spTree>
     <p:extLst>
       <p:ext uri="{BB962C8B-B14F-4D97-AF65-F5344CB8AC3E}">
-        <p14:creationId xmlns:p14="http://schemas.microsoft.com/office/powerpoint/2010/main" val="1623405131"/>
+        <p14:creationId xmlns:p14="http://schemas.microsoft.com/office/powerpoint/2010/main" val="1218095406"/>
       </p:ext>
     </p:extLst>
   </p:cSld>
@@ -12590,7 +10562,7 @@
           <p:cNvPr id="30" name="">
             <a:extLst xmlns:a="http://schemas.openxmlformats.org/drawingml/2006/main">
               <a:ext uri="{FF2B5EF4-FFF2-40B4-BE49-F238E27FC236}">
-                <a16:creationId xmlns:a16="http://schemas.microsoft.com/office/drawing/2014/main" id="{8E2106CA-8DB5-4933-AD41-C87741C3896F}"/>
+                <a16:creationId xmlns:a16="http://schemas.microsoft.com/office/drawing/2014/main" id="{AD289060-1F81-4467-A5D2-CC14F2908008}"/>
               </a:ext>
             </a:extLst>
           </p:cNvPr>
@@ -12749,7 +10721,7 @@
           <p:cNvPr id="2" name="">
             <a:extLst xmlns:a="http://schemas.openxmlformats.org/drawingml/2006/main">
               <a:ext uri="{FF2B5EF4-FFF2-40B4-BE49-F238E27FC236}">
-                <a16:creationId xmlns:a16="http://schemas.microsoft.com/office/drawing/2014/main" id="{8576AC7B-35E4-4CE4-AA85-9FE31CEA458D}"/>
+                <a16:creationId xmlns:a16="http://schemas.microsoft.com/office/drawing/2014/main" id="{E0FC824D-D355-4901-B7C0-366324CB1560}"/>
               </a:ext>
             </a:extLst>
           </p:cNvPr>
@@ -12898,7 +10870,7 @@
                 <a:ea typeface="Malgun Gothic"/>
                 <a:cs typeface="Malgun Gothic"/>
               </a:rPr>
-              <a:t>다음 단계는 기능 추가보다 작게 검증하고 정리하기</a:t>
+              <a:t>로컬이음의 다음 개발 방향</a:t>
             </a:r>
           </a:p>
         </p:txBody>
@@ -12908,7 +10880,7 @@
           <p:cNvPr id="3" name="">
             <a:extLst xmlns:a="http://schemas.openxmlformats.org/drawingml/2006/main">
               <a:ext uri="{FF2B5EF4-FFF2-40B4-BE49-F238E27FC236}">
-                <a16:creationId xmlns:a16="http://schemas.microsoft.com/office/drawing/2014/main" id="{3ACA739C-C128-48E7-8A9D-706D3AF22E02}"/>
+                <a16:creationId xmlns:a16="http://schemas.microsoft.com/office/drawing/2014/main" id="{0AD44306-F6A1-4266-89A0-43CF02356DE6}"/>
               </a:ext>
             </a:extLst>
           </p:cNvPr>
@@ -12941,7 +10913,7 @@
           <p:cNvPr id="4" name="">
             <a:extLst xmlns:a="http://schemas.openxmlformats.org/drawingml/2006/main">
               <a:ext uri="{FF2B5EF4-FFF2-40B4-BE49-F238E27FC236}">
-                <a16:creationId xmlns:a16="http://schemas.microsoft.com/office/drawing/2014/main" id="{6833BD2D-B791-491C-A946-FBE1644B9942}"/>
+                <a16:creationId xmlns:a16="http://schemas.microsoft.com/office/drawing/2014/main" id="{B8FF8C04-F823-4564-9CF7-3F4C8C8FF47E}"/>
               </a:ext>
             </a:extLst>
           </p:cNvPr>
@@ -13090,7 +11062,7 @@
                 <a:ea typeface="Malgun Gothic"/>
                 <a:cs typeface="Malgun Gothic"/>
               </a:rPr>
-              <a:t>LOCAL EUM  ·  멘토링 브리프  ·  2026.10</a:t>
+              <a:t>LOCAL EUM  ·  기획과 구현  ·  2026.10</a:t>
             </a:r>
           </a:p>
         </p:txBody>
@@ -13100,7 +11072,7 @@
           <p:cNvPr id="5" name="">
             <a:extLst xmlns:a="http://schemas.openxmlformats.org/drawingml/2006/main">
               <a:ext uri="{FF2B5EF4-FFF2-40B4-BE49-F238E27FC236}">
-                <a16:creationId xmlns:a16="http://schemas.microsoft.com/office/drawing/2014/main" id="{33C9E426-C9D1-471B-A6E7-99DCF1D91EE4}"/>
+                <a16:creationId xmlns:a16="http://schemas.microsoft.com/office/drawing/2014/main" id="{A5734BF1-43E4-477F-9117-254CC4FC409C}"/>
               </a:ext>
             </a:extLst>
           </p:cNvPr>
@@ -13259,7 +11231,7 @@
           <p:cNvPr id="6" name="">
             <a:extLst xmlns:a="http://schemas.openxmlformats.org/drawingml/2006/main">
               <a:ext uri="{FF2B5EF4-FFF2-40B4-BE49-F238E27FC236}">
-                <a16:creationId xmlns:a16="http://schemas.microsoft.com/office/drawing/2014/main" id="{C981C59A-81EF-4965-A59E-EBF85EDFC6E0}"/>
+                <a16:creationId xmlns:a16="http://schemas.microsoft.com/office/drawing/2014/main" id="{3AB39D7F-A03D-4EAF-AA79-687436ACB41B}"/>
               </a:ext>
             </a:extLst>
           </p:cNvPr>
@@ -13292,7 +11264,7 @@
           <p:cNvPr id="7" name="">
             <a:extLst xmlns:a="http://schemas.openxmlformats.org/drawingml/2006/main">
               <a:ext uri="{FF2B5EF4-FFF2-40B4-BE49-F238E27FC236}">
-                <a16:creationId xmlns:a16="http://schemas.microsoft.com/office/drawing/2014/main" id="{535D640A-11D6-4CAA-9BEC-249498FDB63E}"/>
+                <a16:creationId xmlns:a16="http://schemas.microsoft.com/office/drawing/2014/main" id="{2A7EFC45-4432-4CDD-974E-3C0ED74E7366}"/>
               </a:ext>
             </a:extLst>
           </p:cNvPr>
@@ -13325,7 +11297,7 @@
           <p:cNvPr id="8" name="">
             <a:extLst xmlns:a="http://schemas.openxmlformats.org/drawingml/2006/main">
               <a:ext uri="{FF2B5EF4-FFF2-40B4-BE49-F238E27FC236}">
-                <a16:creationId xmlns:a16="http://schemas.microsoft.com/office/drawing/2014/main" id="{6286C65F-9E61-4FF2-B69E-5A9A4A4F53AC}"/>
+                <a16:creationId xmlns:a16="http://schemas.microsoft.com/office/drawing/2014/main" id="{FE795E58-1079-4036-B99F-E465BE983109}"/>
               </a:ext>
             </a:extLst>
           </p:cNvPr>
@@ -13484,7 +11456,7 @@
           <p:cNvPr id="9" name="">
             <a:extLst xmlns:a="http://schemas.openxmlformats.org/drawingml/2006/main">
               <a:ext uri="{FF2B5EF4-FFF2-40B4-BE49-F238E27FC236}">
-                <a16:creationId xmlns:a16="http://schemas.microsoft.com/office/drawing/2014/main" id="{1663E1A8-4617-4D6F-B40D-8A37751A4A37}"/>
+                <a16:creationId xmlns:a16="http://schemas.microsoft.com/office/drawing/2014/main" id="{1DA01AD6-F810-4636-A9DD-5171D8C5D392}"/>
               </a:ext>
             </a:extLst>
           </p:cNvPr>
@@ -13643,7 +11615,7 @@
           <p:cNvPr id="10" name="">
             <a:extLst xmlns:a="http://schemas.openxmlformats.org/drawingml/2006/main">
               <a:ext uri="{FF2B5EF4-FFF2-40B4-BE49-F238E27FC236}">
-                <a16:creationId xmlns:a16="http://schemas.microsoft.com/office/drawing/2014/main" id="{96F5327B-988A-4DC9-BA7B-135081C21441}"/>
+                <a16:creationId xmlns:a16="http://schemas.microsoft.com/office/drawing/2014/main" id="{96561951-C259-4A98-8750-CFC1535A99CF}"/>
               </a:ext>
             </a:extLst>
           </p:cNvPr>
@@ -13825,7 +11797,7 @@
           <p:cNvPr id="11" name="">
             <a:extLst xmlns:a="http://schemas.openxmlformats.org/drawingml/2006/main">
               <a:ext uri="{FF2B5EF4-FFF2-40B4-BE49-F238E27FC236}">
-                <a16:creationId xmlns:a16="http://schemas.microsoft.com/office/drawing/2014/main" id="{40430AC7-CE9A-4429-A2DE-3AF4B8BF999B}"/>
+                <a16:creationId xmlns:a16="http://schemas.microsoft.com/office/drawing/2014/main" id="{4B5800EC-88BA-460B-86F0-853CE3783807}"/>
               </a:ext>
             </a:extLst>
           </p:cNvPr>
@@ -13858,7 +11830,7 @@
           <p:cNvPr id="12" name="">
             <a:extLst xmlns:a="http://schemas.openxmlformats.org/drawingml/2006/main">
               <a:ext uri="{FF2B5EF4-FFF2-40B4-BE49-F238E27FC236}">
-                <a16:creationId xmlns:a16="http://schemas.microsoft.com/office/drawing/2014/main" id="{1394E960-6183-499A-9933-EC7823A71948}"/>
+                <a16:creationId xmlns:a16="http://schemas.microsoft.com/office/drawing/2014/main" id="{DDEDF2B9-AE05-421F-9326-9895E8D822E3}"/>
               </a:ext>
             </a:extLst>
           </p:cNvPr>
@@ -13891,7 +11863,7 @@
           <p:cNvPr id="13" name="">
             <a:extLst xmlns:a="http://schemas.openxmlformats.org/drawingml/2006/main">
               <a:ext uri="{FF2B5EF4-FFF2-40B4-BE49-F238E27FC236}">
-                <a16:creationId xmlns:a16="http://schemas.microsoft.com/office/drawing/2014/main" id="{B9276CB4-866C-4B6A-A6A3-21E2D57BA721}"/>
+                <a16:creationId xmlns:a16="http://schemas.microsoft.com/office/drawing/2014/main" id="{BBA49E59-CF41-420F-931F-36DCB0252218}"/>
               </a:ext>
             </a:extLst>
           </p:cNvPr>
@@ -14050,7 +12022,7 @@
           <p:cNvPr id="14" name="">
             <a:extLst xmlns:a="http://schemas.openxmlformats.org/drawingml/2006/main">
               <a:ext uri="{FF2B5EF4-FFF2-40B4-BE49-F238E27FC236}">
-                <a16:creationId xmlns:a16="http://schemas.microsoft.com/office/drawing/2014/main" id="{738AAC36-03F9-4010-BB06-6BEB53680BF5}"/>
+                <a16:creationId xmlns:a16="http://schemas.microsoft.com/office/drawing/2014/main" id="{AAD11E37-C138-4A18-9595-9A7EC260FE3F}"/>
               </a:ext>
             </a:extLst>
           </p:cNvPr>
@@ -14209,7 +12181,7 @@
           <p:cNvPr id="15" name="">
             <a:extLst xmlns:a="http://schemas.openxmlformats.org/drawingml/2006/main">
               <a:ext uri="{FF2B5EF4-FFF2-40B4-BE49-F238E27FC236}">
-                <a16:creationId xmlns:a16="http://schemas.microsoft.com/office/drawing/2014/main" id="{C67A279E-9F58-4464-8EE1-982C664C5AAB}"/>
+                <a16:creationId xmlns:a16="http://schemas.microsoft.com/office/drawing/2014/main" id="{9B3ABB64-335D-44C6-9420-287F3830BBE4}"/>
               </a:ext>
             </a:extLst>
           </p:cNvPr>
@@ -14391,7 +12363,7 @@
           <p:cNvPr id="16" name="">
             <a:extLst xmlns:a="http://schemas.openxmlformats.org/drawingml/2006/main">
               <a:ext uri="{FF2B5EF4-FFF2-40B4-BE49-F238E27FC236}">
-                <a16:creationId xmlns:a16="http://schemas.microsoft.com/office/drawing/2014/main" id="{41FE70FC-8F23-4DAA-85F7-C79AFEDD6EA1}"/>
+                <a16:creationId xmlns:a16="http://schemas.microsoft.com/office/drawing/2014/main" id="{DC94A951-6739-47D2-9DE7-9912E89C1CC5}"/>
               </a:ext>
             </a:extLst>
           </p:cNvPr>
@@ -14424,7 +12396,7 @@
           <p:cNvPr id="17" name="">
             <a:extLst xmlns:a="http://schemas.openxmlformats.org/drawingml/2006/main">
               <a:ext uri="{FF2B5EF4-FFF2-40B4-BE49-F238E27FC236}">
-                <a16:creationId xmlns:a16="http://schemas.microsoft.com/office/drawing/2014/main" id="{89AB23B5-F1FF-45F0-A34E-041C4FDF7FFA}"/>
+                <a16:creationId xmlns:a16="http://schemas.microsoft.com/office/drawing/2014/main" id="{A2E2C97F-F2EF-45F7-9B19-32A697D416BC}"/>
               </a:ext>
             </a:extLst>
           </p:cNvPr>
@@ -14457,7 +12429,7 @@
           <p:cNvPr id="18" name="">
             <a:extLst xmlns:a="http://schemas.openxmlformats.org/drawingml/2006/main">
               <a:ext uri="{FF2B5EF4-FFF2-40B4-BE49-F238E27FC236}">
-                <a16:creationId xmlns:a16="http://schemas.microsoft.com/office/drawing/2014/main" id="{922692CB-E456-4F8A-AB3B-7CCD1C1FC259}"/>
+                <a16:creationId xmlns:a16="http://schemas.microsoft.com/office/drawing/2014/main" id="{90E817F8-FABF-4AB2-815B-336E6591F9B2}"/>
               </a:ext>
             </a:extLst>
           </p:cNvPr>
@@ -14616,7 +12588,7 @@
           <p:cNvPr id="19" name="">
             <a:extLst xmlns:a="http://schemas.openxmlformats.org/drawingml/2006/main">
               <a:ext uri="{FF2B5EF4-FFF2-40B4-BE49-F238E27FC236}">
-                <a16:creationId xmlns:a16="http://schemas.microsoft.com/office/drawing/2014/main" id="{33254EA8-EDCD-44A9-ACC2-1C60845437D0}"/>
+                <a16:creationId xmlns:a16="http://schemas.microsoft.com/office/drawing/2014/main" id="{1A574098-FFFB-43FA-9BF5-2099353A832B}"/>
               </a:ext>
             </a:extLst>
           </p:cNvPr>
@@ -14775,7 +12747,7 @@
           <p:cNvPr id="20" name="">
             <a:extLst xmlns:a="http://schemas.openxmlformats.org/drawingml/2006/main">
               <a:ext uri="{FF2B5EF4-FFF2-40B4-BE49-F238E27FC236}">
-                <a16:creationId xmlns:a16="http://schemas.microsoft.com/office/drawing/2014/main" id="{0282592D-F222-490B-8D9F-3F0BBB2828D6}"/>
+                <a16:creationId xmlns:a16="http://schemas.microsoft.com/office/drawing/2014/main" id="{1ED0FACC-9286-49D5-A7F0-FECBA213B927}"/>
               </a:ext>
             </a:extLst>
           </p:cNvPr>
@@ -14957,7 +12929,7 @@
           <p:cNvPr id="21" name="">
             <a:extLst xmlns:a="http://schemas.openxmlformats.org/drawingml/2006/main">
               <a:ext uri="{FF2B5EF4-FFF2-40B4-BE49-F238E27FC236}">
-                <a16:creationId xmlns:a16="http://schemas.microsoft.com/office/drawing/2014/main" id="{BD0AE0B3-C1DA-44CA-A45E-F4B15EAA91F4}"/>
+                <a16:creationId xmlns:a16="http://schemas.microsoft.com/office/drawing/2014/main" id="{1E4B53C2-A2F8-4158-84DD-1E7B8AD29FD2}"/>
               </a:ext>
             </a:extLst>
           </p:cNvPr>
@@ -14990,7 +12962,7 @@
           <p:cNvPr id="22" name="">
             <a:extLst xmlns:a="http://schemas.openxmlformats.org/drawingml/2006/main">
               <a:ext uri="{FF2B5EF4-FFF2-40B4-BE49-F238E27FC236}">
-                <a16:creationId xmlns:a16="http://schemas.microsoft.com/office/drawing/2014/main" id="{D3BF1FCF-A657-4B2D-AD20-EE6AAE1E264A}"/>
+                <a16:creationId xmlns:a16="http://schemas.microsoft.com/office/drawing/2014/main" id="{81A1CFEE-0FA7-4291-95CF-BB53A626BC3A}"/>
               </a:ext>
             </a:extLst>
           </p:cNvPr>
@@ -15023,7 +12995,7 @@
           <p:cNvPr id="23" name="">
             <a:extLst xmlns:a="http://schemas.openxmlformats.org/drawingml/2006/main">
               <a:ext uri="{FF2B5EF4-FFF2-40B4-BE49-F238E27FC236}">
-                <a16:creationId xmlns:a16="http://schemas.microsoft.com/office/drawing/2014/main" id="{8B55A397-972E-46F7-A211-28743965A6FD}"/>
+                <a16:creationId xmlns:a16="http://schemas.microsoft.com/office/drawing/2014/main" id="{3BF1F7DA-EC86-4D8C-A31C-3326F9EC3236}"/>
               </a:ext>
             </a:extLst>
           </p:cNvPr>
@@ -15182,7 +13154,7 @@
           <p:cNvPr id="24" name="">
             <a:extLst xmlns:a="http://schemas.openxmlformats.org/drawingml/2006/main">
               <a:ext uri="{FF2B5EF4-FFF2-40B4-BE49-F238E27FC236}">
-                <a16:creationId xmlns:a16="http://schemas.microsoft.com/office/drawing/2014/main" id="{74E682D2-72ED-4EA8-B540-9917B8ED97AB}"/>
+                <a16:creationId xmlns:a16="http://schemas.microsoft.com/office/drawing/2014/main" id="{8751B043-B37A-438D-B05B-D47137A5C075}"/>
               </a:ext>
             </a:extLst>
           </p:cNvPr>
@@ -15331,7 +13303,7 @@
                 <a:ea typeface="Malgun Gothic"/>
                 <a:cs typeface="Malgun Gothic"/>
               </a:rPr>
-              <a:t>출시·팀 연동 결정</a:t>
+              <a:t>공개 운영 준비</a:t>
             </a:r>
           </a:p>
         </p:txBody>
@@ -15341,7 +13313,7 @@
           <p:cNvPr id="25" name="">
             <a:extLst xmlns:a="http://schemas.openxmlformats.org/drawingml/2006/main">
               <a:ext uri="{FF2B5EF4-FFF2-40B4-BE49-F238E27FC236}">
-                <a16:creationId xmlns:a16="http://schemas.microsoft.com/office/drawing/2014/main" id="{2DFBEBAD-0498-4E1B-8C71-C2B87C81A5C5}"/>
+                <a16:creationId xmlns:a16="http://schemas.microsoft.com/office/drawing/2014/main" id="{C4A9DBB3-80F5-4F87-9CF2-A749B37B65FA}"/>
               </a:ext>
             </a:extLst>
           </p:cNvPr>
@@ -15490,7 +13462,7 @@
                 <a:ea typeface="Malgun Gothic"/>
                 <a:cs typeface="Malgun Gothic"/>
               </a:rPr>
-              <a:t>공통 배포·인증 접점 확정</a:t>
+              <a:t>장소·안내 정보 확인</a:t>
             </a:r>
           </a:p>
           <a:p xmlns:a="http://schemas.openxmlformats.org/drawingml/2006/main">
@@ -15513,7 +13485,7 @@
                 <a:ea typeface="Malgun Gothic"/>
                 <a:cs typeface="Malgun Gothic"/>
               </a:rPr>
-              <a:t>재검증 후 데모 공유</a:t>
+              <a:t>시연 데이터 운영 전환 검토</a:t>
             </a:r>
           </a:p>
         </p:txBody>
@@ -15523,7 +13495,7 @@
           <p:cNvPr id="26" name="">
             <a:extLst xmlns:a="http://schemas.openxmlformats.org/drawingml/2006/main">
               <a:ext uri="{FF2B5EF4-FFF2-40B4-BE49-F238E27FC236}">
-                <a16:creationId xmlns:a16="http://schemas.microsoft.com/office/drawing/2014/main" id="{2682E336-BB69-4C6B-95B4-DDAA1239B9B6}"/>
+                <a16:creationId xmlns:a16="http://schemas.microsoft.com/office/drawing/2014/main" id="{D705D6AB-A0F8-4056-ACE7-E2BE4B2741B2}"/>
               </a:ext>
             </a:extLst>
           </p:cNvPr>
@@ -15556,7 +13528,7 @@
           <p:cNvPr id="27" name="">
             <a:extLst xmlns:a="http://schemas.openxmlformats.org/drawingml/2006/main">
               <a:ext uri="{FF2B5EF4-FFF2-40B4-BE49-F238E27FC236}">
-                <a16:creationId xmlns:a16="http://schemas.microsoft.com/office/drawing/2014/main" id="{26E37FA3-D0D7-4D47-AD9A-3FD5BDDDC86C}"/>
+                <a16:creationId xmlns:a16="http://schemas.microsoft.com/office/drawing/2014/main" id="{5790E45A-45F4-4E31-A498-CBD66101032D}"/>
               </a:ext>
             </a:extLst>
           </p:cNvPr>
@@ -15705,7 +13677,7 @@
                 <a:ea typeface="Malgun Gothic"/>
                 <a:cs typeface="Malgun Gothic"/>
               </a:rPr>
-              <a:t>멘토링에서 합의할 산출물</a:t>
+              <a:t>기획 의도를 이어갈 개발 방향</a:t>
             </a:r>
           </a:p>
         </p:txBody>
@@ -15715,7 +13687,7 @@
           <p:cNvPr id="28" name="">
             <a:extLst xmlns:a="http://schemas.openxmlformats.org/drawingml/2006/main">
               <a:ext uri="{FF2B5EF4-FFF2-40B4-BE49-F238E27FC236}">
-                <a16:creationId xmlns:a16="http://schemas.microsoft.com/office/drawing/2014/main" id="{B1DAD393-840C-435E-8DA9-65329B4B05F4}"/>
+                <a16:creationId xmlns:a16="http://schemas.microsoft.com/office/drawing/2014/main" id="{58988EE7-2C3D-4085-96BB-4CC8B97B0B1B}"/>
               </a:ext>
             </a:extLst>
           </p:cNvPr>
@@ -15727,7 +13699,7 @@
         <p:spPr>
           <a:xfrm xmlns:a="http://schemas.openxmlformats.org/drawingml/2006/main">
             <a:off x="876300" y="5057775"/>
-            <a:ext cx="10382250" cy="323850"/>
+            <a:ext cx="10382250" cy="552450"/>
           </a:xfrm>
           <a:prstGeom xmlns:a="http://schemas.openxmlformats.org/drawingml/2006/main" prst="rect">
             <a:avLst/>
@@ -15744,7 +13716,7 @@
           </a:bodyPr>
           <a:lstStyle xmlns:a="http://schemas.openxmlformats.org/drawingml/2006/main">
             <a:defPPr algn="l">
-              <a:defRPr sz="1800" b="1">
+              <a:defRPr sz="1650" b="1">
                 <a:solidFill>
                   <a:srgbClr val="FFFFFF"/>
                 </a:solidFill>
@@ -15754,7 +13726,7 @@
               </a:defRPr>
             </a:defPPr>
             <a:lvl1pPr algn="l">
-              <a:defRPr sz="1800" b="1">
+              <a:defRPr sz="1650" b="1">
                 <a:solidFill>
                   <a:srgbClr val="FFFFFF"/>
                 </a:solidFill>
@@ -15764,7 +13736,7 @@
               </a:defRPr>
             </a:lvl1pPr>
             <a:lvl2pPr algn="l">
-              <a:defRPr sz="1800" b="1">
+              <a:defRPr sz="1650" b="1">
                 <a:solidFill>
                   <a:srgbClr val="FFFFFF"/>
                 </a:solidFill>
@@ -15774,7 +13746,7 @@
               </a:defRPr>
             </a:lvl2pPr>
             <a:lvl3pPr algn="l">
-              <a:defRPr sz="1800" b="1">
+              <a:defRPr sz="1650" b="1">
                 <a:solidFill>
                   <a:srgbClr val="FFFFFF"/>
                 </a:solidFill>
@@ -15784,7 +13756,7 @@
               </a:defRPr>
             </a:lvl3pPr>
             <a:lvl4pPr algn="l">
-              <a:defRPr sz="1800" b="1">
+              <a:defRPr sz="1650" b="1">
                 <a:solidFill>
                   <a:srgbClr val="FFFFFF"/>
                 </a:solidFill>
@@ -15794,7 +13766,7 @@
               </a:defRPr>
             </a:lvl4pPr>
             <a:lvl5pPr algn="l">
-              <a:defRPr sz="1800" b="1">
+              <a:defRPr sz="1650" b="1">
                 <a:solidFill>
                   <a:srgbClr val="FFFFFF"/>
                 </a:solidFill>
@@ -15804,7 +13776,7 @@
               </a:defRPr>
             </a:lvl5pPr>
             <a:lvl6pPr algn="l">
-              <a:defRPr sz="1800" b="1">
+              <a:defRPr sz="1650" b="1">
                 <a:solidFill>
                   <a:srgbClr val="FFFFFF"/>
                 </a:solidFill>
@@ -15814,7 +13786,7 @@
               </a:defRPr>
             </a:lvl6pPr>
             <a:lvl7pPr algn="l">
-              <a:defRPr sz="1800" b="1">
+              <a:defRPr sz="1650" b="1">
                 <a:solidFill>
                   <a:srgbClr val="FFFFFF"/>
                 </a:solidFill>
@@ -15824,7 +13796,7 @@
               </a:defRPr>
             </a:lvl7pPr>
             <a:lvl8pPr algn="l">
-              <a:defRPr sz="1800" b="1">
+              <a:defRPr sz="1650" b="1">
                 <a:solidFill>
                   <a:srgbClr val="FFFFFF"/>
                 </a:solidFill>
@@ -15834,7 +13806,7 @@
               </a:defRPr>
             </a:lvl8pPr>
             <a:lvl9pPr algn="l">
-              <a:defRPr sz="1800" b="1">
+              <a:defRPr sz="1650" b="1">
                 <a:solidFill>
                   <a:srgbClr val="FFFFFF"/>
                 </a:solidFill>
@@ -15846,7 +13818,7 @@
           </a:lstStyle>
           <a:p xmlns:a="http://schemas.openxmlformats.org/drawingml/2006/main">
             <a:pPr algn="l">
-              <a:defRPr sz="1800" b="1">
+              <a:defRPr sz="1650" b="1">
                 <a:solidFill>
                   <a:srgbClr val="FFFFFF"/>
                 </a:solidFill>
@@ -15856,7 +13828,7 @@
               </a:defRPr>
             </a:pPr>
             <a:r>
-              <a:rPr sz="1800" b="1">
+              <a:rPr sz="1650" b="1">
                 <a:solidFill>
                   <a:srgbClr val="FFFFFF"/>
                 </a:solidFill>
@@ -15864,7 +13836,30 @@
                 <a:ea typeface="Malgun Gothic"/>
                 <a:cs typeface="Malgun Gothic"/>
               </a:rPr>
-              <a:t>검증할 가설 1개  ·  성공 기준 1개  ·  다음 단계와 제외할 범위</a:t>
+              <a:t>호스트가 운영하고 여행자가 만족하는 체험을 위해</a:t>
+            </a:r>
+          </a:p>
+          <a:p xmlns:a="http://schemas.openxmlformats.org/drawingml/2006/main">
+            <a:pPr algn="l">
+              <a:defRPr sz="1650" b="1">
+                <a:solidFill>
+                  <a:srgbClr val="FFFFFF"/>
+                </a:solidFill>
+                <a:latin typeface="Malgun Gothic"/>
+                <a:ea typeface="Malgun Gothic"/>
+                <a:cs typeface="Malgun Gothic"/>
+              </a:defRPr>
+            </a:pPr>
+            <a:r>
+              <a:rPr sz="1650" b="1">
+                <a:solidFill>
+                  <a:srgbClr val="FFFFFF"/>
+                </a:solidFill>
+                <a:latin typeface="Malgun Gothic"/>
+                <a:ea typeface="Malgun Gothic"/>
+                <a:cs typeface="Malgun Gothic"/>
+              </a:rPr>
+              <a:t>운영 조건과 사용자 반응을 단계적으로 확인합니다.</a:t>
             </a:r>
           </a:p>
         </p:txBody>
@@ -15874,7 +13869,7 @@
           <p:cNvPr id="29" name="">
             <a:extLst xmlns:a="http://schemas.openxmlformats.org/drawingml/2006/main">
               <a:ext uri="{FF2B5EF4-FFF2-40B4-BE49-F238E27FC236}">
-                <a16:creationId xmlns:a16="http://schemas.microsoft.com/office/drawing/2014/main" id="{FD896907-06ED-4477-AB8F-10D67086CEA2}"/>
+                <a16:creationId xmlns:a16="http://schemas.microsoft.com/office/drawing/2014/main" id="{9436DC47-38A9-4F3A-A7E3-F8CBEDFFAAE9}"/>
               </a:ext>
             </a:extLst>
           </p:cNvPr>
@@ -16023,7 +14018,7 @@
                 <a:ea typeface="Malgun Gothic"/>
                 <a:cs typeface="Malgun Gothic"/>
               </a:rPr>
-              <a:t>LOCAL EUM  ·  지역의 경험이 여행자의 기억과 호스트의 지속 가능한 운영으로 이어지는지 확인합니다.</a:t>
+              <a:t>지역의 일상과 호스트의 이야기가 여행자의 기억으로 이어지는 서비스로 발전시킵니다.</a:t>
             </a:r>
           </a:p>
         </p:txBody>
@@ -16031,7 +14026,7 @@
     </p:spTree>
     <p:extLst>
       <p:ext uri="{BB962C8B-B14F-4D97-AF65-F5344CB8AC3E}">
-        <p14:creationId xmlns:p14="http://schemas.microsoft.com/office/powerpoint/2010/main" val="1792963742"/>
+        <p14:creationId xmlns:p14="http://schemas.microsoft.com/office/powerpoint/2010/main" val="227045797"/>
       </p:ext>
     </p:extLst>
   </p:cSld>
@@ -16062,7 +14057,7 @@
           <p:cNvPr id="17" name="">
             <a:extLst xmlns:a="http://schemas.openxmlformats.org/drawingml/2006/main">
               <a:ext uri="{FF2B5EF4-FFF2-40B4-BE49-F238E27FC236}">
-                <a16:creationId xmlns:a16="http://schemas.microsoft.com/office/drawing/2014/main" id="{59B291C5-819E-415B-8840-3DC9CAAFCEE6}"/>
+                <a16:creationId xmlns:a16="http://schemas.microsoft.com/office/drawing/2014/main" id="{B545DFFB-A262-4D0F-A022-21680CF974DD}"/>
               </a:ext>
             </a:extLst>
           </p:cNvPr>
@@ -16221,7 +14216,7 @@
           <p:cNvPr id="2" name="">
             <a:extLst xmlns:a="http://schemas.openxmlformats.org/drawingml/2006/main">
               <a:ext uri="{FF2B5EF4-FFF2-40B4-BE49-F238E27FC236}">
-                <a16:creationId xmlns:a16="http://schemas.microsoft.com/office/drawing/2014/main" id="{2CF0E080-EF95-4FA5-9F47-062E6787D5DC}"/>
+                <a16:creationId xmlns:a16="http://schemas.microsoft.com/office/drawing/2014/main" id="{F44B86D9-4406-45E8-848D-47D348AD938C}"/>
               </a:ext>
             </a:extLst>
           </p:cNvPr>
@@ -16370,7 +14365,7 @@
                 <a:ea typeface="Malgun Gothic"/>
                 <a:cs typeface="Malgun Gothic"/>
               </a:rPr>
-              <a:t>관광 정보와 “돈을 내고 싶은 경험” 사이</a:t>
+              <a:t>지역 주민의 이야기가 여행의 경험이 됩니다</a:t>
             </a:r>
           </a:p>
         </p:txBody>
@@ -16380,7 +14375,7 @@
           <p:cNvPr id="3" name="">
             <a:extLst xmlns:a="http://schemas.openxmlformats.org/drawingml/2006/main">
               <a:ext uri="{FF2B5EF4-FFF2-40B4-BE49-F238E27FC236}">
-                <a16:creationId xmlns:a16="http://schemas.microsoft.com/office/drawing/2014/main" id="{09CC795C-BAD5-487D-841F-19D2DC63936E}"/>
+                <a16:creationId xmlns:a16="http://schemas.microsoft.com/office/drawing/2014/main" id="{017BCC14-DBDC-4492-9BFD-25CE4083AEF7}"/>
               </a:ext>
             </a:extLst>
           </p:cNvPr>
@@ -16413,7 +14408,7 @@
           <p:cNvPr id="4" name="">
             <a:extLst xmlns:a="http://schemas.openxmlformats.org/drawingml/2006/main">
               <a:ext uri="{FF2B5EF4-FFF2-40B4-BE49-F238E27FC236}">
-                <a16:creationId xmlns:a16="http://schemas.microsoft.com/office/drawing/2014/main" id="{A15AB360-FA6F-4C84-8636-D5933B4EF456}"/>
+                <a16:creationId xmlns:a16="http://schemas.microsoft.com/office/drawing/2014/main" id="{8B044E5E-220F-49F5-8740-4008D68E2955}"/>
               </a:ext>
             </a:extLst>
           </p:cNvPr>
@@ -16562,7 +14557,7 @@
                 <a:ea typeface="Malgun Gothic"/>
                 <a:cs typeface="Malgun Gothic"/>
               </a:rPr>
-              <a:t>LOCAL EUM  ·  멘토링 브리프  ·  2026.10</a:t>
+              <a:t>LOCAL EUM  ·  기획과 구현  ·  2026.10</a:t>
             </a:r>
           </a:p>
         </p:txBody>
@@ -16572,7 +14567,7 @@
           <p:cNvPr id="5" name="">
             <a:extLst xmlns:a="http://schemas.openxmlformats.org/drawingml/2006/main">
               <a:ext uri="{FF2B5EF4-FFF2-40B4-BE49-F238E27FC236}">
-                <a16:creationId xmlns:a16="http://schemas.microsoft.com/office/drawing/2014/main" id="{86A26301-6300-400E-9B5F-20FCCA07E51E}"/>
+                <a16:creationId xmlns:a16="http://schemas.microsoft.com/office/drawing/2014/main" id="{8A66A0AC-B4B1-4674-8B4C-AC8A7C6B1AC6}"/>
               </a:ext>
             </a:extLst>
           </p:cNvPr>
@@ -16731,7 +14726,7 @@
           <p:cNvPr id="6" name="">
             <a:extLst xmlns:a="http://schemas.openxmlformats.org/drawingml/2006/main">
               <a:ext uri="{FF2B5EF4-FFF2-40B4-BE49-F238E27FC236}">
-                <a16:creationId xmlns:a16="http://schemas.microsoft.com/office/drawing/2014/main" id="{E0A96532-325A-46EA-A8E2-79A02073B402}"/>
+                <a16:creationId xmlns:a16="http://schemas.microsoft.com/office/drawing/2014/main" id="{2D609748-FD54-4A54-ABB3-636550E91ACA}"/>
               </a:ext>
             </a:extLst>
           </p:cNvPr>
@@ -16766,7 +14761,7 @@
           <p:cNvPr id="7" name="">
             <a:extLst xmlns:a="http://schemas.openxmlformats.org/drawingml/2006/main">
               <a:ext uri="{FF2B5EF4-FFF2-40B4-BE49-F238E27FC236}">
-                <a16:creationId xmlns:a16="http://schemas.microsoft.com/office/drawing/2014/main" id="{817FB8EC-EFDD-454E-B1CB-0ED127F69292}"/>
+                <a16:creationId xmlns:a16="http://schemas.microsoft.com/office/drawing/2014/main" id="{AF34D830-96D5-4998-92C5-7468D8588114}"/>
               </a:ext>
             </a:extLst>
           </p:cNvPr>
@@ -16799,7 +14794,7 @@
           <p:cNvPr id="8" name="">
             <a:extLst xmlns:a="http://schemas.openxmlformats.org/drawingml/2006/main">
               <a:ext uri="{FF2B5EF4-FFF2-40B4-BE49-F238E27FC236}">
-                <a16:creationId xmlns:a16="http://schemas.microsoft.com/office/drawing/2014/main" id="{D31BC917-9B0A-428D-9853-75B53E96B09A}"/>
+                <a16:creationId xmlns:a16="http://schemas.microsoft.com/office/drawing/2014/main" id="{561D1ED3-8DF7-4505-988F-33A9F1F59A01}"/>
               </a:ext>
             </a:extLst>
           </p:cNvPr>
@@ -16948,7 +14943,7 @@
                 <a:ea typeface="Malgun Gothic"/>
                 <a:cs typeface="Malgun Gothic"/>
               </a:rPr>
-              <a:t>여행자 문제</a:t>
+              <a:t>여행자에게</a:t>
             </a:r>
           </a:p>
         </p:txBody>
@@ -16958,7 +14953,7 @@
           <p:cNvPr id="9" name="">
             <a:extLst xmlns:a="http://schemas.openxmlformats.org/drawingml/2006/main">
               <a:ext uri="{FF2B5EF4-FFF2-40B4-BE49-F238E27FC236}">
-                <a16:creationId xmlns:a16="http://schemas.microsoft.com/office/drawing/2014/main" id="{C0024EB4-0532-4358-8E28-BBA8A6E9465C}"/>
+                <a16:creationId xmlns:a16="http://schemas.microsoft.com/office/drawing/2014/main" id="{8A6F8935-A563-4BBB-9C9E-7FC4E8955D1C}"/>
               </a:ext>
             </a:extLst>
           </p:cNvPr>
@@ -17111,7 +15106,7 @@
                 <a:ea typeface="Malgun Gothic"/>
                 <a:cs typeface="Malgun Gothic"/>
               </a:rPr>
-              <a:t>지역 주민과 함께하는 경험을 찾기 어렵고,</a:t>
+              <a:t>방문 장소와 명소 정보는 많지만,</a:t>
             </a:r>
           </a:p>
           <a:p xmlns:a="http://schemas.openxmlformats.org/drawingml/2006/main">
@@ -17138,7 +15133,7 @@
                 <a:ea typeface="Malgun Gothic"/>
                 <a:cs typeface="Malgun Gothic"/>
               </a:rPr>
-              <a:t>가격·진행 언어·시간·집결 정보가 흩어져</a:t>
+              <a:t>지역 주민과 일상을 함께하는 경험은</a:t>
             </a:r>
           </a:p>
           <a:p xmlns:a="http://schemas.openxmlformats.org/drawingml/2006/main">
@@ -17165,7 +15160,7 @@
                 <a:ea typeface="Malgun Gothic"/>
                 <a:cs typeface="Malgun Gothic"/>
               </a:rPr>
-              <a:t>참여 전에 신뢰와 가치를 판단하기 어렵습니다.</a:t>
+              <a:t>쉽게 찾기 어렵습니다.</a:t>
             </a:r>
           </a:p>
         </p:txBody>
@@ -17175,7 +15170,7 @@
           <p:cNvPr id="10" name="">
             <a:extLst xmlns:a="http://schemas.openxmlformats.org/drawingml/2006/main">
               <a:ext uri="{FF2B5EF4-FFF2-40B4-BE49-F238E27FC236}">
-                <a16:creationId xmlns:a16="http://schemas.microsoft.com/office/drawing/2014/main" id="{8B52CFE9-7B18-4C69-B4E9-F91EDEB6931F}"/>
+                <a16:creationId xmlns:a16="http://schemas.microsoft.com/office/drawing/2014/main" id="{5C3AA152-794F-4A8A-89E4-05BE6A11E5A3}"/>
               </a:ext>
             </a:extLst>
           </p:cNvPr>
@@ -17210,7 +15205,7 @@
           <p:cNvPr id="11" name="">
             <a:extLst xmlns:a="http://schemas.openxmlformats.org/drawingml/2006/main">
               <a:ext uri="{FF2B5EF4-FFF2-40B4-BE49-F238E27FC236}">
-                <a16:creationId xmlns:a16="http://schemas.microsoft.com/office/drawing/2014/main" id="{2FFC2614-1554-4622-875A-0266F47C88C3}"/>
+                <a16:creationId xmlns:a16="http://schemas.microsoft.com/office/drawing/2014/main" id="{9F80C941-E549-44EB-9939-DE9C8F5D758A}"/>
               </a:ext>
             </a:extLst>
           </p:cNvPr>
@@ -17243,7 +15238,7 @@
           <p:cNvPr id="12" name="">
             <a:extLst xmlns:a="http://schemas.openxmlformats.org/drawingml/2006/main">
               <a:ext uri="{FF2B5EF4-FFF2-40B4-BE49-F238E27FC236}">
-                <a16:creationId xmlns:a16="http://schemas.microsoft.com/office/drawing/2014/main" id="{D38B9345-FE07-45CA-9245-43AA0B7AFA71}"/>
+                <a16:creationId xmlns:a16="http://schemas.microsoft.com/office/drawing/2014/main" id="{4E2EDFEE-79F3-4006-AB76-E02BA572A6C5}"/>
               </a:ext>
             </a:extLst>
           </p:cNvPr>
@@ -17392,7 +15387,7 @@
                 <a:ea typeface="Malgun Gothic"/>
                 <a:cs typeface="Malgun Gothic"/>
               </a:rPr>
-              <a:t>호스트 문제</a:t>
+              <a:t>지역 호스트에게</a:t>
             </a:r>
           </a:p>
         </p:txBody>
@@ -17402,7 +15397,7 @@
           <p:cNvPr id="13" name="">
             <a:extLst xmlns:a="http://schemas.openxmlformats.org/drawingml/2006/main">
               <a:ext uri="{FF2B5EF4-FFF2-40B4-BE49-F238E27FC236}">
-                <a16:creationId xmlns:a16="http://schemas.microsoft.com/office/drawing/2014/main" id="{30F20378-4E4B-462D-A33D-79A17F0C8B7D}"/>
+                <a16:creationId xmlns:a16="http://schemas.microsoft.com/office/drawing/2014/main" id="{0DD1C3E4-FBDE-42B9-9AB8-F0A7D29ECCCF}"/>
               </a:ext>
             </a:extLst>
           </p:cNvPr>
@@ -17555,7 +15550,7 @@
                 <a:ea typeface="Malgun Gothic"/>
                 <a:cs typeface="Malgun Gothic"/>
               </a:rPr>
-              <a:t>아이디어를 운영 가능한 일정·안전 안내·가격으로</a:t>
+              <a:t>지역 주민의 이야기와 관심사를</a:t>
             </a:r>
           </a:p>
           <a:p xmlns:a="http://schemas.openxmlformats.org/drawingml/2006/main">
@@ -17582,7 +15577,7 @@
                 <a:ea typeface="Malgun Gothic"/>
                 <a:cs typeface="Malgun Gothic"/>
               </a:rPr>
-              <a:t>구체화하고, 여러 체험의 회차와 신청자를</a:t>
+              <a:t>여행 경험으로 소개하고 운영할 수 있는</a:t>
             </a:r>
           </a:p>
           <a:p xmlns:a="http://schemas.openxmlformats.org/drawingml/2006/main">
@@ -17609,7 +15604,7 @@
                 <a:ea typeface="Malgun Gothic"/>
                 <a:cs typeface="Malgun Gothic"/>
               </a:rPr>
-              <a:t>일관되게 관리하기가 어렵습니다.</a:t>
+              <a:t>프로그램과 도구가 필요합니다.</a:t>
             </a:r>
           </a:p>
         </p:txBody>
@@ -17619,7 +15614,7 @@
           <p:cNvPr id="14" name="">
             <a:extLst xmlns:a="http://schemas.openxmlformats.org/drawingml/2006/main">
               <a:ext uri="{FF2B5EF4-FFF2-40B4-BE49-F238E27FC236}">
-                <a16:creationId xmlns:a16="http://schemas.microsoft.com/office/drawing/2014/main" id="{198D81EC-E34A-44CF-AAB1-A8FD0E2EB50D}"/>
+                <a16:creationId xmlns:a16="http://schemas.microsoft.com/office/drawing/2014/main" id="{8EC7B304-22BE-43B1-B5E6-FCD7DBBEB88E}"/>
               </a:ext>
             </a:extLst>
           </p:cNvPr>
@@ -17652,7 +15647,7 @@
           <p:cNvPr id="15" name="">
             <a:extLst xmlns:a="http://schemas.openxmlformats.org/drawingml/2006/main">
               <a:ext uri="{FF2B5EF4-FFF2-40B4-BE49-F238E27FC236}">
-                <a16:creationId xmlns:a16="http://schemas.microsoft.com/office/drawing/2014/main" id="{BB11FF89-F262-42AE-BF1A-CEC31B10301C}"/>
+                <a16:creationId xmlns:a16="http://schemas.microsoft.com/office/drawing/2014/main" id="{A5624EDA-1031-4789-A8A5-7C5F6E7F9436}"/>
               </a:ext>
             </a:extLst>
           </p:cNvPr>
@@ -17801,7 +15796,7 @@
                 <a:ea typeface="Malgun Gothic"/>
                 <a:cs typeface="Malgun Gothic"/>
               </a:rPr>
-              <a:t>핵심 가설</a:t>
+              <a:t>로컬이음의 역할</a:t>
             </a:r>
           </a:p>
         </p:txBody>
@@ -17811,7 +15806,7 @@
           <p:cNvPr id="16" name="">
             <a:extLst xmlns:a="http://schemas.openxmlformats.org/drawingml/2006/main">
               <a:ext uri="{FF2B5EF4-FFF2-40B4-BE49-F238E27FC236}">
-                <a16:creationId xmlns:a16="http://schemas.microsoft.com/office/drawing/2014/main" id="{B7049039-4FA4-4D3D-ACA0-9B7BDEE7047E}"/>
+                <a16:creationId xmlns:a16="http://schemas.microsoft.com/office/drawing/2014/main" id="{D742456F-8370-4A85-ABED-667657A5CE3A}"/>
               </a:ext>
             </a:extLst>
           </p:cNvPr>
@@ -17960,7 +15955,7 @@
                 <a:ea typeface="Malgun Gothic"/>
                 <a:cs typeface="Malgun Gothic"/>
               </a:rPr>
-              <a:t>단순히 장소를 방문하는 것만으로는 부족합니다.</a:t>
+              <a:t>여행자와 지역 주민을 연결해</a:t>
             </a:r>
           </a:p>
           <a:p xmlns:a="http://schemas.openxmlformats.org/drawingml/2006/main">
@@ -17983,7 +15978,7 @@
                 <a:ea typeface="Malgun Gothic"/>
                 <a:cs typeface="Malgun Gothic"/>
               </a:rPr>
-              <a:t>호스트의 해석·참여·기억할 결과가 실제 지불 이유인지 확인해야 합니다.</a:t>
+              <a:t>평범한 지역의 일상을 함께하는 체험으로 만듭니다.</a:t>
             </a:r>
           </a:p>
         </p:txBody>
@@ -17991,7 +15986,7 @@
     </p:spTree>
     <p:extLst>
       <p:ext uri="{BB962C8B-B14F-4D97-AF65-F5344CB8AC3E}">
-        <p14:creationId xmlns:p14="http://schemas.microsoft.com/office/powerpoint/2010/main" val="445331319"/>
+        <p14:creationId xmlns:p14="http://schemas.microsoft.com/office/powerpoint/2010/main" val="1846209715"/>
       </p:ext>
     </p:extLst>
   </p:cSld>
@@ -18022,7 +16017,7 @@
           <p:cNvPr id="40" name="">
             <a:extLst xmlns:a="http://schemas.openxmlformats.org/drawingml/2006/main">
               <a:ext uri="{FF2B5EF4-FFF2-40B4-BE49-F238E27FC236}">
-                <a16:creationId xmlns:a16="http://schemas.microsoft.com/office/drawing/2014/main" id="{555D517E-D347-4B27-981C-38FAC69466D3}"/>
+                <a16:creationId xmlns:a16="http://schemas.microsoft.com/office/drawing/2014/main" id="{B9EF3A4A-303F-4E34-A6DB-4EA0516A06AB}"/>
               </a:ext>
             </a:extLst>
           </p:cNvPr>
@@ -18181,7 +16176,7 @@
           <p:cNvPr id="2" name="">
             <a:extLst xmlns:a="http://schemas.openxmlformats.org/drawingml/2006/main">
               <a:ext uri="{FF2B5EF4-FFF2-40B4-BE49-F238E27FC236}">
-                <a16:creationId xmlns:a16="http://schemas.microsoft.com/office/drawing/2014/main" id="{6E468372-51E3-4E04-BDAA-3019722D9E6A}"/>
+                <a16:creationId xmlns:a16="http://schemas.microsoft.com/office/drawing/2014/main" id="{46152BB3-D2AE-4932-8AED-EB361BB1ECFC}"/>
               </a:ext>
             </a:extLst>
           </p:cNvPr>
@@ -18340,7 +16335,7 @@
           <p:cNvPr id="3" name="">
             <a:extLst xmlns:a="http://schemas.openxmlformats.org/drawingml/2006/main">
               <a:ext uri="{FF2B5EF4-FFF2-40B4-BE49-F238E27FC236}">
-                <a16:creationId xmlns:a16="http://schemas.microsoft.com/office/drawing/2014/main" id="{E5E260E0-740A-425A-A7BF-FF2419520333}"/>
+                <a16:creationId xmlns:a16="http://schemas.microsoft.com/office/drawing/2014/main" id="{2CD672E7-9BE7-4008-9DF5-2BC2DE31EBA6}"/>
               </a:ext>
             </a:extLst>
           </p:cNvPr>
@@ -18373,7 +16368,7 @@
           <p:cNvPr id="4" name="">
             <a:extLst xmlns:a="http://schemas.openxmlformats.org/drawingml/2006/main">
               <a:ext uri="{FF2B5EF4-FFF2-40B4-BE49-F238E27FC236}">
-                <a16:creationId xmlns:a16="http://schemas.microsoft.com/office/drawing/2014/main" id="{5DF213FB-90B1-4173-B0BB-0109E026121E}"/>
+                <a16:creationId xmlns:a16="http://schemas.microsoft.com/office/drawing/2014/main" id="{77DF9A72-248F-4E0C-A08E-5A1C62F377CB}"/>
               </a:ext>
             </a:extLst>
           </p:cNvPr>
@@ -18522,7 +16517,7 @@
                 <a:ea typeface="Malgun Gothic"/>
                 <a:cs typeface="Malgun Gothic"/>
               </a:rPr>
-              <a:t>LOCAL EUM  ·  멘토링 브리프  ·  2026.10</a:t>
+              <a:t>LOCAL EUM  ·  기획과 구현  ·  2026.10</a:t>
             </a:r>
           </a:p>
         </p:txBody>
@@ -18532,7 +16527,7 @@
           <p:cNvPr id="5" name="">
             <a:extLst xmlns:a="http://schemas.openxmlformats.org/drawingml/2006/main">
               <a:ext uri="{FF2B5EF4-FFF2-40B4-BE49-F238E27FC236}">
-                <a16:creationId xmlns:a16="http://schemas.microsoft.com/office/drawing/2014/main" id="{0E4847A1-1FFB-4C32-9209-C91B1F344E8E}"/>
+                <a16:creationId xmlns:a16="http://schemas.microsoft.com/office/drawing/2014/main" id="{9B6D143D-09C8-4B41-91EF-46A18D087651}"/>
               </a:ext>
             </a:extLst>
           </p:cNvPr>
@@ -18691,7 +16686,7 @@
           <p:cNvPr id="6" name="">
             <a:extLst xmlns:a="http://schemas.openxmlformats.org/drawingml/2006/main">
               <a:ext uri="{FF2B5EF4-FFF2-40B4-BE49-F238E27FC236}">
-                <a16:creationId xmlns:a16="http://schemas.microsoft.com/office/drawing/2014/main" id="{74C93678-CD86-49CA-92AC-A8043106CA44}"/>
+                <a16:creationId xmlns:a16="http://schemas.microsoft.com/office/drawing/2014/main" id="{B56B050F-8F3F-46F9-AD11-9137E46AEFFA}"/>
               </a:ext>
             </a:extLst>
           </p:cNvPr>
@@ -18850,7 +16845,7 @@
           <p:cNvPr id="7" name="">
             <a:extLst xmlns:a="http://schemas.openxmlformats.org/drawingml/2006/main">
               <a:ext uri="{FF2B5EF4-FFF2-40B4-BE49-F238E27FC236}">
-                <a16:creationId xmlns:a16="http://schemas.microsoft.com/office/drawing/2014/main" id="{A0CD8533-B3D6-4A7C-8975-99F607021732}"/>
+                <a16:creationId xmlns:a16="http://schemas.microsoft.com/office/drawing/2014/main" id="{84A20637-4E6D-4B36-A283-D11984D113C0}"/>
               </a:ext>
             </a:extLst>
           </p:cNvPr>
@@ -18885,7 +16880,7 @@
           <p:cNvPr id="8" name="">
             <a:extLst xmlns:a="http://schemas.openxmlformats.org/drawingml/2006/main">
               <a:ext uri="{FF2B5EF4-FFF2-40B4-BE49-F238E27FC236}">
-                <a16:creationId xmlns:a16="http://schemas.microsoft.com/office/drawing/2014/main" id="{8DA312DF-897C-4C53-9ADB-0273FA10ADEE}"/>
+                <a16:creationId xmlns:a16="http://schemas.microsoft.com/office/drawing/2014/main" id="{5960FADA-F8F2-4368-9C80-3BA3DBC7D95D}"/>
               </a:ext>
             </a:extLst>
           </p:cNvPr>
@@ -19044,7 +17039,7 @@
           <p:cNvPr id="9" name="">
             <a:extLst xmlns:a="http://schemas.openxmlformats.org/drawingml/2006/main">
               <a:ext uri="{FF2B5EF4-FFF2-40B4-BE49-F238E27FC236}">
-                <a16:creationId xmlns:a16="http://schemas.microsoft.com/office/drawing/2014/main" id="{65BD34AF-3D2A-4FCC-9CC1-861A96D881E7}"/>
+                <a16:creationId xmlns:a16="http://schemas.microsoft.com/office/drawing/2014/main" id="{27D5E7E2-C9E8-44BE-B933-D1BB2681E592}"/>
               </a:ext>
             </a:extLst>
           </p:cNvPr>
@@ -19203,7 +17198,7 @@
           <p:cNvPr id="10" name="">
             <a:extLst xmlns:a="http://schemas.openxmlformats.org/drawingml/2006/main">
               <a:ext uri="{FF2B5EF4-FFF2-40B4-BE49-F238E27FC236}">
-                <a16:creationId xmlns:a16="http://schemas.microsoft.com/office/drawing/2014/main" id="{08B38374-F1B4-4178-B3A3-B76D64D0E910}"/>
+                <a16:creationId xmlns:a16="http://schemas.microsoft.com/office/drawing/2014/main" id="{A697E238-86BB-4329-B69C-5CF166F2A752}"/>
               </a:ext>
             </a:extLst>
           </p:cNvPr>
@@ -19362,7 +17357,7 @@
           <p:cNvPr id="11" name="">
             <a:extLst xmlns:a="http://schemas.openxmlformats.org/drawingml/2006/main">
               <a:ext uri="{FF2B5EF4-FFF2-40B4-BE49-F238E27FC236}">
-                <a16:creationId xmlns:a16="http://schemas.microsoft.com/office/drawing/2014/main" id="{9835AB9C-15C3-4792-989F-75DC332CF8E9}"/>
+                <a16:creationId xmlns:a16="http://schemas.microsoft.com/office/drawing/2014/main" id="{698D5160-9A7A-4DB5-AAE0-1B8762CE880A}"/>
               </a:ext>
             </a:extLst>
           </p:cNvPr>
@@ -19397,7 +17392,7 @@
           <p:cNvPr id="12" name="">
             <a:extLst xmlns:a="http://schemas.openxmlformats.org/drawingml/2006/main">
               <a:ext uri="{FF2B5EF4-FFF2-40B4-BE49-F238E27FC236}">
-                <a16:creationId xmlns:a16="http://schemas.microsoft.com/office/drawing/2014/main" id="{A809F9F1-AF0F-410C-B009-EA5D9FB2CBF5}"/>
+                <a16:creationId xmlns:a16="http://schemas.microsoft.com/office/drawing/2014/main" id="{AC12D9ED-201D-4B09-90FF-8A9982B0EFA4}"/>
               </a:ext>
             </a:extLst>
           </p:cNvPr>
@@ -19556,7 +17551,7 @@
           <p:cNvPr id="13" name="">
             <a:extLst xmlns:a="http://schemas.openxmlformats.org/drawingml/2006/main">
               <a:ext uri="{FF2B5EF4-FFF2-40B4-BE49-F238E27FC236}">
-                <a16:creationId xmlns:a16="http://schemas.microsoft.com/office/drawing/2014/main" id="{AEA32378-91A7-4655-A43D-EBCEC4B54092}"/>
+                <a16:creationId xmlns:a16="http://schemas.microsoft.com/office/drawing/2014/main" id="{269D9B8C-4B65-4ECE-99DF-F7727A91351A}"/>
               </a:ext>
             </a:extLst>
           </p:cNvPr>
@@ -19715,7 +17710,7 @@
           <p:cNvPr id="14" name="">
             <a:extLst xmlns:a="http://schemas.openxmlformats.org/drawingml/2006/main">
               <a:ext uri="{FF2B5EF4-FFF2-40B4-BE49-F238E27FC236}">
-                <a16:creationId xmlns:a16="http://schemas.microsoft.com/office/drawing/2014/main" id="{2714CB13-F18C-4BE6-9377-E9236C2E1B72}"/>
+                <a16:creationId xmlns:a16="http://schemas.microsoft.com/office/drawing/2014/main" id="{80A09BCC-E821-4E8F-A43C-85912A12DC87}"/>
               </a:ext>
             </a:extLst>
           </p:cNvPr>
@@ -19874,7 +17869,7 @@
           <p:cNvPr id="15" name="">
             <a:extLst xmlns:a="http://schemas.openxmlformats.org/drawingml/2006/main">
               <a:ext uri="{FF2B5EF4-FFF2-40B4-BE49-F238E27FC236}">
-                <a16:creationId xmlns:a16="http://schemas.microsoft.com/office/drawing/2014/main" id="{D752CA9E-4FD7-47E0-AC57-9D8AAA3BA6B3}"/>
+                <a16:creationId xmlns:a16="http://schemas.microsoft.com/office/drawing/2014/main" id="{3C793420-2168-4353-B74B-D98441D8F4F4}"/>
               </a:ext>
             </a:extLst>
           </p:cNvPr>
@@ -19909,7 +17904,7 @@
           <p:cNvPr id="16" name="">
             <a:extLst xmlns:a="http://schemas.openxmlformats.org/drawingml/2006/main">
               <a:ext uri="{FF2B5EF4-FFF2-40B4-BE49-F238E27FC236}">
-                <a16:creationId xmlns:a16="http://schemas.microsoft.com/office/drawing/2014/main" id="{B52AB3A6-904B-4758-99E5-A10D28349D56}"/>
+                <a16:creationId xmlns:a16="http://schemas.microsoft.com/office/drawing/2014/main" id="{5880C2A7-905B-457F-A61B-1676FC78A931}"/>
               </a:ext>
             </a:extLst>
           </p:cNvPr>
@@ -20068,7 +18063,7 @@
           <p:cNvPr id="17" name="">
             <a:extLst xmlns:a="http://schemas.openxmlformats.org/drawingml/2006/main">
               <a:ext uri="{FF2B5EF4-FFF2-40B4-BE49-F238E27FC236}">
-                <a16:creationId xmlns:a16="http://schemas.microsoft.com/office/drawing/2014/main" id="{40FB9C8A-2F2B-4DC8-B1C3-A76DE6A9C3C3}"/>
+                <a16:creationId xmlns:a16="http://schemas.microsoft.com/office/drawing/2014/main" id="{D85A10D5-D4B5-4E13-8ED7-4CB7110D7368}"/>
               </a:ext>
             </a:extLst>
           </p:cNvPr>
@@ -20227,7 +18222,7 @@
           <p:cNvPr id="18" name="">
             <a:extLst xmlns:a="http://schemas.openxmlformats.org/drawingml/2006/main">
               <a:ext uri="{FF2B5EF4-FFF2-40B4-BE49-F238E27FC236}">
-                <a16:creationId xmlns:a16="http://schemas.microsoft.com/office/drawing/2014/main" id="{2CB65D3F-FF56-4F13-8268-BDC270F1A81C}"/>
+                <a16:creationId xmlns:a16="http://schemas.microsoft.com/office/drawing/2014/main" id="{078320BE-1C7F-4843-BB92-3E7BB876AD53}"/>
               </a:ext>
             </a:extLst>
           </p:cNvPr>
@@ -20386,7 +18381,7 @@
           <p:cNvPr id="19" name="">
             <a:extLst xmlns:a="http://schemas.openxmlformats.org/drawingml/2006/main">
               <a:ext uri="{FF2B5EF4-FFF2-40B4-BE49-F238E27FC236}">
-                <a16:creationId xmlns:a16="http://schemas.microsoft.com/office/drawing/2014/main" id="{4830CBDE-E31B-41B5-86F1-4D34731AFE87}"/>
+                <a16:creationId xmlns:a16="http://schemas.microsoft.com/office/drawing/2014/main" id="{CE469C6F-8E78-4ECC-B6D1-8DBA6C751D28}"/>
               </a:ext>
             </a:extLst>
           </p:cNvPr>
@@ -20421,7 +18416,7 @@
           <p:cNvPr id="20" name="">
             <a:extLst xmlns:a="http://schemas.openxmlformats.org/drawingml/2006/main">
               <a:ext uri="{FF2B5EF4-FFF2-40B4-BE49-F238E27FC236}">
-                <a16:creationId xmlns:a16="http://schemas.microsoft.com/office/drawing/2014/main" id="{48018AC7-5603-410E-BD8B-9B427B244946}"/>
+                <a16:creationId xmlns:a16="http://schemas.microsoft.com/office/drawing/2014/main" id="{5FB740E8-A850-4C8C-A5AA-AD8E94D5E98B}"/>
               </a:ext>
             </a:extLst>
           </p:cNvPr>
@@ -20580,7 +18575,7 @@
           <p:cNvPr id="21" name="">
             <a:extLst xmlns:a="http://schemas.openxmlformats.org/drawingml/2006/main">
               <a:ext uri="{FF2B5EF4-FFF2-40B4-BE49-F238E27FC236}">
-                <a16:creationId xmlns:a16="http://schemas.microsoft.com/office/drawing/2014/main" id="{10199EB3-31FA-47FC-A922-0E836308F27D}"/>
+                <a16:creationId xmlns:a16="http://schemas.microsoft.com/office/drawing/2014/main" id="{97AF6867-1EF8-4806-A4A6-1740E0BDA675}"/>
               </a:ext>
             </a:extLst>
           </p:cNvPr>
@@ -20739,7 +18734,7 @@
           <p:cNvPr id="22" name="">
             <a:extLst xmlns:a="http://schemas.openxmlformats.org/drawingml/2006/main">
               <a:ext uri="{FF2B5EF4-FFF2-40B4-BE49-F238E27FC236}">
-                <a16:creationId xmlns:a16="http://schemas.microsoft.com/office/drawing/2014/main" id="{DD2450A2-DFE4-42A8-AA8C-8A09F481EC0F}"/>
+                <a16:creationId xmlns:a16="http://schemas.microsoft.com/office/drawing/2014/main" id="{DB5097E7-5354-43DE-B809-10C5C46D30DE}"/>
               </a:ext>
             </a:extLst>
           </p:cNvPr>
@@ -20898,7 +18893,7 @@
           <p:cNvPr id="23" name="">
             <a:extLst xmlns:a="http://schemas.openxmlformats.org/drawingml/2006/main">
               <a:ext uri="{FF2B5EF4-FFF2-40B4-BE49-F238E27FC236}">
-                <a16:creationId xmlns:a16="http://schemas.microsoft.com/office/drawing/2014/main" id="{2A3628EE-A9C8-467D-8400-7A5F4FE5A7F8}"/>
+                <a16:creationId xmlns:a16="http://schemas.microsoft.com/office/drawing/2014/main" id="{8ECDEC99-C32D-4115-AF10-6E2496B13F62}"/>
               </a:ext>
             </a:extLst>
           </p:cNvPr>
@@ -20933,7 +18928,7 @@
           <p:cNvPr id="24" name="">
             <a:extLst xmlns:a="http://schemas.openxmlformats.org/drawingml/2006/main">
               <a:ext uri="{FF2B5EF4-FFF2-40B4-BE49-F238E27FC236}">
-                <a16:creationId xmlns:a16="http://schemas.microsoft.com/office/drawing/2014/main" id="{C3E754F2-292D-4748-9695-A98AE051BDBC}"/>
+                <a16:creationId xmlns:a16="http://schemas.microsoft.com/office/drawing/2014/main" id="{07A0A5A5-A89C-43FE-8708-A810642B734B}"/>
               </a:ext>
             </a:extLst>
           </p:cNvPr>
@@ -21092,7 +19087,7 @@
           <p:cNvPr id="25" name="">
             <a:extLst xmlns:a="http://schemas.openxmlformats.org/drawingml/2006/main">
               <a:ext uri="{FF2B5EF4-FFF2-40B4-BE49-F238E27FC236}">
-                <a16:creationId xmlns:a16="http://schemas.microsoft.com/office/drawing/2014/main" id="{67A3E459-BE53-4FAB-AFC3-11D60F680911}"/>
+                <a16:creationId xmlns:a16="http://schemas.microsoft.com/office/drawing/2014/main" id="{D5971E4C-E3CD-4C88-91D3-9C1F9F2D0D3E}"/>
               </a:ext>
             </a:extLst>
           </p:cNvPr>
@@ -21251,7 +19246,7 @@
           <p:cNvPr id="26" name="">
             <a:extLst xmlns:a="http://schemas.openxmlformats.org/drawingml/2006/main">
               <a:ext uri="{FF2B5EF4-FFF2-40B4-BE49-F238E27FC236}">
-                <a16:creationId xmlns:a16="http://schemas.microsoft.com/office/drawing/2014/main" id="{C176119D-4218-4D7E-91B1-2C8249EC2E81}"/>
+                <a16:creationId xmlns:a16="http://schemas.microsoft.com/office/drawing/2014/main" id="{77B83C42-DD60-44FE-AB64-595C45F82EA7}"/>
               </a:ext>
             </a:extLst>
           </p:cNvPr>
@@ -21410,7 +19405,7 @@
           <p:cNvPr id="27" name="">
             <a:extLst xmlns:a="http://schemas.openxmlformats.org/drawingml/2006/main">
               <a:ext uri="{FF2B5EF4-FFF2-40B4-BE49-F238E27FC236}">
-                <a16:creationId xmlns:a16="http://schemas.microsoft.com/office/drawing/2014/main" id="{D27DE905-CE80-4995-8BC0-55F446327019}"/>
+                <a16:creationId xmlns:a16="http://schemas.microsoft.com/office/drawing/2014/main" id="{8115DB57-AFC4-46B3-B067-3DAEC38290F4}"/>
               </a:ext>
             </a:extLst>
           </p:cNvPr>
@@ -21445,7 +19440,7 @@
           <p:cNvPr id="28" name="">
             <a:extLst xmlns:a="http://schemas.openxmlformats.org/drawingml/2006/main">
               <a:ext uri="{FF2B5EF4-FFF2-40B4-BE49-F238E27FC236}">
-                <a16:creationId xmlns:a16="http://schemas.microsoft.com/office/drawing/2014/main" id="{AE713E71-FC55-4D6A-818E-5716FA21B3A1}"/>
+                <a16:creationId xmlns:a16="http://schemas.microsoft.com/office/drawing/2014/main" id="{505DFEA6-2A79-46D9-9602-870167A3F333}"/>
               </a:ext>
             </a:extLst>
           </p:cNvPr>
@@ -21604,7 +19599,7 @@
           <p:cNvPr id="29" name="">
             <a:extLst xmlns:a="http://schemas.openxmlformats.org/drawingml/2006/main">
               <a:ext uri="{FF2B5EF4-FFF2-40B4-BE49-F238E27FC236}">
-                <a16:creationId xmlns:a16="http://schemas.microsoft.com/office/drawing/2014/main" id="{44847B50-65DA-4996-BAB5-ECD5CB0370F1}"/>
+                <a16:creationId xmlns:a16="http://schemas.microsoft.com/office/drawing/2014/main" id="{7719D892-329E-41AD-961D-7995A7E2548E}"/>
               </a:ext>
             </a:extLst>
           </p:cNvPr>
@@ -21763,7 +19758,7 @@
           <p:cNvPr id="30" name="">
             <a:extLst xmlns:a="http://schemas.openxmlformats.org/drawingml/2006/main">
               <a:ext uri="{FF2B5EF4-FFF2-40B4-BE49-F238E27FC236}">
-                <a16:creationId xmlns:a16="http://schemas.microsoft.com/office/drawing/2014/main" id="{7B9E45E6-A818-4DE9-8F41-D9DD761CE2DC}"/>
+                <a16:creationId xmlns:a16="http://schemas.microsoft.com/office/drawing/2014/main" id="{8330FFCA-5569-4B97-BE62-5A08729F60F4}"/>
               </a:ext>
             </a:extLst>
           </p:cNvPr>
@@ -21922,7 +19917,7 @@
           <p:cNvPr id="31" name="">
             <a:extLst xmlns:a="http://schemas.openxmlformats.org/drawingml/2006/main">
               <a:ext uri="{FF2B5EF4-FFF2-40B4-BE49-F238E27FC236}">
-                <a16:creationId xmlns:a16="http://schemas.microsoft.com/office/drawing/2014/main" id="{40F7CFBD-76D9-47EF-9A01-FDC3E4FE4F98}"/>
+                <a16:creationId xmlns:a16="http://schemas.microsoft.com/office/drawing/2014/main" id="{CA529BA0-D488-4645-98D3-D4C3D8408A6A}"/>
               </a:ext>
             </a:extLst>
           </p:cNvPr>
@@ -21957,7 +19952,7 @@
           <p:cNvPr id="32" name="">
             <a:extLst xmlns:a="http://schemas.openxmlformats.org/drawingml/2006/main">
               <a:ext uri="{FF2B5EF4-FFF2-40B4-BE49-F238E27FC236}">
-                <a16:creationId xmlns:a16="http://schemas.microsoft.com/office/drawing/2014/main" id="{FF3B793E-5D24-4BF8-807B-FC403F84153E}"/>
+                <a16:creationId xmlns:a16="http://schemas.microsoft.com/office/drawing/2014/main" id="{16781A35-1316-4EF1-8F96-0DCA56EFCD3F}"/>
               </a:ext>
             </a:extLst>
           </p:cNvPr>
@@ -22116,7 +20111,7 @@
           <p:cNvPr id="33" name="">
             <a:extLst xmlns:a="http://schemas.openxmlformats.org/drawingml/2006/main">
               <a:ext uri="{FF2B5EF4-FFF2-40B4-BE49-F238E27FC236}">
-                <a16:creationId xmlns:a16="http://schemas.microsoft.com/office/drawing/2014/main" id="{1CDC8452-C42A-4DCC-8524-E333728C7177}"/>
+                <a16:creationId xmlns:a16="http://schemas.microsoft.com/office/drawing/2014/main" id="{B6F6D3CC-086D-4DA7-ACA8-ECC808F47EEE}"/>
               </a:ext>
             </a:extLst>
           </p:cNvPr>
@@ -22275,7 +20270,7 @@
           <p:cNvPr id="34" name="">
             <a:extLst xmlns:a="http://schemas.openxmlformats.org/drawingml/2006/main">
               <a:ext uri="{FF2B5EF4-FFF2-40B4-BE49-F238E27FC236}">
-                <a16:creationId xmlns:a16="http://schemas.microsoft.com/office/drawing/2014/main" id="{799D3ABA-C613-42E6-A703-E5C8197F542D}"/>
+                <a16:creationId xmlns:a16="http://schemas.microsoft.com/office/drawing/2014/main" id="{73844FED-3A0E-4E9A-94B1-3453ABAB3431}"/>
               </a:ext>
             </a:extLst>
           </p:cNvPr>
@@ -22434,7 +20429,7 @@
           <p:cNvPr id="35" name="">
             <a:extLst xmlns:a="http://schemas.openxmlformats.org/drawingml/2006/main">
               <a:ext uri="{FF2B5EF4-FFF2-40B4-BE49-F238E27FC236}">
-                <a16:creationId xmlns:a16="http://schemas.microsoft.com/office/drawing/2014/main" id="{1A23E3CE-4DFA-4B26-B781-B14D07612DCB}"/>
+                <a16:creationId xmlns:a16="http://schemas.microsoft.com/office/drawing/2014/main" id="{8F6C62C8-C769-492A-8B1B-1304ABA4B1F0}"/>
               </a:ext>
             </a:extLst>
           </p:cNvPr>
@@ -22469,7 +20464,7 @@
           <p:cNvPr id="36" name="">
             <a:extLst xmlns:a="http://schemas.openxmlformats.org/drawingml/2006/main">
               <a:ext uri="{FF2B5EF4-FFF2-40B4-BE49-F238E27FC236}">
-                <a16:creationId xmlns:a16="http://schemas.microsoft.com/office/drawing/2014/main" id="{18EA5481-C631-46C6-82DC-D2E7FCEC68EB}"/>
+                <a16:creationId xmlns:a16="http://schemas.microsoft.com/office/drawing/2014/main" id="{E7F03535-BB10-4528-AF04-F98EEC736947}"/>
               </a:ext>
             </a:extLst>
           </p:cNvPr>
@@ -22628,7 +20623,7 @@
           <p:cNvPr id="37" name="">
             <a:extLst xmlns:a="http://schemas.openxmlformats.org/drawingml/2006/main">
               <a:ext uri="{FF2B5EF4-FFF2-40B4-BE49-F238E27FC236}">
-                <a16:creationId xmlns:a16="http://schemas.microsoft.com/office/drawing/2014/main" id="{C00838BF-1EBA-498B-A8FA-13B5165464F2}"/>
+                <a16:creationId xmlns:a16="http://schemas.microsoft.com/office/drawing/2014/main" id="{C74A0659-26F8-4482-88EC-8C52F483C603}"/>
               </a:ext>
             </a:extLst>
           </p:cNvPr>
@@ -22787,7 +20782,7 @@
           <p:cNvPr id="38" name="">
             <a:extLst xmlns:a="http://schemas.openxmlformats.org/drawingml/2006/main">
               <a:ext uri="{FF2B5EF4-FFF2-40B4-BE49-F238E27FC236}">
-                <a16:creationId xmlns:a16="http://schemas.microsoft.com/office/drawing/2014/main" id="{C36F6256-F3ED-456F-94D6-C726AF3F59B6}"/>
+                <a16:creationId xmlns:a16="http://schemas.microsoft.com/office/drawing/2014/main" id="{67A207EF-224E-4409-B6EE-A61E130E5814}"/>
               </a:ext>
             </a:extLst>
           </p:cNvPr>
@@ -22820,7 +20815,7 @@
           <p:cNvPr id="39" name="">
             <a:extLst xmlns:a="http://schemas.openxmlformats.org/drawingml/2006/main">
               <a:ext uri="{FF2B5EF4-FFF2-40B4-BE49-F238E27FC236}">
-                <a16:creationId xmlns:a16="http://schemas.microsoft.com/office/drawing/2014/main" id="{DDCEDB8B-7893-40C7-A542-35FFFF80CF45}"/>
+                <a16:creationId xmlns:a16="http://schemas.microsoft.com/office/drawing/2014/main" id="{64ABF0D2-75A1-4DEB-8DDE-C09A001D0DBB}"/>
               </a:ext>
             </a:extLst>
           </p:cNvPr>
@@ -23000,7 +20995,7 @@
     </p:spTree>
     <p:extLst>
       <p:ext uri="{BB962C8B-B14F-4D97-AF65-F5344CB8AC3E}">
-        <p14:creationId xmlns:p14="http://schemas.microsoft.com/office/powerpoint/2010/main" val="1969670689"/>
+        <p14:creationId xmlns:p14="http://schemas.microsoft.com/office/powerpoint/2010/main" val="919050851"/>
       </p:ext>
     </p:extLst>
   </p:cSld>
@@ -23031,7 +21026,7 @@
           <p:cNvPr id="17" name="">
             <a:extLst xmlns:a="http://schemas.openxmlformats.org/drawingml/2006/main">
               <a:ext uri="{FF2B5EF4-FFF2-40B4-BE49-F238E27FC236}">
-                <a16:creationId xmlns:a16="http://schemas.microsoft.com/office/drawing/2014/main" id="{4A9AFDD4-8DAC-4EBD-8F90-A360EDF1B6A6}"/>
+                <a16:creationId xmlns:a16="http://schemas.microsoft.com/office/drawing/2014/main" id="{E508F20E-F42A-4BDF-81F4-E8948738101A}"/>
               </a:ext>
             </a:extLst>
           </p:cNvPr>
@@ -23190,7 +21185,7 @@
           <p:cNvPr id="2" name="">
             <a:extLst xmlns:a="http://schemas.openxmlformats.org/drawingml/2006/main">
               <a:ext uri="{FF2B5EF4-FFF2-40B4-BE49-F238E27FC236}">
-                <a16:creationId xmlns:a16="http://schemas.microsoft.com/office/drawing/2014/main" id="{73387D3E-F5AF-48E4-A339-D60CFC496771}"/>
+                <a16:creationId xmlns:a16="http://schemas.microsoft.com/office/drawing/2014/main" id="{D82633D7-1BCD-4B9A-AB9D-53753109BF83}"/>
               </a:ext>
             </a:extLst>
           </p:cNvPr>
@@ -23349,7 +21344,7 @@
           <p:cNvPr id="3" name="">
             <a:extLst xmlns:a="http://schemas.openxmlformats.org/drawingml/2006/main">
               <a:ext uri="{FF2B5EF4-FFF2-40B4-BE49-F238E27FC236}">
-                <a16:creationId xmlns:a16="http://schemas.microsoft.com/office/drawing/2014/main" id="{E07FF751-83BC-420A-8C48-81398FD609A3}"/>
+                <a16:creationId xmlns:a16="http://schemas.microsoft.com/office/drawing/2014/main" id="{F2B5DC2E-F68C-487D-9073-3DC53EEA1286}"/>
               </a:ext>
             </a:extLst>
           </p:cNvPr>
@@ -23382,7 +21377,7 @@
           <p:cNvPr id="4" name="">
             <a:extLst xmlns:a="http://schemas.openxmlformats.org/drawingml/2006/main">
               <a:ext uri="{FF2B5EF4-FFF2-40B4-BE49-F238E27FC236}">
-                <a16:creationId xmlns:a16="http://schemas.microsoft.com/office/drawing/2014/main" id="{CB688982-B374-46B8-A640-0DED7011CBCC}"/>
+                <a16:creationId xmlns:a16="http://schemas.microsoft.com/office/drawing/2014/main" id="{D8629718-88E1-4C88-A50D-C4651105D949}"/>
               </a:ext>
             </a:extLst>
           </p:cNvPr>
@@ -23531,7 +21526,7 @@
                 <a:ea typeface="Malgun Gothic"/>
                 <a:cs typeface="Malgun Gothic"/>
               </a:rPr>
-              <a:t>LOCAL EUM  ·  멘토링 브리프  ·  2026.10</a:t>
+              <a:t>LOCAL EUM  ·  기획과 구현  ·  2026.10</a:t>
             </a:r>
           </a:p>
         </p:txBody>
@@ -23541,7 +21536,7 @@
           <p:cNvPr id="5" name="">
             <a:extLst xmlns:a="http://schemas.openxmlformats.org/drawingml/2006/main">
               <a:ext uri="{FF2B5EF4-FFF2-40B4-BE49-F238E27FC236}">
-                <a16:creationId xmlns:a16="http://schemas.microsoft.com/office/drawing/2014/main" id="{9425E541-1F58-48D6-A749-211BA665390E}"/>
+                <a16:creationId xmlns:a16="http://schemas.microsoft.com/office/drawing/2014/main" id="{AD8907C4-75D3-486D-9BCC-7567D379C33C}"/>
               </a:ext>
             </a:extLst>
           </p:cNvPr>
@@ -23700,7 +21695,7 @@
           <p:cNvPr id="6" name="">
             <a:extLst xmlns:a="http://schemas.openxmlformats.org/drawingml/2006/main">
               <a:ext uri="{FF2B5EF4-FFF2-40B4-BE49-F238E27FC236}">
-                <a16:creationId xmlns:a16="http://schemas.microsoft.com/office/drawing/2014/main" id="{634774DA-7D8D-4E15-BB7E-E7E416B0C581}"/>
+                <a16:creationId xmlns:a16="http://schemas.microsoft.com/office/drawing/2014/main" id="{ED06BAB7-06AA-4107-BD04-0D3A83651C30}"/>
               </a:ext>
             </a:extLst>
           </p:cNvPr>
@@ -23710,7 +21705,7 @@
           <p:nvPr/>
         </p:nvPicPr>
         <p:blipFill>
-          <a:blip xmlns:r="http://schemas.openxmlformats.org/officeDocument/2006/relationships" xmlns:a="http://schemas.openxmlformats.org/drawingml/2006/main" r:embed="Rc34eac48d2e547ac"/>
+          <a:blip xmlns:r="http://schemas.openxmlformats.org/officeDocument/2006/relationships" xmlns:a="http://schemas.openxmlformats.org/drawingml/2006/main" r:embed="Re0b22eea174e4fbf"/>
           <a:srcRect xmlns:a="http://schemas.openxmlformats.org/drawingml/2006/main" l="7933" t="0" r="7933" b="0"/>
           <a:stretch xmlns:a="http://schemas.openxmlformats.org/drawingml/2006/main">
             <a:fillRect l="0" t="0" r="0" b="0"/>
@@ -23733,7 +21728,7 @@
           <p:cNvPr id="7" name="">
             <a:extLst xmlns:a="http://schemas.openxmlformats.org/drawingml/2006/main">
               <a:ext uri="{FF2B5EF4-FFF2-40B4-BE49-F238E27FC236}">
-                <a16:creationId xmlns:a16="http://schemas.microsoft.com/office/drawing/2014/main" id="{217A92AF-3EBA-48EB-9464-D97600387FD3}"/>
+                <a16:creationId xmlns:a16="http://schemas.microsoft.com/office/drawing/2014/main" id="{C2DA13E9-0952-488B-A44A-484BBD480AB4}"/>
               </a:ext>
             </a:extLst>
           </p:cNvPr>
@@ -23743,7 +21738,7 @@
           <p:nvPr/>
         </p:nvPicPr>
         <p:blipFill>
-          <a:blip xmlns:r="http://schemas.openxmlformats.org/officeDocument/2006/relationships" xmlns:a="http://schemas.openxmlformats.org/drawingml/2006/main" r:embed="R47007f734c7e4679"/>
+          <a:blip xmlns:r="http://schemas.openxmlformats.org/officeDocument/2006/relationships" xmlns:a="http://schemas.openxmlformats.org/drawingml/2006/main" r:embed="Re084a8fee94946c6"/>
           <a:srcRect xmlns:a="http://schemas.openxmlformats.org/drawingml/2006/main" l="7933" t="0" r="7933" b="0"/>
           <a:stretch xmlns:a="http://schemas.openxmlformats.org/drawingml/2006/main">
             <a:fillRect l="0" t="0" r="0" b="0"/>
@@ -23766,7 +21761,7 @@
           <p:cNvPr id="8" name="">
             <a:extLst xmlns:a="http://schemas.openxmlformats.org/drawingml/2006/main">
               <a:ext uri="{FF2B5EF4-FFF2-40B4-BE49-F238E27FC236}">
-                <a16:creationId xmlns:a16="http://schemas.microsoft.com/office/drawing/2014/main" id="{0E3B138C-DDF7-463C-B0AD-5AF35DED42AA}"/>
+                <a16:creationId xmlns:a16="http://schemas.microsoft.com/office/drawing/2014/main" id="{2AC5D809-BFE0-4B2E-A0CC-645E75912060}"/>
               </a:ext>
             </a:extLst>
           </p:cNvPr>
@@ -23776,7 +21771,7 @@
           <p:nvPr/>
         </p:nvPicPr>
         <p:blipFill>
-          <a:blip xmlns:r="http://schemas.openxmlformats.org/officeDocument/2006/relationships" xmlns:a="http://schemas.openxmlformats.org/drawingml/2006/main" r:embed="R27f9053a638f44b9"/>
+          <a:blip xmlns:r="http://schemas.openxmlformats.org/officeDocument/2006/relationships" xmlns:a="http://schemas.openxmlformats.org/drawingml/2006/main" r:embed="R9616675068c842aa"/>
           <a:srcRect xmlns:a="http://schemas.openxmlformats.org/drawingml/2006/main" l="7933" t="0" r="7933" b="0"/>
           <a:stretch xmlns:a="http://schemas.openxmlformats.org/drawingml/2006/main">
             <a:fillRect l="0" t="0" r="0" b="0"/>
@@ -23799,7 +21794,7 @@
           <p:cNvPr id="9" name="">
             <a:extLst xmlns:a="http://schemas.openxmlformats.org/drawingml/2006/main">
               <a:ext uri="{FF2B5EF4-FFF2-40B4-BE49-F238E27FC236}">
-                <a16:creationId xmlns:a16="http://schemas.microsoft.com/office/drawing/2014/main" id="{783D2B05-1295-4032-9C30-8FD2EABA45BF}"/>
+                <a16:creationId xmlns:a16="http://schemas.microsoft.com/office/drawing/2014/main" id="{4DD3BFB5-4B39-4BBB-9B23-E070D70AD697}"/>
               </a:ext>
             </a:extLst>
           </p:cNvPr>
@@ -23958,7 +21953,7 @@
           <p:cNvPr id="10" name="">
             <a:extLst xmlns:a="http://schemas.openxmlformats.org/drawingml/2006/main">
               <a:ext uri="{FF2B5EF4-FFF2-40B4-BE49-F238E27FC236}">
-                <a16:creationId xmlns:a16="http://schemas.microsoft.com/office/drawing/2014/main" id="{55ECA01A-E1BC-42B1-8D71-03B5E3CA56C3}"/>
+                <a16:creationId xmlns:a16="http://schemas.microsoft.com/office/drawing/2014/main" id="{D68D0A6D-002B-4E66-A618-1F36A3BAC9D8}"/>
               </a:ext>
             </a:extLst>
           </p:cNvPr>
@@ -24140,7 +22135,7 @@
           <p:cNvPr id="11" name="">
             <a:extLst xmlns:a="http://schemas.openxmlformats.org/drawingml/2006/main">
               <a:ext uri="{FF2B5EF4-FFF2-40B4-BE49-F238E27FC236}">
-                <a16:creationId xmlns:a16="http://schemas.microsoft.com/office/drawing/2014/main" id="{23EA671B-5961-4515-8A72-80230A10A331}"/>
+                <a16:creationId xmlns:a16="http://schemas.microsoft.com/office/drawing/2014/main" id="{46EE67A4-022C-4835-A212-059EB1E53BBF}"/>
               </a:ext>
             </a:extLst>
           </p:cNvPr>
@@ -24299,7 +22294,7 @@
           <p:cNvPr id="12" name="">
             <a:extLst xmlns:a="http://schemas.openxmlformats.org/drawingml/2006/main">
               <a:ext uri="{FF2B5EF4-FFF2-40B4-BE49-F238E27FC236}">
-                <a16:creationId xmlns:a16="http://schemas.microsoft.com/office/drawing/2014/main" id="{6CF714E9-28E0-444C-A733-B08B08CC2103}"/>
+                <a16:creationId xmlns:a16="http://schemas.microsoft.com/office/drawing/2014/main" id="{1A2F7FAD-BA38-48AA-A6BA-83C5692A9F67}"/>
               </a:ext>
             </a:extLst>
           </p:cNvPr>
@@ -24481,7 +22476,7 @@
           <p:cNvPr id="13" name="">
             <a:extLst xmlns:a="http://schemas.openxmlformats.org/drawingml/2006/main">
               <a:ext uri="{FF2B5EF4-FFF2-40B4-BE49-F238E27FC236}">
-                <a16:creationId xmlns:a16="http://schemas.microsoft.com/office/drawing/2014/main" id="{D32F5BB0-B817-4211-8A27-CBC7EBFD1288}"/>
+                <a16:creationId xmlns:a16="http://schemas.microsoft.com/office/drawing/2014/main" id="{87B6FF49-2809-49FC-A8E8-48D31F5D9396}"/>
               </a:ext>
             </a:extLst>
           </p:cNvPr>
@@ -24640,7 +22635,7 @@
           <p:cNvPr id="14" name="">
             <a:extLst xmlns:a="http://schemas.openxmlformats.org/drawingml/2006/main">
               <a:ext uri="{FF2B5EF4-FFF2-40B4-BE49-F238E27FC236}">
-                <a16:creationId xmlns:a16="http://schemas.microsoft.com/office/drawing/2014/main" id="{C5FB69B0-2F2E-4EA6-9FD6-9D50015D6961}"/>
+                <a16:creationId xmlns:a16="http://schemas.microsoft.com/office/drawing/2014/main" id="{B50CF891-85FC-4F1A-AC12-7BF04B2CC69D}"/>
               </a:ext>
             </a:extLst>
           </p:cNvPr>
@@ -24822,7 +22817,7 @@
           <p:cNvPr id="15" name="">
             <a:extLst xmlns:a="http://schemas.openxmlformats.org/drawingml/2006/main">
               <a:ext uri="{FF2B5EF4-FFF2-40B4-BE49-F238E27FC236}">
-                <a16:creationId xmlns:a16="http://schemas.microsoft.com/office/drawing/2014/main" id="{5BC45BD0-7FFB-457D-9B81-95B196F4055B}"/>
+                <a16:creationId xmlns:a16="http://schemas.microsoft.com/office/drawing/2014/main" id="{5208F81A-7450-461D-B119-09E21C29348B}"/>
               </a:ext>
             </a:extLst>
           </p:cNvPr>
@@ -24855,7 +22850,7 @@
           <p:cNvPr id="16" name="">
             <a:extLst xmlns:a="http://schemas.openxmlformats.org/drawingml/2006/main">
               <a:ext uri="{FF2B5EF4-FFF2-40B4-BE49-F238E27FC236}">
-                <a16:creationId xmlns:a16="http://schemas.microsoft.com/office/drawing/2014/main" id="{C2BEF97C-1505-446E-A5CE-B69EEC8E974D}"/>
+                <a16:creationId xmlns:a16="http://schemas.microsoft.com/office/drawing/2014/main" id="{481FE9D8-918C-45E2-AB5F-4B038389E9CA}"/>
               </a:ext>
             </a:extLst>
           </p:cNvPr>
@@ -25012,7 +23007,7 @@
     </p:spTree>
     <p:extLst>
       <p:ext uri="{BB962C8B-B14F-4D97-AF65-F5344CB8AC3E}">
-        <p14:creationId xmlns:p14="http://schemas.microsoft.com/office/powerpoint/2010/main" val="1741465871"/>
+        <p14:creationId xmlns:p14="http://schemas.microsoft.com/office/powerpoint/2010/main" val="186205095"/>
       </p:ext>
     </p:extLst>
   </p:cSld>
@@ -25043,7 +23038,7 @@
           <p:cNvPr id="44" name="">
             <a:extLst xmlns:a="http://schemas.openxmlformats.org/drawingml/2006/main">
               <a:ext uri="{FF2B5EF4-FFF2-40B4-BE49-F238E27FC236}">
-                <a16:creationId xmlns:a16="http://schemas.microsoft.com/office/drawing/2014/main" id="{707473BE-008D-45AF-A257-BC29EEFF0043}"/>
+                <a16:creationId xmlns:a16="http://schemas.microsoft.com/office/drawing/2014/main" id="{E2783A5B-1691-43BA-BE44-8E1A91DE0AE5}"/>
               </a:ext>
             </a:extLst>
           </p:cNvPr>
@@ -25202,7 +23197,7 @@
           <p:cNvPr id="2" name="">
             <a:extLst xmlns:a="http://schemas.openxmlformats.org/drawingml/2006/main">
               <a:ext uri="{FF2B5EF4-FFF2-40B4-BE49-F238E27FC236}">
-                <a16:creationId xmlns:a16="http://schemas.microsoft.com/office/drawing/2014/main" id="{D3AAA134-3F3F-4122-BA60-478A53734F0D}"/>
+                <a16:creationId xmlns:a16="http://schemas.microsoft.com/office/drawing/2014/main" id="{D6D0ECB5-5DA8-4234-873D-B5C0B453F626}"/>
               </a:ext>
             </a:extLst>
           </p:cNvPr>
@@ -25361,7 +23356,7 @@
           <p:cNvPr id="3" name="">
             <a:extLst xmlns:a="http://schemas.openxmlformats.org/drawingml/2006/main">
               <a:ext uri="{FF2B5EF4-FFF2-40B4-BE49-F238E27FC236}">
-                <a16:creationId xmlns:a16="http://schemas.microsoft.com/office/drawing/2014/main" id="{2C1CD50B-FA9A-443A-B34B-8DAB6116D473}"/>
+                <a16:creationId xmlns:a16="http://schemas.microsoft.com/office/drawing/2014/main" id="{468F87CC-AF3D-493B-8816-44E0B4F1CCA0}"/>
               </a:ext>
             </a:extLst>
           </p:cNvPr>
@@ -25394,7 +23389,7 @@
           <p:cNvPr id="4" name="">
             <a:extLst xmlns:a="http://schemas.openxmlformats.org/drawingml/2006/main">
               <a:ext uri="{FF2B5EF4-FFF2-40B4-BE49-F238E27FC236}">
-                <a16:creationId xmlns:a16="http://schemas.microsoft.com/office/drawing/2014/main" id="{B000AA51-C4AA-45D1-97A1-74D8ADD73454}"/>
+                <a16:creationId xmlns:a16="http://schemas.microsoft.com/office/drawing/2014/main" id="{9F22CA23-757A-4CCC-B738-E67828841512}"/>
               </a:ext>
             </a:extLst>
           </p:cNvPr>
@@ -25543,7 +23538,7 @@
                 <a:ea typeface="Malgun Gothic"/>
                 <a:cs typeface="Malgun Gothic"/>
               </a:rPr>
-              <a:t>LOCAL EUM  ·  멘토링 브리프  ·  2026.10</a:t>
+              <a:t>LOCAL EUM  ·  기획과 구현  ·  2026.10</a:t>
             </a:r>
           </a:p>
         </p:txBody>
@@ -25553,7 +23548,7 @@
           <p:cNvPr id="5" name="">
             <a:extLst xmlns:a="http://schemas.openxmlformats.org/drawingml/2006/main">
               <a:ext uri="{FF2B5EF4-FFF2-40B4-BE49-F238E27FC236}">
-                <a16:creationId xmlns:a16="http://schemas.microsoft.com/office/drawing/2014/main" id="{AC719487-A320-4C79-BAB4-2A75795FA87B}"/>
+                <a16:creationId xmlns:a16="http://schemas.microsoft.com/office/drawing/2014/main" id="{1FB9F416-98F1-4485-A753-015C89CEA1DF}"/>
               </a:ext>
             </a:extLst>
           </p:cNvPr>
@@ -25712,7 +23707,7 @@
           <p:cNvPr id="6" name="">
             <a:extLst xmlns:a="http://schemas.openxmlformats.org/drawingml/2006/main">
               <a:ext uri="{FF2B5EF4-FFF2-40B4-BE49-F238E27FC236}">
-                <a16:creationId xmlns:a16="http://schemas.microsoft.com/office/drawing/2014/main" id="{855647E3-5751-49D0-B2DE-26F44BFF1562}"/>
+                <a16:creationId xmlns:a16="http://schemas.microsoft.com/office/drawing/2014/main" id="{69A573C8-6494-4629-A761-566CA546F4D5}"/>
               </a:ext>
             </a:extLst>
           </p:cNvPr>
@@ -25747,7 +23742,7 @@
           <p:cNvPr id="7" name="">
             <a:extLst xmlns:a="http://schemas.openxmlformats.org/drawingml/2006/main">
               <a:ext uri="{FF2B5EF4-FFF2-40B4-BE49-F238E27FC236}">
-                <a16:creationId xmlns:a16="http://schemas.microsoft.com/office/drawing/2014/main" id="{6BCEDCD2-72B0-453B-A4A5-26BB31D3167A}"/>
+                <a16:creationId xmlns:a16="http://schemas.microsoft.com/office/drawing/2014/main" id="{E603D823-6BD2-461E-BC84-3BAAE97D92CE}"/>
               </a:ext>
             </a:extLst>
           </p:cNvPr>
@@ -25906,7 +23901,7 @@
           <p:cNvPr id="8" name="">
             <a:extLst xmlns:a="http://schemas.openxmlformats.org/drawingml/2006/main">
               <a:ext uri="{FF2B5EF4-FFF2-40B4-BE49-F238E27FC236}">
-                <a16:creationId xmlns:a16="http://schemas.microsoft.com/office/drawing/2014/main" id="{D39A646E-DB6E-4DE0-9C15-C046399A9240}"/>
+                <a16:creationId xmlns:a16="http://schemas.microsoft.com/office/drawing/2014/main" id="{9ED1045C-FC20-4EAE-8B7B-C7610BE4E636}"/>
               </a:ext>
             </a:extLst>
           </p:cNvPr>
@@ -26065,7 +24060,7 @@
           <p:cNvPr id="9" name="">
             <a:extLst xmlns:a="http://schemas.openxmlformats.org/drawingml/2006/main">
               <a:ext uri="{FF2B5EF4-FFF2-40B4-BE49-F238E27FC236}">
-                <a16:creationId xmlns:a16="http://schemas.microsoft.com/office/drawing/2014/main" id="{8CA55F6F-650C-422F-BA60-E1BCA630AE5F}"/>
+                <a16:creationId xmlns:a16="http://schemas.microsoft.com/office/drawing/2014/main" id="{0ADD3669-5C49-4AEC-9B84-62A0E938C073}"/>
               </a:ext>
             </a:extLst>
           </p:cNvPr>
@@ -26100,7 +24095,7 @@
           <p:cNvPr id="10" name="">
             <a:extLst xmlns:a="http://schemas.openxmlformats.org/drawingml/2006/main">
               <a:ext uri="{FF2B5EF4-FFF2-40B4-BE49-F238E27FC236}">
-                <a16:creationId xmlns:a16="http://schemas.microsoft.com/office/drawing/2014/main" id="{DD4285EA-8A22-4993-BCD1-E31A71639CC2}"/>
+                <a16:creationId xmlns:a16="http://schemas.microsoft.com/office/drawing/2014/main" id="{6E5FCA81-363A-4959-807C-AC91101BEB19}"/>
               </a:ext>
             </a:extLst>
           </p:cNvPr>
@@ -26259,7 +24254,7 @@
           <p:cNvPr id="11" name="">
             <a:extLst xmlns:a="http://schemas.openxmlformats.org/drawingml/2006/main">
               <a:ext uri="{FF2B5EF4-FFF2-40B4-BE49-F238E27FC236}">
-                <a16:creationId xmlns:a16="http://schemas.microsoft.com/office/drawing/2014/main" id="{2F24E56B-3096-401F-ACBD-60A34DA04EFA}"/>
+                <a16:creationId xmlns:a16="http://schemas.microsoft.com/office/drawing/2014/main" id="{10CAAB8D-B0FF-474D-B367-6B9E2D80E50A}"/>
               </a:ext>
             </a:extLst>
           </p:cNvPr>
@@ -26418,7 +24413,7 @@
           <p:cNvPr id="12" name="">
             <a:extLst xmlns:a="http://schemas.openxmlformats.org/drawingml/2006/main">
               <a:ext uri="{FF2B5EF4-FFF2-40B4-BE49-F238E27FC236}">
-                <a16:creationId xmlns:a16="http://schemas.microsoft.com/office/drawing/2014/main" id="{947971C8-9224-4BBD-8F3A-8E74802FE09C}"/>
+                <a16:creationId xmlns:a16="http://schemas.microsoft.com/office/drawing/2014/main" id="{10F70CB0-5E3B-49AC-8E41-EF603D91A415}"/>
               </a:ext>
             </a:extLst>
           </p:cNvPr>
@@ -26453,7 +24448,7 @@
           <p:cNvPr id="13" name="">
             <a:extLst xmlns:a="http://schemas.openxmlformats.org/drawingml/2006/main">
               <a:ext uri="{FF2B5EF4-FFF2-40B4-BE49-F238E27FC236}">
-                <a16:creationId xmlns:a16="http://schemas.microsoft.com/office/drawing/2014/main" id="{0E85A074-EDFE-4E2C-878A-8DADF105A9AB}"/>
+                <a16:creationId xmlns:a16="http://schemas.microsoft.com/office/drawing/2014/main" id="{149FC960-C167-414F-95A7-F4364AEAA384}"/>
               </a:ext>
             </a:extLst>
           </p:cNvPr>
@@ -26612,7 +24607,7 @@
           <p:cNvPr id="14" name="">
             <a:extLst xmlns:a="http://schemas.openxmlformats.org/drawingml/2006/main">
               <a:ext uri="{FF2B5EF4-FFF2-40B4-BE49-F238E27FC236}">
-                <a16:creationId xmlns:a16="http://schemas.microsoft.com/office/drawing/2014/main" id="{E30657F0-DAB4-4D46-9989-E7211A229CB8}"/>
+                <a16:creationId xmlns:a16="http://schemas.microsoft.com/office/drawing/2014/main" id="{8276E9AB-D767-48D4-B6B1-12AACC9CB05F}"/>
               </a:ext>
             </a:extLst>
           </p:cNvPr>
@@ -26771,7 +24766,7 @@
           <p:cNvPr id="15" name="">
             <a:extLst xmlns:a="http://schemas.openxmlformats.org/drawingml/2006/main">
               <a:ext uri="{FF2B5EF4-FFF2-40B4-BE49-F238E27FC236}">
-                <a16:creationId xmlns:a16="http://schemas.microsoft.com/office/drawing/2014/main" id="{42FFA863-26C3-443E-8592-5E194E7E2C5E}"/>
+                <a16:creationId xmlns:a16="http://schemas.microsoft.com/office/drawing/2014/main" id="{95BB69CB-272D-406F-8869-767AEE75AC4B}"/>
               </a:ext>
             </a:extLst>
           </p:cNvPr>
@@ -26806,7 +24801,7 @@
           <p:cNvPr id="16" name="">
             <a:extLst xmlns:a="http://schemas.openxmlformats.org/drawingml/2006/main">
               <a:ext uri="{FF2B5EF4-FFF2-40B4-BE49-F238E27FC236}">
-                <a16:creationId xmlns:a16="http://schemas.microsoft.com/office/drawing/2014/main" id="{7660C642-36CC-4ED5-94D6-FDEC74C998E2}"/>
+                <a16:creationId xmlns:a16="http://schemas.microsoft.com/office/drawing/2014/main" id="{3CF7A171-93D6-47DE-8107-101C8BA9962A}"/>
               </a:ext>
             </a:extLst>
           </p:cNvPr>
@@ -26965,7 +24960,7 @@
           <p:cNvPr id="17" name="">
             <a:extLst xmlns:a="http://schemas.openxmlformats.org/drawingml/2006/main">
               <a:ext uri="{FF2B5EF4-FFF2-40B4-BE49-F238E27FC236}">
-                <a16:creationId xmlns:a16="http://schemas.microsoft.com/office/drawing/2014/main" id="{1E381500-5CE8-4267-AD47-956D27ACB925}"/>
+                <a16:creationId xmlns:a16="http://schemas.microsoft.com/office/drawing/2014/main" id="{39910219-AF07-453A-AF06-E979CCAB37C8}"/>
               </a:ext>
             </a:extLst>
           </p:cNvPr>
@@ -27124,7 +25119,7 @@
           <p:cNvPr id="18" name="">
             <a:extLst xmlns:a="http://schemas.openxmlformats.org/drawingml/2006/main">
               <a:ext uri="{FF2B5EF4-FFF2-40B4-BE49-F238E27FC236}">
-                <a16:creationId xmlns:a16="http://schemas.microsoft.com/office/drawing/2014/main" id="{E12FED2F-0B8C-4279-B67F-C4DA22C77781}"/>
+                <a16:creationId xmlns:a16="http://schemas.microsoft.com/office/drawing/2014/main" id="{71B8192F-A95A-4926-976E-61920E05B691}"/>
               </a:ext>
             </a:extLst>
           </p:cNvPr>
@@ -27159,7 +25154,7 @@
           <p:cNvPr id="19" name="">
             <a:extLst xmlns:a="http://schemas.openxmlformats.org/drawingml/2006/main">
               <a:ext uri="{FF2B5EF4-FFF2-40B4-BE49-F238E27FC236}">
-                <a16:creationId xmlns:a16="http://schemas.microsoft.com/office/drawing/2014/main" id="{9A082255-03DD-4797-AC16-53DCAAD031FC}"/>
+                <a16:creationId xmlns:a16="http://schemas.microsoft.com/office/drawing/2014/main" id="{348D5675-95D1-4AE1-A636-8E17229FD6DD}"/>
               </a:ext>
             </a:extLst>
           </p:cNvPr>
@@ -27318,7 +25313,7 @@
           <p:cNvPr id="20" name="">
             <a:extLst xmlns:a="http://schemas.openxmlformats.org/drawingml/2006/main">
               <a:ext uri="{FF2B5EF4-FFF2-40B4-BE49-F238E27FC236}">
-                <a16:creationId xmlns:a16="http://schemas.microsoft.com/office/drawing/2014/main" id="{A5502C36-22BB-4BFA-8524-0FFAC08EE38E}"/>
+                <a16:creationId xmlns:a16="http://schemas.microsoft.com/office/drawing/2014/main" id="{75B54B67-0625-4485-9434-9CD285132AA5}"/>
               </a:ext>
             </a:extLst>
           </p:cNvPr>
@@ -27477,7 +25472,7 @@
           <p:cNvPr id="21" name="">
             <a:extLst xmlns:a="http://schemas.openxmlformats.org/drawingml/2006/main">
               <a:ext uri="{FF2B5EF4-FFF2-40B4-BE49-F238E27FC236}">
-                <a16:creationId xmlns:a16="http://schemas.microsoft.com/office/drawing/2014/main" id="{041EC1D8-65E3-4BD9-985A-39693D285167}"/>
+                <a16:creationId xmlns:a16="http://schemas.microsoft.com/office/drawing/2014/main" id="{0A5C54BC-D80F-4193-BE1C-6A0209FA6EE9}"/>
               </a:ext>
             </a:extLst>
           </p:cNvPr>
@@ -27512,7 +25507,7 @@
           <p:cNvPr id="22" name="">
             <a:extLst xmlns:a="http://schemas.openxmlformats.org/drawingml/2006/main">
               <a:ext uri="{FF2B5EF4-FFF2-40B4-BE49-F238E27FC236}">
-                <a16:creationId xmlns:a16="http://schemas.microsoft.com/office/drawing/2014/main" id="{DC813338-F0A6-4ABB-A76A-B34E349241FE}"/>
+                <a16:creationId xmlns:a16="http://schemas.microsoft.com/office/drawing/2014/main" id="{7BAC895C-4FD0-4E7E-AE2A-EFBCF2BEC4C3}"/>
               </a:ext>
             </a:extLst>
           </p:cNvPr>
@@ -27671,7 +25666,7 @@
           <p:cNvPr id="23" name="">
             <a:extLst xmlns:a="http://schemas.openxmlformats.org/drawingml/2006/main">
               <a:ext uri="{FF2B5EF4-FFF2-40B4-BE49-F238E27FC236}">
-                <a16:creationId xmlns:a16="http://schemas.microsoft.com/office/drawing/2014/main" id="{6385B7E5-C0B9-46A6-A6E1-5FCFB6864EE1}"/>
+                <a16:creationId xmlns:a16="http://schemas.microsoft.com/office/drawing/2014/main" id="{65F1558D-22A8-4BB3-897C-D7A9BC6E092A}"/>
               </a:ext>
             </a:extLst>
           </p:cNvPr>
@@ -27830,7 +25825,7 @@
           <p:cNvPr id="24" name="">
             <a:extLst xmlns:a="http://schemas.openxmlformats.org/drawingml/2006/main">
               <a:ext uri="{FF2B5EF4-FFF2-40B4-BE49-F238E27FC236}">
-                <a16:creationId xmlns:a16="http://schemas.microsoft.com/office/drawing/2014/main" id="{1C92CBA4-F199-489C-88C4-67531DE50EEF}"/>
+                <a16:creationId xmlns:a16="http://schemas.microsoft.com/office/drawing/2014/main" id="{AA747936-9B79-40FD-A6BE-7C48E4280925}"/>
               </a:ext>
             </a:extLst>
           </p:cNvPr>
@@ -27863,7 +25858,7 @@
           <p:cNvPr id="25" name="">
             <a:extLst xmlns:a="http://schemas.openxmlformats.org/drawingml/2006/main">
               <a:ext uri="{FF2B5EF4-FFF2-40B4-BE49-F238E27FC236}">
-                <a16:creationId xmlns:a16="http://schemas.microsoft.com/office/drawing/2014/main" id="{78207874-AA85-430A-8F68-6897C23F0870}"/>
+                <a16:creationId xmlns:a16="http://schemas.microsoft.com/office/drawing/2014/main" id="{823819AF-2A09-4CED-B369-3C72475C17EE}"/>
               </a:ext>
             </a:extLst>
           </p:cNvPr>
@@ -28022,7 +26017,7 @@
           <p:cNvPr id="26" name="">
             <a:extLst xmlns:a="http://schemas.openxmlformats.org/drawingml/2006/main">
               <a:ext uri="{FF2B5EF4-FFF2-40B4-BE49-F238E27FC236}">
-                <a16:creationId xmlns:a16="http://schemas.microsoft.com/office/drawing/2014/main" id="{3A6E3091-FD79-47E6-8C9E-CF87FD4CD4CC}"/>
+                <a16:creationId xmlns:a16="http://schemas.microsoft.com/office/drawing/2014/main" id="{2D9265B4-79C7-4799-B33E-1179D5C77FB4}"/>
               </a:ext>
             </a:extLst>
           </p:cNvPr>
@@ -28181,7 +26176,7 @@
           <p:cNvPr id="27" name="">
             <a:extLst xmlns:a="http://schemas.openxmlformats.org/drawingml/2006/main">
               <a:ext uri="{FF2B5EF4-FFF2-40B4-BE49-F238E27FC236}">
-                <a16:creationId xmlns:a16="http://schemas.microsoft.com/office/drawing/2014/main" id="{454680C6-54FE-49B1-B9DE-FE10B97C13AC}"/>
+                <a16:creationId xmlns:a16="http://schemas.microsoft.com/office/drawing/2014/main" id="{80371235-7268-4800-A87E-A65C19C0269B}"/>
               </a:ext>
             </a:extLst>
           </p:cNvPr>
@@ -28214,7 +26209,7 @@
           <p:cNvPr id="28" name="">
             <a:extLst xmlns:a="http://schemas.openxmlformats.org/drawingml/2006/main">
               <a:ext uri="{FF2B5EF4-FFF2-40B4-BE49-F238E27FC236}">
-                <a16:creationId xmlns:a16="http://schemas.microsoft.com/office/drawing/2014/main" id="{16E47F0A-2EDC-4990-BE37-D5C769D44F32}"/>
+                <a16:creationId xmlns:a16="http://schemas.microsoft.com/office/drawing/2014/main" id="{4D7518EF-B088-456E-BA1B-6B29AF17FD27}"/>
               </a:ext>
             </a:extLst>
           </p:cNvPr>
@@ -28373,7 +26368,7 @@
           <p:cNvPr id="29" name="">
             <a:extLst xmlns:a="http://schemas.openxmlformats.org/drawingml/2006/main">
               <a:ext uri="{FF2B5EF4-FFF2-40B4-BE49-F238E27FC236}">
-                <a16:creationId xmlns:a16="http://schemas.microsoft.com/office/drawing/2014/main" id="{B2590E8D-C303-4AB1-AE09-919980817607}"/>
+                <a16:creationId xmlns:a16="http://schemas.microsoft.com/office/drawing/2014/main" id="{D1F6AAB5-3A8E-4B0B-8F51-5D4F5ECB7F84}"/>
               </a:ext>
             </a:extLst>
           </p:cNvPr>
@@ -28532,7 +26527,7 @@
           <p:cNvPr id="30" name="">
             <a:extLst xmlns:a="http://schemas.openxmlformats.org/drawingml/2006/main">
               <a:ext uri="{FF2B5EF4-FFF2-40B4-BE49-F238E27FC236}">
-                <a16:creationId xmlns:a16="http://schemas.microsoft.com/office/drawing/2014/main" id="{08233631-DD72-4BDA-9587-DE3C2EE793BA}"/>
+                <a16:creationId xmlns:a16="http://schemas.microsoft.com/office/drawing/2014/main" id="{88F28B55-4D73-4235-9013-16340C4FCB36}"/>
               </a:ext>
             </a:extLst>
           </p:cNvPr>
@@ -28565,7 +26560,7 @@
           <p:cNvPr id="31" name="">
             <a:extLst xmlns:a="http://schemas.openxmlformats.org/drawingml/2006/main">
               <a:ext uri="{FF2B5EF4-FFF2-40B4-BE49-F238E27FC236}">
-                <a16:creationId xmlns:a16="http://schemas.microsoft.com/office/drawing/2014/main" id="{C3786B61-71C9-4DD6-928F-BE2A934887BA}"/>
+                <a16:creationId xmlns:a16="http://schemas.microsoft.com/office/drawing/2014/main" id="{4CAFFA98-CD44-4497-A1FC-1D9CC7BB519A}"/>
               </a:ext>
             </a:extLst>
           </p:cNvPr>
@@ -28724,7 +26719,7 @@
           <p:cNvPr id="32" name="">
             <a:extLst xmlns:a="http://schemas.openxmlformats.org/drawingml/2006/main">
               <a:ext uri="{FF2B5EF4-FFF2-40B4-BE49-F238E27FC236}">
-                <a16:creationId xmlns:a16="http://schemas.microsoft.com/office/drawing/2014/main" id="{41B2BD37-C675-4071-BD44-D2E217F368AB}"/>
+                <a16:creationId xmlns:a16="http://schemas.microsoft.com/office/drawing/2014/main" id="{EFB51FEB-6E5F-4DF8-85AD-1DDAC578F987}"/>
               </a:ext>
             </a:extLst>
           </p:cNvPr>
@@ -28883,7 +26878,7 @@
           <p:cNvPr id="33" name="">
             <a:extLst xmlns:a="http://schemas.openxmlformats.org/drawingml/2006/main">
               <a:ext uri="{FF2B5EF4-FFF2-40B4-BE49-F238E27FC236}">
-                <a16:creationId xmlns:a16="http://schemas.microsoft.com/office/drawing/2014/main" id="{F7F7A72C-CD4C-41F5-831C-C34472A15278}"/>
+                <a16:creationId xmlns:a16="http://schemas.microsoft.com/office/drawing/2014/main" id="{F831E215-3984-424E-8771-9E91B664CCD3}"/>
               </a:ext>
             </a:extLst>
           </p:cNvPr>
@@ -28916,7 +26911,7 @@
           <p:cNvPr id="34" name="">
             <a:extLst xmlns:a="http://schemas.openxmlformats.org/drawingml/2006/main">
               <a:ext uri="{FF2B5EF4-FFF2-40B4-BE49-F238E27FC236}">
-                <a16:creationId xmlns:a16="http://schemas.microsoft.com/office/drawing/2014/main" id="{17A12C99-5B2D-4993-9023-BA77A2494D9E}"/>
+                <a16:creationId xmlns:a16="http://schemas.microsoft.com/office/drawing/2014/main" id="{A55103D8-30E2-43AA-B42A-E1DC26A5711F}"/>
               </a:ext>
             </a:extLst>
           </p:cNvPr>
@@ -29075,7 +27070,7 @@
           <p:cNvPr id="35" name="">
             <a:extLst xmlns:a="http://schemas.openxmlformats.org/drawingml/2006/main">
               <a:ext uri="{FF2B5EF4-FFF2-40B4-BE49-F238E27FC236}">
-                <a16:creationId xmlns:a16="http://schemas.microsoft.com/office/drawing/2014/main" id="{AFC0D060-526D-438F-A341-F2AAD463BF87}"/>
+                <a16:creationId xmlns:a16="http://schemas.microsoft.com/office/drawing/2014/main" id="{9376513A-0BEA-436F-BE2E-F436EF55862F}"/>
               </a:ext>
             </a:extLst>
           </p:cNvPr>
@@ -29234,7 +27229,7 @@
           <p:cNvPr id="36" name="">
             <a:extLst xmlns:a="http://schemas.openxmlformats.org/drawingml/2006/main">
               <a:ext uri="{FF2B5EF4-FFF2-40B4-BE49-F238E27FC236}">
-                <a16:creationId xmlns:a16="http://schemas.microsoft.com/office/drawing/2014/main" id="{F8CAF684-B024-47E8-B76E-88D2E6341E5E}"/>
+                <a16:creationId xmlns:a16="http://schemas.microsoft.com/office/drawing/2014/main" id="{83F25BE9-F8E9-4C4B-A266-87D394A06712}"/>
               </a:ext>
             </a:extLst>
           </p:cNvPr>
@@ -29267,7 +27262,7 @@
           <p:cNvPr id="37" name="">
             <a:extLst xmlns:a="http://schemas.openxmlformats.org/drawingml/2006/main">
               <a:ext uri="{FF2B5EF4-FFF2-40B4-BE49-F238E27FC236}">
-                <a16:creationId xmlns:a16="http://schemas.microsoft.com/office/drawing/2014/main" id="{AB925DC5-7CA0-4914-866B-29AEE3AEA64D}"/>
+                <a16:creationId xmlns:a16="http://schemas.microsoft.com/office/drawing/2014/main" id="{3938C8B3-3AD2-4338-BC2D-7FD7466A4C91}"/>
               </a:ext>
             </a:extLst>
           </p:cNvPr>
@@ -29426,7 +27421,7 @@
           <p:cNvPr id="38" name="">
             <a:extLst xmlns:a="http://schemas.openxmlformats.org/drawingml/2006/main">
               <a:ext uri="{FF2B5EF4-FFF2-40B4-BE49-F238E27FC236}">
-                <a16:creationId xmlns:a16="http://schemas.microsoft.com/office/drawing/2014/main" id="{FF049574-75FC-4FE9-BCF9-1D85BFF3B9FC}"/>
+                <a16:creationId xmlns:a16="http://schemas.microsoft.com/office/drawing/2014/main" id="{9570E982-50DB-4A67-A0E8-AD7FD53ADC82}"/>
               </a:ext>
             </a:extLst>
           </p:cNvPr>
@@ -29585,7 +27580,7 @@
           <p:cNvPr id="39" name="">
             <a:extLst xmlns:a="http://schemas.openxmlformats.org/drawingml/2006/main">
               <a:ext uri="{FF2B5EF4-FFF2-40B4-BE49-F238E27FC236}">
-                <a16:creationId xmlns:a16="http://schemas.microsoft.com/office/drawing/2014/main" id="{03D7D625-5144-4D0A-9477-1954A0A3CD8D}"/>
+                <a16:creationId xmlns:a16="http://schemas.microsoft.com/office/drawing/2014/main" id="{69E3EE05-812E-4AAE-A353-86CA791FB17E}"/>
               </a:ext>
             </a:extLst>
           </p:cNvPr>
@@ -29744,7 +27739,7 @@
           <p:cNvPr id="40" name="">
             <a:extLst xmlns:a="http://schemas.openxmlformats.org/drawingml/2006/main">
               <a:ext uri="{FF2B5EF4-FFF2-40B4-BE49-F238E27FC236}">
-                <a16:creationId xmlns:a16="http://schemas.microsoft.com/office/drawing/2014/main" id="{4AE5FEC1-19AA-4F28-B2C6-867EEE9D8613}"/>
+                <a16:creationId xmlns:a16="http://schemas.microsoft.com/office/drawing/2014/main" id="{87EF8C3F-1B2A-41A4-A8A0-BE16153BA5F5}"/>
               </a:ext>
             </a:extLst>
           </p:cNvPr>
@@ -29903,7 +27898,7 @@
           <p:cNvPr id="41" name="">
             <a:extLst xmlns:a="http://schemas.openxmlformats.org/drawingml/2006/main">
               <a:ext uri="{FF2B5EF4-FFF2-40B4-BE49-F238E27FC236}">
-                <a16:creationId xmlns:a16="http://schemas.microsoft.com/office/drawing/2014/main" id="{5358595F-49E0-42DB-8DFC-C210CAC13A8D}"/>
+                <a16:creationId xmlns:a16="http://schemas.microsoft.com/office/drawing/2014/main" id="{57796C51-B267-491B-9092-F61BAF5B030A}"/>
               </a:ext>
             </a:extLst>
           </p:cNvPr>
@@ -30062,7 +28057,7 @@
           <p:cNvPr id="42" name="">
             <a:extLst xmlns:a="http://schemas.openxmlformats.org/drawingml/2006/main">
               <a:ext uri="{FF2B5EF4-FFF2-40B4-BE49-F238E27FC236}">
-                <a16:creationId xmlns:a16="http://schemas.microsoft.com/office/drawing/2014/main" id="{76265CEF-E41A-4FB9-B330-C6898044F588}"/>
+                <a16:creationId xmlns:a16="http://schemas.microsoft.com/office/drawing/2014/main" id="{BF2E43B3-07CE-4D2A-BE63-854BC7D3E22E}"/>
               </a:ext>
             </a:extLst>
           </p:cNvPr>
@@ -30221,7 +28216,7 @@
           <p:cNvPr id="43" name="">
             <a:extLst xmlns:a="http://schemas.openxmlformats.org/drawingml/2006/main">
               <a:ext uri="{FF2B5EF4-FFF2-40B4-BE49-F238E27FC236}">
-                <a16:creationId xmlns:a16="http://schemas.microsoft.com/office/drawing/2014/main" id="{4BCCAD88-0FF8-4964-97E6-1CD762385466}"/>
+                <a16:creationId xmlns:a16="http://schemas.microsoft.com/office/drawing/2014/main" id="{E6E3F31D-10FD-4839-AA2A-52ABC905A7AA}"/>
               </a:ext>
             </a:extLst>
           </p:cNvPr>
@@ -30401,7 +28396,7 @@
     </p:spTree>
     <p:extLst>
       <p:ext uri="{BB962C8B-B14F-4D97-AF65-F5344CB8AC3E}">
-        <p14:creationId xmlns:p14="http://schemas.microsoft.com/office/powerpoint/2010/main" val="357981199"/>
+        <p14:creationId xmlns:p14="http://schemas.microsoft.com/office/powerpoint/2010/main" val="1286194658"/>
       </p:ext>
     </p:extLst>
   </p:cSld>
@@ -30432,7 +28427,7 @@
           <p:cNvPr id="30" name="">
             <a:extLst xmlns:a="http://schemas.openxmlformats.org/drawingml/2006/main">
               <a:ext uri="{FF2B5EF4-FFF2-40B4-BE49-F238E27FC236}">
-                <a16:creationId xmlns:a16="http://schemas.microsoft.com/office/drawing/2014/main" id="{C1586798-C8A8-4056-83F6-B1EE06F6751D}"/>
+                <a16:creationId xmlns:a16="http://schemas.microsoft.com/office/drawing/2014/main" id="{9FA6578B-EC45-4CE7-A77B-9152655A59A2}"/>
               </a:ext>
             </a:extLst>
           </p:cNvPr>
@@ -30581,7 +28576,7 @@
                 <a:ea typeface="Malgun Gothic"/>
                 <a:cs typeface="Malgun Gothic"/>
               </a:rPr>
-              <a:t>SYSTEM ARCHITECTURE</a:t>
+              <a:t>LOCAL EUM ARCHITECTURE</a:t>
             </a:r>
           </a:p>
         </p:txBody>
@@ -30591,7 +28586,7 @@
           <p:cNvPr id="2" name="">
             <a:extLst xmlns:a="http://schemas.openxmlformats.org/drawingml/2006/main">
               <a:ext uri="{FF2B5EF4-FFF2-40B4-BE49-F238E27FC236}">
-                <a16:creationId xmlns:a16="http://schemas.microsoft.com/office/drawing/2014/main" id="{CBA0BC47-C455-481A-95D1-A81ECAC23A72}"/>
+                <a16:creationId xmlns:a16="http://schemas.microsoft.com/office/drawing/2014/main" id="{D2D1F5E9-FB59-46B5-B38B-8B7B3E8B15BC}"/>
               </a:ext>
             </a:extLst>
           </p:cNvPr>
@@ -30740,7 +28735,7 @@
                 <a:ea typeface="Malgun Gothic"/>
                 <a:cs typeface="Malgun Gothic"/>
               </a:rPr>
-              <a:t>팀 공통 React 안의 로컬이음, 데이터는 Supabase로 분리</a:t>
+              <a:t>여행자 화면과 호스트 운영을 Supabase로 연결</a:t>
             </a:r>
           </a:p>
         </p:txBody>
@@ -30750,7 +28745,7 @@
           <p:cNvPr id="3" name="">
             <a:extLst xmlns:a="http://schemas.openxmlformats.org/drawingml/2006/main">
               <a:ext uri="{FF2B5EF4-FFF2-40B4-BE49-F238E27FC236}">
-                <a16:creationId xmlns:a16="http://schemas.microsoft.com/office/drawing/2014/main" id="{E8F8EC4C-FFB1-43A2-AAFB-6C9EB7805F81}"/>
+                <a16:creationId xmlns:a16="http://schemas.microsoft.com/office/drawing/2014/main" id="{3F59CC9E-38CB-4114-9C98-704CA29D90A9}"/>
               </a:ext>
             </a:extLst>
           </p:cNvPr>
@@ -30783,7 +28778,7 @@
           <p:cNvPr id="4" name="">
             <a:extLst xmlns:a="http://schemas.openxmlformats.org/drawingml/2006/main">
               <a:ext uri="{FF2B5EF4-FFF2-40B4-BE49-F238E27FC236}">
-                <a16:creationId xmlns:a16="http://schemas.microsoft.com/office/drawing/2014/main" id="{7E531F1D-2502-4229-A61C-3EB983827B29}"/>
+                <a16:creationId xmlns:a16="http://schemas.microsoft.com/office/drawing/2014/main" id="{9C86CC9C-5BBC-473B-8C3D-08A0A8A9B9CA}"/>
               </a:ext>
             </a:extLst>
           </p:cNvPr>
@@ -30932,7 +28927,7 @@
                 <a:ea typeface="Malgun Gothic"/>
                 <a:cs typeface="Malgun Gothic"/>
               </a:rPr>
-              <a:t>LOCAL EUM  ·  멘토링 브리프  ·  2026.10</a:t>
+              <a:t>LOCAL EUM  ·  기획과 구현  ·  2026.10</a:t>
             </a:r>
           </a:p>
         </p:txBody>
@@ -30942,7 +28937,7 @@
           <p:cNvPr id="5" name="">
             <a:extLst xmlns:a="http://schemas.openxmlformats.org/drawingml/2006/main">
               <a:ext uri="{FF2B5EF4-FFF2-40B4-BE49-F238E27FC236}">
-                <a16:creationId xmlns:a16="http://schemas.microsoft.com/office/drawing/2014/main" id="{FD033D60-8D46-4DC8-8247-7090BEF61D1D}"/>
+                <a16:creationId xmlns:a16="http://schemas.microsoft.com/office/drawing/2014/main" id="{F209CF63-8658-466D-A9F4-D9FF9258D4F8}"/>
               </a:ext>
             </a:extLst>
           </p:cNvPr>
@@ -31101,7 +29096,7 @@
           <p:cNvPr id="6" name="">
             <a:extLst xmlns:a="http://schemas.openxmlformats.org/drawingml/2006/main">
               <a:ext uri="{FF2B5EF4-FFF2-40B4-BE49-F238E27FC236}">
-                <a16:creationId xmlns:a16="http://schemas.microsoft.com/office/drawing/2014/main" id="{EC0C903B-7A92-4C16-953B-E111DC394CE7}"/>
+                <a16:creationId xmlns:a16="http://schemas.microsoft.com/office/drawing/2014/main" id="{F5D85B52-20C6-4FEE-9438-11E59952FDB2}"/>
               </a:ext>
             </a:extLst>
           </p:cNvPr>
@@ -31136,7 +29131,7 @@
           <p:cNvPr id="7" name="">
             <a:extLst xmlns:a="http://schemas.openxmlformats.org/drawingml/2006/main">
               <a:ext uri="{FF2B5EF4-FFF2-40B4-BE49-F238E27FC236}">
-                <a16:creationId xmlns:a16="http://schemas.microsoft.com/office/drawing/2014/main" id="{8D51DED6-5487-4395-869C-16D0A4D5A12B}"/>
+                <a16:creationId xmlns:a16="http://schemas.microsoft.com/office/drawing/2014/main" id="{6F325442-3673-4300-A9C0-378C3A447DE3}"/>
               </a:ext>
             </a:extLst>
           </p:cNvPr>
@@ -31295,7 +29290,7 @@
           <p:cNvPr id="8" name="">
             <a:extLst xmlns:a="http://schemas.openxmlformats.org/drawingml/2006/main">
               <a:ext uri="{FF2B5EF4-FFF2-40B4-BE49-F238E27FC236}">
-                <a16:creationId xmlns:a16="http://schemas.microsoft.com/office/drawing/2014/main" id="{228755C6-8B74-4FC8-9008-05AA0B8C2515}"/>
+                <a16:creationId xmlns:a16="http://schemas.microsoft.com/office/drawing/2014/main" id="{853D497E-6F1F-4911-8F8D-3F6E5CCA9C6B}"/>
               </a:ext>
             </a:extLst>
           </p:cNvPr>
@@ -31328,7 +29323,7 @@
           <p:cNvPr id="9" name="">
             <a:extLst xmlns:a="http://schemas.openxmlformats.org/drawingml/2006/main">
               <a:ext uri="{FF2B5EF4-FFF2-40B4-BE49-F238E27FC236}">
-                <a16:creationId xmlns:a16="http://schemas.microsoft.com/office/drawing/2014/main" id="{E564D4E4-F999-4FBF-9304-82C84E1F69E7}"/>
+                <a16:creationId xmlns:a16="http://schemas.microsoft.com/office/drawing/2014/main" id="{A575E4B8-0EB8-4FFA-AC07-38783012354D}"/>
               </a:ext>
             </a:extLst>
           </p:cNvPr>
@@ -31487,7 +29482,7 @@
           <p:cNvPr id="10" name="">
             <a:extLst xmlns:a="http://schemas.openxmlformats.org/drawingml/2006/main">
               <a:ext uri="{FF2B5EF4-FFF2-40B4-BE49-F238E27FC236}">
-                <a16:creationId xmlns:a16="http://schemas.microsoft.com/office/drawing/2014/main" id="{1164C088-BC77-4678-B1DA-69063367C3D6}"/>
+                <a16:creationId xmlns:a16="http://schemas.microsoft.com/office/drawing/2014/main" id="{28418DA0-C85D-4393-B5A5-842632135313}"/>
               </a:ext>
             </a:extLst>
           </p:cNvPr>
@@ -31677,7 +29672,7 @@
           <p:cNvPr id="11" name="">
             <a:extLst xmlns:a="http://schemas.openxmlformats.org/drawingml/2006/main">
               <a:ext uri="{FF2B5EF4-FFF2-40B4-BE49-F238E27FC236}">
-                <a16:creationId xmlns:a16="http://schemas.microsoft.com/office/drawing/2014/main" id="{91027264-C451-4E96-B5D9-B06E3F411274}"/>
+                <a16:creationId xmlns:a16="http://schemas.microsoft.com/office/drawing/2014/main" id="{1026CD84-52F8-4651-88CD-502ED2E44796}"/>
               </a:ext>
             </a:extLst>
           </p:cNvPr>
@@ -31710,7 +29705,7 @@
           <p:cNvPr id="12" name="">
             <a:extLst xmlns:a="http://schemas.openxmlformats.org/drawingml/2006/main">
               <a:ext uri="{FF2B5EF4-FFF2-40B4-BE49-F238E27FC236}">
-                <a16:creationId xmlns:a16="http://schemas.microsoft.com/office/drawing/2014/main" id="{83352D68-C405-4AA7-838E-3135750BE655}"/>
+                <a16:creationId xmlns:a16="http://schemas.microsoft.com/office/drawing/2014/main" id="{F1567C8C-20E0-4DAC-9026-495646856B2A}"/>
               </a:ext>
             </a:extLst>
           </p:cNvPr>
@@ -31869,7 +29864,7 @@
           <p:cNvPr id="13" name="">
             <a:extLst xmlns:a="http://schemas.openxmlformats.org/drawingml/2006/main">
               <a:ext uri="{FF2B5EF4-FFF2-40B4-BE49-F238E27FC236}">
-                <a16:creationId xmlns:a16="http://schemas.microsoft.com/office/drawing/2014/main" id="{6A5B5E6E-B6D1-419E-81F2-E5E0C8F42C9C}"/>
+                <a16:creationId xmlns:a16="http://schemas.microsoft.com/office/drawing/2014/main" id="{0AF10D99-E424-4292-8601-E80F506E1D2A}"/>
               </a:ext>
             </a:extLst>
           </p:cNvPr>
@@ -32059,7 +30054,7 @@
           <p:cNvPr id="14" name="">
             <a:extLst xmlns:a="http://schemas.openxmlformats.org/drawingml/2006/main">
               <a:ext uri="{FF2B5EF4-FFF2-40B4-BE49-F238E27FC236}">
-                <a16:creationId xmlns:a16="http://schemas.microsoft.com/office/drawing/2014/main" id="{39A865C7-AF42-4664-A894-D78C3C7D6AFF}"/>
+                <a16:creationId xmlns:a16="http://schemas.microsoft.com/office/drawing/2014/main" id="{2B1B731A-D0C3-4205-A064-B9804D26DE35}"/>
               </a:ext>
             </a:extLst>
           </p:cNvPr>
@@ -32218,7 +30213,7 @@
           <p:cNvPr id="15" name="">
             <a:extLst xmlns:a="http://schemas.openxmlformats.org/drawingml/2006/main">
               <a:ext uri="{FF2B5EF4-FFF2-40B4-BE49-F238E27FC236}">
-                <a16:creationId xmlns:a16="http://schemas.microsoft.com/office/drawing/2014/main" id="{41C07E2F-E03C-434D-BF4B-F0E8B01A23A8}"/>
+                <a16:creationId xmlns:a16="http://schemas.microsoft.com/office/drawing/2014/main" id="{9B679173-BF68-47F5-95E6-52ED4559FFB5}"/>
               </a:ext>
             </a:extLst>
           </p:cNvPr>
@@ -32251,7 +30246,7 @@
           <p:cNvPr id="16" name="">
             <a:extLst xmlns:a="http://schemas.openxmlformats.org/drawingml/2006/main">
               <a:ext uri="{FF2B5EF4-FFF2-40B4-BE49-F238E27FC236}">
-                <a16:creationId xmlns:a16="http://schemas.microsoft.com/office/drawing/2014/main" id="{0DB69114-0519-47BE-9D9F-517775106789}"/>
+                <a16:creationId xmlns:a16="http://schemas.microsoft.com/office/drawing/2014/main" id="{D407726B-4158-4DD4-8016-7EDE50D39FB7}"/>
               </a:ext>
             </a:extLst>
           </p:cNvPr>
@@ -32410,7 +30405,7 @@
           <p:cNvPr id="17" name="">
             <a:extLst xmlns:a="http://schemas.openxmlformats.org/drawingml/2006/main">
               <a:ext uri="{FF2B5EF4-FFF2-40B4-BE49-F238E27FC236}">
-                <a16:creationId xmlns:a16="http://schemas.microsoft.com/office/drawing/2014/main" id="{9FA44C6E-AC57-4DDC-9507-8110DF408A1E}"/>
+                <a16:creationId xmlns:a16="http://schemas.microsoft.com/office/drawing/2014/main" id="{1EEB6C7D-E1A0-4AA6-AAAC-1D3D57E0E218}"/>
               </a:ext>
             </a:extLst>
           </p:cNvPr>
@@ -32600,7 +30595,7 @@
           <p:cNvPr id="18" name="">
             <a:extLst xmlns:a="http://schemas.openxmlformats.org/drawingml/2006/main">
               <a:ext uri="{FF2B5EF4-FFF2-40B4-BE49-F238E27FC236}">
-                <a16:creationId xmlns:a16="http://schemas.microsoft.com/office/drawing/2014/main" id="{3A339488-76C4-4F95-B989-3878A2656FB2}"/>
+                <a16:creationId xmlns:a16="http://schemas.microsoft.com/office/drawing/2014/main" id="{8A85697E-5A56-4D7C-A52C-95B33453815A}"/>
               </a:ext>
             </a:extLst>
           </p:cNvPr>
@@ -32633,7 +30628,7 @@
           <p:cNvPr id="19" name="">
             <a:extLst xmlns:a="http://schemas.openxmlformats.org/drawingml/2006/main">
               <a:ext uri="{FF2B5EF4-FFF2-40B4-BE49-F238E27FC236}">
-                <a16:creationId xmlns:a16="http://schemas.microsoft.com/office/drawing/2014/main" id="{DFF553DA-7450-4A0E-93DF-C551635E8769}"/>
+                <a16:creationId xmlns:a16="http://schemas.microsoft.com/office/drawing/2014/main" id="{2CCE9C7B-80A0-4434-917F-582A0B6E9A0E}"/>
               </a:ext>
             </a:extLst>
           </p:cNvPr>
@@ -32792,7 +30787,7 @@
           <p:cNvPr id="20" name="">
             <a:extLst xmlns:a="http://schemas.openxmlformats.org/drawingml/2006/main">
               <a:ext uri="{FF2B5EF4-FFF2-40B4-BE49-F238E27FC236}">
-                <a16:creationId xmlns:a16="http://schemas.microsoft.com/office/drawing/2014/main" id="{6B0C0104-234A-4401-AF01-F1F5FFF48E08}"/>
+                <a16:creationId xmlns:a16="http://schemas.microsoft.com/office/drawing/2014/main" id="{4A1D09E3-D0C2-40ED-A0F3-7374118D9129}"/>
               </a:ext>
             </a:extLst>
           </p:cNvPr>
@@ -32982,7 +30977,7 @@
           <p:cNvPr id="21" name="">
             <a:extLst xmlns:a="http://schemas.openxmlformats.org/drawingml/2006/main">
               <a:ext uri="{FF2B5EF4-FFF2-40B4-BE49-F238E27FC236}">
-                <a16:creationId xmlns:a16="http://schemas.microsoft.com/office/drawing/2014/main" id="{E78B54F4-90C9-42F3-BA99-402D05E01FB5}"/>
+                <a16:creationId xmlns:a16="http://schemas.microsoft.com/office/drawing/2014/main" id="{64313D80-7A28-48A9-B3C4-AA2A039D05B0}"/>
               </a:ext>
             </a:extLst>
           </p:cNvPr>
@@ -33017,7 +31012,7 @@
           <p:cNvPr id="22" name="">
             <a:extLst xmlns:a="http://schemas.openxmlformats.org/drawingml/2006/main">
               <a:ext uri="{FF2B5EF4-FFF2-40B4-BE49-F238E27FC236}">
-                <a16:creationId xmlns:a16="http://schemas.microsoft.com/office/drawing/2014/main" id="{168EF397-4D1C-4DC5-B0D2-9CA1F2AC6469}"/>
+                <a16:creationId xmlns:a16="http://schemas.microsoft.com/office/drawing/2014/main" id="{61A1537C-E71E-4B49-AC2F-0171D00F54F9}"/>
               </a:ext>
             </a:extLst>
           </p:cNvPr>
@@ -33050,7 +31045,7 @@
           <p:cNvPr id="23" name="">
             <a:extLst xmlns:a="http://schemas.openxmlformats.org/drawingml/2006/main">
               <a:ext uri="{FF2B5EF4-FFF2-40B4-BE49-F238E27FC236}">
-                <a16:creationId xmlns:a16="http://schemas.microsoft.com/office/drawing/2014/main" id="{DBF12097-9AB7-45C5-A2FB-C94318DAB379}"/>
+                <a16:creationId xmlns:a16="http://schemas.microsoft.com/office/drawing/2014/main" id="{BA43EF30-E782-4ED8-A772-B11E44EE5044}"/>
               </a:ext>
             </a:extLst>
           </p:cNvPr>
@@ -33199,7 +31194,7 @@
                 <a:ea typeface="Malgun Gothic"/>
                 <a:cs typeface="Malgun Gothic"/>
               </a:rPr>
-              <a:t>팀의 다른 영역</a:t>
+              <a:t>체험 운영 데이터</a:t>
             </a:r>
           </a:p>
         </p:txBody>
@@ -33209,7 +31204,7 @@
           <p:cNvPr id="24" name="">
             <a:extLst xmlns:a="http://schemas.openxmlformats.org/drawingml/2006/main">
               <a:ext uri="{FF2B5EF4-FFF2-40B4-BE49-F238E27FC236}">
-                <a16:creationId xmlns:a16="http://schemas.microsoft.com/office/drawing/2014/main" id="{AA5619D3-6977-4981-A7D3-0B0A36DE9532}"/>
+                <a16:creationId xmlns:a16="http://schemas.microsoft.com/office/drawing/2014/main" id="{8807CD6D-D5C8-4D8E-AC61-DEE7F7E2852A}"/>
               </a:ext>
             </a:extLst>
           </p:cNvPr>
@@ -33234,7 +31229,7 @@
         </p:spPr>
         <p:txBody>
           <a:bodyPr xmlns:a="http://schemas.openxmlformats.org/drawingml/2006/main" wrap="square" lIns="0" tIns="0" rIns="0" bIns="0" anchor="t">
-            <a:normAutofit fontScale="87383"/>
+            <a:normAutofit fontScale="100000"/>
           </a:bodyPr>
           <a:lstStyle xmlns:a="http://schemas.openxmlformats.org/drawingml/2006/main">
             <a:defPPr algn="l">
@@ -33362,7 +31357,7 @@
                 <a:ea typeface="Malgun Gothic"/>
                 <a:cs typeface="Malgun Gothic"/>
               </a:rPr>
-              <a:t>일정·검색 등은 Express API와</a:t>
+              <a:t>체험 소개와 단계별 일정</a:t>
             </a:r>
           </a:p>
           <a:p xmlns:a="http://schemas.openxmlformats.org/drawingml/2006/main">
@@ -33389,7 +31384,7 @@
                 <a:ea typeface="Malgun Gothic"/>
                 <a:cs typeface="Malgun Gothic"/>
               </a:rPr>
-              <a:t>Oracle을 사용합니다.</a:t>
+              <a:t>모집 회차와 신청 정보</a:t>
             </a:r>
           </a:p>
           <a:p xmlns:a="http://schemas.openxmlformats.org/drawingml/2006/main">
@@ -33416,34 +31411,7 @@
                 <a:ea typeface="Malgun Gothic"/>
                 <a:cs typeface="Malgun Gothic"/>
               </a:rPr>
-              <a:t>로컬이음의 체험·HOST DB는</a:t>
-            </a:r>
-          </a:p>
-          <a:p xmlns:a="http://schemas.openxmlformats.org/drawingml/2006/main">
-            <a:pPr algn="l">
-              <a:lnSpc>
-                <a:spcPct val="115000"/>
-              </a:lnSpc>
-              <a:buNone/>
-              <a:defRPr sz="1275" b="0">
-                <a:solidFill>
-                  <a:srgbClr val="62768A"/>
-                </a:solidFill>
-                <a:latin typeface="Malgun Gothic"/>
-                <a:ea typeface="Malgun Gothic"/>
-                <a:cs typeface="Malgun Gothic"/>
-              </a:defRPr>
-            </a:pPr>
-            <a:r>
-              <a:rPr sz="1275" b="0">
-                <a:solidFill>
-                  <a:srgbClr val="62768A"/>
-                </a:solidFill>
-                <a:latin typeface="Malgun Gothic"/>
-                <a:ea typeface="Malgun Gothic"/>
-                <a:cs typeface="Malgun Gothic"/>
-              </a:rPr>
-              <a:t>Supabase PostgreSQL입니다.</a:t>
+              <a:t>호스트 역할에 따른 접근 제한</a:t>
             </a:r>
           </a:p>
         </p:txBody>
@@ -33453,7 +31421,7 @@
           <p:cNvPr id="25" name="">
             <a:extLst xmlns:a="http://schemas.openxmlformats.org/drawingml/2006/main">
               <a:ext uri="{FF2B5EF4-FFF2-40B4-BE49-F238E27FC236}">
-                <a16:creationId xmlns:a16="http://schemas.microsoft.com/office/drawing/2014/main" id="{3CCF9566-E23C-4379-98C6-79CB78860F60}"/>
+                <a16:creationId xmlns:a16="http://schemas.microsoft.com/office/drawing/2014/main" id="{BB045B86-6AA0-4299-8B09-0A1AE6B87205}"/>
               </a:ext>
             </a:extLst>
           </p:cNvPr>
@@ -33488,7 +31456,7 @@
           <p:cNvPr id="26" name="">
             <a:extLst xmlns:a="http://schemas.openxmlformats.org/drawingml/2006/main">
               <a:ext uri="{FF2B5EF4-FFF2-40B4-BE49-F238E27FC236}">
-                <a16:creationId xmlns:a16="http://schemas.microsoft.com/office/drawing/2014/main" id="{C4912AA4-092A-435F-9A52-BD4A88276DBA}"/>
+                <a16:creationId xmlns:a16="http://schemas.microsoft.com/office/drawing/2014/main" id="{4D93A514-232F-4511-8F2A-93A00B7A0319}"/>
               </a:ext>
             </a:extLst>
           </p:cNvPr>
@@ -33521,7 +31489,7 @@
           <p:cNvPr id="27" name="">
             <a:extLst xmlns:a="http://schemas.openxmlformats.org/drawingml/2006/main">
               <a:ext uri="{FF2B5EF4-FFF2-40B4-BE49-F238E27FC236}">
-                <a16:creationId xmlns:a16="http://schemas.microsoft.com/office/drawing/2014/main" id="{4A06E423-77A1-469B-A57C-27A5E15D62CC}"/>
+                <a16:creationId xmlns:a16="http://schemas.microsoft.com/office/drawing/2014/main" id="{2629BA74-E6BE-4EDC-8BDC-3180544C1221}"/>
               </a:ext>
             </a:extLst>
           </p:cNvPr>
@@ -33670,7 +31638,7 @@
                 <a:ea typeface="Malgun Gothic"/>
                 <a:cs typeface="Malgun Gothic"/>
               </a:rPr>
-              <a:t>연동 접점</a:t>
+              <a:t>AI 기획 지원</a:t>
             </a:r>
           </a:p>
         </p:txBody>
@@ -33680,7 +31648,7 @@
           <p:cNvPr id="28" name="">
             <a:extLst xmlns:a="http://schemas.openxmlformats.org/drawingml/2006/main">
               <a:ext uri="{FF2B5EF4-FFF2-40B4-BE49-F238E27FC236}">
-                <a16:creationId xmlns:a16="http://schemas.microsoft.com/office/drawing/2014/main" id="{DCC55983-FA5F-472A-9D13-A358846045D0}"/>
+                <a16:creationId xmlns:a16="http://schemas.microsoft.com/office/drawing/2014/main" id="{8F94CE31-CF68-42AA-B272-00C2ADFB1AE7}"/>
               </a:ext>
             </a:extLst>
           </p:cNvPr>
@@ -33833,7 +31801,7 @@
                 <a:ea typeface="Malgun Gothic"/>
                 <a:cs typeface="Malgun Gothic"/>
               </a:rPr>
-              <a:t>공통 Header → 로컬 체험 경로</a:t>
+              <a:t>지역 자료와 체험 정보를 바탕으로</a:t>
             </a:r>
           </a:p>
           <a:p xmlns:a="http://schemas.openxmlformats.org/drawingml/2006/main">
@@ -33860,7 +31828,7 @@
                 <a:ea typeface="Malgun Gothic"/>
                 <a:cs typeface="Malgun Gothic"/>
               </a:rPr>
-              <a:t>공통 React 라우터</a:t>
+              <a:t>운영 아이디어를 제안합니다.</a:t>
             </a:r>
           </a:p>
           <a:p xmlns:a="http://schemas.openxmlformats.org/drawingml/2006/main">
@@ -33892,7 +31860,7 @@
                 <a:ea typeface="Malgun Gothic"/>
                 <a:cs typeface="Malgun Gothic"/>
               </a:rPr>
-              <a:t>아직 별도 확인이 필요한 영역:</a:t>
+              <a:t>호스트가 검토하고 편집한 뒤</a:t>
             </a:r>
           </a:p>
           <a:p xmlns:a="http://schemas.openxmlformats.org/drawingml/2006/main">
@@ -33919,7 +31887,7 @@
                 <a:ea typeface="Malgun Gothic"/>
                 <a:cs typeface="Malgun Gothic"/>
               </a:rPr>
-              <a:t>팀 인증 연계 · 통합 배포 주소</a:t>
+              <a:t>기존 프로필에 저장합니다.</a:t>
             </a:r>
           </a:p>
         </p:txBody>
@@ -33929,7 +31897,7 @@
           <p:cNvPr id="29" name="">
             <a:extLst xmlns:a="http://schemas.openxmlformats.org/drawingml/2006/main">
               <a:ext uri="{FF2B5EF4-FFF2-40B4-BE49-F238E27FC236}">
-                <a16:creationId xmlns:a16="http://schemas.microsoft.com/office/drawing/2014/main" id="{3123DE69-79BA-449B-963B-29BF6C24CFB9}"/>
+                <a16:creationId xmlns:a16="http://schemas.microsoft.com/office/drawing/2014/main" id="{F881E3FA-D5A4-4E74-B666-1747B01B69A7}"/>
               </a:ext>
             </a:extLst>
           </p:cNvPr>
@@ -34078,7 +32046,7 @@
                 <a:ea typeface="Malgun Gothic"/>
                 <a:cs typeface="Malgun Gothic"/>
               </a:rPr>
-              <a:t>설계 선택  ·  기존 팀 앱의 화면·라우팅을 재사용하면서, 체험 운영 데이터는 전용 Supabase 스키마와 RLS로 관리</a:t>
+              <a:t>서비스 흐름  ·  여행자는 체험을 찾고 신청하며 호스트는 회차와 참가자를 관리합니다.</a:t>
             </a:r>
           </a:p>
         </p:txBody>
@@ -34086,7 +32054,7 @@
     </p:spTree>
     <p:extLst>
       <p:ext uri="{BB962C8B-B14F-4D97-AF65-F5344CB8AC3E}">
-        <p14:creationId xmlns:p14="http://schemas.microsoft.com/office/powerpoint/2010/main" val="123627499"/>
+        <p14:creationId xmlns:p14="http://schemas.microsoft.com/office/powerpoint/2010/main" val="1903486316"/>
       </p:ext>
     </p:extLst>
   </p:cSld>
@@ -34117,7 +32085,7 @@
           <p:cNvPr id="44" name="">
             <a:extLst xmlns:a="http://schemas.openxmlformats.org/drawingml/2006/main">
               <a:ext uri="{FF2B5EF4-FFF2-40B4-BE49-F238E27FC236}">
-                <a16:creationId xmlns:a16="http://schemas.microsoft.com/office/drawing/2014/main" id="{D9D4299D-B584-443D-A7F2-31337B99911E}"/>
+                <a16:creationId xmlns:a16="http://schemas.microsoft.com/office/drawing/2014/main" id="{201AA9FF-699C-4920-9D29-33EB775EC75C}"/>
               </a:ext>
             </a:extLst>
           </p:cNvPr>
@@ -34276,7 +32244,7 @@
           <p:cNvPr id="2" name="">
             <a:extLst xmlns:a="http://schemas.openxmlformats.org/drawingml/2006/main">
               <a:ext uri="{FF2B5EF4-FFF2-40B4-BE49-F238E27FC236}">
-                <a16:creationId xmlns:a16="http://schemas.microsoft.com/office/drawing/2014/main" id="{A4BD7420-C066-4E08-BF78-43CD6E562BF9}"/>
+                <a16:creationId xmlns:a16="http://schemas.microsoft.com/office/drawing/2014/main" id="{9D11CA08-1C08-4C86-A295-BD9C248E919E}"/>
               </a:ext>
             </a:extLst>
           </p:cNvPr>
@@ -34435,7 +32403,7 @@
           <p:cNvPr id="3" name="">
             <a:extLst xmlns:a="http://schemas.openxmlformats.org/drawingml/2006/main">
               <a:ext uri="{FF2B5EF4-FFF2-40B4-BE49-F238E27FC236}">
-                <a16:creationId xmlns:a16="http://schemas.microsoft.com/office/drawing/2014/main" id="{CC356BCA-D6AD-476A-B76B-A434858CC01F}"/>
+                <a16:creationId xmlns:a16="http://schemas.microsoft.com/office/drawing/2014/main" id="{2D9EC027-CC68-414C-B35E-76CBC3929E59}"/>
               </a:ext>
             </a:extLst>
           </p:cNvPr>
@@ -34468,7 +32436,7 @@
           <p:cNvPr id="4" name="">
             <a:extLst xmlns:a="http://schemas.openxmlformats.org/drawingml/2006/main">
               <a:ext uri="{FF2B5EF4-FFF2-40B4-BE49-F238E27FC236}">
-                <a16:creationId xmlns:a16="http://schemas.microsoft.com/office/drawing/2014/main" id="{036C47D6-FA35-4304-958F-519BE14505F1}"/>
+                <a16:creationId xmlns:a16="http://schemas.microsoft.com/office/drawing/2014/main" id="{6650D04F-28D6-407F-8284-1168966570F8}"/>
               </a:ext>
             </a:extLst>
           </p:cNvPr>
@@ -34617,7 +32585,7 @@
                 <a:ea typeface="Malgun Gothic"/>
                 <a:cs typeface="Malgun Gothic"/>
               </a:rPr>
-              <a:t>LOCAL EUM  ·  멘토링 브리프  ·  2026.10</a:t>
+              <a:t>LOCAL EUM  ·  기획과 구현  ·  2026.10</a:t>
             </a:r>
           </a:p>
         </p:txBody>
@@ -34627,7 +32595,7 @@
           <p:cNvPr id="5" name="">
             <a:extLst xmlns:a="http://schemas.openxmlformats.org/drawingml/2006/main">
               <a:ext uri="{FF2B5EF4-FFF2-40B4-BE49-F238E27FC236}">
-                <a16:creationId xmlns:a16="http://schemas.microsoft.com/office/drawing/2014/main" id="{3D665221-262D-46EB-81D2-00F35E52470C}"/>
+                <a16:creationId xmlns:a16="http://schemas.microsoft.com/office/drawing/2014/main" id="{3F91F7E8-388D-4E80-AF47-357B7529928B}"/>
               </a:ext>
             </a:extLst>
           </p:cNvPr>
@@ -34786,7 +32754,7 @@
           <p:cNvPr id="6" name="">
             <a:extLst xmlns:a="http://schemas.openxmlformats.org/drawingml/2006/main">
               <a:ext uri="{FF2B5EF4-FFF2-40B4-BE49-F238E27FC236}">
-                <a16:creationId xmlns:a16="http://schemas.microsoft.com/office/drawing/2014/main" id="{26B13E6C-E0E0-498A-B246-96FA51D8DCAC}"/>
+                <a16:creationId xmlns:a16="http://schemas.microsoft.com/office/drawing/2014/main" id="{29D63E0A-9831-48D8-AEEF-776C3565A23D}"/>
               </a:ext>
             </a:extLst>
           </p:cNvPr>
@@ -34821,7 +32789,7 @@
           <p:cNvPr id="7" name="">
             <a:extLst xmlns:a="http://schemas.openxmlformats.org/drawingml/2006/main">
               <a:ext uri="{FF2B5EF4-FFF2-40B4-BE49-F238E27FC236}">
-                <a16:creationId xmlns:a16="http://schemas.microsoft.com/office/drawing/2014/main" id="{BB7962EC-30A9-45A6-A193-ACA353089D50}"/>
+                <a16:creationId xmlns:a16="http://schemas.microsoft.com/office/drawing/2014/main" id="{06DE39D9-0814-4C14-A651-085DAD4EEB75}"/>
               </a:ext>
             </a:extLst>
           </p:cNvPr>
@@ -34854,7 +32822,7 @@
           <p:cNvPr id="8" name="">
             <a:extLst xmlns:a="http://schemas.openxmlformats.org/drawingml/2006/main">
               <a:ext uri="{FF2B5EF4-FFF2-40B4-BE49-F238E27FC236}">
-                <a16:creationId xmlns:a16="http://schemas.microsoft.com/office/drawing/2014/main" id="{6FA226C2-6FFB-4533-9222-B4964E0AB192}"/>
+                <a16:creationId xmlns:a16="http://schemas.microsoft.com/office/drawing/2014/main" id="{83603956-404B-484D-BED6-A87977ADF11A}"/>
               </a:ext>
             </a:extLst>
           </p:cNvPr>
@@ -35013,7 +32981,7 @@
           <p:cNvPr id="9" name="">
             <a:extLst xmlns:a="http://schemas.openxmlformats.org/drawingml/2006/main">
               <a:ext uri="{FF2B5EF4-FFF2-40B4-BE49-F238E27FC236}">
-                <a16:creationId xmlns:a16="http://schemas.microsoft.com/office/drawing/2014/main" id="{FFFDCA4B-2E31-4273-95D5-2E2AB49AF247}"/>
+                <a16:creationId xmlns:a16="http://schemas.microsoft.com/office/drawing/2014/main" id="{807EEF7C-8A06-4878-B1C2-EC10FD89CC7E}"/>
               </a:ext>
             </a:extLst>
           </p:cNvPr>
@@ -35172,7 +33140,7 @@
           <p:cNvPr id="10" name="">
             <a:extLst xmlns:a="http://schemas.openxmlformats.org/drawingml/2006/main">
               <a:ext uri="{FF2B5EF4-FFF2-40B4-BE49-F238E27FC236}">
-                <a16:creationId xmlns:a16="http://schemas.microsoft.com/office/drawing/2014/main" id="{3FB7C59F-AA44-4531-97E1-70E4545B6E4E}"/>
+                <a16:creationId xmlns:a16="http://schemas.microsoft.com/office/drawing/2014/main" id="{EC7E3D07-69C2-4A0D-ADDE-83494F2C0842}"/>
               </a:ext>
             </a:extLst>
           </p:cNvPr>
@@ -35354,7 +33322,7 @@
           <p:cNvPr id="11" name="">
             <a:extLst xmlns:a="http://schemas.openxmlformats.org/drawingml/2006/main">
               <a:ext uri="{FF2B5EF4-FFF2-40B4-BE49-F238E27FC236}">
-                <a16:creationId xmlns:a16="http://schemas.microsoft.com/office/drawing/2014/main" id="{C39C82B7-6FC6-460B-8BD0-4372AAB22034}"/>
+                <a16:creationId xmlns:a16="http://schemas.microsoft.com/office/drawing/2014/main" id="{A91DD4E3-0364-4CCC-82A5-6E3ADDCA79A9}"/>
               </a:ext>
             </a:extLst>
           </p:cNvPr>
@@ -35513,7 +33481,7 @@
           <p:cNvPr id="12" name="">
             <a:extLst xmlns:a="http://schemas.openxmlformats.org/drawingml/2006/main">
               <a:ext uri="{FF2B5EF4-FFF2-40B4-BE49-F238E27FC236}">
-                <a16:creationId xmlns:a16="http://schemas.microsoft.com/office/drawing/2014/main" id="{9550392E-2A15-46A9-9058-987D6C1E342E}"/>
+                <a16:creationId xmlns:a16="http://schemas.microsoft.com/office/drawing/2014/main" id="{C72E530D-90D2-48EF-B752-745B5D1B5262}"/>
               </a:ext>
             </a:extLst>
           </p:cNvPr>
@@ -35548,7 +33516,7 @@
           <p:cNvPr id="13" name="">
             <a:extLst xmlns:a="http://schemas.openxmlformats.org/drawingml/2006/main">
               <a:ext uri="{FF2B5EF4-FFF2-40B4-BE49-F238E27FC236}">
-                <a16:creationId xmlns:a16="http://schemas.microsoft.com/office/drawing/2014/main" id="{6ADB851C-3A73-4353-847B-BAE46A112E0F}"/>
+                <a16:creationId xmlns:a16="http://schemas.microsoft.com/office/drawing/2014/main" id="{6A8275F7-2BFC-4694-B92E-868CB38FCD8B}"/>
               </a:ext>
             </a:extLst>
           </p:cNvPr>
@@ -35581,7 +33549,7 @@
           <p:cNvPr id="14" name="">
             <a:extLst xmlns:a="http://schemas.openxmlformats.org/drawingml/2006/main">
               <a:ext uri="{FF2B5EF4-FFF2-40B4-BE49-F238E27FC236}">
-                <a16:creationId xmlns:a16="http://schemas.microsoft.com/office/drawing/2014/main" id="{20A90327-5ECC-44A2-9A88-3EE155235227}"/>
+                <a16:creationId xmlns:a16="http://schemas.microsoft.com/office/drawing/2014/main" id="{5B047E4C-4241-4FFD-96B8-863A5F7726A8}"/>
               </a:ext>
             </a:extLst>
           </p:cNvPr>
@@ -35740,7 +33708,7 @@
           <p:cNvPr id="15" name="">
             <a:extLst xmlns:a="http://schemas.openxmlformats.org/drawingml/2006/main">
               <a:ext uri="{FF2B5EF4-FFF2-40B4-BE49-F238E27FC236}">
-                <a16:creationId xmlns:a16="http://schemas.microsoft.com/office/drawing/2014/main" id="{2067B54A-30E2-4A12-9EFC-388B4CB81A65}"/>
+                <a16:creationId xmlns:a16="http://schemas.microsoft.com/office/drawing/2014/main" id="{45098085-75CF-4A11-8AAB-7B8D0F64163C}"/>
               </a:ext>
             </a:extLst>
           </p:cNvPr>
@@ -35899,7 +33867,7 @@
           <p:cNvPr id="16" name="">
             <a:extLst xmlns:a="http://schemas.openxmlformats.org/drawingml/2006/main">
               <a:ext uri="{FF2B5EF4-FFF2-40B4-BE49-F238E27FC236}">
-                <a16:creationId xmlns:a16="http://schemas.microsoft.com/office/drawing/2014/main" id="{777DC59C-A1D1-4EE7-9B67-8339659397B0}"/>
+                <a16:creationId xmlns:a16="http://schemas.microsoft.com/office/drawing/2014/main" id="{137CFEBA-47DE-4A8D-94E4-8FF494284AF2}"/>
               </a:ext>
             </a:extLst>
           </p:cNvPr>
@@ -36081,7 +34049,7 @@
           <p:cNvPr id="17" name="">
             <a:extLst xmlns:a="http://schemas.openxmlformats.org/drawingml/2006/main">
               <a:ext uri="{FF2B5EF4-FFF2-40B4-BE49-F238E27FC236}">
-                <a16:creationId xmlns:a16="http://schemas.microsoft.com/office/drawing/2014/main" id="{B9DD9E1F-4135-41DD-B569-38CEFE7520DD}"/>
+                <a16:creationId xmlns:a16="http://schemas.microsoft.com/office/drawing/2014/main" id="{8C1BBDAA-9BCA-42EF-B602-E950D5078E95}"/>
               </a:ext>
             </a:extLst>
           </p:cNvPr>
@@ -36240,7 +34208,7 @@
           <p:cNvPr id="18" name="">
             <a:extLst xmlns:a="http://schemas.openxmlformats.org/drawingml/2006/main">
               <a:ext uri="{FF2B5EF4-FFF2-40B4-BE49-F238E27FC236}">
-                <a16:creationId xmlns:a16="http://schemas.microsoft.com/office/drawing/2014/main" id="{EA326CD2-1DBB-4057-A1EB-6A1D82C3204C}"/>
+                <a16:creationId xmlns:a16="http://schemas.microsoft.com/office/drawing/2014/main" id="{C111F341-49F9-42A2-B80E-D407CE4FA80B}"/>
               </a:ext>
             </a:extLst>
           </p:cNvPr>
@@ -36275,7 +34243,7 @@
           <p:cNvPr id="19" name="">
             <a:extLst xmlns:a="http://schemas.openxmlformats.org/drawingml/2006/main">
               <a:ext uri="{FF2B5EF4-FFF2-40B4-BE49-F238E27FC236}">
-                <a16:creationId xmlns:a16="http://schemas.microsoft.com/office/drawing/2014/main" id="{26E8A1BE-A44E-41AD-BA0E-C55EF09DF38D}"/>
+                <a16:creationId xmlns:a16="http://schemas.microsoft.com/office/drawing/2014/main" id="{E75FCB0E-0E23-421E-859C-2A735C677A89}"/>
               </a:ext>
             </a:extLst>
           </p:cNvPr>
@@ -36308,7 +34276,7 @@
           <p:cNvPr id="20" name="">
             <a:extLst xmlns:a="http://schemas.openxmlformats.org/drawingml/2006/main">
               <a:ext uri="{FF2B5EF4-FFF2-40B4-BE49-F238E27FC236}">
-                <a16:creationId xmlns:a16="http://schemas.microsoft.com/office/drawing/2014/main" id="{0E5731BB-1513-48A9-A5F9-0F810BB31325}"/>
+                <a16:creationId xmlns:a16="http://schemas.microsoft.com/office/drawing/2014/main" id="{DB3644A0-5568-4BA4-94BF-B9AA6F1D2820}"/>
               </a:ext>
             </a:extLst>
           </p:cNvPr>
@@ -36467,7 +34435,7 @@
           <p:cNvPr id="21" name="">
             <a:extLst xmlns:a="http://schemas.openxmlformats.org/drawingml/2006/main">
               <a:ext uri="{FF2B5EF4-FFF2-40B4-BE49-F238E27FC236}">
-                <a16:creationId xmlns:a16="http://schemas.microsoft.com/office/drawing/2014/main" id="{B16AC7B6-8951-43FE-9480-81F1552C7916}"/>
+                <a16:creationId xmlns:a16="http://schemas.microsoft.com/office/drawing/2014/main" id="{913BCCDC-AD15-482C-905E-9A7F405186F6}"/>
               </a:ext>
             </a:extLst>
           </p:cNvPr>
@@ -36626,7 +34594,7 @@
           <p:cNvPr id="22" name="">
             <a:extLst xmlns:a="http://schemas.openxmlformats.org/drawingml/2006/main">
               <a:ext uri="{FF2B5EF4-FFF2-40B4-BE49-F238E27FC236}">
-                <a16:creationId xmlns:a16="http://schemas.microsoft.com/office/drawing/2014/main" id="{4529EB39-B87B-4D6E-9340-AD65E248D3AA}"/>
+                <a16:creationId xmlns:a16="http://schemas.microsoft.com/office/drawing/2014/main" id="{FA6997A2-3AAB-4583-A2C6-852D47730D0A}"/>
               </a:ext>
             </a:extLst>
           </p:cNvPr>
@@ -36808,7 +34776,7 @@
           <p:cNvPr id="23" name="">
             <a:extLst xmlns:a="http://schemas.openxmlformats.org/drawingml/2006/main">
               <a:ext uri="{FF2B5EF4-FFF2-40B4-BE49-F238E27FC236}">
-                <a16:creationId xmlns:a16="http://schemas.microsoft.com/office/drawing/2014/main" id="{54216CBD-0577-499F-A6B3-91C1C489BE4E}"/>
+                <a16:creationId xmlns:a16="http://schemas.microsoft.com/office/drawing/2014/main" id="{8C6A6013-E127-4C82-82A7-6C9D5BDEC54E}"/>
               </a:ext>
             </a:extLst>
           </p:cNvPr>
@@ -36967,7 +34935,7 @@
           <p:cNvPr id="24" name="">
             <a:extLst xmlns:a="http://schemas.openxmlformats.org/drawingml/2006/main">
               <a:ext uri="{FF2B5EF4-FFF2-40B4-BE49-F238E27FC236}">
-                <a16:creationId xmlns:a16="http://schemas.microsoft.com/office/drawing/2014/main" id="{70EA71A3-144B-4A6A-A2EC-B6C968257431}"/>
+                <a16:creationId xmlns:a16="http://schemas.microsoft.com/office/drawing/2014/main" id="{8BB6617E-EBC1-4C42-BE19-1A77680D0F60}"/>
               </a:ext>
             </a:extLst>
           </p:cNvPr>
@@ -37002,7 +34970,7 @@
           <p:cNvPr id="25" name="">
             <a:extLst xmlns:a="http://schemas.openxmlformats.org/drawingml/2006/main">
               <a:ext uri="{FF2B5EF4-FFF2-40B4-BE49-F238E27FC236}">
-                <a16:creationId xmlns:a16="http://schemas.microsoft.com/office/drawing/2014/main" id="{5A729137-5B0A-40F0-A8E4-1021CD6DB2F6}"/>
+                <a16:creationId xmlns:a16="http://schemas.microsoft.com/office/drawing/2014/main" id="{9D6EDB97-B93D-4C40-819D-F09B7D70F0FD}"/>
               </a:ext>
             </a:extLst>
           </p:cNvPr>
@@ -37035,7 +35003,7 @@
           <p:cNvPr id="26" name="">
             <a:extLst xmlns:a="http://schemas.openxmlformats.org/drawingml/2006/main">
               <a:ext uri="{FF2B5EF4-FFF2-40B4-BE49-F238E27FC236}">
-                <a16:creationId xmlns:a16="http://schemas.microsoft.com/office/drawing/2014/main" id="{4711BBE4-4E0E-4174-AB59-CE37A216AF07}"/>
+                <a16:creationId xmlns:a16="http://schemas.microsoft.com/office/drawing/2014/main" id="{B371A791-5784-4D61-9F93-F9E88460E9CE}"/>
               </a:ext>
             </a:extLst>
           </p:cNvPr>
@@ -37194,7 +35162,7 @@
           <p:cNvPr id="27" name="">
             <a:extLst xmlns:a="http://schemas.openxmlformats.org/drawingml/2006/main">
               <a:ext uri="{FF2B5EF4-FFF2-40B4-BE49-F238E27FC236}">
-                <a16:creationId xmlns:a16="http://schemas.microsoft.com/office/drawing/2014/main" id="{B0E8252F-79DC-4C12-8A49-6507DC0F78D2}"/>
+                <a16:creationId xmlns:a16="http://schemas.microsoft.com/office/drawing/2014/main" id="{32C396B4-8C8E-4EBA-A2D3-4A2523D24E52}"/>
               </a:ext>
             </a:extLst>
           </p:cNvPr>
@@ -37353,7 +35321,7 @@
           <p:cNvPr id="28" name="">
             <a:extLst xmlns:a="http://schemas.openxmlformats.org/drawingml/2006/main">
               <a:ext uri="{FF2B5EF4-FFF2-40B4-BE49-F238E27FC236}">
-                <a16:creationId xmlns:a16="http://schemas.microsoft.com/office/drawing/2014/main" id="{56D103D3-E9DD-45F7-BC82-CAFB50DFF0AF}"/>
+                <a16:creationId xmlns:a16="http://schemas.microsoft.com/office/drawing/2014/main" id="{2C9B2D5A-5C04-495A-B940-CCA9559240D7}"/>
               </a:ext>
             </a:extLst>
           </p:cNvPr>
@@ -37535,7 +35503,7 @@
           <p:cNvPr id="29" name="">
             <a:extLst xmlns:a="http://schemas.openxmlformats.org/drawingml/2006/main">
               <a:ext uri="{FF2B5EF4-FFF2-40B4-BE49-F238E27FC236}">
-                <a16:creationId xmlns:a16="http://schemas.microsoft.com/office/drawing/2014/main" id="{EB29DE1D-94E0-4D7A-91DE-3FD610299C40}"/>
+                <a16:creationId xmlns:a16="http://schemas.microsoft.com/office/drawing/2014/main" id="{250617D2-0A3C-451E-B83E-4F8C79BE2CFD}"/>
               </a:ext>
             </a:extLst>
           </p:cNvPr>
@@ -37694,7 +35662,7 @@
           <p:cNvPr id="30" name="">
             <a:extLst xmlns:a="http://schemas.openxmlformats.org/drawingml/2006/main">
               <a:ext uri="{FF2B5EF4-FFF2-40B4-BE49-F238E27FC236}">
-                <a16:creationId xmlns:a16="http://schemas.microsoft.com/office/drawing/2014/main" id="{AC7652CF-B641-4C60-B06D-12ED291639D6}"/>
+                <a16:creationId xmlns:a16="http://schemas.microsoft.com/office/drawing/2014/main" id="{05E08FCD-67B8-4B7B-AAB9-B263EC3275B7}"/>
               </a:ext>
             </a:extLst>
           </p:cNvPr>
@@ -37729,7 +35697,7 @@
           <p:cNvPr id="31" name="">
             <a:extLst xmlns:a="http://schemas.openxmlformats.org/drawingml/2006/main">
               <a:ext uri="{FF2B5EF4-FFF2-40B4-BE49-F238E27FC236}">
-                <a16:creationId xmlns:a16="http://schemas.microsoft.com/office/drawing/2014/main" id="{C68926F4-4843-4C26-9546-509FBE5CFFC5}"/>
+                <a16:creationId xmlns:a16="http://schemas.microsoft.com/office/drawing/2014/main" id="{4CFD260F-8BA7-48BF-86C9-44BCD36C65B2}"/>
               </a:ext>
             </a:extLst>
           </p:cNvPr>
@@ -37762,7 +35730,7 @@
           <p:cNvPr id="32" name="">
             <a:extLst xmlns:a="http://schemas.openxmlformats.org/drawingml/2006/main">
               <a:ext uri="{FF2B5EF4-FFF2-40B4-BE49-F238E27FC236}">
-                <a16:creationId xmlns:a16="http://schemas.microsoft.com/office/drawing/2014/main" id="{D0295A1E-CD62-41FE-BAE3-51E1E738BAE9}"/>
+                <a16:creationId xmlns:a16="http://schemas.microsoft.com/office/drawing/2014/main" id="{78E72288-E2DB-422B-9A09-5CFEA489EC43}"/>
               </a:ext>
             </a:extLst>
           </p:cNvPr>
@@ -37921,7 +35889,7 @@
           <p:cNvPr id="33" name="">
             <a:extLst xmlns:a="http://schemas.openxmlformats.org/drawingml/2006/main">
               <a:ext uri="{FF2B5EF4-FFF2-40B4-BE49-F238E27FC236}">
-                <a16:creationId xmlns:a16="http://schemas.microsoft.com/office/drawing/2014/main" id="{135FAABC-C99F-4DC9-85F3-D2D33B0B2492}"/>
+                <a16:creationId xmlns:a16="http://schemas.microsoft.com/office/drawing/2014/main" id="{44F21102-E17D-4E7F-948D-EF5AC8983A4F}"/>
               </a:ext>
             </a:extLst>
           </p:cNvPr>
@@ -38080,7 +36048,7 @@
           <p:cNvPr id="34" name="">
             <a:extLst xmlns:a="http://schemas.openxmlformats.org/drawingml/2006/main">
               <a:ext uri="{FF2B5EF4-FFF2-40B4-BE49-F238E27FC236}">
-                <a16:creationId xmlns:a16="http://schemas.microsoft.com/office/drawing/2014/main" id="{DA62CEE5-7F0E-4CCA-B39B-83523B4253CB}"/>
+                <a16:creationId xmlns:a16="http://schemas.microsoft.com/office/drawing/2014/main" id="{F850962F-BFC4-447A-A90D-89FF56CFB1CA}"/>
               </a:ext>
             </a:extLst>
           </p:cNvPr>
@@ -38262,7 +36230,7 @@
           <p:cNvPr id="35" name="">
             <a:extLst xmlns:a="http://schemas.openxmlformats.org/drawingml/2006/main">
               <a:ext uri="{FF2B5EF4-FFF2-40B4-BE49-F238E27FC236}">
-                <a16:creationId xmlns:a16="http://schemas.microsoft.com/office/drawing/2014/main" id="{DAB40F44-32F7-46AD-AF04-427F1C32066C}"/>
+                <a16:creationId xmlns:a16="http://schemas.microsoft.com/office/drawing/2014/main" id="{F658710D-DF3A-4639-9A66-B78E43FC11ED}"/>
               </a:ext>
             </a:extLst>
           </p:cNvPr>
@@ -38297,7 +36265,7 @@
           <p:cNvPr id="36" name="">
             <a:extLst xmlns:a="http://schemas.openxmlformats.org/drawingml/2006/main">
               <a:ext uri="{FF2B5EF4-FFF2-40B4-BE49-F238E27FC236}">
-                <a16:creationId xmlns:a16="http://schemas.microsoft.com/office/drawing/2014/main" id="{5B6408A1-ADC9-4B24-A8AB-2544C407F601}"/>
+                <a16:creationId xmlns:a16="http://schemas.microsoft.com/office/drawing/2014/main" id="{F2286C70-3EFE-44BE-B39F-D29B63372A9C}"/>
               </a:ext>
             </a:extLst>
           </p:cNvPr>
@@ -38330,7 +36298,7 @@
           <p:cNvPr id="37" name="">
             <a:extLst xmlns:a="http://schemas.openxmlformats.org/drawingml/2006/main">
               <a:ext uri="{FF2B5EF4-FFF2-40B4-BE49-F238E27FC236}">
-                <a16:creationId xmlns:a16="http://schemas.microsoft.com/office/drawing/2014/main" id="{9F9F96C7-456E-40FC-BD81-1B2A87B11926}"/>
+                <a16:creationId xmlns:a16="http://schemas.microsoft.com/office/drawing/2014/main" id="{28810635-023D-4CBF-A23E-072DEF55D943}"/>
               </a:ext>
             </a:extLst>
           </p:cNvPr>
@@ -38489,7 +36457,7 @@
           <p:cNvPr id="38" name="">
             <a:extLst xmlns:a="http://schemas.openxmlformats.org/drawingml/2006/main">
               <a:ext uri="{FF2B5EF4-FFF2-40B4-BE49-F238E27FC236}">
-                <a16:creationId xmlns:a16="http://schemas.microsoft.com/office/drawing/2014/main" id="{38F1965A-C980-47F5-8D07-2374A0147B4D}"/>
+                <a16:creationId xmlns:a16="http://schemas.microsoft.com/office/drawing/2014/main" id="{EAEA6C47-9E67-4D7B-BEC3-216EF5402CD0}"/>
               </a:ext>
             </a:extLst>
           </p:cNvPr>
@@ -38706,7 +36674,7 @@
           <p:cNvPr id="39" name="">
             <a:extLst xmlns:a="http://schemas.openxmlformats.org/drawingml/2006/main">
               <a:ext uri="{FF2B5EF4-FFF2-40B4-BE49-F238E27FC236}">
-                <a16:creationId xmlns:a16="http://schemas.microsoft.com/office/drawing/2014/main" id="{41E7CE30-0634-44D6-8F48-C00FBAB79498}"/>
+                <a16:creationId xmlns:a16="http://schemas.microsoft.com/office/drawing/2014/main" id="{CA74709B-471E-47B7-B94D-3D971C80D7B8}"/>
               </a:ext>
             </a:extLst>
           </p:cNvPr>
@@ -38741,7 +36709,7 @@
           <p:cNvPr id="40" name="">
             <a:extLst xmlns:a="http://schemas.openxmlformats.org/drawingml/2006/main">
               <a:ext uri="{FF2B5EF4-FFF2-40B4-BE49-F238E27FC236}">
-                <a16:creationId xmlns:a16="http://schemas.microsoft.com/office/drawing/2014/main" id="{6500DF10-7AA2-451E-B728-6DF2617966FD}"/>
+                <a16:creationId xmlns:a16="http://schemas.microsoft.com/office/drawing/2014/main" id="{C693E5A4-995B-4B17-B813-C7328EFD86C4}"/>
               </a:ext>
             </a:extLst>
           </p:cNvPr>
@@ -38774,7 +36742,7 @@
           <p:cNvPr id="41" name="">
             <a:extLst xmlns:a="http://schemas.openxmlformats.org/drawingml/2006/main">
               <a:ext uri="{FF2B5EF4-FFF2-40B4-BE49-F238E27FC236}">
-                <a16:creationId xmlns:a16="http://schemas.microsoft.com/office/drawing/2014/main" id="{5942BB64-3A2E-4BAA-8E5B-D9F0F2A0FB76}"/>
+                <a16:creationId xmlns:a16="http://schemas.microsoft.com/office/drawing/2014/main" id="{01167927-1DB6-47D8-AB5D-5AC1B596116F}"/>
               </a:ext>
             </a:extLst>
           </p:cNvPr>
@@ -38933,7 +36901,7 @@
           <p:cNvPr id="42" name="">
             <a:extLst xmlns:a="http://schemas.openxmlformats.org/drawingml/2006/main">
               <a:ext uri="{FF2B5EF4-FFF2-40B4-BE49-F238E27FC236}">
-                <a16:creationId xmlns:a16="http://schemas.microsoft.com/office/drawing/2014/main" id="{D9962E6C-BB36-455E-A511-F7110F3355A2}"/>
+                <a16:creationId xmlns:a16="http://schemas.microsoft.com/office/drawing/2014/main" id="{A5257572-B0AF-4B79-B537-FE07E36114AF}"/>
               </a:ext>
             </a:extLst>
           </p:cNvPr>
@@ -39150,7 +37118,7 @@
           <p:cNvPr id="43" name="">
             <a:extLst xmlns:a="http://schemas.openxmlformats.org/drawingml/2006/main">
               <a:ext uri="{FF2B5EF4-FFF2-40B4-BE49-F238E27FC236}">
-                <a16:creationId xmlns:a16="http://schemas.microsoft.com/office/drawing/2014/main" id="{1466E321-C045-45A2-B1DC-E65C3EE8CCE0}"/>
+                <a16:creationId xmlns:a16="http://schemas.microsoft.com/office/drawing/2014/main" id="{CCBF8A17-B69F-409B-BBD8-25347494DBD4}"/>
               </a:ext>
             </a:extLst>
           </p:cNvPr>
@@ -39307,7 +37275,7 @@
     </p:spTree>
     <p:extLst>
       <p:ext uri="{BB962C8B-B14F-4D97-AF65-F5344CB8AC3E}">
-        <p14:creationId xmlns:p14="http://schemas.microsoft.com/office/powerpoint/2010/main" val="1300192190"/>
+        <p14:creationId xmlns:p14="http://schemas.microsoft.com/office/powerpoint/2010/main" val="1994375061"/>
       </p:ext>
     </p:extLst>
   </p:cSld>
@@ -39338,7 +37306,7 @@
           <p:cNvPr id="29" name="">
             <a:extLst xmlns:a="http://schemas.openxmlformats.org/drawingml/2006/main">
               <a:ext uri="{FF2B5EF4-FFF2-40B4-BE49-F238E27FC236}">
-                <a16:creationId xmlns:a16="http://schemas.microsoft.com/office/drawing/2014/main" id="{5BB6A808-CF12-4BF2-A101-7341206DDAC4}"/>
+                <a16:creationId xmlns:a16="http://schemas.microsoft.com/office/drawing/2014/main" id="{F3DD63C7-E9A6-47A8-BA0B-769051D319A3}"/>
               </a:ext>
             </a:extLst>
           </p:cNvPr>
@@ -39497,7 +37465,7 @@
           <p:cNvPr id="2" name="">
             <a:extLst xmlns:a="http://schemas.openxmlformats.org/drawingml/2006/main">
               <a:ext uri="{FF2B5EF4-FFF2-40B4-BE49-F238E27FC236}">
-                <a16:creationId xmlns:a16="http://schemas.microsoft.com/office/drawing/2014/main" id="{24932B36-8F08-4DA9-B858-D6B8A38E2918}"/>
+                <a16:creationId xmlns:a16="http://schemas.microsoft.com/office/drawing/2014/main" id="{1F76C29C-0511-4362-97DA-61D2486714DE}"/>
               </a:ext>
             </a:extLst>
           </p:cNvPr>
@@ -39656,7 +37624,7 @@
           <p:cNvPr id="3" name="">
             <a:extLst xmlns:a="http://schemas.openxmlformats.org/drawingml/2006/main">
               <a:ext uri="{FF2B5EF4-FFF2-40B4-BE49-F238E27FC236}">
-                <a16:creationId xmlns:a16="http://schemas.microsoft.com/office/drawing/2014/main" id="{EAEB74A2-86DB-4BB7-8C23-CF08AD503531}"/>
+                <a16:creationId xmlns:a16="http://schemas.microsoft.com/office/drawing/2014/main" id="{F46D2628-62E3-4219-9342-F4DC32D7ADFF}"/>
               </a:ext>
             </a:extLst>
           </p:cNvPr>
@@ -39689,7 +37657,7 @@
           <p:cNvPr id="4" name="">
             <a:extLst xmlns:a="http://schemas.openxmlformats.org/drawingml/2006/main">
               <a:ext uri="{FF2B5EF4-FFF2-40B4-BE49-F238E27FC236}">
-                <a16:creationId xmlns:a16="http://schemas.microsoft.com/office/drawing/2014/main" id="{C0C3E7E2-FF82-48CD-8089-66A153D5F8CE}"/>
+                <a16:creationId xmlns:a16="http://schemas.microsoft.com/office/drawing/2014/main" id="{EF1B7D46-80FE-4FBE-BD11-FBAE9398807B}"/>
               </a:ext>
             </a:extLst>
           </p:cNvPr>
@@ -39838,7 +37806,7 @@
                 <a:ea typeface="Malgun Gothic"/>
                 <a:cs typeface="Malgun Gothic"/>
               </a:rPr>
-              <a:t>LOCAL EUM  ·  멘토링 브리프  ·  2026.10</a:t>
+              <a:t>LOCAL EUM  ·  기획과 구현  ·  2026.10</a:t>
             </a:r>
           </a:p>
         </p:txBody>
@@ -39848,7 +37816,7 @@
           <p:cNvPr id="5" name="">
             <a:extLst xmlns:a="http://schemas.openxmlformats.org/drawingml/2006/main">
               <a:ext uri="{FF2B5EF4-FFF2-40B4-BE49-F238E27FC236}">
-                <a16:creationId xmlns:a16="http://schemas.microsoft.com/office/drawing/2014/main" id="{335120CE-10F2-49D3-BB59-294F25A3D11F}"/>
+                <a16:creationId xmlns:a16="http://schemas.microsoft.com/office/drawing/2014/main" id="{C49D7415-4705-495C-AC60-7F44FF43A321}"/>
               </a:ext>
             </a:extLst>
           </p:cNvPr>
@@ -40007,7 +37975,7 @@
           <p:cNvPr id="6" name="">
             <a:extLst xmlns:a="http://schemas.openxmlformats.org/drawingml/2006/main">
               <a:ext uri="{FF2B5EF4-FFF2-40B4-BE49-F238E27FC236}">
-                <a16:creationId xmlns:a16="http://schemas.microsoft.com/office/drawing/2014/main" id="{8983BB53-93E1-4551-B0EA-4111AAC1843B}"/>
+                <a16:creationId xmlns:a16="http://schemas.microsoft.com/office/drawing/2014/main" id="{51A1B68B-F628-4A34-B2FC-3E383C1AD288}"/>
               </a:ext>
             </a:extLst>
           </p:cNvPr>
@@ -40042,7 +38010,7 @@
           <p:cNvPr id="7" name="">
             <a:extLst xmlns:a="http://schemas.openxmlformats.org/drawingml/2006/main">
               <a:ext uri="{FF2B5EF4-FFF2-40B4-BE49-F238E27FC236}">
-                <a16:creationId xmlns:a16="http://schemas.microsoft.com/office/drawing/2014/main" id="{7241EEC5-6BF6-4099-B5D9-4D2F456A0CD3}"/>
+                <a16:creationId xmlns:a16="http://schemas.microsoft.com/office/drawing/2014/main" id="{9D3CE338-46F1-442C-8355-ACB6A1B393AC}"/>
               </a:ext>
             </a:extLst>
           </p:cNvPr>
@@ -40201,7 +38169,7 @@
           <p:cNvPr id="8" name="">
             <a:extLst xmlns:a="http://schemas.openxmlformats.org/drawingml/2006/main">
               <a:ext uri="{FF2B5EF4-FFF2-40B4-BE49-F238E27FC236}">
-                <a16:creationId xmlns:a16="http://schemas.microsoft.com/office/drawing/2014/main" id="{6629EFEA-3BBD-473F-ABCE-1B778BCDA2B5}"/>
+                <a16:creationId xmlns:a16="http://schemas.microsoft.com/office/drawing/2014/main" id="{CEA7E8D7-0606-4983-AA8D-E2DA59D52862}"/>
               </a:ext>
             </a:extLst>
           </p:cNvPr>
@@ -40360,7 +38328,7 @@
           <p:cNvPr id="9" name="">
             <a:extLst xmlns:a="http://schemas.openxmlformats.org/drawingml/2006/main">
               <a:ext uri="{FF2B5EF4-FFF2-40B4-BE49-F238E27FC236}">
-                <a16:creationId xmlns:a16="http://schemas.microsoft.com/office/drawing/2014/main" id="{FD6F47F9-DB8E-4AC6-82BF-95515A9C9C49}"/>
+                <a16:creationId xmlns:a16="http://schemas.microsoft.com/office/drawing/2014/main" id="{28EA407B-9E4E-43A1-AF02-E4FA015F1829}"/>
               </a:ext>
             </a:extLst>
           </p:cNvPr>
@@ -40519,7 +38487,7 @@
           <p:cNvPr id="10" name="">
             <a:extLst xmlns:a="http://schemas.openxmlformats.org/drawingml/2006/main">
               <a:ext uri="{FF2B5EF4-FFF2-40B4-BE49-F238E27FC236}">
-                <a16:creationId xmlns:a16="http://schemas.microsoft.com/office/drawing/2014/main" id="{F4AE5648-3B4A-4F88-B218-DB870BEA4ED4}"/>
+                <a16:creationId xmlns:a16="http://schemas.microsoft.com/office/drawing/2014/main" id="{BF7F32D9-416A-4315-9314-E147DB071753}"/>
               </a:ext>
             </a:extLst>
           </p:cNvPr>
@@ -40554,7 +38522,7 @@
           <p:cNvPr id="11" name="">
             <a:extLst xmlns:a="http://schemas.openxmlformats.org/drawingml/2006/main">
               <a:ext uri="{FF2B5EF4-FFF2-40B4-BE49-F238E27FC236}">
-                <a16:creationId xmlns:a16="http://schemas.microsoft.com/office/drawing/2014/main" id="{DC95CC39-FAE6-4CC9-9249-B9B9F88EF452}"/>
+                <a16:creationId xmlns:a16="http://schemas.microsoft.com/office/drawing/2014/main" id="{3F6F2A9E-6B66-47C0-A5B4-FE0CC72F992D}"/>
               </a:ext>
             </a:extLst>
           </p:cNvPr>
@@ -40713,7 +38681,7 @@
           <p:cNvPr id="12" name="">
             <a:extLst xmlns:a="http://schemas.openxmlformats.org/drawingml/2006/main">
               <a:ext uri="{FF2B5EF4-FFF2-40B4-BE49-F238E27FC236}">
-                <a16:creationId xmlns:a16="http://schemas.microsoft.com/office/drawing/2014/main" id="{1735DA3C-B402-4C83-B3F3-1004415E8C63}"/>
+                <a16:creationId xmlns:a16="http://schemas.microsoft.com/office/drawing/2014/main" id="{44234FB6-0658-4D15-A4F3-937EFEA531BC}"/>
               </a:ext>
             </a:extLst>
           </p:cNvPr>
@@ -40872,7 +38840,7 @@
           <p:cNvPr id="13" name="">
             <a:extLst xmlns:a="http://schemas.openxmlformats.org/drawingml/2006/main">
               <a:ext uri="{FF2B5EF4-FFF2-40B4-BE49-F238E27FC236}">
-                <a16:creationId xmlns:a16="http://schemas.microsoft.com/office/drawing/2014/main" id="{E5E26D93-9049-4805-ABD6-AA70C73A2214}"/>
+                <a16:creationId xmlns:a16="http://schemas.microsoft.com/office/drawing/2014/main" id="{654DCF98-68D7-4670-82BB-42AF6FB9659C}"/>
               </a:ext>
             </a:extLst>
           </p:cNvPr>
@@ -41031,7 +38999,7 @@
           <p:cNvPr id="14" name="">
             <a:extLst xmlns:a="http://schemas.openxmlformats.org/drawingml/2006/main">
               <a:ext uri="{FF2B5EF4-FFF2-40B4-BE49-F238E27FC236}">
-                <a16:creationId xmlns:a16="http://schemas.microsoft.com/office/drawing/2014/main" id="{E2F88819-26BA-41CF-B5B8-B7DA92C96C6C}"/>
+                <a16:creationId xmlns:a16="http://schemas.microsoft.com/office/drawing/2014/main" id="{7CD8F644-B22D-4469-BE39-B1BEE31A519F}"/>
               </a:ext>
             </a:extLst>
           </p:cNvPr>
@@ -41066,7 +39034,7 @@
           <p:cNvPr id="15" name="">
             <a:extLst xmlns:a="http://schemas.openxmlformats.org/drawingml/2006/main">
               <a:ext uri="{FF2B5EF4-FFF2-40B4-BE49-F238E27FC236}">
-                <a16:creationId xmlns:a16="http://schemas.microsoft.com/office/drawing/2014/main" id="{91A671B9-9D54-4725-93A9-63D08EBF9615}"/>
+                <a16:creationId xmlns:a16="http://schemas.microsoft.com/office/drawing/2014/main" id="{DCA27D25-9F82-43A0-92AA-481B97FB4622}"/>
               </a:ext>
             </a:extLst>
           </p:cNvPr>
@@ -41225,7 +39193,7 @@
           <p:cNvPr id="16" name="">
             <a:extLst xmlns:a="http://schemas.openxmlformats.org/drawingml/2006/main">
               <a:ext uri="{FF2B5EF4-FFF2-40B4-BE49-F238E27FC236}">
-                <a16:creationId xmlns:a16="http://schemas.microsoft.com/office/drawing/2014/main" id="{DD3DA090-BE4A-431B-814C-8EC394FDB63E}"/>
+                <a16:creationId xmlns:a16="http://schemas.microsoft.com/office/drawing/2014/main" id="{3D797CB2-90E5-4F3F-8102-C46FF3F4BA0D}"/>
               </a:ext>
             </a:extLst>
           </p:cNvPr>
@@ -41384,7 +39352,7 @@
           <p:cNvPr id="17" name="">
             <a:extLst xmlns:a="http://schemas.openxmlformats.org/drawingml/2006/main">
               <a:ext uri="{FF2B5EF4-FFF2-40B4-BE49-F238E27FC236}">
-                <a16:creationId xmlns:a16="http://schemas.microsoft.com/office/drawing/2014/main" id="{68433ABF-1F47-4AEC-8AEE-BAB349E2DC00}"/>
+                <a16:creationId xmlns:a16="http://schemas.microsoft.com/office/drawing/2014/main" id="{0BCFF23D-9870-486C-8A68-D1818F9FBA86}"/>
               </a:ext>
             </a:extLst>
           </p:cNvPr>
@@ -41543,7 +39511,7 @@
           <p:cNvPr id="18" name="">
             <a:extLst xmlns:a="http://schemas.openxmlformats.org/drawingml/2006/main">
               <a:ext uri="{FF2B5EF4-FFF2-40B4-BE49-F238E27FC236}">
-                <a16:creationId xmlns:a16="http://schemas.microsoft.com/office/drawing/2014/main" id="{515BD262-DE91-4601-9830-E7239EEF812F}"/>
+                <a16:creationId xmlns:a16="http://schemas.microsoft.com/office/drawing/2014/main" id="{10D646F5-33EF-4181-81CB-996274814556}"/>
               </a:ext>
             </a:extLst>
           </p:cNvPr>
@@ -41578,7 +39546,7 @@
           <p:cNvPr id="19" name="">
             <a:extLst xmlns:a="http://schemas.openxmlformats.org/drawingml/2006/main">
               <a:ext uri="{FF2B5EF4-FFF2-40B4-BE49-F238E27FC236}">
-                <a16:creationId xmlns:a16="http://schemas.microsoft.com/office/drawing/2014/main" id="{ED9D473F-2AC3-4266-897E-9043ED60CA4F}"/>
+                <a16:creationId xmlns:a16="http://schemas.microsoft.com/office/drawing/2014/main" id="{3A3B665D-3F57-4CD7-9910-0F746A855074}"/>
               </a:ext>
             </a:extLst>
           </p:cNvPr>
@@ -41611,7 +39579,7 @@
           <p:cNvPr id="20" name="">
             <a:extLst xmlns:a="http://schemas.openxmlformats.org/drawingml/2006/main">
               <a:ext uri="{FF2B5EF4-FFF2-40B4-BE49-F238E27FC236}">
-                <a16:creationId xmlns:a16="http://schemas.microsoft.com/office/drawing/2014/main" id="{FD6BA852-5B0B-49BE-B6C1-C2C3D2F6D826}"/>
+                <a16:creationId xmlns:a16="http://schemas.microsoft.com/office/drawing/2014/main" id="{DBD08995-E565-40A3-BBDE-AA845480DAC5}"/>
               </a:ext>
             </a:extLst>
           </p:cNvPr>
@@ -41770,7 +39738,7 @@
           <p:cNvPr id="21" name="">
             <a:extLst xmlns:a="http://schemas.openxmlformats.org/drawingml/2006/main">
               <a:ext uri="{FF2B5EF4-FFF2-40B4-BE49-F238E27FC236}">
-                <a16:creationId xmlns:a16="http://schemas.microsoft.com/office/drawing/2014/main" id="{4B538E0C-8114-4F71-84EF-6E880BB89A94}"/>
+                <a16:creationId xmlns:a16="http://schemas.microsoft.com/office/drawing/2014/main" id="{615FCCA0-14A3-4AEB-9E65-36368200FCE6}"/>
               </a:ext>
             </a:extLst>
           </p:cNvPr>
@@ -41987,7 +39955,7 @@
           <p:cNvPr id="22" name="">
             <a:extLst xmlns:a="http://schemas.openxmlformats.org/drawingml/2006/main">
               <a:ext uri="{FF2B5EF4-FFF2-40B4-BE49-F238E27FC236}">
-                <a16:creationId xmlns:a16="http://schemas.microsoft.com/office/drawing/2014/main" id="{E0242CFB-94D8-4921-BD66-CEADC07856C3}"/>
+                <a16:creationId xmlns:a16="http://schemas.microsoft.com/office/drawing/2014/main" id="{7B045150-A174-4EFD-8E4C-87D41079A1D7}"/>
               </a:ext>
             </a:extLst>
           </p:cNvPr>
@@ -42022,7 +39990,7 @@
           <p:cNvPr id="23" name="">
             <a:extLst xmlns:a="http://schemas.openxmlformats.org/drawingml/2006/main">
               <a:ext uri="{FF2B5EF4-FFF2-40B4-BE49-F238E27FC236}">
-                <a16:creationId xmlns:a16="http://schemas.microsoft.com/office/drawing/2014/main" id="{CA38F5EB-C40A-44D2-A9F1-F4C9D0E77C45}"/>
+                <a16:creationId xmlns:a16="http://schemas.microsoft.com/office/drawing/2014/main" id="{488252E1-1A86-401D-B0B8-565FF051630D}"/>
               </a:ext>
             </a:extLst>
           </p:cNvPr>
@@ -42055,7 +40023,7 @@
           <p:cNvPr id="24" name="">
             <a:extLst xmlns:a="http://schemas.openxmlformats.org/drawingml/2006/main">
               <a:ext uri="{FF2B5EF4-FFF2-40B4-BE49-F238E27FC236}">
-                <a16:creationId xmlns:a16="http://schemas.microsoft.com/office/drawing/2014/main" id="{9AADE256-9EDE-4E67-93B0-AFB6FD5C8B82}"/>
+                <a16:creationId xmlns:a16="http://schemas.microsoft.com/office/drawing/2014/main" id="{1E66C83E-16EC-491F-BF5D-E72114644B64}"/>
               </a:ext>
             </a:extLst>
           </p:cNvPr>
@@ -42214,7 +40182,7 @@
           <p:cNvPr id="25" name="">
             <a:extLst xmlns:a="http://schemas.openxmlformats.org/drawingml/2006/main">
               <a:ext uri="{FF2B5EF4-FFF2-40B4-BE49-F238E27FC236}">
-                <a16:creationId xmlns:a16="http://schemas.microsoft.com/office/drawing/2014/main" id="{2875BDFE-755D-4BEC-9A9D-E9AC814F4FB0}"/>
+                <a16:creationId xmlns:a16="http://schemas.microsoft.com/office/drawing/2014/main" id="{3DAA8628-3413-4980-8A8C-FD49D6858897}"/>
               </a:ext>
             </a:extLst>
           </p:cNvPr>
@@ -42431,7 +40399,7 @@
           <p:cNvPr id="26" name="">
             <a:extLst xmlns:a="http://schemas.openxmlformats.org/drawingml/2006/main">
               <a:ext uri="{FF2B5EF4-FFF2-40B4-BE49-F238E27FC236}">
-                <a16:creationId xmlns:a16="http://schemas.microsoft.com/office/drawing/2014/main" id="{51B834C4-8CB0-4724-B014-A0811690B93C}"/>
+                <a16:creationId xmlns:a16="http://schemas.microsoft.com/office/drawing/2014/main" id="{684AD434-826E-4819-8536-D7CEB5E3F25F}"/>
               </a:ext>
             </a:extLst>
           </p:cNvPr>
@@ -42464,7 +40432,7 @@
           <p:cNvPr id="27" name="">
             <a:extLst xmlns:a="http://schemas.openxmlformats.org/drawingml/2006/main">
               <a:ext uri="{FF2B5EF4-FFF2-40B4-BE49-F238E27FC236}">
-                <a16:creationId xmlns:a16="http://schemas.microsoft.com/office/drawing/2014/main" id="{9B900257-AC30-4F7D-86FB-E791E4B408AD}"/>
+                <a16:creationId xmlns:a16="http://schemas.microsoft.com/office/drawing/2014/main" id="{D4E2D1A6-83C3-4CAF-9CDC-3F7BAA1CFA4E}"/>
               </a:ext>
             </a:extLst>
           </p:cNvPr>
@@ -42646,7 +40614,7 @@
           <p:cNvPr id="28" name="">
             <a:extLst xmlns:a="http://schemas.openxmlformats.org/drawingml/2006/main">
               <a:ext uri="{FF2B5EF4-FFF2-40B4-BE49-F238E27FC236}">
-                <a16:creationId xmlns:a16="http://schemas.microsoft.com/office/drawing/2014/main" id="{80C9F1E7-4F3A-44E6-95AC-4F97F8D27CE9}"/>
+                <a16:creationId xmlns:a16="http://schemas.microsoft.com/office/drawing/2014/main" id="{4A1EF857-2762-4BFF-A801-1F28A37DFB4F}"/>
               </a:ext>
             </a:extLst>
           </p:cNvPr>
@@ -42803,7 +40771,7 @@
     </p:spTree>
     <p:extLst>
       <p:ext uri="{BB962C8B-B14F-4D97-AF65-F5344CB8AC3E}">
-        <p14:creationId xmlns:p14="http://schemas.microsoft.com/office/powerpoint/2010/main" val="2107778414"/>
+        <p14:creationId xmlns:p14="http://schemas.microsoft.com/office/powerpoint/2010/main" val="299180844"/>
       </p:ext>
     </p:extLst>
   </p:cSld>
@@ -42834,7 +40802,7 @@
           <p:cNvPr id="28" name="">
             <a:extLst xmlns:a="http://schemas.openxmlformats.org/drawingml/2006/main">
               <a:ext uri="{FF2B5EF4-FFF2-40B4-BE49-F238E27FC236}">
-                <a16:creationId xmlns:a16="http://schemas.microsoft.com/office/drawing/2014/main" id="{7169D15D-DE7A-465E-9C28-BED6F8F91C98}"/>
+                <a16:creationId xmlns:a16="http://schemas.microsoft.com/office/drawing/2014/main" id="{15E82083-200E-42F0-8A67-5F1E0C331033}"/>
               </a:ext>
             </a:extLst>
           </p:cNvPr>
@@ -42993,7 +40961,7 @@
           <p:cNvPr id="2" name="">
             <a:extLst xmlns:a="http://schemas.openxmlformats.org/drawingml/2006/main">
               <a:ext uri="{FF2B5EF4-FFF2-40B4-BE49-F238E27FC236}">
-                <a16:creationId xmlns:a16="http://schemas.microsoft.com/office/drawing/2014/main" id="{33A7FCC2-472A-4483-8D93-C8D3AB9E7450}"/>
+                <a16:creationId xmlns:a16="http://schemas.microsoft.com/office/drawing/2014/main" id="{8D443B73-10A6-4B6A-AB0A-E902AF0DEC3D}"/>
               </a:ext>
             </a:extLst>
           </p:cNvPr>
@@ -43152,7 +41120,7 @@
           <p:cNvPr id="3" name="">
             <a:extLst xmlns:a="http://schemas.openxmlformats.org/drawingml/2006/main">
               <a:ext uri="{FF2B5EF4-FFF2-40B4-BE49-F238E27FC236}">
-                <a16:creationId xmlns:a16="http://schemas.microsoft.com/office/drawing/2014/main" id="{D516E1A1-431E-4E4A-8025-1C6595589F4C}"/>
+                <a16:creationId xmlns:a16="http://schemas.microsoft.com/office/drawing/2014/main" id="{FA81CED6-B3D3-482A-886E-628F8BC5E6D0}"/>
               </a:ext>
             </a:extLst>
           </p:cNvPr>
@@ -43185,7 +41153,7 @@
           <p:cNvPr id="4" name="">
             <a:extLst xmlns:a="http://schemas.openxmlformats.org/drawingml/2006/main">
               <a:ext uri="{FF2B5EF4-FFF2-40B4-BE49-F238E27FC236}">
-                <a16:creationId xmlns:a16="http://schemas.microsoft.com/office/drawing/2014/main" id="{240E9C24-4EF7-4829-BA70-CF70C241ED80}"/>
+                <a16:creationId xmlns:a16="http://schemas.microsoft.com/office/drawing/2014/main" id="{D9D14686-9F21-4999-97D5-542EABF0590A}"/>
               </a:ext>
             </a:extLst>
           </p:cNvPr>
@@ -43334,7 +41302,7 @@
                 <a:ea typeface="Malgun Gothic"/>
                 <a:cs typeface="Malgun Gothic"/>
               </a:rPr>
-              <a:t>LOCAL EUM  ·  멘토링 브리프  ·  2026.10</a:t>
+              <a:t>LOCAL EUM  ·  기획과 구현  ·  2026.10</a:t>
             </a:r>
           </a:p>
         </p:txBody>
@@ -43344,7 +41312,7 @@
           <p:cNvPr id="5" name="">
             <a:extLst xmlns:a="http://schemas.openxmlformats.org/drawingml/2006/main">
               <a:ext uri="{FF2B5EF4-FFF2-40B4-BE49-F238E27FC236}">
-                <a16:creationId xmlns:a16="http://schemas.microsoft.com/office/drawing/2014/main" id="{3932025B-261F-4053-8975-76C713F5EF8D}"/>
+                <a16:creationId xmlns:a16="http://schemas.microsoft.com/office/drawing/2014/main" id="{73624396-6856-4969-98C1-00A8CC1FDD17}"/>
               </a:ext>
             </a:extLst>
           </p:cNvPr>
@@ -43503,7 +41471,7 @@
           <p:cNvPr id="6" name="">
             <a:extLst xmlns:a="http://schemas.openxmlformats.org/drawingml/2006/main">
               <a:ext uri="{FF2B5EF4-FFF2-40B4-BE49-F238E27FC236}">
-                <a16:creationId xmlns:a16="http://schemas.microsoft.com/office/drawing/2014/main" id="{B228A671-779B-4739-8500-5C9FF1E0658F}"/>
+                <a16:creationId xmlns:a16="http://schemas.microsoft.com/office/drawing/2014/main" id="{29677D96-FF7E-4042-813C-36DFB71E19BD}"/>
               </a:ext>
             </a:extLst>
           </p:cNvPr>
@@ -43538,7 +41506,7 @@
           <p:cNvPr id="7" name="">
             <a:extLst xmlns:a="http://schemas.openxmlformats.org/drawingml/2006/main">
               <a:ext uri="{FF2B5EF4-FFF2-40B4-BE49-F238E27FC236}">
-                <a16:creationId xmlns:a16="http://schemas.microsoft.com/office/drawing/2014/main" id="{80CB8A2E-FE23-4636-966A-D137E9F43E90}"/>
+                <a16:creationId xmlns:a16="http://schemas.microsoft.com/office/drawing/2014/main" id="{B0B925B7-D5C2-4E06-9EC6-0B673F77906C}"/>
               </a:ext>
             </a:extLst>
           </p:cNvPr>
@@ -43697,7 +41665,7 @@
           <p:cNvPr id="8" name="">
             <a:extLst xmlns:a="http://schemas.openxmlformats.org/drawingml/2006/main">
               <a:ext uri="{FF2B5EF4-FFF2-40B4-BE49-F238E27FC236}">
-                <a16:creationId xmlns:a16="http://schemas.microsoft.com/office/drawing/2014/main" id="{872324E9-82CB-41A0-8E77-25304C3E6642}"/>
+                <a16:creationId xmlns:a16="http://schemas.microsoft.com/office/drawing/2014/main" id="{92342571-EA5D-4C67-A042-B75E0544ABCB}"/>
               </a:ext>
             </a:extLst>
           </p:cNvPr>
@@ -43856,7 +41824,7 @@
           <p:cNvPr id="9" name="">
             <a:extLst xmlns:a="http://schemas.openxmlformats.org/drawingml/2006/main">
               <a:ext uri="{FF2B5EF4-FFF2-40B4-BE49-F238E27FC236}">
-                <a16:creationId xmlns:a16="http://schemas.microsoft.com/office/drawing/2014/main" id="{3414BAA2-1FB6-4986-BEE6-53330C6485E5}"/>
+                <a16:creationId xmlns:a16="http://schemas.microsoft.com/office/drawing/2014/main" id="{6D5D447F-B139-403A-B83E-5533F1C7FCE2}"/>
               </a:ext>
             </a:extLst>
           </p:cNvPr>
@@ -43889,7 +41857,7 @@
           <p:cNvPr id="10" name="">
             <a:extLst xmlns:a="http://schemas.openxmlformats.org/drawingml/2006/main">
               <a:ext uri="{FF2B5EF4-FFF2-40B4-BE49-F238E27FC236}">
-                <a16:creationId xmlns:a16="http://schemas.microsoft.com/office/drawing/2014/main" id="{375097B4-B592-43CD-BF23-F488B8FCA860}"/>
+                <a16:creationId xmlns:a16="http://schemas.microsoft.com/office/drawing/2014/main" id="{898F7E81-9156-45DD-B6B1-E4DE29E36573}"/>
               </a:ext>
             </a:extLst>
           </p:cNvPr>
@@ -44048,7 +42016,7 @@
           <p:cNvPr id="11" name="">
             <a:extLst xmlns:a="http://schemas.openxmlformats.org/drawingml/2006/main">
               <a:ext uri="{FF2B5EF4-FFF2-40B4-BE49-F238E27FC236}">
-                <a16:creationId xmlns:a16="http://schemas.microsoft.com/office/drawing/2014/main" id="{DCB3E90A-DEAC-45DB-B585-A10C73FAEAB7}"/>
+                <a16:creationId xmlns:a16="http://schemas.microsoft.com/office/drawing/2014/main" id="{65599B55-75CB-4D7F-9AA0-3A1C6D5AE3DB}"/>
               </a:ext>
             </a:extLst>
           </p:cNvPr>
@@ -44083,7 +42051,7 @@
           <p:cNvPr id="12" name="">
             <a:extLst xmlns:a="http://schemas.openxmlformats.org/drawingml/2006/main">
               <a:ext uri="{FF2B5EF4-FFF2-40B4-BE49-F238E27FC236}">
-                <a16:creationId xmlns:a16="http://schemas.microsoft.com/office/drawing/2014/main" id="{F3C21E7A-712D-408C-8755-61E1DC10B1B1}"/>
+                <a16:creationId xmlns:a16="http://schemas.microsoft.com/office/drawing/2014/main" id="{EC7B982D-C948-4EB3-AF60-498443D55510}"/>
               </a:ext>
             </a:extLst>
           </p:cNvPr>
@@ -44242,7 +42210,7 @@
           <p:cNvPr id="13" name="">
             <a:extLst xmlns:a="http://schemas.openxmlformats.org/drawingml/2006/main">
               <a:ext uri="{FF2B5EF4-FFF2-40B4-BE49-F238E27FC236}">
-                <a16:creationId xmlns:a16="http://schemas.microsoft.com/office/drawing/2014/main" id="{1FA15764-4477-4817-AB59-CBA72387E0D4}"/>
+                <a16:creationId xmlns:a16="http://schemas.microsoft.com/office/drawing/2014/main" id="{610039BC-C766-4CF4-B895-4BCCAB5DEC0F}"/>
               </a:ext>
             </a:extLst>
           </p:cNvPr>
@@ -44401,7 +42369,7 @@
           <p:cNvPr id="14" name="">
             <a:extLst xmlns:a="http://schemas.openxmlformats.org/drawingml/2006/main">
               <a:ext uri="{FF2B5EF4-FFF2-40B4-BE49-F238E27FC236}">
-                <a16:creationId xmlns:a16="http://schemas.microsoft.com/office/drawing/2014/main" id="{891C5591-76A8-46FF-BCED-556FC19CD8C4}"/>
+                <a16:creationId xmlns:a16="http://schemas.microsoft.com/office/drawing/2014/main" id="{DE46FF5E-B8D4-4121-B9C4-A039150B2676}"/>
               </a:ext>
             </a:extLst>
           </p:cNvPr>
@@ -44434,7 +42402,7 @@
           <p:cNvPr id="15" name="">
             <a:extLst xmlns:a="http://schemas.openxmlformats.org/drawingml/2006/main">
               <a:ext uri="{FF2B5EF4-FFF2-40B4-BE49-F238E27FC236}">
-                <a16:creationId xmlns:a16="http://schemas.microsoft.com/office/drawing/2014/main" id="{340954BB-1448-4B89-9E68-EC17F191D150}"/>
+                <a16:creationId xmlns:a16="http://schemas.microsoft.com/office/drawing/2014/main" id="{54D0AEB2-1506-4B9C-86DB-3895885D48E2}"/>
               </a:ext>
             </a:extLst>
           </p:cNvPr>
@@ -44593,7 +42561,7 @@
           <p:cNvPr id="16" name="">
             <a:extLst xmlns:a="http://schemas.openxmlformats.org/drawingml/2006/main">
               <a:ext uri="{FF2B5EF4-FFF2-40B4-BE49-F238E27FC236}">
-                <a16:creationId xmlns:a16="http://schemas.microsoft.com/office/drawing/2014/main" id="{35C71710-6F56-4859-91B1-E35FFCD8F8B4}"/>
+                <a16:creationId xmlns:a16="http://schemas.microsoft.com/office/drawing/2014/main" id="{BCE327E2-41F9-4380-9A61-2F1AD635668C}"/>
               </a:ext>
             </a:extLst>
           </p:cNvPr>
@@ -44628,7 +42596,7 @@
           <p:cNvPr id="17" name="">
             <a:extLst xmlns:a="http://schemas.openxmlformats.org/drawingml/2006/main">
               <a:ext uri="{FF2B5EF4-FFF2-40B4-BE49-F238E27FC236}">
-                <a16:creationId xmlns:a16="http://schemas.microsoft.com/office/drawing/2014/main" id="{B7C37EF1-942C-418D-9267-104F167489E3}"/>
+                <a16:creationId xmlns:a16="http://schemas.microsoft.com/office/drawing/2014/main" id="{7335982D-EC7B-415C-9AED-88A49F0A84C6}"/>
               </a:ext>
             </a:extLst>
           </p:cNvPr>
@@ -44787,7 +42755,7 @@
           <p:cNvPr id="18" name="">
             <a:extLst xmlns:a="http://schemas.openxmlformats.org/drawingml/2006/main">
               <a:ext uri="{FF2B5EF4-FFF2-40B4-BE49-F238E27FC236}">
-                <a16:creationId xmlns:a16="http://schemas.microsoft.com/office/drawing/2014/main" id="{3EAF3D81-6EDB-47E2-89CD-F0A579BEAEEE}"/>
+                <a16:creationId xmlns:a16="http://schemas.microsoft.com/office/drawing/2014/main" id="{CDF9BE42-C04F-4BC8-9F01-728A675BEE40}"/>
               </a:ext>
             </a:extLst>
           </p:cNvPr>
@@ -44946,7 +42914,7 @@
           <p:cNvPr id="19" name="">
             <a:extLst xmlns:a="http://schemas.openxmlformats.org/drawingml/2006/main">
               <a:ext uri="{FF2B5EF4-FFF2-40B4-BE49-F238E27FC236}">
-                <a16:creationId xmlns:a16="http://schemas.microsoft.com/office/drawing/2014/main" id="{6A3FC050-BCC8-4075-9463-E0198A441E75}"/>
+                <a16:creationId xmlns:a16="http://schemas.microsoft.com/office/drawing/2014/main" id="{8E10A389-9454-4D45-A572-039CE16E8606}"/>
               </a:ext>
             </a:extLst>
           </p:cNvPr>
@@ -44979,7 +42947,7 @@
           <p:cNvPr id="20" name="">
             <a:extLst xmlns:a="http://schemas.openxmlformats.org/drawingml/2006/main">
               <a:ext uri="{FF2B5EF4-FFF2-40B4-BE49-F238E27FC236}">
-                <a16:creationId xmlns:a16="http://schemas.microsoft.com/office/drawing/2014/main" id="{F22DC2FC-D2B5-4188-9D66-589B2DAF0200}"/>
+                <a16:creationId xmlns:a16="http://schemas.microsoft.com/office/drawing/2014/main" id="{A4B4D782-BB21-4735-862D-D3508098100D}"/>
               </a:ext>
             </a:extLst>
           </p:cNvPr>
@@ -45138,7 +43106,7 @@
           <p:cNvPr id="21" name="">
             <a:extLst xmlns:a="http://schemas.openxmlformats.org/drawingml/2006/main">
               <a:ext uri="{FF2B5EF4-FFF2-40B4-BE49-F238E27FC236}">
-                <a16:creationId xmlns:a16="http://schemas.microsoft.com/office/drawing/2014/main" id="{38B7CCC0-93F1-4EE8-B526-3EF932D3B9B3}"/>
+                <a16:creationId xmlns:a16="http://schemas.microsoft.com/office/drawing/2014/main" id="{A9DBED3A-EA3B-4E77-A2CA-045AEACDF90F}"/>
               </a:ext>
             </a:extLst>
           </p:cNvPr>
@@ -45173,7 +43141,7 @@
           <p:cNvPr id="22" name="">
             <a:extLst xmlns:a="http://schemas.openxmlformats.org/drawingml/2006/main">
               <a:ext uri="{FF2B5EF4-FFF2-40B4-BE49-F238E27FC236}">
-                <a16:creationId xmlns:a16="http://schemas.microsoft.com/office/drawing/2014/main" id="{2DCC95EA-AE9D-4A38-ADBF-296CBF696A03}"/>
+                <a16:creationId xmlns:a16="http://schemas.microsoft.com/office/drawing/2014/main" id="{83CC15C0-362C-4D46-B69B-7A1615C41EA1}"/>
               </a:ext>
             </a:extLst>
           </p:cNvPr>
@@ -45322,7 +43290,7 @@
                 <a:ea typeface="Malgun Gothic"/>
                 <a:cs typeface="Malgun Gothic"/>
               </a:rPr>
-              <a:t>협업</a:t>
+              <a:t>시범 체험</a:t>
             </a:r>
           </a:p>
         </p:txBody>
@@ -45332,7 +43300,7 @@
           <p:cNvPr id="23" name="">
             <a:extLst xmlns:a="http://schemas.openxmlformats.org/drawingml/2006/main">
               <a:ext uri="{FF2B5EF4-FFF2-40B4-BE49-F238E27FC236}">
-                <a16:creationId xmlns:a16="http://schemas.microsoft.com/office/drawing/2014/main" id="{92F5B274-F3C6-4DE3-B777-BDDD0C3D0A9A}"/>
+                <a16:creationId xmlns:a16="http://schemas.microsoft.com/office/drawing/2014/main" id="{1D76534D-F25A-4E3A-A642-CEA51145B7E5}"/>
               </a:ext>
             </a:extLst>
           </p:cNvPr>
@@ -45481,7 +43449,7 @@
                 <a:ea typeface="Malgun Gothic"/>
                 <a:cs typeface="Malgun Gothic"/>
               </a:rPr>
-              <a:t>PR #13 병합</a:t>
+              <a:t>서울·부산·창원 언어·친구 3건</a:t>
             </a:r>
           </a:p>
         </p:txBody>
@@ -45491,7 +43459,7 @@
           <p:cNvPr id="24" name="">
             <a:extLst xmlns:a="http://schemas.openxmlformats.org/drawingml/2006/main">
               <a:ext uri="{FF2B5EF4-FFF2-40B4-BE49-F238E27FC236}">
-                <a16:creationId xmlns:a16="http://schemas.microsoft.com/office/drawing/2014/main" id="{A96C037B-9021-438F-9B68-B93404AB3C2F}"/>
+                <a16:creationId xmlns:a16="http://schemas.microsoft.com/office/drawing/2014/main" id="{D509AAC2-0351-42B6-9299-4A5E60961995}"/>
               </a:ext>
             </a:extLst>
           </p:cNvPr>
@@ -45524,7 +43492,7 @@
           <p:cNvPr id="25" name="">
             <a:extLst xmlns:a="http://schemas.openxmlformats.org/drawingml/2006/main">
               <a:ext uri="{FF2B5EF4-FFF2-40B4-BE49-F238E27FC236}">
-                <a16:creationId xmlns:a16="http://schemas.microsoft.com/office/drawing/2014/main" id="{E5D76B2E-68A8-489A-B172-900A31FF3453}"/>
+                <a16:creationId xmlns:a16="http://schemas.microsoft.com/office/drawing/2014/main" id="{F7428A4C-57F7-4229-BD6E-B1D23A973D7D}"/>
               </a:ext>
             </a:extLst>
           </p:cNvPr>
@@ -45673,7 +43641,7 @@
                 <a:ea typeface="Malgun Gothic"/>
                 <a:cs typeface="Malgun Gothic"/>
               </a:rPr>
-              <a:t>main 커밋에서 확인</a:t>
+              <a:t>Supabase 조회 + 앱 화면</a:t>
             </a:r>
           </a:p>
         </p:txBody>
@@ -45683,7 +43651,7 @@
           <p:cNvPr id="26" name="">
             <a:extLst xmlns:a="http://schemas.openxmlformats.org/drawingml/2006/main">
               <a:ext uri="{FF2B5EF4-FFF2-40B4-BE49-F238E27FC236}">
-                <a16:creationId xmlns:a16="http://schemas.microsoft.com/office/drawing/2014/main" id="{5862B79F-AA82-4127-9717-883658249B9F}"/>
+                <a16:creationId xmlns:a16="http://schemas.microsoft.com/office/drawing/2014/main" id="{40A898B3-C7B7-42E3-A91E-3722D5AC5CC2}"/>
               </a:ext>
             </a:extLst>
           </p:cNvPr>
@@ -45716,7 +43684,7 @@
           <p:cNvPr id="27" name="">
             <a:extLst xmlns:a="http://schemas.openxmlformats.org/drawingml/2006/main">
               <a:ext uri="{FF2B5EF4-FFF2-40B4-BE49-F238E27FC236}">
-                <a16:creationId xmlns:a16="http://schemas.microsoft.com/office/drawing/2014/main" id="{CF961E95-E372-4570-B1C7-04C171170F78}"/>
+                <a16:creationId xmlns:a16="http://schemas.microsoft.com/office/drawing/2014/main" id="{41D49CC1-EE7B-498B-A0DD-7E399D907EF9}"/>
               </a:ext>
             </a:extLst>
           </p:cNvPr>
@@ -45745,7 +43713,7 @@
           </a:bodyPr>
           <a:lstStyle xmlns:a="http://schemas.openxmlformats.org/drawingml/2006/main">
             <a:defPPr algn="ctr">
-              <a:defRPr sz="1500" b="1">
+              <a:defRPr sz="1425" b="1">
                 <a:solidFill>
                   <a:srgbClr val="9A3C32"/>
                 </a:solidFill>
@@ -45755,7 +43723,7 @@
               </a:defRPr>
             </a:defPPr>
             <a:lvl1pPr algn="ctr">
-              <a:defRPr sz="1500" b="1">
+              <a:defRPr sz="1425" b="1">
                 <a:solidFill>
                   <a:srgbClr val="9A3C32"/>
                 </a:solidFill>
@@ -45765,7 +43733,7 @@
               </a:defRPr>
             </a:lvl1pPr>
             <a:lvl2pPr algn="ctr">
-              <a:defRPr sz="1500" b="1">
+              <a:defRPr sz="1425" b="1">
                 <a:solidFill>
                   <a:srgbClr val="9A3C32"/>
                 </a:solidFill>
@@ -45775,7 +43743,7 @@
               </a:defRPr>
             </a:lvl2pPr>
             <a:lvl3pPr algn="ctr">
-              <a:defRPr sz="1500" b="1">
+              <a:defRPr sz="1425" b="1">
                 <a:solidFill>
                   <a:srgbClr val="9A3C32"/>
                 </a:solidFill>
@@ -45785,7 +43753,7 @@
               </a:defRPr>
             </a:lvl3pPr>
             <a:lvl4pPr algn="ctr">
-              <a:defRPr sz="1500" b="1">
+              <a:defRPr sz="1425" b="1">
                 <a:solidFill>
                   <a:srgbClr val="9A3C32"/>
                 </a:solidFill>
@@ -45795,7 +43763,7 @@
               </a:defRPr>
             </a:lvl4pPr>
             <a:lvl5pPr algn="ctr">
-              <a:defRPr sz="1500" b="1">
+              <a:defRPr sz="1425" b="1">
                 <a:solidFill>
                   <a:srgbClr val="9A3C32"/>
                 </a:solidFill>
@@ -45805,7 +43773,7 @@
               </a:defRPr>
             </a:lvl5pPr>
             <a:lvl6pPr algn="ctr">
-              <a:defRPr sz="1500" b="1">
+              <a:defRPr sz="1425" b="1">
                 <a:solidFill>
                   <a:srgbClr val="9A3C32"/>
                 </a:solidFill>
@@ -45815,7 +43783,7 @@
               </a:defRPr>
             </a:lvl6pPr>
             <a:lvl7pPr algn="ctr">
-              <a:defRPr sz="1500" b="1">
+              <a:defRPr sz="1425" b="1">
                 <a:solidFill>
                   <a:srgbClr val="9A3C32"/>
                 </a:solidFill>
@@ -45825,7 +43793,7 @@
               </a:defRPr>
             </a:lvl7pPr>
             <a:lvl8pPr algn="ctr">
-              <a:defRPr sz="1500" b="1">
+              <a:defRPr sz="1425" b="1">
                 <a:solidFill>
                   <a:srgbClr val="9A3C32"/>
                 </a:solidFill>
@@ -45835,7 +43803,7 @@
               </a:defRPr>
             </a:lvl8pPr>
             <a:lvl9pPr algn="ctr">
-              <a:defRPr sz="1500" b="1">
+              <a:defRPr sz="1425" b="1">
                 <a:solidFill>
                   <a:srgbClr val="9A3C32"/>
                 </a:solidFill>
@@ -45847,7 +43815,7 @@
           </a:lstStyle>
           <a:p xmlns:a="http://schemas.openxmlformats.org/drawingml/2006/main">
             <a:pPr algn="ctr">
-              <a:defRPr sz="1500" b="1">
+              <a:defRPr sz="1425" b="1">
                 <a:solidFill>
                   <a:srgbClr val="9A3C32"/>
                 </a:solidFill>
@@ -45857,7 +43825,7 @@
               </a:defRPr>
             </a:pPr>
             <a:r>
-              <a:rPr sz="1500" b="1">
+              <a:rPr sz="1425" b="1">
                 <a:solidFill>
                   <a:srgbClr val="9A3C32"/>
                 </a:solidFill>
@@ -45865,7 +43833,7 @@
                 <a:ea typeface="Malgun Gothic"/>
                 <a:cs typeface="Malgun Gothic"/>
               </a:rPr>
-              <a:t>테스트 통과 ≠ 실서비스 보증  ·  실 사용자 5명 평가와 피드백 반영은 아직 완료 증거가 없습니다.</a:t>
+              <a:t>구현과 테스트 결과를 실제 운영 검증과 구분합니다. 실 사용자 평가와 피드백 반영은 진행 전입니다.</a:t>
             </a:r>
           </a:p>
         </p:txBody>
@@ -45873,7 +43841,7 @@
     </p:spTree>
     <p:extLst>
       <p:ext uri="{BB962C8B-B14F-4D97-AF65-F5344CB8AC3E}">
-        <p14:creationId xmlns:p14="http://schemas.microsoft.com/office/powerpoint/2010/main" val="53157735"/>
+        <p14:creationId xmlns:p14="http://schemas.microsoft.com/office/powerpoint/2010/main" val="1227456091"/>
       </p:ext>
     </p:extLst>
   </p:cSld>
